--- a/pitch-decks/airon-agent-passport-trust-gateway.pptx
+++ b/pitch-decks/airon-agent-passport-trust-gateway.pptx
@@ -2,24 +2,25 @@
 <file path=ppt/presentation.xml><?xml version="1.0" encoding="utf-8"?>
 <p:presentation xmlns:p="http://schemas.openxmlformats.org/presentationml/2006/main">
   <p:sldMasterIdLst>
-    <p:sldMasterId xmlns:r="http://schemas.openxmlformats.org/officeDocument/2006/relationships" id="2147483648" r:id="R58e83e81d7a24c8e"/>
+    <p:sldMasterId xmlns:r="http://schemas.openxmlformats.org/officeDocument/2006/relationships" id="2147483648" r:id="R97e249c8cd3d429b"/>
   </p:sldMasterIdLst>
   <p:notesMasterIdLst>
-    <p:notesMasterId xmlns:r="http://schemas.openxmlformats.org/officeDocument/2006/relationships" r:id="R859d0fa17f7e4d16"/>
+    <p:notesMasterId xmlns:r="http://schemas.openxmlformats.org/officeDocument/2006/relationships" r:id="R05a045b6f4094f64"/>
   </p:notesMasterIdLst>
   <p:sldIdLst>
-    <p:sldId xmlns:r="http://schemas.openxmlformats.org/officeDocument/2006/relationships" id="256" r:id="R5a9b68987a0d414c"/>
-    <p:sldId xmlns:r="http://schemas.openxmlformats.org/officeDocument/2006/relationships" id="257" r:id="R4cc7e96b3f1f4ac3"/>
-    <p:sldId xmlns:r="http://schemas.openxmlformats.org/officeDocument/2006/relationships" id="258" r:id="R020a1d02de26485d"/>
-    <p:sldId xmlns:r="http://schemas.openxmlformats.org/officeDocument/2006/relationships" id="259" r:id="R7ddba32dd8264d20"/>
-    <p:sldId xmlns:r="http://schemas.openxmlformats.org/officeDocument/2006/relationships" id="260" r:id="R64057c15af564197"/>
-    <p:sldId xmlns:r="http://schemas.openxmlformats.org/officeDocument/2006/relationships" id="261" r:id="R333dbf1624a94736"/>
-    <p:sldId xmlns:r="http://schemas.openxmlformats.org/officeDocument/2006/relationships" id="262" r:id="Rfd144f14e1e24cd9"/>
-    <p:sldId xmlns:r="http://schemas.openxmlformats.org/officeDocument/2006/relationships" id="263" r:id="Ra1d05073881d4058"/>
-    <p:sldId xmlns:r="http://schemas.openxmlformats.org/officeDocument/2006/relationships" id="264" r:id="R7b02942de6a64d4b"/>
-    <p:sldId xmlns:r="http://schemas.openxmlformats.org/officeDocument/2006/relationships" id="265" r:id="R65cad8b8a77547be"/>
-    <p:sldId xmlns:r="http://schemas.openxmlformats.org/officeDocument/2006/relationships" id="266" r:id="Rceac8574f90d4ec8"/>
-    <p:sldId xmlns:r="http://schemas.openxmlformats.org/officeDocument/2006/relationships" id="267" r:id="R83566bc8d9a14e4d"/>
+    <p:sldId xmlns:r="http://schemas.openxmlformats.org/officeDocument/2006/relationships" id="256" r:id="R96e8bacd00544637"/>
+    <p:sldId xmlns:r="http://schemas.openxmlformats.org/officeDocument/2006/relationships" id="257" r:id="R0907d333d5b74916"/>
+    <p:sldId xmlns:r="http://schemas.openxmlformats.org/officeDocument/2006/relationships" id="258" r:id="R5b0358aab94b41d7"/>
+    <p:sldId xmlns:r="http://schemas.openxmlformats.org/officeDocument/2006/relationships" id="259" r:id="R12ae71896d3f4db4"/>
+    <p:sldId xmlns:r="http://schemas.openxmlformats.org/officeDocument/2006/relationships" id="260" r:id="R0e74e5b196284052"/>
+    <p:sldId xmlns:r="http://schemas.openxmlformats.org/officeDocument/2006/relationships" id="261" r:id="R13040a50f768489b"/>
+    <p:sldId xmlns:r="http://schemas.openxmlformats.org/officeDocument/2006/relationships" id="262" r:id="R3f056a4d0aba4592"/>
+    <p:sldId xmlns:r="http://schemas.openxmlformats.org/officeDocument/2006/relationships" id="263" r:id="R9b6ca708076a4321"/>
+    <p:sldId xmlns:r="http://schemas.openxmlformats.org/officeDocument/2006/relationships" id="264" r:id="R0b06b796534b484d"/>
+    <p:sldId xmlns:r="http://schemas.openxmlformats.org/officeDocument/2006/relationships" id="265" r:id="Re50b248da01f44af"/>
+    <p:sldId xmlns:r="http://schemas.openxmlformats.org/officeDocument/2006/relationships" id="266" r:id="R2f73f557927b4eb6"/>
+    <p:sldId xmlns:r="http://schemas.openxmlformats.org/officeDocument/2006/relationships" id="267" r:id="R3c22910fcbb84811"/>
+    <p:sldId xmlns:r="http://schemas.openxmlformats.org/officeDocument/2006/relationships" id="268" r:id="Recce54a70d4145a0"/>
   </p:sldIdLst>
   <p:sldSz cx="12192000" cy="6858000"/>
   <p:notesSz cx="6858000" cy="9144000"/>
@@ -726,6 +727,72 @@
 </p:notes>
 </file>
 
+<file path=ppt/notesSlides/notesSlide13.xml><?xml version="1.0" encoding="utf-8"?>
+<p:notes xmlns:p="http://schemas.openxmlformats.org/presentationml/2006/main">
+  <p:cSld>
+    <p:spTree>
+      <p:nvGrpSpPr>
+        <p:cNvPr id="1" name=""/>
+        <p:cNvGrpSpPr/>
+        <p:nvPr/>
+      </p:nvGrpSpPr>
+      <p:grpSpPr>
+        <a:xfrm xmlns:a="http://schemas.openxmlformats.org/drawingml/2006/main"/>
+      </p:grpSpPr>
+      <p:sp>
+        <p:nvSpPr>
+          <p:cNvPr id="2" name="Slide Image Placeholder 1"/>
+          <p:cNvSpPr>
+            <a:spLocks xmlns:a="http://schemas.openxmlformats.org/drawingml/2006/main" noGrp="1"/>
+          </p:cNvSpPr>
+          <p:nvPr>
+            <p:ph type="sldImg" idx="0"/>
+          </p:nvPr>
+        </p:nvSpPr>
+        <p:spPr/>
+      </p:sp>
+      <p:sp>
+        <p:nvSpPr>
+          <p:cNvPr id="3" name="Notes Placeholder 2"/>
+          <p:cNvSpPr>
+            <a:spLocks xmlns:a="http://schemas.openxmlformats.org/drawingml/2006/main" noGrp="1"/>
+          </p:cNvSpPr>
+          <p:nvPr>
+            <p:ph type="body" idx="1"/>
+          </p:nvPr>
+        </p:nvSpPr>
+        <p:spPr/>
+        <p:txBody>
+          <a:bodyPr xmlns:a="http://schemas.openxmlformats.org/drawingml/2006/main"/>
+          <a:lstStyle xmlns:a="http://schemas.openxmlformats.org/drawingml/2006/main"/>
+          <a:p xmlns:a="http://schemas.openxmlformats.org/drawingml/2006/main"/>
+        </p:txBody>
+      </p:sp>
+      <p:sp>
+        <p:nvSpPr>
+          <p:cNvPr id="4" name="Slide Number Placeholder 3"/>
+          <p:cNvSpPr>
+            <a:spLocks xmlns:a="http://schemas.openxmlformats.org/drawingml/2006/main" noGrp="1"/>
+          </p:cNvSpPr>
+          <p:nvPr>
+            <p:ph type="sldNum" idx="5"/>
+          </p:nvPr>
+        </p:nvSpPr>
+        <p:spPr/>
+        <p:txBody>
+          <a:bodyPr xmlns:a="http://schemas.openxmlformats.org/drawingml/2006/main"/>
+          <a:lstStyle xmlns:a="http://schemas.openxmlformats.org/drawingml/2006/main"/>
+          <a:p xmlns:a="http://schemas.openxmlformats.org/drawingml/2006/main"/>
+        </p:txBody>
+      </p:sp>
+    </p:spTree>
+  </p:cSld>
+  <p:clrMapOvr>
+    <a:masterClrMapping xmlns:a="http://schemas.openxmlformats.org/drawingml/2006/main"/>
+  </p:clrMapOvr>
+</p:notes>
+</file>
+
 <file path=ppt/notesSlides/notesSlide2.xml><?xml version="1.0" encoding="utf-8"?>
 <p:notes xmlns:p="http://schemas.openxmlformats.org/presentationml/2006/main">
   <p:cSld>
@@ -1292,7 +1359,7 @@
   </p:cSld>
   <p:clrMap bg1="lt1" tx1="dk1" bg2="lt2" tx2="dk2" accent1="accent1" accent2="accent2" accent3="accent3" accent4="accent4" accent5="accent5" accent6="accent6" hlink="hlink" folHlink="folHlink"/>
   <p:sldLayoutIdLst>
-    <p:sldLayoutId xmlns:r="http://schemas.openxmlformats.org/officeDocument/2006/relationships" id="2147483649" r:id="Rc17835d569dd4a25"/>
+    <p:sldLayoutId xmlns:r="http://schemas.openxmlformats.org/officeDocument/2006/relationships" id="2147483649" r:id="R1602ee16905c4cce"/>
   </p:sldLayoutIdLst>
   <p:txStyles>
     <p:titleStyle>
@@ -1790,7 +1857,7 @@
           <p:cNvPr id="1" name="">
             <a:extLst xmlns:a="http://schemas.openxmlformats.org/drawingml/2006/main">
               <a:ext uri="{FF2B5EF4-FFF2-40B4-BE49-F238E27FC236}">
-                <a16:creationId xmlns:a16="http://schemas.microsoft.com/office/drawing/2014/main" id="{1C171B75-D356-4143-9811-119FC8C3FD67}"/>
+                <a16:creationId xmlns:a16="http://schemas.microsoft.com/office/drawing/2014/main" id="{819BBBAD-D4FF-4914-84F1-951A7FB589E0}"/>
               </a:ext>
             </a:extLst>
           </p:cNvPr>
@@ -1825,7 +1892,7 @@
           <p:cNvPr id="2" name="">
             <a:extLst xmlns:a="http://schemas.openxmlformats.org/drawingml/2006/main">
               <a:ext uri="{FF2B5EF4-FFF2-40B4-BE49-F238E27FC236}">
-                <a16:creationId xmlns:a16="http://schemas.microsoft.com/office/drawing/2014/main" id="{4491EE53-56D0-4BE7-9A8C-986103095683}"/>
+                <a16:creationId xmlns:a16="http://schemas.microsoft.com/office/drawing/2014/main" id="{867AB0F8-1F49-41BE-8D1D-E3CB5EAC8EE8}"/>
               </a:ext>
             </a:extLst>
           </p:cNvPr>
@@ -1860,7 +1927,7 @@
           <p:cNvPr id="3" name="">
             <a:extLst xmlns:a="http://schemas.openxmlformats.org/drawingml/2006/main">
               <a:ext uri="{FF2B5EF4-FFF2-40B4-BE49-F238E27FC236}">
-                <a16:creationId xmlns:a16="http://schemas.microsoft.com/office/drawing/2014/main" id="{B5C2CD5E-5599-4324-BDD0-CD9F53BA8FAB}"/>
+                <a16:creationId xmlns:a16="http://schemas.microsoft.com/office/drawing/2014/main" id="{3986BAAD-E180-4C48-A1C9-1724DC8E63E8}"/>
               </a:ext>
             </a:extLst>
           </p:cNvPr>
@@ -1895,7 +1962,7 @@
           <p:cNvPr id="4" name="">
             <a:extLst xmlns:a="http://schemas.openxmlformats.org/drawingml/2006/main">
               <a:ext uri="{FF2B5EF4-FFF2-40B4-BE49-F238E27FC236}">
-                <a16:creationId xmlns:a16="http://schemas.microsoft.com/office/drawing/2014/main" id="{596085CA-6EB1-4270-B288-ADD68FB390DB}"/>
+                <a16:creationId xmlns:a16="http://schemas.microsoft.com/office/drawing/2014/main" id="{7BD71278-75B5-4C9D-97CA-153A74FD3368}"/>
               </a:ext>
             </a:extLst>
           </p:cNvPr>
@@ -1930,7 +1997,7 @@
           <p:cNvPr id="5" name="">
             <a:extLst xmlns:a="http://schemas.openxmlformats.org/drawingml/2006/main">
               <a:ext uri="{FF2B5EF4-FFF2-40B4-BE49-F238E27FC236}">
-                <a16:creationId xmlns:a16="http://schemas.microsoft.com/office/drawing/2014/main" id="{5103AD41-B0E0-45ED-9525-318868335749}"/>
+                <a16:creationId xmlns:a16="http://schemas.microsoft.com/office/drawing/2014/main" id="{FE04F1FA-D0A2-46D4-BF0B-A66C6166FBF0}"/>
               </a:ext>
             </a:extLst>
           </p:cNvPr>
@@ -1969,7 +2036,7 @@
           <p:nvPr/>
         </p:nvPicPr>
         <p:blipFill>
-          <a:blip xmlns:r="http://schemas.openxmlformats.org/officeDocument/2006/relationships" xmlns:a="http://schemas.openxmlformats.org/drawingml/2006/main" r:embed="R6a2068fe32c94b50"/>
+          <a:blip xmlns:r="http://schemas.openxmlformats.org/officeDocument/2006/relationships" xmlns:a="http://schemas.openxmlformats.org/drawingml/2006/main" r:embed="Re1468a11e2264446"/>
           <a:stretch xmlns:a="http://schemas.openxmlformats.org/drawingml/2006/main"/>
         </p:blipFill>
         <p:spPr>
@@ -1987,7 +2054,7 @@
           <p:cNvPr id="7" name="">
             <a:extLst xmlns:a="http://schemas.openxmlformats.org/drawingml/2006/main">
               <a:ext uri="{FF2B5EF4-FFF2-40B4-BE49-F238E27FC236}">
-                <a16:creationId xmlns:a16="http://schemas.microsoft.com/office/drawing/2014/main" id="{FF6898EA-6F59-40F0-89E7-0087221D9B59}"/>
+                <a16:creationId xmlns:a16="http://schemas.microsoft.com/office/drawing/2014/main" id="{5A571980-40D6-44DE-AA9D-606FCB46663D}"/>
               </a:ext>
             </a:extLst>
           </p:cNvPr>
@@ -2051,7 +2118,7 @@
           <p:cNvPr id="8" name="">
             <a:extLst xmlns:a="http://schemas.openxmlformats.org/drawingml/2006/main">
               <a:ext uri="{FF2B5EF4-FFF2-40B4-BE49-F238E27FC236}">
-                <a16:creationId xmlns:a16="http://schemas.microsoft.com/office/drawing/2014/main" id="{C01325C7-B48A-4FE2-AB3A-D1D776B01382}"/>
+                <a16:creationId xmlns:a16="http://schemas.microsoft.com/office/drawing/2014/main" id="{435F2E7A-005F-4024-9BD6-B93CB5C9E35A}"/>
               </a:ext>
             </a:extLst>
           </p:cNvPr>
@@ -2115,7 +2182,7 @@
           <p:cNvPr id="9" name="">
             <a:extLst xmlns:a="http://schemas.openxmlformats.org/drawingml/2006/main">
               <a:ext uri="{FF2B5EF4-FFF2-40B4-BE49-F238E27FC236}">
-                <a16:creationId xmlns:a16="http://schemas.microsoft.com/office/drawing/2014/main" id="{42872518-4DAA-4F6B-A097-A11AD1738450}"/>
+                <a16:creationId xmlns:a16="http://schemas.microsoft.com/office/drawing/2014/main" id="{B4F06C6D-9385-4FEE-B133-FF5A71B21226}"/>
               </a:ext>
             </a:extLst>
           </p:cNvPr>
@@ -2179,7 +2246,7 @@
           <p:cNvPr id="10" name="">
             <a:extLst xmlns:a="http://schemas.openxmlformats.org/drawingml/2006/main">
               <a:ext uri="{FF2B5EF4-FFF2-40B4-BE49-F238E27FC236}">
-                <a16:creationId xmlns:a16="http://schemas.microsoft.com/office/drawing/2014/main" id="{98180861-38B8-44ED-8A89-673A178B3D82}"/>
+                <a16:creationId xmlns:a16="http://schemas.microsoft.com/office/drawing/2014/main" id="{5CA11ADB-223D-486B-9639-2659838F4107}"/>
               </a:ext>
             </a:extLst>
           </p:cNvPr>
@@ -2243,7 +2310,7 @@
           <p:cNvPr id="11" name="">
             <a:extLst xmlns:a="http://schemas.openxmlformats.org/drawingml/2006/main">
               <a:ext uri="{FF2B5EF4-FFF2-40B4-BE49-F238E27FC236}">
-                <a16:creationId xmlns:a16="http://schemas.microsoft.com/office/drawing/2014/main" id="{B16D3F0F-A13A-4370-B2DE-FB20F995B13C}"/>
+                <a16:creationId xmlns:a16="http://schemas.microsoft.com/office/drawing/2014/main" id="{8BC7A244-1816-44F3-A5B3-6A08FA249BD8}"/>
               </a:ext>
             </a:extLst>
           </p:cNvPr>
@@ -2276,7 +2343,7 @@
           <p:cNvPr id="12" name="">
             <a:extLst xmlns:a="http://schemas.openxmlformats.org/drawingml/2006/main">
               <a:ext uri="{FF2B5EF4-FFF2-40B4-BE49-F238E27FC236}">
-                <a16:creationId xmlns:a16="http://schemas.microsoft.com/office/drawing/2014/main" id="{9788B56A-5851-43FA-A2F0-47DB3DFAE67E}"/>
+                <a16:creationId xmlns:a16="http://schemas.microsoft.com/office/drawing/2014/main" id="{B5F5C40B-C1BC-44FF-819D-371CB614DD85}"/>
               </a:ext>
             </a:extLst>
           </p:cNvPr>
@@ -2340,7 +2407,7 @@
           <p:cNvPr id="13" name="">
             <a:extLst xmlns:a="http://schemas.openxmlformats.org/drawingml/2006/main">
               <a:ext uri="{FF2B5EF4-FFF2-40B4-BE49-F238E27FC236}">
-                <a16:creationId xmlns:a16="http://schemas.microsoft.com/office/drawing/2014/main" id="{E9039B8C-2E5D-449F-B69C-3041AA9BCA19}"/>
+                <a16:creationId xmlns:a16="http://schemas.microsoft.com/office/drawing/2014/main" id="{31FF61B5-295E-4CEA-BCBB-259B03AA7467}"/>
               </a:ext>
             </a:extLst>
           </p:cNvPr>
@@ -2373,7 +2440,7 @@
           <p:cNvPr id="14" name="">
             <a:extLst xmlns:a="http://schemas.openxmlformats.org/drawingml/2006/main">
               <a:ext uri="{FF2B5EF4-FFF2-40B4-BE49-F238E27FC236}">
-                <a16:creationId xmlns:a16="http://schemas.microsoft.com/office/drawing/2014/main" id="{DC3A7DCB-DA0D-4C6A-8CE3-ADA3A5AA7306}"/>
+                <a16:creationId xmlns:a16="http://schemas.microsoft.com/office/drawing/2014/main" id="{04B83102-AB8D-46BE-BFD3-5E1757AEC03E}"/>
               </a:ext>
             </a:extLst>
           </p:cNvPr>
@@ -2437,7 +2504,7 @@
           <p:cNvPr id="15" name="">
             <a:extLst xmlns:a="http://schemas.openxmlformats.org/drawingml/2006/main">
               <a:ext uri="{FF2B5EF4-FFF2-40B4-BE49-F238E27FC236}">
-                <a16:creationId xmlns:a16="http://schemas.microsoft.com/office/drawing/2014/main" id="{86482E93-A479-4C39-88BC-3A442C1F42F5}"/>
+                <a16:creationId xmlns:a16="http://schemas.microsoft.com/office/drawing/2014/main" id="{5397E836-3092-4061-9BA3-D910AF549A24}"/>
               </a:ext>
             </a:extLst>
           </p:cNvPr>
@@ -2470,7 +2537,7 @@
           <p:cNvPr id="16" name="">
             <a:extLst xmlns:a="http://schemas.openxmlformats.org/drawingml/2006/main">
               <a:ext uri="{FF2B5EF4-FFF2-40B4-BE49-F238E27FC236}">
-                <a16:creationId xmlns:a16="http://schemas.microsoft.com/office/drawing/2014/main" id="{4F84AC89-80BA-4128-BBF1-D37241A09CF1}"/>
+                <a16:creationId xmlns:a16="http://schemas.microsoft.com/office/drawing/2014/main" id="{591307AB-F003-4970-A5FD-4FFFAD0B6495}"/>
               </a:ext>
             </a:extLst>
           </p:cNvPr>
@@ -2534,7 +2601,71 @@
           <p:cNvPr id="17" name="">
             <a:extLst xmlns:a="http://schemas.openxmlformats.org/drawingml/2006/main">
               <a:ext uri="{FF2B5EF4-FFF2-40B4-BE49-F238E27FC236}">
-                <a16:creationId xmlns:a16="http://schemas.microsoft.com/office/drawing/2014/main" id="{AC2CD6AD-373C-4D09-8461-851DC87A03CE}"/>
+                <a16:creationId xmlns:a16="http://schemas.microsoft.com/office/drawing/2014/main" id="{BA44B8F6-2962-4504-8788-62A609227021}"/>
+              </a:ext>
+            </a:extLst>
+          </p:cNvPr>
+          <p:cNvSpPr>
+            <a:spLocks xmlns:a="http://schemas.openxmlformats.org/drawingml/2006/main" noGrp="1"/>
+          </p:cNvSpPr>
+          <p:nvPr/>
+        </p:nvSpPr>
+        <p:spPr>
+          <a:xfrm xmlns:a="http://schemas.openxmlformats.org/drawingml/2006/main">
+            <a:off x="628650" y="4953000"/>
+            <a:ext cx="7429500" cy="228600"/>
+          </a:xfrm>
+          <a:prstGeom xmlns:a="http://schemas.openxmlformats.org/drawingml/2006/main" prst="rect">
+            <a:avLst/>
+          </a:prstGeom>
+          <a:solidFill xmlns:a="http://schemas.openxmlformats.org/drawingml/2006/main">
+            <a:srgbClr val="000000">
+              <a:alpha val="0"/>
+            </a:srgbClr>
+          </a:solidFill>
+          <a:ln xmlns:a="http://schemas.openxmlformats.org/drawingml/2006/main" w="0">
+            <a:solidFill>
+              <a:srgbClr val="000000">
+                <a:alpha val="0"/>
+              </a:srgbClr>
+            </a:solidFill>
+            <a:prstDash val="solid"/>
+          </a:ln>
+        </p:spPr>
+        <p:txBody>
+          <a:bodyPr xmlns:a="http://schemas.openxmlformats.org/drawingml/2006/main" lIns="0" tIns="0" rIns="0" bIns="0" anchor="t"/>
+          <a:lstStyle xmlns:a="http://schemas.openxmlformats.org/drawingml/2006/main"/>
+          <a:p xmlns:a="http://schemas.openxmlformats.org/drawingml/2006/main">
+            <a:pPr algn="l">
+              <a:defRPr sz="1050" b="0">
+                <a:solidFill>
+                  <a:srgbClr val="BFC8DE"/>
+                </a:solidFill>
+                <a:latin typeface="Aptos"/>
+                <a:ea typeface="Aptos"/>
+                <a:cs typeface="Aptos"/>
+              </a:defRPr>
+            </a:pPr>
+            <a:r>
+              <a:rPr sz="1050" b="0">
+                <a:solidFill>
+                  <a:srgbClr val="BFC8DE"/>
+                </a:solidFill>
+                <a:latin typeface="Aptos"/>
+                <a:ea typeface="Aptos"/>
+                <a:cs typeface="Aptos"/>
+              </a:rPr>
+              <a:t>Founder: Katta Naga Sri Ganesh | Syntriass / AIRON | syntriass@gmail.com</a:t>
+            </a:r>
+          </a:p>
+        </p:txBody>
+      </p:sp>
+      <p:sp>
+        <p:nvSpPr>
+          <p:cNvPr id="18" name="">
+            <a:extLst xmlns:a="http://schemas.openxmlformats.org/drawingml/2006/main">
+              <a:ext uri="{FF2B5EF4-FFF2-40B4-BE49-F238E27FC236}">
+                <a16:creationId xmlns:a16="http://schemas.microsoft.com/office/drawing/2014/main" id="{43C132FC-7F4F-4FA3-88AE-DEB6973AD535}"/>
               </a:ext>
             </a:extLst>
           </p:cNvPr>
@@ -2564,10 +2695,10 @@
       </p:sp>
       <p:sp>
         <p:nvSpPr>
-          <p:cNvPr id="18" name="">
-            <a:extLst xmlns:a="http://schemas.openxmlformats.org/drawingml/2006/main">
-              <a:ext uri="{FF2B5EF4-FFF2-40B4-BE49-F238E27FC236}">
-                <a16:creationId xmlns:a16="http://schemas.microsoft.com/office/drawing/2014/main" id="{271C6021-CAF8-40AF-B9CA-7A0F1DCD987B}"/>
+          <p:cNvPr id="19" name="">
+            <a:extLst xmlns:a="http://schemas.openxmlformats.org/drawingml/2006/main">
+              <a:ext uri="{FF2B5EF4-FFF2-40B4-BE49-F238E27FC236}">
+                <a16:creationId xmlns:a16="http://schemas.microsoft.com/office/drawing/2014/main" id="{8BD89E36-DD9D-42B3-BF50-05A436C23B7E}"/>
               </a:ext>
             </a:extLst>
           </p:cNvPr>
@@ -2628,10 +2759,10 @@
       </p:sp>
       <p:sp>
         <p:nvSpPr>
-          <p:cNvPr id="19" name="">
-            <a:extLst xmlns:a="http://schemas.openxmlformats.org/drawingml/2006/main">
-              <a:ext uri="{FF2B5EF4-FFF2-40B4-BE49-F238E27FC236}">
-                <a16:creationId xmlns:a16="http://schemas.microsoft.com/office/drawing/2014/main" id="{3E85BA19-66B4-492D-841D-46E8E739FC31}"/>
+          <p:cNvPr id="20" name="">
+            <a:extLst xmlns:a="http://schemas.openxmlformats.org/drawingml/2006/main">
+              <a:ext uri="{FF2B5EF4-FFF2-40B4-BE49-F238E27FC236}">
+                <a16:creationId xmlns:a16="http://schemas.microsoft.com/office/drawing/2014/main" id="{D824558E-8AD5-4241-A6FC-EECAA22E81E1}"/>
               </a:ext>
             </a:extLst>
           </p:cNvPr>
@@ -2692,10 +2823,10 @@
       </p:sp>
       <p:sp>
         <p:nvSpPr>
-          <p:cNvPr id="20" name="">
-            <a:extLst xmlns:a="http://schemas.openxmlformats.org/drawingml/2006/main">
-              <a:ext uri="{FF2B5EF4-FFF2-40B4-BE49-F238E27FC236}">
-                <a16:creationId xmlns:a16="http://schemas.microsoft.com/office/drawing/2014/main" id="{25618874-CCC0-44B4-ACCB-6797D44FD5C4}"/>
+          <p:cNvPr id="21" name="">
+            <a:extLst xmlns:a="http://schemas.openxmlformats.org/drawingml/2006/main">
+              <a:ext uri="{FF2B5EF4-FFF2-40B4-BE49-F238E27FC236}">
+                <a16:creationId xmlns:a16="http://schemas.microsoft.com/office/drawing/2014/main" id="{B028E2A8-5438-4D2F-AD4C-3E967D6F1CAD}"/>
               </a:ext>
             </a:extLst>
           </p:cNvPr>
@@ -2725,10 +2856,10 @@
       </p:sp>
       <p:sp>
         <p:nvSpPr>
-          <p:cNvPr id="21" name="">
-            <a:extLst xmlns:a="http://schemas.openxmlformats.org/drawingml/2006/main">
-              <a:ext uri="{FF2B5EF4-FFF2-40B4-BE49-F238E27FC236}">
-                <a16:creationId xmlns:a16="http://schemas.microsoft.com/office/drawing/2014/main" id="{AE0D7B75-F029-4AE2-AAF8-58FD1C4583A7}"/>
+          <p:cNvPr id="22" name="">
+            <a:extLst xmlns:a="http://schemas.openxmlformats.org/drawingml/2006/main">
+              <a:ext uri="{FF2B5EF4-FFF2-40B4-BE49-F238E27FC236}">
+                <a16:creationId xmlns:a16="http://schemas.microsoft.com/office/drawing/2014/main" id="{B544518A-B476-4DFB-A38B-97077362FD71}"/>
               </a:ext>
             </a:extLst>
           </p:cNvPr>
@@ -2789,10 +2920,10 @@
       </p:sp>
       <p:sp>
         <p:nvSpPr>
-          <p:cNvPr id="22" name="">
-            <a:extLst xmlns:a="http://schemas.openxmlformats.org/drawingml/2006/main">
-              <a:ext uri="{FF2B5EF4-FFF2-40B4-BE49-F238E27FC236}">
-                <a16:creationId xmlns:a16="http://schemas.microsoft.com/office/drawing/2014/main" id="{FDE03FE0-D31B-4DBF-AE85-43F6B42269C5}"/>
+          <p:cNvPr id="23" name="">
+            <a:extLst xmlns:a="http://schemas.openxmlformats.org/drawingml/2006/main">
+              <a:ext uri="{FF2B5EF4-FFF2-40B4-BE49-F238E27FC236}">
+                <a16:creationId xmlns:a16="http://schemas.microsoft.com/office/drawing/2014/main" id="{3B5B966D-2501-4EC8-915F-B08EDD41DA7F}"/>
               </a:ext>
             </a:extLst>
           </p:cNvPr>
@@ -2853,10 +2984,10 @@
       </p:sp>
       <p:sp>
         <p:nvSpPr>
-          <p:cNvPr id="23" name="">
-            <a:extLst xmlns:a="http://schemas.openxmlformats.org/drawingml/2006/main">
-              <a:ext uri="{FF2B5EF4-FFF2-40B4-BE49-F238E27FC236}">
-                <a16:creationId xmlns:a16="http://schemas.microsoft.com/office/drawing/2014/main" id="{1351B5FC-3A54-4298-A93A-97534E883E8D}"/>
+          <p:cNvPr id="24" name="">
+            <a:extLst xmlns:a="http://schemas.openxmlformats.org/drawingml/2006/main">
+              <a:ext uri="{FF2B5EF4-FFF2-40B4-BE49-F238E27FC236}">
+                <a16:creationId xmlns:a16="http://schemas.microsoft.com/office/drawing/2014/main" id="{3595F720-4C84-447D-971C-1E35C7FA7F92}"/>
               </a:ext>
             </a:extLst>
           </p:cNvPr>
@@ -2886,10 +3017,10 @@
       </p:sp>
       <p:sp>
         <p:nvSpPr>
-          <p:cNvPr id="24" name="">
-            <a:extLst xmlns:a="http://schemas.openxmlformats.org/drawingml/2006/main">
-              <a:ext uri="{FF2B5EF4-FFF2-40B4-BE49-F238E27FC236}">
-                <a16:creationId xmlns:a16="http://schemas.microsoft.com/office/drawing/2014/main" id="{4DBBA0E0-86D4-408A-B118-D0A8588F954E}"/>
+          <p:cNvPr id="25" name="">
+            <a:extLst xmlns:a="http://schemas.openxmlformats.org/drawingml/2006/main">
+              <a:ext uri="{FF2B5EF4-FFF2-40B4-BE49-F238E27FC236}">
+                <a16:creationId xmlns:a16="http://schemas.microsoft.com/office/drawing/2014/main" id="{B2F61ABA-C5A7-4F03-AF15-60A67B77AF1F}"/>
               </a:ext>
             </a:extLst>
           </p:cNvPr>
@@ -2950,10 +3081,10 @@
       </p:sp>
       <p:sp>
         <p:nvSpPr>
-          <p:cNvPr id="25" name="">
-            <a:extLst xmlns:a="http://schemas.openxmlformats.org/drawingml/2006/main">
-              <a:ext uri="{FF2B5EF4-FFF2-40B4-BE49-F238E27FC236}">
-                <a16:creationId xmlns:a16="http://schemas.microsoft.com/office/drawing/2014/main" id="{7315AC45-CB99-480E-973C-9C33846BBA4C}"/>
+          <p:cNvPr id="26" name="">
+            <a:extLst xmlns:a="http://schemas.openxmlformats.org/drawingml/2006/main">
+              <a:ext uri="{FF2B5EF4-FFF2-40B4-BE49-F238E27FC236}">
+                <a16:creationId xmlns:a16="http://schemas.microsoft.com/office/drawing/2014/main" id="{82A97741-25CA-46D1-8D15-D881398AE519}"/>
               </a:ext>
             </a:extLst>
           </p:cNvPr>
@@ -3014,10 +3145,10 @@
       </p:sp>
       <p:sp>
         <p:nvSpPr>
-          <p:cNvPr id="26" name="">
-            <a:extLst xmlns:a="http://schemas.openxmlformats.org/drawingml/2006/main">
-              <a:ext uri="{FF2B5EF4-FFF2-40B4-BE49-F238E27FC236}">
-                <a16:creationId xmlns:a16="http://schemas.microsoft.com/office/drawing/2014/main" id="{15AD2678-2023-405B-AEDC-C82A801E0924}"/>
+          <p:cNvPr id="27" name="">
+            <a:extLst xmlns:a="http://schemas.openxmlformats.org/drawingml/2006/main">
+              <a:ext uri="{FF2B5EF4-FFF2-40B4-BE49-F238E27FC236}">
+                <a16:creationId xmlns:a16="http://schemas.microsoft.com/office/drawing/2014/main" id="{E06B6089-F975-4F10-B46E-94F6CA0663CC}"/>
               </a:ext>
             </a:extLst>
           </p:cNvPr>
@@ -3049,10 +3180,10 @@
       </p:sp>
       <p:sp>
         <p:nvSpPr>
-          <p:cNvPr id="27" name="">
-            <a:extLst xmlns:a="http://schemas.openxmlformats.org/drawingml/2006/main">
-              <a:ext uri="{FF2B5EF4-FFF2-40B4-BE49-F238E27FC236}">
-                <a16:creationId xmlns:a16="http://schemas.microsoft.com/office/drawing/2014/main" id="{826314C6-7327-4C50-A6B3-3E16036F3A03}"/>
+          <p:cNvPr id="28" name="">
+            <a:extLst xmlns:a="http://schemas.openxmlformats.org/drawingml/2006/main">
+              <a:ext uri="{FF2B5EF4-FFF2-40B4-BE49-F238E27FC236}">
+                <a16:creationId xmlns:a16="http://schemas.microsoft.com/office/drawing/2014/main" id="{ED04DF64-B575-40B9-8775-A40F3746C8C2}"/>
               </a:ext>
             </a:extLst>
           </p:cNvPr>
@@ -3084,10 +3215,10 @@
       </p:sp>
       <p:sp>
         <p:nvSpPr>
-          <p:cNvPr id="28" name="">
-            <a:extLst xmlns:a="http://schemas.openxmlformats.org/drawingml/2006/main">
-              <a:ext uri="{FF2B5EF4-FFF2-40B4-BE49-F238E27FC236}">
-                <a16:creationId xmlns:a16="http://schemas.microsoft.com/office/drawing/2014/main" id="{96F8DBDA-9B9F-4562-9A8F-756FD3B980D9}"/>
+          <p:cNvPr id="29" name="">
+            <a:extLst xmlns:a="http://schemas.openxmlformats.org/drawingml/2006/main">
+              <a:ext uri="{FF2B5EF4-FFF2-40B4-BE49-F238E27FC236}">
+                <a16:creationId xmlns:a16="http://schemas.microsoft.com/office/drawing/2014/main" id="{AAA0EB2A-E9B2-4CB0-97C6-CCEC0923A45C}"/>
               </a:ext>
             </a:extLst>
           </p:cNvPr>
@@ -3119,10 +3250,10 @@
       </p:sp>
       <p:sp>
         <p:nvSpPr>
-          <p:cNvPr id="29" name="">
-            <a:extLst xmlns:a="http://schemas.openxmlformats.org/drawingml/2006/main">
-              <a:ext uri="{FF2B5EF4-FFF2-40B4-BE49-F238E27FC236}">
-                <a16:creationId xmlns:a16="http://schemas.microsoft.com/office/drawing/2014/main" id="{B8B245DC-00FD-448D-BC8E-AD78ED400727}"/>
+          <p:cNvPr id="30" name="">
+            <a:extLst xmlns:a="http://schemas.openxmlformats.org/drawingml/2006/main">
+              <a:ext uri="{FF2B5EF4-FFF2-40B4-BE49-F238E27FC236}">
+                <a16:creationId xmlns:a16="http://schemas.microsoft.com/office/drawing/2014/main" id="{A368134B-BFEA-4787-9826-C1CF40CD0083}"/>
               </a:ext>
             </a:extLst>
           </p:cNvPr>
@@ -3154,10 +3285,10 @@
       </p:sp>
       <p:sp>
         <p:nvSpPr>
-          <p:cNvPr id="30" name="">
-            <a:extLst xmlns:a="http://schemas.openxmlformats.org/drawingml/2006/main">
-              <a:ext uri="{FF2B5EF4-FFF2-40B4-BE49-F238E27FC236}">
-                <a16:creationId xmlns:a16="http://schemas.microsoft.com/office/drawing/2014/main" id="{D700F07C-5D42-4EE3-8348-C8A6E8F062B7}"/>
+          <p:cNvPr id="31" name="">
+            <a:extLst xmlns:a="http://schemas.openxmlformats.org/drawingml/2006/main">
+              <a:ext uri="{FF2B5EF4-FFF2-40B4-BE49-F238E27FC236}">
+                <a16:creationId xmlns:a16="http://schemas.microsoft.com/office/drawing/2014/main" id="{77205302-179D-4525-BFF3-D72856C2BC1F}"/>
               </a:ext>
             </a:extLst>
           </p:cNvPr>
@@ -3218,10 +3349,10 @@
       </p:sp>
       <p:sp>
         <p:nvSpPr>
-          <p:cNvPr id="31" name="">
-            <a:extLst xmlns:a="http://schemas.openxmlformats.org/drawingml/2006/main">
-              <a:ext uri="{FF2B5EF4-FFF2-40B4-BE49-F238E27FC236}">
-                <a16:creationId xmlns:a16="http://schemas.microsoft.com/office/drawing/2014/main" id="{3E0BCC5A-5D29-4C59-932E-A14716CC0393}"/>
+          <p:cNvPr id="32" name="">
+            <a:extLst xmlns:a="http://schemas.openxmlformats.org/drawingml/2006/main">
+              <a:ext uri="{FF2B5EF4-FFF2-40B4-BE49-F238E27FC236}">
+                <a16:creationId xmlns:a16="http://schemas.microsoft.com/office/drawing/2014/main" id="{B8824F18-FEDC-46A3-8BF8-07CD6316BEAC}"/>
               </a:ext>
             </a:extLst>
           </p:cNvPr>
@@ -3283,7 +3414,7 @@
     </p:spTree>
     <p:extLst>
       <p:ext uri="{BB962C8B-B14F-4D97-AF65-F5344CB8AC3E}">
-        <p14:creationId xmlns:p14="http://schemas.microsoft.com/office/powerpoint/2010/main" val="617766088"/>
+        <p14:creationId xmlns:p14="http://schemas.microsoft.com/office/powerpoint/2010/main" val="157778827"/>
       </p:ext>
     </p:extLst>
   </p:cSld>
@@ -3307,7 +3438,7 @@
           <p:cNvPr id="1" name="">
             <a:extLst xmlns:a="http://schemas.openxmlformats.org/drawingml/2006/main">
               <a:ext uri="{FF2B5EF4-FFF2-40B4-BE49-F238E27FC236}">
-                <a16:creationId xmlns:a16="http://schemas.microsoft.com/office/drawing/2014/main" id="{8777C568-3817-4436-AEC4-BD4CEF923C55}"/>
+                <a16:creationId xmlns:a16="http://schemas.microsoft.com/office/drawing/2014/main" id="{06D77FBB-198C-400C-ABB9-B62C1EE62267}"/>
               </a:ext>
             </a:extLst>
           </p:cNvPr>
@@ -3342,7 +3473,7 @@
           <p:cNvPr id="2" name="">
             <a:extLst xmlns:a="http://schemas.openxmlformats.org/drawingml/2006/main">
               <a:ext uri="{FF2B5EF4-FFF2-40B4-BE49-F238E27FC236}">
-                <a16:creationId xmlns:a16="http://schemas.microsoft.com/office/drawing/2014/main" id="{805DDB9D-467A-4122-8C28-4BD99B89CDC8}"/>
+                <a16:creationId xmlns:a16="http://schemas.microsoft.com/office/drawing/2014/main" id="{FF6A2EE0-8AA1-45BF-B3CF-F6EB27AE444D}"/>
               </a:ext>
             </a:extLst>
           </p:cNvPr>
@@ -3377,7 +3508,7 @@
           <p:cNvPr id="3" name="">
             <a:extLst xmlns:a="http://schemas.openxmlformats.org/drawingml/2006/main">
               <a:ext uri="{FF2B5EF4-FFF2-40B4-BE49-F238E27FC236}">
-                <a16:creationId xmlns:a16="http://schemas.microsoft.com/office/drawing/2014/main" id="{52F2908C-EDDA-4647-AAF7-1773E753847D}"/>
+                <a16:creationId xmlns:a16="http://schemas.microsoft.com/office/drawing/2014/main" id="{893E0F9F-F711-4016-945F-806DCB029F69}"/>
               </a:ext>
             </a:extLst>
           </p:cNvPr>
@@ -3412,7 +3543,7 @@
           <p:cNvPr id="4" name="">
             <a:extLst xmlns:a="http://schemas.openxmlformats.org/drawingml/2006/main">
               <a:ext uri="{FF2B5EF4-FFF2-40B4-BE49-F238E27FC236}">
-                <a16:creationId xmlns:a16="http://schemas.microsoft.com/office/drawing/2014/main" id="{1283A39A-554C-41DD-B0D1-B6B77DDB15B7}"/>
+                <a16:creationId xmlns:a16="http://schemas.microsoft.com/office/drawing/2014/main" id="{FFA6432D-F0CE-4034-BA37-69FD883AA1F0}"/>
               </a:ext>
             </a:extLst>
           </p:cNvPr>
@@ -3447,7 +3578,7 @@
           <p:cNvPr id="5" name="">
             <a:extLst xmlns:a="http://schemas.openxmlformats.org/drawingml/2006/main">
               <a:ext uri="{FF2B5EF4-FFF2-40B4-BE49-F238E27FC236}">
-                <a16:creationId xmlns:a16="http://schemas.microsoft.com/office/drawing/2014/main" id="{57EB06C6-480C-4BFA-BFB9-44F5394B0F85}"/>
+                <a16:creationId xmlns:a16="http://schemas.microsoft.com/office/drawing/2014/main" id="{837F2222-B087-4873-BF76-C5C9036CEB2C}"/>
               </a:ext>
             </a:extLst>
           </p:cNvPr>
@@ -3482,7 +3613,7 @@
           <p:cNvPr id="6" name="">
             <a:extLst xmlns:a="http://schemas.openxmlformats.org/drawingml/2006/main">
               <a:ext uri="{FF2B5EF4-FFF2-40B4-BE49-F238E27FC236}">
-                <a16:creationId xmlns:a16="http://schemas.microsoft.com/office/drawing/2014/main" id="{25260D56-4E06-4189-B78A-BC737967173D}"/>
+                <a16:creationId xmlns:a16="http://schemas.microsoft.com/office/drawing/2014/main" id="{6E330B34-3D02-454A-9E58-FF301560EFC3}"/>
               </a:ext>
             </a:extLst>
           </p:cNvPr>
@@ -3546,7 +3677,7 @@
           <p:cNvPr id="7" name="">
             <a:extLst xmlns:a="http://schemas.openxmlformats.org/drawingml/2006/main">
               <a:ext uri="{FF2B5EF4-FFF2-40B4-BE49-F238E27FC236}">
-                <a16:creationId xmlns:a16="http://schemas.microsoft.com/office/drawing/2014/main" id="{A63D52DF-A39E-4FB7-83FA-DBA1CF33FDC5}"/>
+                <a16:creationId xmlns:a16="http://schemas.microsoft.com/office/drawing/2014/main" id="{26F96D71-B1E7-4510-B262-C433D1F477B1}"/>
               </a:ext>
             </a:extLst>
           </p:cNvPr>
@@ -3610,7 +3741,7 @@
           <p:cNvPr id="8" name="">
             <a:extLst xmlns:a="http://schemas.openxmlformats.org/drawingml/2006/main">
               <a:ext uri="{FF2B5EF4-FFF2-40B4-BE49-F238E27FC236}">
-                <a16:creationId xmlns:a16="http://schemas.microsoft.com/office/drawing/2014/main" id="{5F862105-714D-4CD4-A777-82D896AA9D56}"/>
+                <a16:creationId xmlns:a16="http://schemas.microsoft.com/office/drawing/2014/main" id="{073FA02C-FC42-462C-A617-6D97917D1AE4}"/>
               </a:ext>
             </a:extLst>
           </p:cNvPr>
@@ -3674,7 +3805,7 @@
           <p:cNvPr id="9" name="">
             <a:extLst xmlns:a="http://schemas.openxmlformats.org/drawingml/2006/main">
               <a:ext uri="{FF2B5EF4-FFF2-40B4-BE49-F238E27FC236}">
-                <a16:creationId xmlns:a16="http://schemas.microsoft.com/office/drawing/2014/main" id="{B3280706-B2B8-4F6A-827E-2DF4EBCE445E}"/>
+                <a16:creationId xmlns:a16="http://schemas.microsoft.com/office/drawing/2014/main" id="{FC702A8C-A2AB-4F65-91EE-47C9044CD324}"/>
               </a:ext>
             </a:extLst>
           </p:cNvPr>
@@ -3709,7 +3840,7 @@
           <p:cNvPr id="10" name="">
             <a:extLst xmlns:a="http://schemas.openxmlformats.org/drawingml/2006/main">
               <a:ext uri="{FF2B5EF4-FFF2-40B4-BE49-F238E27FC236}">
-                <a16:creationId xmlns:a16="http://schemas.microsoft.com/office/drawing/2014/main" id="{249DECC6-6378-43EE-96DB-BD0E4F38FD39}"/>
+                <a16:creationId xmlns:a16="http://schemas.microsoft.com/office/drawing/2014/main" id="{26C08703-9599-4192-B063-D16BDA8271A6}"/>
               </a:ext>
             </a:extLst>
           </p:cNvPr>
@@ -3742,7 +3873,7 @@
           <p:cNvPr id="11" name="">
             <a:extLst xmlns:a="http://schemas.openxmlformats.org/drawingml/2006/main">
               <a:ext uri="{FF2B5EF4-FFF2-40B4-BE49-F238E27FC236}">
-                <a16:creationId xmlns:a16="http://schemas.microsoft.com/office/drawing/2014/main" id="{4258FBA2-A54A-442E-80B9-86E3DB4A17A7}"/>
+                <a16:creationId xmlns:a16="http://schemas.microsoft.com/office/drawing/2014/main" id="{F0ABCD0B-7C9E-4277-8812-159FCACFE62A}"/>
               </a:ext>
             </a:extLst>
           </p:cNvPr>
@@ -3775,7 +3906,7 @@
           <p:cNvPr id="12" name="">
             <a:extLst xmlns:a="http://schemas.openxmlformats.org/drawingml/2006/main">
               <a:ext uri="{FF2B5EF4-FFF2-40B4-BE49-F238E27FC236}">
-                <a16:creationId xmlns:a16="http://schemas.microsoft.com/office/drawing/2014/main" id="{0FCA1600-F95F-4D2E-B7B9-7BD6D04BEDFD}"/>
+                <a16:creationId xmlns:a16="http://schemas.microsoft.com/office/drawing/2014/main" id="{69BF2FD0-D644-41A8-B075-50442EC14DF2}"/>
               </a:ext>
             </a:extLst>
           </p:cNvPr>
@@ -3839,7 +3970,7 @@
           <p:cNvPr id="13" name="">
             <a:extLst xmlns:a="http://schemas.openxmlformats.org/drawingml/2006/main">
               <a:ext uri="{FF2B5EF4-FFF2-40B4-BE49-F238E27FC236}">
-                <a16:creationId xmlns:a16="http://schemas.microsoft.com/office/drawing/2014/main" id="{DA9E5899-7718-4FF9-8035-AE65D68E0282}"/>
+                <a16:creationId xmlns:a16="http://schemas.microsoft.com/office/drawing/2014/main" id="{D7B82055-2AA2-4F71-9CC2-7C8450EBB5F9}"/>
               </a:ext>
             </a:extLst>
           </p:cNvPr>
@@ -3903,7 +4034,7 @@
           <p:cNvPr id="14" name="">
             <a:extLst xmlns:a="http://schemas.openxmlformats.org/drawingml/2006/main">
               <a:ext uri="{FF2B5EF4-FFF2-40B4-BE49-F238E27FC236}">
-                <a16:creationId xmlns:a16="http://schemas.microsoft.com/office/drawing/2014/main" id="{15D24345-930C-4845-B68E-44E77D19F630}"/>
+                <a16:creationId xmlns:a16="http://schemas.microsoft.com/office/drawing/2014/main" id="{43D5C64B-267A-45AA-BB54-FF869073AAB9}"/>
               </a:ext>
             </a:extLst>
           </p:cNvPr>
@@ -3967,7 +4098,7 @@
           <p:cNvPr id="15" name="">
             <a:extLst xmlns:a="http://schemas.openxmlformats.org/drawingml/2006/main">
               <a:ext uri="{FF2B5EF4-FFF2-40B4-BE49-F238E27FC236}">
-                <a16:creationId xmlns:a16="http://schemas.microsoft.com/office/drawing/2014/main" id="{1B42F7C5-24A6-42CE-AA87-3D667C1B0E89}"/>
+                <a16:creationId xmlns:a16="http://schemas.microsoft.com/office/drawing/2014/main" id="{CF02B491-C128-4E34-8FFD-6489682E63E5}"/>
               </a:ext>
             </a:extLst>
           </p:cNvPr>
@@ -4000,7 +4131,7 @@
           <p:cNvPr id="16" name="">
             <a:extLst xmlns:a="http://schemas.openxmlformats.org/drawingml/2006/main">
               <a:ext uri="{FF2B5EF4-FFF2-40B4-BE49-F238E27FC236}">
-                <a16:creationId xmlns:a16="http://schemas.microsoft.com/office/drawing/2014/main" id="{084163AB-196C-4AB3-96F1-DCAA0A4CA640}"/>
+                <a16:creationId xmlns:a16="http://schemas.microsoft.com/office/drawing/2014/main" id="{EA6B883F-1FFA-4A81-8545-7D5BE06076B9}"/>
               </a:ext>
             </a:extLst>
           </p:cNvPr>
@@ -4033,7 +4164,7 @@
           <p:cNvPr id="17" name="">
             <a:extLst xmlns:a="http://schemas.openxmlformats.org/drawingml/2006/main">
               <a:ext uri="{FF2B5EF4-FFF2-40B4-BE49-F238E27FC236}">
-                <a16:creationId xmlns:a16="http://schemas.microsoft.com/office/drawing/2014/main" id="{FEF1FAF4-B446-40E1-82B3-BE2E03BE5FDC}"/>
+                <a16:creationId xmlns:a16="http://schemas.microsoft.com/office/drawing/2014/main" id="{3EDFDFB8-0890-41D6-8A90-93951A86C749}"/>
               </a:ext>
             </a:extLst>
           </p:cNvPr>
@@ -4097,7 +4228,7 @@
           <p:cNvPr id="18" name="">
             <a:extLst xmlns:a="http://schemas.openxmlformats.org/drawingml/2006/main">
               <a:ext uri="{FF2B5EF4-FFF2-40B4-BE49-F238E27FC236}">
-                <a16:creationId xmlns:a16="http://schemas.microsoft.com/office/drawing/2014/main" id="{2A50C3D0-3FE9-435C-9414-E4411A32F476}"/>
+                <a16:creationId xmlns:a16="http://schemas.microsoft.com/office/drawing/2014/main" id="{40488193-01D8-4D4F-89B6-91875F1735F1}"/>
               </a:ext>
             </a:extLst>
           </p:cNvPr>
@@ -4161,7 +4292,7 @@
           <p:cNvPr id="19" name="">
             <a:extLst xmlns:a="http://schemas.openxmlformats.org/drawingml/2006/main">
               <a:ext uri="{FF2B5EF4-FFF2-40B4-BE49-F238E27FC236}">
-                <a16:creationId xmlns:a16="http://schemas.microsoft.com/office/drawing/2014/main" id="{AF8084FC-DD19-44DF-9B3D-C3374F2A7C74}"/>
+                <a16:creationId xmlns:a16="http://schemas.microsoft.com/office/drawing/2014/main" id="{FBCA0529-40A5-4AAD-B634-E181311EACAC}"/>
               </a:ext>
             </a:extLst>
           </p:cNvPr>
@@ -4225,7 +4356,7 @@
           <p:cNvPr id="20" name="">
             <a:extLst xmlns:a="http://schemas.openxmlformats.org/drawingml/2006/main">
               <a:ext uri="{FF2B5EF4-FFF2-40B4-BE49-F238E27FC236}">
-                <a16:creationId xmlns:a16="http://schemas.microsoft.com/office/drawing/2014/main" id="{84D27EB4-8827-4D29-A485-71B007423F77}"/>
+                <a16:creationId xmlns:a16="http://schemas.microsoft.com/office/drawing/2014/main" id="{4CD45B9C-5E31-4347-928C-1B1CA6DFB040}"/>
               </a:ext>
             </a:extLst>
           </p:cNvPr>
@@ -4258,7 +4389,7 @@
           <p:cNvPr id="21" name="">
             <a:extLst xmlns:a="http://schemas.openxmlformats.org/drawingml/2006/main">
               <a:ext uri="{FF2B5EF4-FFF2-40B4-BE49-F238E27FC236}">
-                <a16:creationId xmlns:a16="http://schemas.microsoft.com/office/drawing/2014/main" id="{AF6E53BC-7D82-42DA-A392-C4A89C560384}"/>
+                <a16:creationId xmlns:a16="http://schemas.microsoft.com/office/drawing/2014/main" id="{3544E1A4-50F2-4CA2-A6EE-41BE14C3870E}"/>
               </a:ext>
             </a:extLst>
           </p:cNvPr>
@@ -4291,7 +4422,7 @@
           <p:cNvPr id="22" name="">
             <a:extLst xmlns:a="http://schemas.openxmlformats.org/drawingml/2006/main">
               <a:ext uri="{FF2B5EF4-FFF2-40B4-BE49-F238E27FC236}">
-                <a16:creationId xmlns:a16="http://schemas.microsoft.com/office/drawing/2014/main" id="{08B9CC60-E29A-45F4-83A6-92CC0032CC19}"/>
+                <a16:creationId xmlns:a16="http://schemas.microsoft.com/office/drawing/2014/main" id="{05ADEE92-2E10-4734-A244-18942A79335B}"/>
               </a:ext>
             </a:extLst>
           </p:cNvPr>
@@ -4355,7 +4486,7 @@
           <p:cNvPr id="23" name="">
             <a:extLst xmlns:a="http://schemas.openxmlformats.org/drawingml/2006/main">
               <a:ext uri="{FF2B5EF4-FFF2-40B4-BE49-F238E27FC236}">
-                <a16:creationId xmlns:a16="http://schemas.microsoft.com/office/drawing/2014/main" id="{EBB1166B-2BB9-46A1-91CE-8CA000B1FD1F}"/>
+                <a16:creationId xmlns:a16="http://schemas.microsoft.com/office/drawing/2014/main" id="{346A2DB6-AC86-406B-A3B5-A1AD613EE830}"/>
               </a:ext>
             </a:extLst>
           </p:cNvPr>
@@ -4419,7 +4550,7 @@
           <p:cNvPr id="24" name="">
             <a:extLst xmlns:a="http://schemas.openxmlformats.org/drawingml/2006/main">
               <a:ext uri="{FF2B5EF4-FFF2-40B4-BE49-F238E27FC236}">
-                <a16:creationId xmlns:a16="http://schemas.microsoft.com/office/drawing/2014/main" id="{5A6DF062-57AE-4C77-9031-020ED774A8FA}"/>
+                <a16:creationId xmlns:a16="http://schemas.microsoft.com/office/drawing/2014/main" id="{2588AA44-9ED8-465D-926D-1DEEF96C78C4}"/>
               </a:ext>
             </a:extLst>
           </p:cNvPr>
@@ -4483,7 +4614,7 @@
           <p:cNvPr id="25" name="">
             <a:extLst xmlns:a="http://schemas.openxmlformats.org/drawingml/2006/main">
               <a:ext uri="{FF2B5EF4-FFF2-40B4-BE49-F238E27FC236}">
-                <a16:creationId xmlns:a16="http://schemas.microsoft.com/office/drawing/2014/main" id="{7EACE4C8-2B2F-4E3C-8F99-C804FC13A017}"/>
+                <a16:creationId xmlns:a16="http://schemas.microsoft.com/office/drawing/2014/main" id="{8014C8BE-0F4B-434E-986B-6F4E344C8945}"/>
               </a:ext>
             </a:extLst>
           </p:cNvPr>
@@ -4516,7 +4647,7 @@
           <p:cNvPr id="26" name="">
             <a:extLst xmlns:a="http://schemas.openxmlformats.org/drawingml/2006/main">
               <a:ext uri="{FF2B5EF4-FFF2-40B4-BE49-F238E27FC236}">
-                <a16:creationId xmlns:a16="http://schemas.microsoft.com/office/drawing/2014/main" id="{3F409433-4412-4EF3-98FB-923F2C12203B}"/>
+                <a16:creationId xmlns:a16="http://schemas.microsoft.com/office/drawing/2014/main" id="{DBD4581B-0C3E-47A1-9973-AD15685F2060}"/>
               </a:ext>
             </a:extLst>
           </p:cNvPr>
@@ -4549,7 +4680,7 @@
           <p:cNvPr id="27" name="">
             <a:extLst xmlns:a="http://schemas.openxmlformats.org/drawingml/2006/main">
               <a:ext uri="{FF2B5EF4-FFF2-40B4-BE49-F238E27FC236}">
-                <a16:creationId xmlns:a16="http://schemas.microsoft.com/office/drawing/2014/main" id="{8FA9407B-E03E-4D6F-9111-FDF98A1C8437}"/>
+                <a16:creationId xmlns:a16="http://schemas.microsoft.com/office/drawing/2014/main" id="{5300A0F1-8472-45F2-836F-CD488E2092F3}"/>
               </a:ext>
             </a:extLst>
           </p:cNvPr>
@@ -4613,7 +4744,7 @@
           <p:cNvPr id="28" name="">
             <a:extLst xmlns:a="http://schemas.openxmlformats.org/drawingml/2006/main">
               <a:ext uri="{FF2B5EF4-FFF2-40B4-BE49-F238E27FC236}">
-                <a16:creationId xmlns:a16="http://schemas.microsoft.com/office/drawing/2014/main" id="{AC3624A2-E97D-4462-92E1-E24D912C244F}"/>
+                <a16:creationId xmlns:a16="http://schemas.microsoft.com/office/drawing/2014/main" id="{91DE23BA-6046-4AD4-8445-B305CB0AFBE5}"/>
               </a:ext>
             </a:extLst>
           </p:cNvPr>
@@ -4677,7 +4808,7 @@
           <p:cNvPr id="29" name="">
             <a:extLst xmlns:a="http://schemas.openxmlformats.org/drawingml/2006/main">
               <a:ext uri="{FF2B5EF4-FFF2-40B4-BE49-F238E27FC236}">
-                <a16:creationId xmlns:a16="http://schemas.microsoft.com/office/drawing/2014/main" id="{5AB95AD6-926A-4ED1-9564-139504CAD7A9}"/>
+                <a16:creationId xmlns:a16="http://schemas.microsoft.com/office/drawing/2014/main" id="{9A4BFAE8-35D7-4369-ADE8-14FF34DFEA9E}"/>
               </a:ext>
             </a:extLst>
           </p:cNvPr>
@@ -4741,7 +4872,7 @@
           <p:cNvPr id="30" name="">
             <a:extLst xmlns:a="http://schemas.openxmlformats.org/drawingml/2006/main">
               <a:ext uri="{FF2B5EF4-FFF2-40B4-BE49-F238E27FC236}">
-                <a16:creationId xmlns:a16="http://schemas.microsoft.com/office/drawing/2014/main" id="{04B7854A-8157-426B-A674-CF64A0281E95}"/>
+                <a16:creationId xmlns:a16="http://schemas.microsoft.com/office/drawing/2014/main" id="{30490EAA-8578-412E-B241-A43E3B35C597}"/>
               </a:ext>
             </a:extLst>
           </p:cNvPr>
@@ -4774,7 +4905,7 @@
           <p:cNvPr id="31" name="">
             <a:extLst xmlns:a="http://schemas.openxmlformats.org/drawingml/2006/main">
               <a:ext uri="{FF2B5EF4-FFF2-40B4-BE49-F238E27FC236}">
-                <a16:creationId xmlns:a16="http://schemas.microsoft.com/office/drawing/2014/main" id="{928C640F-03BE-4904-8789-6E4C0559B4FF}"/>
+                <a16:creationId xmlns:a16="http://schemas.microsoft.com/office/drawing/2014/main" id="{63C60ADF-FDF8-4CA9-88BE-A00CCCEB28C5}"/>
               </a:ext>
             </a:extLst>
           </p:cNvPr>
@@ -4838,7 +4969,7 @@
           <p:cNvPr id="32" name="">
             <a:extLst xmlns:a="http://schemas.openxmlformats.org/drawingml/2006/main">
               <a:ext uri="{FF2B5EF4-FFF2-40B4-BE49-F238E27FC236}">
-                <a16:creationId xmlns:a16="http://schemas.microsoft.com/office/drawing/2014/main" id="{E4974E6F-48B2-4B4C-9A3E-92B8FDCB4048}"/>
+                <a16:creationId xmlns:a16="http://schemas.microsoft.com/office/drawing/2014/main" id="{05DBDE9E-6A45-40DD-A887-B2F1A720AD20}"/>
               </a:ext>
             </a:extLst>
           </p:cNvPr>
@@ -4873,7 +5004,7 @@
           <p:cNvPr id="33" name="">
             <a:extLst xmlns:a="http://schemas.openxmlformats.org/drawingml/2006/main">
               <a:ext uri="{FF2B5EF4-FFF2-40B4-BE49-F238E27FC236}">
-                <a16:creationId xmlns:a16="http://schemas.microsoft.com/office/drawing/2014/main" id="{DFB02C74-0C59-468C-A2EF-0B3D914B515B}"/>
+                <a16:creationId xmlns:a16="http://schemas.microsoft.com/office/drawing/2014/main" id="{E95046B2-BB0F-4DDC-9B62-BF46D8134AA9}"/>
               </a:ext>
             </a:extLst>
           </p:cNvPr>
@@ -4908,7 +5039,7 @@
           <p:cNvPr id="34" name="">
             <a:extLst xmlns:a="http://schemas.openxmlformats.org/drawingml/2006/main">
               <a:ext uri="{FF2B5EF4-FFF2-40B4-BE49-F238E27FC236}">
-                <a16:creationId xmlns:a16="http://schemas.microsoft.com/office/drawing/2014/main" id="{A2C9DDB8-F7A7-46FB-B184-5B32B3EB9D6F}"/>
+                <a16:creationId xmlns:a16="http://schemas.microsoft.com/office/drawing/2014/main" id="{07145F9D-533B-4C2B-8177-B88AA813C98A}"/>
               </a:ext>
             </a:extLst>
           </p:cNvPr>
@@ -4943,7 +5074,7 @@
           <p:cNvPr id="35" name="">
             <a:extLst xmlns:a="http://schemas.openxmlformats.org/drawingml/2006/main">
               <a:ext uri="{FF2B5EF4-FFF2-40B4-BE49-F238E27FC236}">
-                <a16:creationId xmlns:a16="http://schemas.microsoft.com/office/drawing/2014/main" id="{272D2E3E-C87E-48F6-B0A4-5AE256FF3592}"/>
+                <a16:creationId xmlns:a16="http://schemas.microsoft.com/office/drawing/2014/main" id="{9C3DF08E-C9AE-464A-954F-A08BDA389EA6}"/>
               </a:ext>
             </a:extLst>
           </p:cNvPr>
@@ -4978,7 +5109,7 @@
           <p:cNvPr id="36" name="">
             <a:extLst xmlns:a="http://schemas.openxmlformats.org/drawingml/2006/main">
               <a:ext uri="{FF2B5EF4-FFF2-40B4-BE49-F238E27FC236}">
-                <a16:creationId xmlns:a16="http://schemas.microsoft.com/office/drawing/2014/main" id="{CD40CC2F-3DD8-45A0-BC9B-7377E7DFBFA3}"/>
+                <a16:creationId xmlns:a16="http://schemas.microsoft.com/office/drawing/2014/main" id="{9C15F591-3B6F-4934-B6B6-73CCA3DF5F11}"/>
               </a:ext>
             </a:extLst>
           </p:cNvPr>
@@ -5042,7 +5173,7 @@
           <p:cNvPr id="37" name="">
             <a:extLst xmlns:a="http://schemas.openxmlformats.org/drawingml/2006/main">
               <a:ext uri="{FF2B5EF4-FFF2-40B4-BE49-F238E27FC236}">
-                <a16:creationId xmlns:a16="http://schemas.microsoft.com/office/drawing/2014/main" id="{02711B69-E423-4EEE-9A4C-85BD4AED3CF7}"/>
+                <a16:creationId xmlns:a16="http://schemas.microsoft.com/office/drawing/2014/main" id="{86AD9ED2-B35D-40F8-A158-F50D664BD599}"/>
               </a:ext>
             </a:extLst>
           </p:cNvPr>
@@ -5104,7 +5235,7 @@
     </p:spTree>
     <p:extLst>
       <p:ext uri="{BB962C8B-B14F-4D97-AF65-F5344CB8AC3E}">
-        <p14:creationId xmlns:p14="http://schemas.microsoft.com/office/powerpoint/2010/main" val="23688355"/>
+        <p14:creationId xmlns:p14="http://schemas.microsoft.com/office/powerpoint/2010/main" val="1040388865"/>
       </p:ext>
     </p:extLst>
   </p:cSld>
@@ -5128,7 +5259,7 @@
           <p:cNvPr id="1" name="">
             <a:extLst xmlns:a="http://schemas.openxmlformats.org/drawingml/2006/main">
               <a:ext uri="{FF2B5EF4-FFF2-40B4-BE49-F238E27FC236}">
-                <a16:creationId xmlns:a16="http://schemas.microsoft.com/office/drawing/2014/main" id="{8363367F-E2D0-4DB4-87A1-1C20D7B57866}"/>
+                <a16:creationId xmlns:a16="http://schemas.microsoft.com/office/drawing/2014/main" id="{B77CB070-A7ED-4F8B-A3DB-1C656C931B99}"/>
               </a:ext>
             </a:extLst>
           </p:cNvPr>
@@ -5163,7 +5294,7 @@
           <p:cNvPr id="2" name="">
             <a:extLst xmlns:a="http://schemas.openxmlformats.org/drawingml/2006/main">
               <a:ext uri="{FF2B5EF4-FFF2-40B4-BE49-F238E27FC236}">
-                <a16:creationId xmlns:a16="http://schemas.microsoft.com/office/drawing/2014/main" id="{76DBF28C-0814-44B7-9B40-66E3BD1A632C}"/>
+                <a16:creationId xmlns:a16="http://schemas.microsoft.com/office/drawing/2014/main" id="{D6E50309-944D-44B0-BF86-688E0E16338E}"/>
               </a:ext>
             </a:extLst>
           </p:cNvPr>
@@ -5198,7 +5329,7 @@
           <p:cNvPr id="3" name="">
             <a:extLst xmlns:a="http://schemas.openxmlformats.org/drawingml/2006/main">
               <a:ext uri="{FF2B5EF4-FFF2-40B4-BE49-F238E27FC236}">
-                <a16:creationId xmlns:a16="http://schemas.microsoft.com/office/drawing/2014/main" id="{70F0C886-E5B7-41C9-9EF4-A4763EA0D3CC}"/>
+                <a16:creationId xmlns:a16="http://schemas.microsoft.com/office/drawing/2014/main" id="{E9BFBE6D-E0F8-4379-BCAE-9E8E5FAD3893}"/>
               </a:ext>
             </a:extLst>
           </p:cNvPr>
@@ -5233,7 +5364,7 @@
           <p:cNvPr id="4" name="">
             <a:extLst xmlns:a="http://schemas.openxmlformats.org/drawingml/2006/main">
               <a:ext uri="{FF2B5EF4-FFF2-40B4-BE49-F238E27FC236}">
-                <a16:creationId xmlns:a16="http://schemas.microsoft.com/office/drawing/2014/main" id="{134EB19F-1BF4-4979-9031-E0AEF24AED71}"/>
+                <a16:creationId xmlns:a16="http://schemas.microsoft.com/office/drawing/2014/main" id="{F5C6C4D6-A98C-4ECC-A3A6-E43E07685C15}"/>
               </a:ext>
             </a:extLst>
           </p:cNvPr>
@@ -5268,7 +5399,7 @@
           <p:cNvPr id="5" name="">
             <a:extLst xmlns:a="http://schemas.openxmlformats.org/drawingml/2006/main">
               <a:ext uri="{FF2B5EF4-FFF2-40B4-BE49-F238E27FC236}">
-                <a16:creationId xmlns:a16="http://schemas.microsoft.com/office/drawing/2014/main" id="{04F61B00-6CC1-4AE2-B4E4-F701AB8AC0BA}"/>
+                <a16:creationId xmlns:a16="http://schemas.microsoft.com/office/drawing/2014/main" id="{6201CAC7-5B5F-42E7-81CA-22328CD169D6}"/>
               </a:ext>
             </a:extLst>
           </p:cNvPr>
@@ -5303,7 +5434,7 @@
           <p:cNvPr id="6" name="">
             <a:extLst xmlns:a="http://schemas.openxmlformats.org/drawingml/2006/main">
               <a:ext uri="{FF2B5EF4-FFF2-40B4-BE49-F238E27FC236}">
-                <a16:creationId xmlns:a16="http://schemas.microsoft.com/office/drawing/2014/main" id="{70DD26BB-FC23-443E-99A4-78A88BC69C8A}"/>
+                <a16:creationId xmlns:a16="http://schemas.microsoft.com/office/drawing/2014/main" id="{FB7E1CCA-93F4-4A2F-B7E3-7988F2668BD3}"/>
               </a:ext>
             </a:extLst>
           </p:cNvPr>
@@ -5367,7 +5498,7 @@
           <p:cNvPr id="7" name="">
             <a:extLst xmlns:a="http://schemas.openxmlformats.org/drawingml/2006/main">
               <a:ext uri="{FF2B5EF4-FFF2-40B4-BE49-F238E27FC236}">
-                <a16:creationId xmlns:a16="http://schemas.microsoft.com/office/drawing/2014/main" id="{8A02E11B-B0D0-4DE4-9032-E132F04EEEBC}"/>
+                <a16:creationId xmlns:a16="http://schemas.microsoft.com/office/drawing/2014/main" id="{08DF09FF-19BD-49E0-95AB-E84C9074EE19}"/>
               </a:ext>
             </a:extLst>
           </p:cNvPr>
@@ -5431,7 +5562,7 @@
           <p:cNvPr id="8" name="">
             <a:extLst xmlns:a="http://schemas.openxmlformats.org/drawingml/2006/main">
               <a:ext uri="{FF2B5EF4-FFF2-40B4-BE49-F238E27FC236}">
-                <a16:creationId xmlns:a16="http://schemas.microsoft.com/office/drawing/2014/main" id="{08E845A2-ED0B-4D82-B076-7906246EFE76}"/>
+                <a16:creationId xmlns:a16="http://schemas.microsoft.com/office/drawing/2014/main" id="{656009F7-F711-4876-BBAB-320654141C13}"/>
               </a:ext>
             </a:extLst>
           </p:cNvPr>
@@ -5495,7 +5626,7 @@
           <p:cNvPr id="9" name="">
             <a:extLst xmlns:a="http://schemas.openxmlformats.org/drawingml/2006/main">
               <a:ext uri="{FF2B5EF4-FFF2-40B4-BE49-F238E27FC236}">
-                <a16:creationId xmlns:a16="http://schemas.microsoft.com/office/drawing/2014/main" id="{DE4DF22A-3F94-4CCB-A55C-EEB9B4126FF8}"/>
+                <a16:creationId xmlns:a16="http://schemas.microsoft.com/office/drawing/2014/main" id="{A402364F-DC5A-4FA2-860E-223B01EF90BD}"/>
               </a:ext>
             </a:extLst>
           </p:cNvPr>
@@ -5528,7 +5659,7 @@
           <p:cNvPr id="10" name="">
             <a:extLst xmlns:a="http://schemas.openxmlformats.org/drawingml/2006/main">
               <a:ext uri="{FF2B5EF4-FFF2-40B4-BE49-F238E27FC236}">
-                <a16:creationId xmlns:a16="http://schemas.microsoft.com/office/drawing/2014/main" id="{4ECFDFF8-F7C6-4813-8B46-7E41ABAEB4C6}"/>
+                <a16:creationId xmlns:a16="http://schemas.microsoft.com/office/drawing/2014/main" id="{AEA67B8F-5EF0-4002-9F40-187C6AC02B64}"/>
               </a:ext>
             </a:extLst>
           </p:cNvPr>
@@ -5563,7 +5694,7 @@
           <p:cNvPr id="11" name="">
             <a:extLst xmlns:a="http://schemas.openxmlformats.org/drawingml/2006/main">
               <a:ext uri="{FF2B5EF4-FFF2-40B4-BE49-F238E27FC236}">
-                <a16:creationId xmlns:a16="http://schemas.microsoft.com/office/drawing/2014/main" id="{B3A6A849-9CC8-4AAA-B8DE-99A047CEC2EB}"/>
+                <a16:creationId xmlns:a16="http://schemas.microsoft.com/office/drawing/2014/main" id="{A76C805B-1A9D-438D-9CD9-B929135D4D18}"/>
               </a:ext>
             </a:extLst>
           </p:cNvPr>
@@ -5627,7 +5758,7 @@
           <p:cNvPr id="12" name="">
             <a:extLst xmlns:a="http://schemas.openxmlformats.org/drawingml/2006/main">
               <a:ext uri="{FF2B5EF4-FFF2-40B4-BE49-F238E27FC236}">
-                <a16:creationId xmlns:a16="http://schemas.microsoft.com/office/drawing/2014/main" id="{95777706-A834-4AA3-9D2B-F34F81270273}"/>
+                <a16:creationId xmlns:a16="http://schemas.microsoft.com/office/drawing/2014/main" id="{1378A00B-0738-4962-A135-80262FEF01A3}"/>
               </a:ext>
             </a:extLst>
           </p:cNvPr>
@@ -5691,7 +5822,7 @@
           <p:cNvPr id="13" name="">
             <a:extLst xmlns:a="http://schemas.openxmlformats.org/drawingml/2006/main">
               <a:ext uri="{FF2B5EF4-FFF2-40B4-BE49-F238E27FC236}">
-                <a16:creationId xmlns:a16="http://schemas.microsoft.com/office/drawing/2014/main" id="{0EC3A027-E1A6-4304-BE66-6C5AE4134DFF}"/>
+                <a16:creationId xmlns:a16="http://schemas.microsoft.com/office/drawing/2014/main" id="{B47C1D73-DB3C-4541-9713-72E1F38F5D35}"/>
               </a:ext>
             </a:extLst>
           </p:cNvPr>
@@ -5755,7 +5886,7 @@
           <p:cNvPr id="14" name="">
             <a:extLst xmlns:a="http://schemas.openxmlformats.org/drawingml/2006/main">
               <a:ext uri="{FF2B5EF4-FFF2-40B4-BE49-F238E27FC236}">
-                <a16:creationId xmlns:a16="http://schemas.microsoft.com/office/drawing/2014/main" id="{56250ECB-2056-4CC2-AE12-B847639B5E84}"/>
+                <a16:creationId xmlns:a16="http://schemas.microsoft.com/office/drawing/2014/main" id="{CC472381-5C2F-49BA-A165-F63AF4ADBB47}"/>
               </a:ext>
             </a:extLst>
           </p:cNvPr>
@@ -5788,7 +5919,7 @@
           <p:cNvPr id="15" name="">
             <a:extLst xmlns:a="http://schemas.openxmlformats.org/drawingml/2006/main">
               <a:ext uri="{FF2B5EF4-FFF2-40B4-BE49-F238E27FC236}">
-                <a16:creationId xmlns:a16="http://schemas.microsoft.com/office/drawing/2014/main" id="{721010F2-E477-4F77-A844-760FC6CE96CA}"/>
+                <a16:creationId xmlns:a16="http://schemas.microsoft.com/office/drawing/2014/main" id="{4B599637-6101-45B0-9F79-13A43EA1ADA5}"/>
               </a:ext>
             </a:extLst>
           </p:cNvPr>
@@ -5823,7 +5954,7 @@
           <p:cNvPr id="16" name="">
             <a:extLst xmlns:a="http://schemas.openxmlformats.org/drawingml/2006/main">
               <a:ext uri="{FF2B5EF4-FFF2-40B4-BE49-F238E27FC236}">
-                <a16:creationId xmlns:a16="http://schemas.microsoft.com/office/drawing/2014/main" id="{64152769-AFEF-46FD-A4F5-52E047040772}"/>
+                <a16:creationId xmlns:a16="http://schemas.microsoft.com/office/drawing/2014/main" id="{533E8F01-32CF-4A6C-98AB-E334F360FB1B}"/>
               </a:ext>
             </a:extLst>
           </p:cNvPr>
@@ -5887,7 +6018,7 @@
           <p:cNvPr id="17" name="">
             <a:extLst xmlns:a="http://schemas.openxmlformats.org/drawingml/2006/main">
               <a:ext uri="{FF2B5EF4-FFF2-40B4-BE49-F238E27FC236}">
-                <a16:creationId xmlns:a16="http://schemas.microsoft.com/office/drawing/2014/main" id="{D6A9DDFD-7258-4E54-AE67-84F9851771DE}"/>
+                <a16:creationId xmlns:a16="http://schemas.microsoft.com/office/drawing/2014/main" id="{5E9B0D9A-4E66-40FB-84DE-E3D62B2A5BC1}"/>
               </a:ext>
             </a:extLst>
           </p:cNvPr>
@@ -5951,7 +6082,7 @@
           <p:cNvPr id="18" name="">
             <a:extLst xmlns:a="http://schemas.openxmlformats.org/drawingml/2006/main">
               <a:ext uri="{FF2B5EF4-FFF2-40B4-BE49-F238E27FC236}">
-                <a16:creationId xmlns:a16="http://schemas.microsoft.com/office/drawing/2014/main" id="{8CFCB0F8-9EB8-4EC1-9799-1F1C33622F13}"/>
+                <a16:creationId xmlns:a16="http://schemas.microsoft.com/office/drawing/2014/main" id="{58BF3AF2-616D-40D4-BF86-96C2D61945A6}"/>
               </a:ext>
             </a:extLst>
           </p:cNvPr>
@@ -6015,7 +6146,7 @@
           <p:cNvPr id="19" name="">
             <a:extLst xmlns:a="http://schemas.openxmlformats.org/drawingml/2006/main">
               <a:ext uri="{FF2B5EF4-FFF2-40B4-BE49-F238E27FC236}">
-                <a16:creationId xmlns:a16="http://schemas.microsoft.com/office/drawing/2014/main" id="{2F250FAA-9D04-44B6-A08A-4B7151B21D20}"/>
+                <a16:creationId xmlns:a16="http://schemas.microsoft.com/office/drawing/2014/main" id="{70EEF971-DB64-4922-BF73-03DF0531CA0A}"/>
               </a:ext>
             </a:extLst>
           </p:cNvPr>
@@ -6048,7 +6179,7 @@
           <p:cNvPr id="20" name="">
             <a:extLst xmlns:a="http://schemas.openxmlformats.org/drawingml/2006/main">
               <a:ext uri="{FF2B5EF4-FFF2-40B4-BE49-F238E27FC236}">
-                <a16:creationId xmlns:a16="http://schemas.microsoft.com/office/drawing/2014/main" id="{8CD9A1D9-908C-44E9-BCE2-06AFB9031FB4}"/>
+                <a16:creationId xmlns:a16="http://schemas.microsoft.com/office/drawing/2014/main" id="{62825F4E-E6ED-4364-8890-999E68B00251}"/>
               </a:ext>
             </a:extLst>
           </p:cNvPr>
@@ -6083,7 +6214,7 @@
           <p:cNvPr id="21" name="">
             <a:extLst xmlns:a="http://schemas.openxmlformats.org/drawingml/2006/main">
               <a:ext uri="{FF2B5EF4-FFF2-40B4-BE49-F238E27FC236}">
-                <a16:creationId xmlns:a16="http://schemas.microsoft.com/office/drawing/2014/main" id="{AF79DFE4-3B03-42A2-81B9-02D725EAC7A4}"/>
+                <a16:creationId xmlns:a16="http://schemas.microsoft.com/office/drawing/2014/main" id="{268FE363-6849-4882-99E5-2D5FA54812A0}"/>
               </a:ext>
             </a:extLst>
           </p:cNvPr>
@@ -6147,7 +6278,7 @@
           <p:cNvPr id="22" name="">
             <a:extLst xmlns:a="http://schemas.openxmlformats.org/drawingml/2006/main">
               <a:ext uri="{FF2B5EF4-FFF2-40B4-BE49-F238E27FC236}">
-                <a16:creationId xmlns:a16="http://schemas.microsoft.com/office/drawing/2014/main" id="{D8968BD6-5ADC-4EA4-B5BD-34E6BDCBFE9D}"/>
+                <a16:creationId xmlns:a16="http://schemas.microsoft.com/office/drawing/2014/main" id="{B16776E8-D9DD-41C3-A183-1B9B341D63D2}"/>
               </a:ext>
             </a:extLst>
           </p:cNvPr>
@@ -6211,7 +6342,7 @@
           <p:cNvPr id="23" name="">
             <a:extLst xmlns:a="http://schemas.openxmlformats.org/drawingml/2006/main">
               <a:ext uri="{FF2B5EF4-FFF2-40B4-BE49-F238E27FC236}">
-                <a16:creationId xmlns:a16="http://schemas.microsoft.com/office/drawing/2014/main" id="{66BC3618-E74E-46C6-97B9-388657709A9B}"/>
+                <a16:creationId xmlns:a16="http://schemas.microsoft.com/office/drawing/2014/main" id="{A0CB077D-8170-476D-B586-C61234A78274}"/>
               </a:ext>
             </a:extLst>
           </p:cNvPr>
@@ -6275,7 +6406,7 @@
           <p:cNvPr id="24" name="">
             <a:extLst xmlns:a="http://schemas.openxmlformats.org/drawingml/2006/main">
               <a:ext uri="{FF2B5EF4-FFF2-40B4-BE49-F238E27FC236}">
-                <a16:creationId xmlns:a16="http://schemas.microsoft.com/office/drawing/2014/main" id="{8A955A12-489E-4451-AA2C-742BD110946B}"/>
+                <a16:creationId xmlns:a16="http://schemas.microsoft.com/office/drawing/2014/main" id="{675261A4-86A0-4A52-A0C7-007480FDA0AF}"/>
               </a:ext>
             </a:extLst>
           </p:cNvPr>
@@ -6308,7 +6439,7 @@
           <p:cNvPr id="25" name="">
             <a:extLst xmlns:a="http://schemas.openxmlformats.org/drawingml/2006/main">
               <a:ext uri="{FF2B5EF4-FFF2-40B4-BE49-F238E27FC236}">
-                <a16:creationId xmlns:a16="http://schemas.microsoft.com/office/drawing/2014/main" id="{68B2CB8D-EC27-4E24-88EA-178EBA3D74FC}"/>
+                <a16:creationId xmlns:a16="http://schemas.microsoft.com/office/drawing/2014/main" id="{888A7279-8D51-4AB4-8B46-ED09A7869C40}"/>
               </a:ext>
             </a:extLst>
           </p:cNvPr>
@@ -6343,7 +6474,7 @@
           <p:cNvPr id="26" name="">
             <a:extLst xmlns:a="http://schemas.openxmlformats.org/drawingml/2006/main">
               <a:ext uri="{FF2B5EF4-FFF2-40B4-BE49-F238E27FC236}">
-                <a16:creationId xmlns:a16="http://schemas.microsoft.com/office/drawing/2014/main" id="{878AB78D-4E95-464B-992E-501FBC8739DF}"/>
+                <a16:creationId xmlns:a16="http://schemas.microsoft.com/office/drawing/2014/main" id="{114784D0-FE95-4D10-B99A-3ED261E7614E}"/>
               </a:ext>
             </a:extLst>
           </p:cNvPr>
@@ -6407,7 +6538,7 @@
           <p:cNvPr id="27" name="">
             <a:extLst xmlns:a="http://schemas.openxmlformats.org/drawingml/2006/main">
               <a:ext uri="{FF2B5EF4-FFF2-40B4-BE49-F238E27FC236}">
-                <a16:creationId xmlns:a16="http://schemas.microsoft.com/office/drawing/2014/main" id="{17A35461-C697-4AB2-821D-D759E13B0DD9}"/>
+                <a16:creationId xmlns:a16="http://schemas.microsoft.com/office/drawing/2014/main" id="{508B36BE-91E6-4604-B757-6BB4A3AABBC8}"/>
               </a:ext>
             </a:extLst>
           </p:cNvPr>
@@ -6471,7 +6602,7 @@
           <p:cNvPr id="28" name="">
             <a:extLst xmlns:a="http://schemas.openxmlformats.org/drawingml/2006/main">
               <a:ext uri="{FF2B5EF4-FFF2-40B4-BE49-F238E27FC236}">
-                <a16:creationId xmlns:a16="http://schemas.microsoft.com/office/drawing/2014/main" id="{51C9F6BB-42F0-41DB-81B8-7436EA190C43}"/>
+                <a16:creationId xmlns:a16="http://schemas.microsoft.com/office/drawing/2014/main" id="{E7B1994C-BFF2-4984-95A9-88830A1AC6AD}"/>
               </a:ext>
             </a:extLst>
           </p:cNvPr>
@@ -6535,7 +6666,7 @@
           <p:cNvPr id="29" name="">
             <a:extLst xmlns:a="http://schemas.openxmlformats.org/drawingml/2006/main">
               <a:ext uri="{FF2B5EF4-FFF2-40B4-BE49-F238E27FC236}">
-                <a16:creationId xmlns:a16="http://schemas.microsoft.com/office/drawing/2014/main" id="{BE1F4DC8-469C-407E-B4FD-0DB51698329A}"/>
+                <a16:creationId xmlns:a16="http://schemas.microsoft.com/office/drawing/2014/main" id="{3D5B7935-218B-4ADB-8076-AED823B16CE2}"/>
               </a:ext>
             </a:extLst>
           </p:cNvPr>
@@ -6568,7 +6699,7 @@
           <p:cNvPr id="30" name="">
             <a:extLst xmlns:a="http://schemas.openxmlformats.org/drawingml/2006/main">
               <a:ext uri="{FF2B5EF4-FFF2-40B4-BE49-F238E27FC236}">
-                <a16:creationId xmlns:a16="http://schemas.microsoft.com/office/drawing/2014/main" id="{D598BDC3-29DE-40B0-AEE4-9FF232E6B9FC}"/>
+                <a16:creationId xmlns:a16="http://schemas.microsoft.com/office/drawing/2014/main" id="{CAC321B8-5FE5-4ED6-9BBB-647D6027C962}"/>
               </a:ext>
             </a:extLst>
           </p:cNvPr>
@@ -6603,7 +6734,7 @@
           <p:cNvPr id="31" name="">
             <a:extLst xmlns:a="http://schemas.openxmlformats.org/drawingml/2006/main">
               <a:ext uri="{FF2B5EF4-FFF2-40B4-BE49-F238E27FC236}">
-                <a16:creationId xmlns:a16="http://schemas.microsoft.com/office/drawing/2014/main" id="{0F59C258-A516-4271-8ED1-407E937C72F5}"/>
+                <a16:creationId xmlns:a16="http://schemas.microsoft.com/office/drawing/2014/main" id="{EDCB916D-B24F-4C4E-AA21-7501579CB281}"/>
               </a:ext>
             </a:extLst>
           </p:cNvPr>
@@ -6638,7 +6769,7 @@
           <p:cNvPr id="32" name="">
             <a:extLst xmlns:a="http://schemas.openxmlformats.org/drawingml/2006/main">
               <a:ext uri="{FF2B5EF4-FFF2-40B4-BE49-F238E27FC236}">
-                <a16:creationId xmlns:a16="http://schemas.microsoft.com/office/drawing/2014/main" id="{8C38EA87-4B7F-4131-8B88-C4093166C81D}"/>
+                <a16:creationId xmlns:a16="http://schemas.microsoft.com/office/drawing/2014/main" id="{86785D96-83E7-42E2-B1D1-D52953B5B6CB}"/>
               </a:ext>
             </a:extLst>
           </p:cNvPr>
@@ -6673,7 +6804,7 @@
           <p:cNvPr id="33" name="">
             <a:extLst xmlns:a="http://schemas.openxmlformats.org/drawingml/2006/main">
               <a:ext uri="{FF2B5EF4-FFF2-40B4-BE49-F238E27FC236}">
-                <a16:creationId xmlns:a16="http://schemas.microsoft.com/office/drawing/2014/main" id="{5158CA7D-10D4-4B38-8675-3DBE06FA3E6D}"/>
+                <a16:creationId xmlns:a16="http://schemas.microsoft.com/office/drawing/2014/main" id="{7298B86C-2F3B-4D42-B447-91AC699D257F}"/>
               </a:ext>
             </a:extLst>
           </p:cNvPr>
@@ -6708,7 +6839,7 @@
           <p:cNvPr id="34" name="">
             <a:extLst xmlns:a="http://schemas.openxmlformats.org/drawingml/2006/main">
               <a:ext uri="{FF2B5EF4-FFF2-40B4-BE49-F238E27FC236}">
-                <a16:creationId xmlns:a16="http://schemas.microsoft.com/office/drawing/2014/main" id="{8B449EDF-E07B-4CC2-A5FF-95C5FDB3660F}"/>
+                <a16:creationId xmlns:a16="http://schemas.microsoft.com/office/drawing/2014/main" id="{DAD11724-64B4-4E49-88AE-095E673E369E}"/>
               </a:ext>
             </a:extLst>
           </p:cNvPr>
@@ -6772,7 +6903,7 @@
           <p:cNvPr id="35" name="">
             <a:extLst xmlns:a="http://schemas.openxmlformats.org/drawingml/2006/main">
               <a:ext uri="{FF2B5EF4-FFF2-40B4-BE49-F238E27FC236}">
-                <a16:creationId xmlns:a16="http://schemas.microsoft.com/office/drawing/2014/main" id="{6133D9C6-D696-412E-B41E-49511858CA12}"/>
+                <a16:creationId xmlns:a16="http://schemas.microsoft.com/office/drawing/2014/main" id="{D1108F84-054D-4299-B5FA-98A12A98EC97}"/>
               </a:ext>
             </a:extLst>
           </p:cNvPr>
@@ -6836,7 +6967,7 @@
           <p:cNvPr id="36" name="">
             <a:extLst xmlns:a="http://schemas.openxmlformats.org/drawingml/2006/main">
               <a:ext uri="{FF2B5EF4-FFF2-40B4-BE49-F238E27FC236}">
-                <a16:creationId xmlns:a16="http://schemas.microsoft.com/office/drawing/2014/main" id="{73119BC0-9DCD-4062-BD7A-5DB8AF209B39}"/>
+                <a16:creationId xmlns:a16="http://schemas.microsoft.com/office/drawing/2014/main" id="{E95A4701-5C91-48D1-AE13-4B5E5DB6FD3A}"/>
               </a:ext>
             </a:extLst>
           </p:cNvPr>
@@ -6871,7 +7002,7 @@
           <p:cNvPr id="37" name="">
             <a:extLst xmlns:a="http://schemas.openxmlformats.org/drawingml/2006/main">
               <a:ext uri="{FF2B5EF4-FFF2-40B4-BE49-F238E27FC236}">
-                <a16:creationId xmlns:a16="http://schemas.microsoft.com/office/drawing/2014/main" id="{1A946D46-0CB0-48C7-99A9-A3654EDE0D6D}"/>
+                <a16:creationId xmlns:a16="http://schemas.microsoft.com/office/drawing/2014/main" id="{337DEFC4-0052-4599-AF94-695A2D5024E4}"/>
               </a:ext>
             </a:extLst>
           </p:cNvPr>
@@ -6935,7 +7066,7 @@
           <p:cNvPr id="38" name="">
             <a:extLst xmlns:a="http://schemas.openxmlformats.org/drawingml/2006/main">
               <a:ext uri="{FF2B5EF4-FFF2-40B4-BE49-F238E27FC236}">
-                <a16:creationId xmlns:a16="http://schemas.microsoft.com/office/drawing/2014/main" id="{B364C1BA-83B6-437F-AA39-D55A3826EE68}"/>
+                <a16:creationId xmlns:a16="http://schemas.microsoft.com/office/drawing/2014/main" id="{70E070B8-D037-4EAA-A35B-56EF54B6C556}"/>
               </a:ext>
             </a:extLst>
           </p:cNvPr>
@@ -6970,7 +7101,7 @@
           <p:cNvPr id="39" name="">
             <a:extLst xmlns:a="http://schemas.openxmlformats.org/drawingml/2006/main">
               <a:ext uri="{FF2B5EF4-FFF2-40B4-BE49-F238E27FC236}">
-                <a16:creationId xmlns:a16="http://schemas.microsoft.com/office/drawing/2014/main" id="{2DAC0BA3-C868-4DCB-9073-DAE250DE5BD8}"/>
+                <a16:creationId xmlns:a16="http://schemas.microsoft.com/office/drawing/2014/main" id="{971AEFDE-0CB6-42BC-8D4C-9DDB94BA6ED5}"/>
               </a:ext>
             </a:extLst>
           </p:cNvPr>
@@ -7034,7 +7165,7 @@
           <p:cNvPr id="40" name="">
             <a:extLst xmlns:a="http://schemas.openxmlformats.org/drawingml/2006/main">
               <a:ext uri="{FF2B5EF4-FFF2-40B4-BE49-F238E27FC236}">
-                <a16:creationId xmlns:a16="http://schemas.microsoft.com/office/drawing/2014/main" id="{188F7900-D6E5-4969-A98A-5968FD0F9BEE}"/>
+                <a16:creationId xmlns:a16="http://schemas.microsoft.com/office/drawing/2014/main" id="{383A5995-89B1-47D8-8607-3B51710BF252}"/>
               </a:ext>
             </a:extLst>
           </p:cNvPr>
@@ -7069,7 +7200,7 @@
           <p:cNvPr id="41" name="">
             <a:extLst xmlns:a="http://schemas.openxmlformats.org/drawingml/2006/main">
               <a:ext uri="{FF2B5EF4-FFF2-40B4-BE49-F238E27FC236}">
-                <a16:creationId xmlns:a16="http://schemas.microsoft.com/office/drawing/2014/main" id="{649911F6-287F-4246-9B60-9C3055C9291A}"/>
+                <a16:creationId xmlns:a16="http://schemas.microsoft.com/office/drawing/2014/main" id="{E3A7C58B-E802-4F1D-A2D7-0770D2C4E329}"/>
               </a:ext>
             </a:extLst>
           </p:cNvPr>
@@ -7133,7 +7264,7 @@
           <p:cNvPr id="42" name="">
             <a:extLst xmlns:a="http://schemas.openxmlformats.org/drawingml/2006/main">
               <a:ext uri="{FF2B5EF4-FFF2-40B4-BE49-F238E27FC236}">
-                <a16:creationId xmlns:a16="http://schemas.microsoft.com/office/drawing/2014/main" id="{E8550BC8-EC66-495E-96B6-ACB7E233B075}"/>
+                <a16:creationId xmlns:a16="http://schemas.microsoft.com/office/drawing/2014/main" id="{1EA90624-7989-4D1A-8F64-33486650332A}"/>
               </a:ext>
             </a:extLst>
           </p:cNvPr>
@@ -7168,7 +7299,7 @@
           <p:cNvPr id="43" name="">
             <a:extLst xmlns:a="http://schemas.openxmlformats.org/drawingml/2006/main">
               <a:ext uri="{FF2B5EF4-FFF2-40B4-BE49-F238E27FC236}">
-                <a16:creationId xmlns:a16="http://schemas.microsoft.com/office/drawing/2014/main" id="{FABE4A7A-42B5-4A68-AF4E-9CBBC0D8DE5E}"/>
+                <a16:creationId xmlns:a16="http://schemas.microsoft.com/office/drawing/2014/main" id="{318BD43E-E74A-4628-AFEF-D23A5045A8DB}"/>
               </a:ext>
             </a:extLst>
           </p:cNvPr>
@@ -7232,7 +7363,7 @@
           <p:cNvPr id="44" name="">
             <a:extLst xmlns:a="http://schemas.openxmlformats.org/drawingml/2006/main">
               <a:ext uri="{FF2B5EF4-FFF2-40B4-BE49-F238E27FC236}">
-                <a16:creationId xmlns:a16="http://schemas.microsoft.com/office/drawing/2014/main" id="{AFEB2342-7827-499E-9430-7944462744D1}"/>
+                <a16:creationId xmlns:a16="http://schemas.microsoft.com/office/drawing/2014/main" id="{D3E29A59-7C33-43A4-A77D-51D611983D11}"/>
               </a:ext>
             </a:extLst>
           </p:cNvPr>
@@ -7267,7 +7398,7 @@
           <p:cNvPr id="45" name="">
             <a:extLst xmlns:a="http://schemas.openxmlformats.org/drawingml/2006/main">
               <a:ext uri="{FF2B5EF4-FFF2-40B4-BE49-F238E27FC236}">
-                <a16:creationId xmlns:a16="http://schemas.microsoft.com/office/drawing/2014/main" id="{A5397580-8196-4B86-B7A9-CE5B3414B1D0}"/>
+                <a16:creationId xmlns:a16="http://schemas.microsoft.com/office/drawing/2014/main" id="{515E156C-9294-49FD-923B-5CE73A3AAC05}"/>
               </a:ext>
             </a:extLst>
           </p:cNvPr>
@@ -7331,7 +7462,7 @@
           <p:cNvPr id="46" name="">
             <a:extLst xmlns:a="http://schemas.openxmlformats.org/drawingml/2006/main">
               <a:ext uri="{FF2B5EF4-FFF2-40B4-BE49-F238E27FC236}">
-                <a16:creationId xmlns:a16="http://schemas.microsoft.com/office/drawing/2014/main" id="{C310318E-07AD-485B-B56A-5EAA0823D384}"/>
+                <a16:creationId xmlns:a16="http://schemas.microsoft.com/office/drawing/2014/main" id="{859E6FD4-942F-4A89-94D8-E6850E6ED373}"/>
               </a:ext>
             </a:extLst>
           </p:cNvPr>
@@ -7364,7 +7495,7 @@
           <p:cNvPr id="47" name="">
             <a:extLst xmlns:a="http://schemas.openxmlformats.org/drawingml/2006/main">
               <a:ext uri="{FF2B5EF4-FFF2-40B4-BE49-F238E27FC236}">
-                <a16:creationId xmlns:a16="http://schemas.microsoft.com/office/drawing/2014/main" id="{9F4B70DB-FADE-4C54-91A4-58245E6E49B5}"/>
+                <a16:creationId xmlns:a16="http://schemas.microsoft.com/office/drawing/2014/main" id="{F75E4299-3B0A-42DE-AD52-0E03B559AA58}"/>
               </a:ext>
             </a:extLst>
           </p:cNvPr>
@@ -7428,7 +7559,7 @@
           <p:cNvPr id="48" name="">
             <a:extLst xmlns:a="http://schemas.openxmlformats.org/drawingml/2006/main">
               <a:ext uri="{FF2B5EF4-FFF2-40B4-BE49-F238E27FC236}">
-                <a16:creationId xmlns:a16="http://schemas.microsoft.com/office/drawing/2014/main" id="{6195426A-793B-4DCD-9F5A-7A5233DF6BB7}"/>
+                <a16:creationId xmlns:a16="http://schemas.microsoft.com/office/drawing/2014/main" id="{9425DF8C-3804-4032-B3A2-66C9FD660DA5}"/>
               </a:ext>
             </a:extLst>
           </p:cNvPr>
@@ -7463,7 +7594,7 @@
           <p:cNvPr id="49" name="">
             <a:extLst xmlns:a="http://schemas.openxmlformats.org/drawingml/2006/main">
               <a:ext uri="{FF2B5EF4-FFF2-40B4-BE49-F238E27FC236}">
-                <a16:creationId xmlns:a16="http://schemas.microsoft.com/office/drawing/2014/main" id="{3DC1FE6A-0B3A-4C3F-807A-0A5FADEDD66E}"/>
+                <a16:creationId xmlns:a16="http://schemas.microsoft.com/office/drawing/2014/main" id="{6BDA1E07-2CB9-4021-BD2F-8E95303731DA}"/>
               </a:ext>
             </a:extLst>
           </p:cNvPr>
@@ -7498,7 +7629,7 @@
           <p:cNvPr id="50" name="">
             <a:extLst xmlns:a="http://schemas.openxmlformats.org/drawingml/2006/main">
               <a:ext uri="{FF2B5EF4-FFF2-40B4-BE49-F238E27FC236}">
-                <a16:creationId xmlns:a16="http://schemas.microsoft.com/office/drawing/2014/main" id="{D913D75B-DD50-49CD-BB4A-1EAED687A03D}"/>
+                <a16:creationId xmlns:a16="http://schemas.microsoft.com/office/drawing/2014/main" id="{0D69BEC9-838D-49AE-8D87-9C9FC88A04E9}"/>
               </a:ext>
             </a:extLst>
           </p:cNvPr>
@@ -7533,7 +7664,7 @@
           <p:cNvPr id="51" name="">
             <a:extLst xmlns:a="http://schemas.openxmlformats.org/drawingml/2006/main">
               <a:ext uri="{FF2B5EF4-FFF2-40B4-BE49-F238E27FC236}">
-                <a16:creationId xmlns:a16="http://schemas.microsoft.com/office/drawing/2014/main" id="{6FECF245-F3B9-46CA-9A21-99E4E82730A6}"/>
+                <a16:creationId xmlns:a16="http://schemas.microsoft.com/office/drawing/2014/main" id="{45BF3825-5C09-497E-97E7-ED24902C8A5B}"/>
               </a:ext>
             </a:extLst>
           </p:cNvPr>
@@ -7568,7 +7699,7 @@
           <p:cNvPr id="52" name="">
             <a:extLst xmlns:a="http://schemas.openxmlformats.org/drawingml/2006/main">
               <a:ext uri="{FF2B5EF4-FFF2-40B4-BE49-F238E27FC236}">
-                <a16:creationId xmlns:a16="http://schemas.microsoft.com/office/drawing/2014/main" id="{8AD9D3D7-9FE0-4566-9F10-0503B63364BD}"/>
+                <a16:creationId xmlns:a16="http://schemas.microsoft.com/office/drawing/2014/main" id="{D63C0E88-A79F-4361-BAC1-86FC35250600}"/>
               </a:ext>
             </a:extLst>
           </p:cNvPr>
@@ -7632,7 +7763,7 @@
           <p:cNvPr id="53" name="">
             <a:extLst xmlns:a="http://schemas.openxmlformats.org/drawingml/2006/main">
               <a:ext uri="{FF2B5EF4-FFF2-40B4-BE49-F238E27FC236}">
-                <a16:creationId xmlns:a16="http://schemas.microsoft.com/office/drawing/2014/main" id="{5437E472-9877-4DE7-9CAD-1FD4D518383D}"/>
+                <a16:creationId xmlns:a16="http://schemas.microsoft.com/office/drawing/2014/main" id="{F6C4AD46-9D40-4014-BFE1-F3D501A7C0D4}"/>
               </a:ext>
             </a:extLst>
           </p:cNvPr>
@@ -7694,7 +7825,7 @@
     </p:spTree>
     <p:extLst>
       <p:ext uri="{BB962C8B-B14F-4D97-AF65-F5344CB8AC3E}">
-        <p14:creationId xmlns:p14="http://schemas.microsoft.com/office/powerpoint/2010/main" val="400827474"/>
+        <p14:creationId xmlns:p14="http://schemas.microsoft.com/office/powerpoint/2010/main" val="2098955112"/>
       </p:ext>
     </p:extLst>
   </p:cSld>
@@ -7718,7 +7849,7 @@
           <p:cNvPr id="1" name="">
             <a:extLst xmlns:a="http://schemas.openxmlformats.org/drawingml/2006/main">
               <a:ext uri="{FF2B5EF4-FFF2-40B4-BE49-F238E27FC236}">
-                <a16:creationId xmlns:a16="http://schemas.microsoft.com/office/drawing/2014/main" id="{4A122C3D-33B9-4289-9D02-EDCD1AC99B11}"/>
+                <a16:creationId xmlns:a16="http://schemas.microsoft.com/office/drawing/2014/main" id="{E1ED736B-4990-467F-BA79-927B3807768F}"/>
               </a:ext>
             </a:extLst>
           </p:cNvPr>
@@ -7736,8 +7867,1795 @@
             <a:avLst/>
           </a:prstGeom>
           <a:solidFill xmlns:a="http://schemas.openxmlformats.org/drawingml/2006/main">
+            <a:srgbClr val="F6F4EE"/>
+          </a:solidFill>
+          <a:ln xmlns:a="http://schemas.openxmlformats.org/drawingml/2006/main" w="0">
+            <a:solidFill>
+              <a:srgbClr val="000000">
+                <a:alpha val="0"/>
+              </a:srgbClr>
+            </a:solidFill>
+            <a:prstDash val="solid"/>
+          </a:ln>
+        </p:spPr>
+      </p:sp>
+      <p:sp>
+        <p:nvSpPr>
+          <p:cNvPr id="2" name="">
+            <a:extLst xmlns:a="http://schemas.openxmlformats.org/drawingml/2006/main">
+              <a:ext uri="{FF2B5EF4-FFF2-40B4-BE49-F238E27FC236}">
+                <a16:creationId xmlns:a16="http://schemas.microsoft.com/office/drawing/2014/main" id="{72DA8186-D6C7-4AAD-9717-FCDCC32EE401}"/>
+              </a:ext>
+            </a:extLst>
+          </p:cNvPr>
+          <p:cNvSpPr>
+            <a:spLocks xmlns:a="http://schemas.openxmlformats.org/drawingml/2006/main" noGrp="1"/>
+          </p:cNvSpPr>
+          <p:nvPr/>
+        </p:nvSpPr>
+        <p:spPr>
+          <a:xfrm xmlns:a="http://schemas.openxmlformats.org/drawingml/2006/main">
+            <a:off x="514350" y="466725"/>
+            <a:ext cx="90488" cy="28575"/>
+          </a:xfrm>
+          <a:prstGeom xmlns:a="http://schemas.openxmlformats.org/drawingml/2006/main" prst="rect">
+            <a:avLst/>
+          </a:prstGeom>
+          <a:solidFill xmlns:a="http://schemas.openxmlformats.org/drawingml/2006/main">
+            <a:srgbClr val="19D9F2"/>
+          </a:solidFill>
+          <a:ln xmlns:a="http://schemas.openxmlformats.org/drawingml/2006/main" w="0">
+            <a:solidFill>
+              <a:srgbClr val="000000">
+                <a:alpha val="0"/>
+              </a:srgbClr>
+            </a:solidFill>
+            <a:prstDash val="solid"/>
+          </a:ln>
+        </p:spPr>
+      </p:sp>
+      <p:sp>
+        <p:nvSpPr>
+          <p:cNvPr id="3" name="">
+            <a:extLst xmlns:a="http://schemas.openxmlformats.org/drawingml/2006/main">
+              <a:ext uri="{FF2B5EF4-FFF2-40B4-BE49-F238E27FC236}">
+                <a16:creationId xmlns:a16="http://schemas.microsoft.com/office/drawing/2014/main" id="{2AFA26F3-90B6-4323-BB3B-87F9E04FCBA5}"/>
+              </a:ext>
+            </a:extLst>
+          </p:cNvPr>
+          <p:cNvSpPr>
+            <a:spLocks xmlns:a="http://schemas.openxmlformats.org/drawingml/2006/main" noGrp="1"/>
+          </p:cNvSpPr>
+          <p:nvPr/>
+        </p:nvSpPr>
+        <p:spPr>
+          <a:xfrm xmlns:a="http://schemas.openxmlformats.org/drawingml/2006/main">
+            <a:off x="595313" y="466725"/>
+            <a:ext cx="90488" cy="28575"/>
+          </a:xfrm>
+          <a:prstGeom xmlns:a="http://schemas.openxmlformats.org/drawingml/2006/main" prst="rect">
+            <a:avLst/>
+          </a:prstGeom>
+          <a:solidFill xmlns:a="http://schemas.openxmlformats.org/drawingml/2006/main">
+            <a:srgbClr val="4169F4"/>
+          </a:solidFill>
+          <a:ln xmlns:a="http://schemas.openxmlformats.org/drawingml/2006/main" w="0">
+            <a:solidFill>
+              <a:srgbClr val="000000">
+                <a:alpha val="0"/>
+              </a:srgbClr>
+            </a:solidFill>
+            <a:prstDash val="solid"/>
+          </a:ln>
+        </p:spPr>
+      </p:sp>
+      <p:sp>
+        <p:nvSpPr>
+          <p:cNvPr id="4" name="">
+            <a:extLst xmlns:a="http://schemas.openxmlformats.org/drawingml/2006/main">
+              <a:ext uri="{FF2B5EF4-FFF2-40B4-BE49-F238E27FC236}">
+                <a16:creationId xmlns:a16="http://schemas.microsoft.com/office/drawing/2014/main" id="{DD6DF698-2772-4BAA-ACAF-9DFBFEB7F076}"/>
+              </a:ext>
+            </a:extLst>
+          </p:cNvPr>
+          <p:cNvSpPr>
+            <a:spLocks xmlns:a="http://schemas.openxmlformats.org/drawingml/2006/main" noGrp="1"/>
+          </p:cNvSpPr>
+          <p:nvPr/>
+        </p:nvSpPr>
+        <p:spPr>
+          <a:xfrm xmlns:a="http://schemas.openxmlformats.org/drawingml/2006/main">
+            <a:off x="676275" y="466725"/>
+            <a:ext cx="90488" cy="28575"/>
+          </a:xfrm>
+          <a:prstGeom xmlns:a="http://schemas.openxmlformats.org/drawingml/2006/main" prst="rect">
+            <a:avLst/>
+          </a:prstGeom>
+          <a:solidFill xmlns:a="http://schemas.openxmlformats.org/drawingml/2006/main">
+            <a:srgbClr val="7A49F2"/>
+          </a:solidFill>
+          <a:ln xmlns:a="http://schemas.openxmlformats.org/drawingml/2006/main" w="0">
+            <a:solidFill>
+              <a:srgbClr val="000000">
+                <a:alpha val="0"/>
+              </a:srgbClr>
+            </a:solidFill>
+            <a:prstDash val="solid"/>
+          </a:ln>
+        </p:spPr>
+      </p:sp>
+      <p:sp>
+        <p:nvSpPr>
+          <p:cNvPr id="5" name="">
+            <a:extLst xmlns:a="http://schemas.openxmlformats.org/drawingml/2006/main">
+              <a:ext uri="{FF2B5EF4-FFF2-40B4-BE49-F238E27FC236}">
+                <a16:creationId xmlns:a16="http://schemas.microsoft.com/office/drawing/2014/main" id="{602A1671-0F4A-48E8-AC1D-8268C8C82673}"/>
+              </a:ext>
+            </a:extLst>
+          </p:cNvPr>
+          <p:cNvSpPr>
+            <a:spLocks xmlns:a="http://schemas.openxmlformats.org/drawingml/2006/main" noGrp="1"/>
+          </p:cNvSpPr>
+          <p:nvPr/>
+        </p:nvSpPr>
+        <p:spPr>
+          <a:xfrm xmlns:a="http://schemas.openxmlformats.org/drawingml/2006/main">
+            <a:off x="757238" y="466725"/>
+            <a:ext cx="90488" cy="28575"/>
+          </a:xfrm>
+          <a:prstGeom xmlns:a="http://schemas.openxmlformats.org/drawingml/2006/main" prst="rect">
+            <a:avLst/>
+          </a:prstGeom>
+          <a:solidFill xmlns:a="http://schemas.openxmlformats.org/drawingml/2006/main">
+            <a:srgbClr val="C52EE8"/>
+          </a:solidFill>
+          <a:ln xmlns:a="http://schemas.openxmlformats.org/drawingml/2006/main" w="0">
+            <a:solidFill>
+              <a:srgbClr val="000000">
+                <a:alpha val="0"/>
+              </a:srgbClr>
+            </a:solidFill>
+            <a:prstDash val="solid"/>
+          </a:ln>
+        </p:spPr>
+      </p:sp>
+      <p:sp>
+        <p:nvSpPr>
+          <p:cNvPr id="6" name="">
+            <a:extLst xmlns:a="http://schemas.openxmlformats.org/drawingml/2006/main">
+              <a:ext uri="{FF2B5EF4-FFF2-40B4-BE49-F238E27FC236}">
+                <a16:creationId xmlns:a16="http://schemas.microsoft.com/office/drawing/2014/main" id="{9BD6CBD0-EC3C-43E4-AB02-B33C04C3A4A3}"/>
+              </a:ext>
+            </a:extLst>
+          </p:cNvPr>
+          <p:cNvSpPr>
+            <a:spLocks xmlns:a="http://schemas.openxmlformats.org/drawingml/2006/main" noGrp="1"/>
+          </p:cNvSpPr>
+          <p:nvPr/>
+        </p:nvSpPr>
+        <p:spPr>
+          <a:xfrm xmlns:a="http://schemas.openxmlformats.org/drawingml/2006/main">
+            <a:off x="876300" y="400050"/>
+            <a:ext cx="4000500" cy="190500"/>
+          </a:xfrm>
+          <a:prstGeom xmlns:a="http://schemas.openxmlformats.org/drawingml/2006/main" prst="rect">
+            <a:avLst/>
+          </a:prstGeom>
+          <a:solidFill xmlns:a="http://schemas.openxmlformats.org/drawingml/2006/main">
+            <a:srgbClr val="000000">
+              <a:alpha val="0"/>
+            </a:srgbClr>
+          </a:solidFill>
+          <a:ln xmlns:a="http://schemas.openxmlformats.org/drawingml/2006/main" w="0">
+            <a:solidFill>
+              <a:srgbClr val="000000">
+                <a:alpha val="0"/>
+              </a:srgbClr>
+            </a:solidFill>
+            <a:prstDash val="solid"/>
+          </a:ln>
+        </p:spPr>
+        <p:txBody>
+          <a:bodyPr xmlns:a="http://schemas.openxmlformats.org/drawingml/2006/main" lIns="0" tIns="0" rIns="0" bIns="0" anchor="ctr"/>
+          <a:lstStyle xmlns:a="http://schemas.openxmlformats.org/drawingml/2006/main"/>
+          <a:p xmlns:a="http://schemas.openxmlformats.org/drawingml/2006/main">
+            <a:pPr algn="l">
+              <a:defRPr sz="900" b="1">
+                <a:solidFill>
+                  <a:srgbClr val="C52EE8"/>
+                </a:solidFill>
+                <a:latin typeface="Aptos"/>
+                <a:ea typeface="Aptos"/>
+                <a:cs typeface="Aptos"/>
+              </a:defRPr>
+            </a:pPr>
+            <a:r>
+              <a:rPr sz="900" b="1">
+                <a:solidFill>
+                  <a:srgbClr val="C52EE8"/>
+                </a:solidFill>
+                <a:latin typeface="Aptos"/>
+                <a:ea typeface="Aptos"/>
+                <a:cs typeface="Aptos"/>
+              </a:rPr>
+              <a:t>FOUNDER</a:t>
+            </a:r>
+          </a:p>
+        </p:txBody>
+      </p:sp>
+      <p:sp>
+        <p:nvSpPr>
+          <p:cNvPr id="7" name="">
+            <a:extLst xmlns:a="http://schemas.openxmlformats.org/drawingml/2006/main">
+              <a:ext uri="{FF2B5EF4-FFF2-40B4-BE49-F238E27FC236}">
+                <a16:creationId xmlns:a16="http://schemas.microsoft.com/office/drawing/2014/main" id="{838449BF-809A-46E6-B16B-303EF9753DA4}"/>
+              </a:ext>
+            </a:extLst>
+          </p:cNvPr>
+          <p:cNvSpPr>
+            <a:spLocks xmlns:a="http://schemas.openxmlformats.org/drawingml/2006/main" noGrp="1"/>
+          </p:cNvSpPr>
+          <p:nvPr/>
+        </p:nvSpPr>
+        <p:spPr>
+          <a:xfrm xmlns:a="http://schemas.openxmlformats.org/drawingml/2006/main">
+            <a:off x="514350" y="723900"/>
+            <a:ext cx="8667750" cy="1009650"/>
+          </a:xfrm>
+          <a:prstGeom xmlns:a="http://schemas.openxmlformats.org/drawingml/2006/main" prst="rect">
+            <a:avLst/>
+          </a:prstGeom>
+          <a:solidFill xmlns:a="http://schemas.openxmlformats.org/drawingml/2006/main">
+            <a:srgbClr val="000000">
+              <a:alpha val="0"/>
+            </a:srgbClr>
+          </a:solidFill>
+          <a:ln xmlns:a="http://schemas.openxmlformats.org/drawingml/2006/main" w="0">
+            <a:solidFill>
+              <a:srgbClr val="000000">
+                <a:alpha val="0"/>
+              </a:srgbClr>
+            </a:solidFill>
+            <a:prstDash val="solid"/>
+          </a:ln>
+        </p:spPr>
+        <p:txBody>
+          <a:bodyPr xmlns:a="http://schemas.openxmlformats.org/drawingml/2006/main" lIns="0" tIns="0" rIns="0" bIns="0" anchor="t"/>
+          <a:lstStyle xmlns:a="http://schemas.openxmlformats.org/drawingml/2006/main"/>
+          <a:p xmlns:a="http://schemas.openxmlformats.org/drawingml/2006/main">
+            <a:pPr algn="l">
+              <a:defRPr sz="3150" b="1">
+                <a:solidFill>
+                  <a:srgbClr val="0A1020"/>
+                </a:solidFill>
+                <a:latin typeface="Aptos Display"/>
+                <a:ea typeface="Aptos Display"/>
+                <a:cs typeface="Aptos Display"/>
+              </a:defRPr>
+            </a:pPr>
+            <a:r>
+              <a:rPr sz="3150" b="1">
+                <a:solidFill>
+                  <a:srgbClr val="0A1020"/>
+                </a:solidFill>
+                <a:latin typeface="Aptos Display"/>
+                <a:ea typeface="Aptos Display"/>
+                <a:cs typeface="Aptos Display"/>
+              </a:rPr>
+              <a:t>Built by Katta Naga Sri Ganesh, Founder of Syntriass / AIRON.</a:t>
+            </a:r>
+          </a:p>
+        </p:txBody>
+      </p:sp>
+      <p:sp>
+        <p:nvSpPr>
+          <p:cNvPr id="8" name="">
+            <a:extLst xmlns:a="http://schemas.openxmlformats.org/drawingml/2006/main">
+              <a:ext uri="{FF2B5EF4-FFF2-40B4-BE49-F238E27FC236}">
+                <a16:creationId xmlns:a16="http://schemas.microsoft.com/office/drawing/2014/main" id="{0EA8720D-80D0-49B9-9D26-FF9C28B18078}"/>
+              </a:ext>
+            </a:extLst>
+          </p:cNvPr>
+          <p:cNvSpPr>
+            <a:spLocks xmlns:a="http://schemas.openxmlformats.org/drawingml/2006/main" noGrp="1"/>
+          </p:cNvSpPr>
+          <p:nvPr/>
+        </p:nvSpPr>
+        <p:spPr>
+          <a:xfrm xmlns:a="http://schemas.openxmlformats.org/drawingml/2006/main">
+            <a:off x="533400" y="1885950"/>
+            <a:ext cx="7239000" cy="495300"/>
+          </a:xfrm>
+          <a:prstGeom xmlns:a="http://schemas.openxmlformats.org/drawingml/2006/main" prst="rect">
+            <a:avLst/>
+          </a:prstGeom>
+          <a:solidFill xmlns:a="http://schemas.openxmlformats.org/drawingml/2006/main">
+            <a:srgbClr val="000000">
+              <a:alpha val="0"/>
+            </a:srgbClr>
+          </a:solidFill>
+          <a:ln xmlns:a="http://schemas.openxmlformats.org/drawingml/2006/main" w="0">
+            <a:solidFill>
+              <a:srgbClr val="000000">
+                <a:alpha val="0"/>
+              </a:srgbClr>
+            </a:solidFill>
+            <a:prstDash val="solid"/>
+          </a:ln>
+        </p:spPr>
+        <p:txBody>
+          <a:bodyPr xmlns:a="http://schemas.openxmlformats.org/drawingml/2006/main" lIns="19050" tIns="19050" rIns="19050" bIns="19050" anchor="t"/>
+          <a:lstStyle xmlns:a="http://schemas.openxmlformats.org/drawingml/2006/main"/>
+          <a:p xmlns:a="http://schemas.openxmlformats.org/drawingml/2006/main">
+            <a:pPr algn="l">
+              <a:defRPr sz="1425" b="0">
+                <a:solidFill>
+                  <a:srgbClr val="0A1020"/>
+                </a:solidFill>
+                <a:latin typeface="Aptos"/>
+                <a:ea typeface="Aptos"/>
+                <a:cs typeface="Aptos"/>
+              </a:defRPr>
+            </a:pPr>
+            <a:r>
+              <a:rPr sz="1425" b="0">
+                <a:solidFill>
+                  <a:srgbClr val="0A1020"/>
+                </a:solidFill>
+                <a:latin typeface="Aptos"/>
+                <a:ea typeface="Aptos"/>
+                <a:cs typeface="Aptos"/>
+              </a:rPr>
+              <a:t>The founder thesis: autonomous agents need a passport before they can safely enter regulated infrastructure.</a:t>
+            </a:r>
+          </a:p>
+        </p:txBody>
+      </p:sp>
+      <p:sp>
+        <p:nvSpPr>
+          <p:cNvPr id="9" name="">
+            <a:extLst xmlns:a="http://schemas.openxmlformats.org/drawingml/2006/main">
+              <a:ext uri="{FF2B5EF4-FFF2-40B4-BE49-F238E27FC236}">
+                <a16:creationId xmlns:a16="http://schemas.microsoft.com/office/drawing/2014/main" id="{C34B6BA3-AEA7-4804-B709-307C9BA42ACD}"/>
+              </a:ext>
+            </a:extLst>
+          </p:cNvPr>
+          <p:cNvSpPr>
+            <a:spLocks xmlns:a="http://schemas.openxmlformats.org/drawingml/2006/main" noGrp="1"/>
+          </p:cNvSpPr>
+          <p:nvPr/>
+        </p:nvSpPr>
+        <p:spPr>
+          <a:xfrm xmlns:a="http://schemas.openxmlformats.org/drawingml/2006/main">
+            <a:off x="742950" y="2857500"/>
+            <a:ext cx="3905250" cy="2228850"/>
+          </a:xfrm>
+          <a:prstGeom xmlns:a="http://schemas.openxmlformats.org/drawingml/2006/main" prst="rect">
+            <a:avLst/>
+          </a:prstGeom>
+          <a:solidFill xmlns:a="http://schemas.openxmlformats.org/drawingml/2006/main">
             <a:srgbClr val="07002B"/>
           </a:solidFill>
+          <a:ln xmlns:a="http://schemas.openxmlformats.org/drawingml/2006/main" w="9525">
+            <a:solidFill>
+              <a:srgbClr val="07002B"/>
+            </a:solidFill>
+            <a:prstDash val="solid"/>
+          </a:ln>
+        </p:spPr>
+      </p:sp>
+      <p:sp>
+        <p:nvSpPr>
+          <p:cNvPr id="10" name="">
+            <a:extLst xmlns:a="http://schemas.openxmlformats.org/drawingml/2006/main">
+              <a:ext uri="{FF2B5EF4-FFF2-40B4-BE49-F238E27FC236}">
+                <a16:creationId xmlns:a16="http://schemas.microsoft.com/office/drawing/2014/main" id="{27E0D97C-8CBD-4AC8-A404-768EF65EE53E}"/>
+              </a:ext>
+            </a:extLst>
+          </p:cNvPr>
+          <p:cNvSpPr>
+            <a:spLocks xmlns:a="http://schemas.openxmlformats.org/drawingml/2006/main" noGrp="1"/>
+          </p:cNvSpPr>
+          <p:nvPr/>
+        </p:nvSpPr>
+        <p:spPr>
+          <a:xfrm xmlns:a="http://schemas.openxmlformats.org/drawingml/2006/main">
+            <a:off x="742950" y="2857500"/>
+            <a:ext cx="985838" cy="57150"/>
+          </a:xfrm>
+          <a:prstGeom xmlns:a="http://schemas.openxmlformats.org/drawingml/2006/main" prst="rect">
+            <a:avLst/>
+          </a:prstGeom>
+          <a:solidFill xmlns:a="http://schemas.openxmlformats.org/drawingml/2006/main">
+            <a:srgbClr val="19D9F2"/>
+          </a:solidFill>
+          <a:ln xmlns:a="http://schemas.openxmlformats.org/drawingml/2006/main" w="0">
+            <a:solidFill>
+              <a:srgbClr val="000000">
+                <a:alpha val="0"/>
+              </a:srgbClr>
+            </a:solidFill>
+            <a:prstDash val="solid"/>
+          </a:ln>
+        </p:spPr>
+      </p:sp>
+      <p:sp>
+        <p:nvSpPr>
+          <p:cNvPr id="11" name="">
+            <a:extLst xmlns:a="http://schemas.openxmlformats.org/drawingml/2006/main">
+              <a:ext uri="{FF2B5EF4-FFF2-40B4-BE49-F238E27FC236}">
+                <a16:creationId xmlns:a16="http://schemas.microsoft.com/office/drawing/2014/main" id="{62F682F4-95BC-4E4F-B3A9-ED0DF77FB82E}"/>
+              </a:ext>
+            </a:extLst>
+          </p:cNvPr>
+          <p:cNvSpPr>
+            <a:spLocks xmlns:a="http://schemas.openxmlformats.org/drawingml/2006/main" noGrp="1"/>
+          </p:cNvSpPr>
+          <p:nvPr/>
+        </p:nvSpPr>
+        <p:spPr>
+          <a:xfrm xmlns:a="http://schemas.openxmlformats.org/drawingml/2006/main">
+            <a:off x="1719263" y="2857500"/>
+            <a:ext cx="985838" cy="57150"/>
+          </a:xfrm>
+          <a:prstGeom xmlns:a="http://schemas.openxmlformats.org/drawingml/2006/main" prst="rect">
+            <a:avLst/>
+          </a:prstGeom>
+          <a:solidFill xmlns:a="http://schemas.openxmlformats.org/drawingml/2006/main">
+            <a:srgbClr val="4169F4"/>
+          </a:solidFill>
+          <a:ln xmlns:a="http://schemas.openxmlformats.org/drawingml/2006/main" w="0">
+            <a:solidFill>
+              <a:srgbClr val="000000">
+                <a:alpha val="0"/>
+              </a:srgbClr>
+            </a:solidFill>
+            <a:prstDash val="solid"/>
+          </a:ln>
+        </p:spPr>
+      </p:sp>
+      <p:sp>
+        <p:nvSpPr>
+          <p:cNvPr id="12" name="">
+            <a:extLst xmlns:a="http://schemas.openxmlformats.org/drawingml/2006/main">
+              <a:ext uri="{FF2B5EF4-FFF2-40B4-BE49-F238E27FC236}">
+                <a16:creationId xmlns:a16="http://schemas.microsoft.com/office/drawing/2014/main" id="{0C41DE00-A9ED-436B-90BD-E15CFBB20CBD}"/>
+              </a:ext>
+            </a:extLst>
+          </p:cNvPr>
+          <p:cNvSpPr>
+            <a:spLocks xmlns:a="http://schemas.openxmlformats.org/drawingml/2006/main" noGrp="1"/>
+          </p:cNvSpPr>
+          <p:nvPr/>
+        </p:nvSpPr>
+        <p:spPr>
+          <a:xfrm xmlns:a="http://schemas.openxmlformats.org/drawingml/2006/main">
+            <a:off x="2695575" y="2857500"/>
+            <a:ext cx="985838" cy="57150"/>
+          </a:xfrm>
+          <a:prstGeom xmlns:a="http://schemas.openxmlformats.org/drawingml/2006/main" prst="rect">
+            <a:avLst/>
+          </a:prstGeom>
+          <a:solidFill xmlns:a="http://schemas.openxmlformats.org/drawingml/2006/main">
+            <a:srgbClr val="7A49F2"/>
+          </a:solidFill>
+          <a:ln xmlns:a="http://schemas.openxmlformats.org/drawingml/2006/main" w="0">
+            <a:solidFill>
+              <a:srgbClr val="000000">
+                <a:alpha val="0"/>
+              </a:srgbClr>
+            </a:solidFill>
+            <a:prstDash val="solid"/>
+          </a:ln>
+        </p:spPr>
+      </p:sp>
+      <p:sp>
+        <p:nvSpPr>
+          <p:cNvPr id="13" name="">
+            <a:extLst xmlns:a="http://schemas.openxmlformats.org/drawingml/2006/main">
+              <a:ext uri="{FF2B5EF4-FFF2-40B4-BE49-F238E27FC236}">
+                <a16:creationId xmlns:a16="http://schemas.microsoft.com/office/drawing/2014/main" id="{0D04C95B-55D8-4083-AE3D-F65E1D1442D8}"/>
+              </a:ext>
+            </a:extLst>
+          </p:cNvPr>
+          <p:cNvSpPr>
+            <a:spLocks xmlns:a="http://schemas.openxmlformats.org/drawingml/2006/main" noGrp="1"/>
+          </p:cNvSpPr>
+          <p:nvPr/>
+        </p:nvSpPr>
+        <p:spPr>
+          <a:xfrm xmlns:a="http://schemas.openxmlformats.org/drawingml/2006/main">
+            <a:off x="3671888" y="2857500"/>
+            <a:ext cx="985838" cy="57150"/>
+          </a:xfrm>
+          <a:prstGeom xmlns:a="http://schemas.openxmlformats.org/drawingml/2006/main" prst="rect">
+            <a:avLst/>
+          </a:prstGeom>
+          <a:solidFill xmlns:a="http://schemas.openxmlformats.org/drawingml/2006/main">
+            <a:srgbClr val="C52EE8"/>
+          </a:solidFill>
+          <a:ln xmlns:a="http://schemas.openxmlformats.org/drawingml/2006/main" w="0">
+            <a:solidFill>
+              <a:srgbClr val="000000">
+                <a:alpha val="0"/>
+              </a:srgbClr>
+            </a:solidFill>
+            <a:prstDash val="solid"/>
+          </a:ln>
+        </p:spPr>
+      </p:sp>
+      <p:pic>
+        <p:nvPicPr>
+          <p:cNvPr id="14" name=""/>
+          <p:cNvPicPr>
+            <a:picLocks xmlns:a="http://schemas.openxmlformats.org/drawingml/2006/main" noChangeAspect="1"/>
+          </p:cNvPicPr>
+          <p:nvPr/>
+        </p:nvPicPr>
+        <p:blipFill>
+          <a:blip xmlns:r="http://schemas.openxmlformats.org/officeDocument/2006/relationships" xmlns:a="http://schemas.openxmlformats.org/drawingml/2006/main" r:embed="R188e3ef6d4344b97"/>
+          <a:stretch xmlns:a="http://schemas.openxmlformats.org/drawingml/2006/main"/>
+        </p:blipFill>
+        <p:spPr>
+          <a:xfrm xmlns:a="http://schemas.openxmlformats.org/drawingml/2006/main">
+            <a:off x="3648075" y="3105150"/>
+            <a:ext cx="590550" cy="590550"/>
+          </a:xfrm>
+          <a:prstGeom xmlns:a="http://schemas.openxmlformats.org/drawingml/2006/main" prst="rect">
+            <a:avLst/>
+          </a:prstGeom>
+        </p:spPr>
+      </p:pic>
+      <p:sp>
+        <p:nvSpPr>
+          <p:cNvPr id="15" name="">
+            <a:extLst xmlns:a="http://schemas.openxmlformats.org/drawingml/2006/main">
+              <a:ext uri="{FF2B5EF4-FFF2-40B4-BE49-F238E27FC236}">
+                <a16:creationId xmlns:a16="http://schemas.microsoft.com/office/drawing/2014/main" id="{F60B2ED8-0F63-45B8-959C-A2981213A36D}"/>
+              </a:ext>
+            </a:extLst>
+          </p:cNvPr>
+          <p:cNvSpPr>
+            <a:spLocks xmlns:a="http://schemas.openxmlformats.org/drawingml/2006/main" noGrp="1"/>
+          </p:cNvSpPr>
+          <p:nvPr/>
+        </p:nvSpPr>
+        <p:spPr>
+          <a:xfrm xmlns:a="http://schemas.openxmlformats.org/drawingml/2006/main">
+            <a:off x="1066800" y="3181350"/>
+            <a:ext cx="2247900" cy="628650"/>
+          </a:xfrm>
+          <a:prstGeom xmlns:a="http://schemas.openxmlformats.org/drawingml/2006/main" prst="rect">
+            <a:avLst/>
+          </a:prstGeom>
+          <a:solidFill xmlns:a="http://schemas.openxmlformats.org/drawingml/2006/main">
+            <a:srgbClr val="000000">
+              <a:alpha val="0"/>
+            </a:srgbClr>
+          </a:solidFill>
+          <a:ln xmlns:a="http://schemas.openxmlformats.org/drawingml/2006/main" w="0">
+            <a:solidFill>
+              <a:srgbClr val="000000">
+                <a:alpha val="0"/>
+              </a:srgbClr>
+            </a:solidFill>
+            <a:prstDash val="solid"/>
+          </a:ln>
+        </p:spPr>
+        <p:txBody>
+          <a:bodyPr xmlns:a="http://schemas.openxmlformats.org/drawingml/2006/main" lIns="0" tIns="0" rIns="0" bIns="0" anchor="t"/>
+          <a:lstStyle xmlns:a="http://schemas.openxmlformats.org/drawingml/2006/main"/>
+          <a:p xmlns:a="http://schemas.openxmlformats.org/drawingml/2006/main">
+            <a:pPr algn="l">
+              <a:defRPr sz="1875" b="1">
+                <a:solidFill>
+                  <a:srgbClr val="FFFFFF"/>
+                </a:solidFill>
+                <a:latin typeface="Aptos Display"/>
+                <a:ea typeface="Aptos Display"/>
+                <a:cs typeface="Aptos Display"/>
+              </a:defRPr>
+            </a:pPr>
+            <a:r>
+              <a:rPr sz="1875" b="1">
+                <a:solidFill>
+                  <a:srgbClr val="FFFFFF"/>
+                </a:solidFill>
+                <a:latin typeface="Aptos Display"/>
+                <a:ea typeface="Aptos Display"/>
+                <a:cs typeface="Aptos Display"/>
+              </a:rPr>
+              <a:t>Katta Naga Sri Ganesh</a:t>
+            </a:r>
+          </a:p>
+        </p:txBody>
+      </p:sp>
+      <p:sp>
+        <p:nvSpPr>
+          <p:cNvPr id="16" name="">
+            <a:extLst xmlns:a="http://schemas.openxmlformats.org/drawingml/2006/main">
+              <a:ext uri="{FF2B5EF4-FFF2-40B4-BE49-F238E27FC236}">
+                <a16:creationId xmlns:a16="http://schemas.microsoft.com/office/drawing/2014/main" id="{7CD6A1ED-18E8-4CE4-B54A-F18D280B342B}"/>
+              </a:ext>
+            </a:extLst>
+          </p:cNvPr>
+          <p:cNvSpPr>
+            <a:spLocks xmlns:a="http://schemas.openxmlformats.org/drawingml/2006/main" noGrp="1"/>
+          </p:cNvSpPr>
+          <p:nvPr/>
+        </p:nvSpPr>
+        <p:spPr>
+          <a:xfrm xmlns:a="http://schemas.openxmlformats.org/drawingml/2006/main">
+            <a:off x="1085850" y="3810000"/>
+            <a:ext cx="2381250" cy="228600"/>
+          </a:xfrm>
+          <a:prstGeom xmlns:a="http://schemas.openxmlformats.org/drawingml/2006/main" prst="rect">
+            <a:avLst/>
+          </a:prstGeom>
+          <a:solidFill xmlns:a="http://schemas.openxmlformats.org/drawingml/2006/main">
+            <a:srgbClr val="000000">
+              <a:alpha val="0"/>
+            </a:srgbClr>
+          </a:solidFill>
+          <a:ln xmlns:a="http://schemas.openxmlformats.org/drawingml/2006/main" w="0">
+            <a:solidFill>
+              <a:srgbClr val="000000">
+                <a:alpha val="0"/>
+              </a:srgbClr>
+            </a:solidFill>
+            <a:prstDash val="solid"/>
+          </a:ln>
+        </p:spPr>
+        <p:txBody>
+          <a:bodyPr xmlns:a="http://schemas.openxmlformats.org/drawingml/2006/main" lIns="0" tIns="0" rIns="0" bIns="0" anchor="t"/>
+          <a:lstStyle xmlns:a="http://schemas.openxmlformats.org/drawingml/2006/main"/>
+          <a:p xmlns:a="http://schemas.openxmlformats.org/drawingml/2006/main">
+            <a:pPr algn="l">
+              <a:defRPr sz="1200" b="1">
+                <a:solidFill>
+                  <a:srgbClr val="19D9F2"/>
+                </a:solidFill>
+                <a:latin typeface="Aptos"/>
+                <a:ea typeface="Aptos"/>
+                <a:cs typeface="Aptos"/>
+              </a:defRPr>
+            </a:pPr>
+            <a:r>
+              <a:rPr sz="1200" b="1">
+                <a:solidFill>
+                  <a:srgbClr val="19D9F2"/>
+                </a:solidFill>
+                <a:latin typeface="Aptos"/>
+                <a:ea typeface="Aptos"/>
+                <a:cs typeface="Aptos"/>
+              </a:rPr>
+              <a:t>Founder | Syntriass / AIRON</a:t>
+            </a:r>
+          </a:p>
+        </p:txBody>
+      </p:sp>
+      <p:sp>
+        <p:nvSpPr>
+          <p:cNvPr id="17" name="">
+            <a:extLst xmlns:a="http://schemas.openxmlformats.org/drawingml/2006/main">
+              <a:ext uri="{FF2B5EF4-FFF2-40B4-BE49-F238E27FC236}">
+                <a16:creationId xmlns:a16="http://schemas.microsoft.com/office/drawing/2014/main" id="{5A9C487A-60AA-4EF7-8695-D66C73655A03}"/>
+              </a:ext>
+            </a:extLst>
+          </p:cNvPr>
+          <p:cNvSpPr>
+            <a:spLocks xmlns:a="http://schemas.openxmlformats.org/drawingml/2006/main" noGrp="1"/>
+          </p:cNvSpPr>
+          <p:nvPr/>
+        </p:nvSpPr>
+        <p:spPr>
+          <a:xfrm xmlns:a="http://schemas.openxmlformats.org/drawingml/2006/main">
+            <a:off x="1085850" y="4171950"/>
+            <a:ext cx="2857500" cy="457200"/>
+          </a:xfrm>
+          <a:prstGeom xmlns:a="http://schemas.openxmlformats.org/drawingml/2006/main" prst="rect">
+            <a:avLst/>
+          </a:prstGeom>
+          <a:solidFill xmlns:a="http://schemas.openxmlformats.org/drawingml/2006/main">
+            <a:srgbClr val="000000">
+              <a:alpha val="0"/>
+            </a:srgbClr>
+          </a:solidFill>
+          <a:ln xmlns:a="http://schemas.openxmlformats.org/drawingml/2006/main" w="0">
+            <a:solidFill>
+              <a:srgbClr val="000000">
+                <a:alpha val="0"/>
+              </a:srgbClr>
+            </a:solidFill>
+            <a:prstDash val="solid"/>
+          </a:ln>
+        </p:spPr>
+        <p:txBody>
+          <a:bodyPr xmlns:a="http://schemas.openxmlformats.org/drawingml/2006/main" lIns="19050" tIns="19050" rIns="19050" bIns="19050" anchor="t"/>
+          <a:lstStyle xmlns:a="http://schemas.openxmlformats.org/drawingml/2006/main"/>
+          <a:p xmlns:a="http://schemas.openxmlformats.org/drawingml/2006/main">
+            <a:pPr algn="l">
+              <a:defRPr sz="1050" b="0">
+                <a:solidFill>
+                  <a:srgbClr val="DCE4F5"/>
+                </a:solidFill>
+                <a:latin typeface="Aptos"/>
+                <a:ea typeface="Aptos"/>
+                <a:cs typeface="Aptos"/>
+              </a:defRPr>
+            </a:pPr>
+            <a:r>
+              <a:rPr sz="1050" b="0">
+                <a:solidFill>
+                  <a:srgbClr val="DCE4F5"/>
+                </a:solidFill>
+                <a:latin typeface="Aptos"/>
+                <a:ea typeface="Aptos"/>
+                <a:cs typeface="Aptos"/>
+              </a:rPr>
+              <a:t>Email: syntriass@gmail.com</a:t>
+            </a:r>
+          </a:p>
+          <a:p xmlns:a="http://schemas.openxmlformats.org/drawingml/2006/main">
+            <a:pPr algn="l">
+              <a:defRPr sz="1050" b="0">
+                <a:solidFill>
+                  <a:srgbClr val="DCE4F5"/>
+                </a:solidFill>
+                <a:latin typeface="Aptos"/>
+                <a:ea typeface="Aptos"/>
+                <a:cs typeface="Aptos"/>
+              </a:defRPr>
+            </a:pPr>
+            <a:r>
+              <a:rPr sz="1050" b="0">
+                <a:solidFill>
+                  <a:srgbClr val="DCE4F5"/>
+                </a:solidFill>
+                <a:latin typeface="Aptos"/>
+                <a:ea typeface="Aptos"/>
+                <a:cs typeface="Aptos"/>
+              </a:rPr>
+              <a:t>GitHub: richardrich999888-rgb</a:t>
+            </a:r>
+          </a:p>
+        </p:txBody>
+      </p:sp>
+      <p:sp>
+        <p:nvSpPr>
+          <p:cNvPr id="18" name="">
+            <a:extLst xmlns:a="http://schemas.openxmlformats.org/drawingml/2006/main">
+              <a:ext uri="{FF2B5EF4-FFF2-40B4-BE49-F238E27FC236}">
+                <a16:creationId xmlns:a16="http://schemas.microsoft.com/office/drawing/2014/main" id="{683CE4BA-4BE6-4BCA-8F37-74671F97F395}"/>
+              </a:ext>
+            </a:extLst>
+          </p:cNvPr>
+          <p:cNvSpPr>
+            <a:spLocks xmlns:a="http://schemas.openxmlformats.org/drawingml/2006/main" noGrp="1"/>
+          </p:cNvSpPr>
+          <p:nvPr/>
+        </p:nvSpPr>
+        <p:spPr>
+          <a:xfrm xmlns:a="http://schemas.openxmlformats.org/drawingml/2006/main">
+            <a:off x="1085850" y="4800600"/>
+            <a:ext cx="1524000" cy="38100"/>
+          </a:xfrm>
+          <a:prstGeom xmlns:a="http://schemas.openxmlformats.org/drawingml/2006/main" prst="rect">
+            <a:avLst/>
+          </a:prstGeom>
+          <a:solidFill xmlns:a="http://schemas.openxmlformats.org/drawingml/2006/main">
+            <a:srgbClr val="C52EE8"/>
+          </a:solidFill>
+          <a:ln xmlns:a="http://schemas.openxmlformats.org/drawingml/2006/main" w="0">
+            <a:solidFill>
+              <a:srgbClr val="000000">
+                <a:alpha val="0"/>
+              </a:srgbClr>
+            </a:solidFill>
+            <a:prstDash val="solid"/>
+          </a:ln>
+        </p:spPr>
+      </p:sp>
+      <p:sp>
+        <p:nvSpPr>
+          <p:cNvPr id="19" name="">
+            <a:extLst xmlns:a="http://schemas.openxmlformats.org/drawingml/2006/main">
+              <a:ext uri="{FF2B5EF4-FFF2-40B4-BE49-F238E27FC236}">
+                <a16:creationId xmlns:a16="http://schemas.microsoft.com/office/drawing/2014/main" id="{6C0123F8-5493-4068-8E2A-FD3CE0881A1C}"/>
+              </a:ext>
+            </a:extLst>
+          </p:cNvPr>
+          <p:cNvSpPr>
+            <a:spLocks xmlns:a="http://schemas.openxmlformats.org/drawingml/2006/main" noGrp="1"/>
+          </p:cNvSpPr>
+          <p:nvPr/>
+        </p:nvSpPr>
+        <p:spPr>
+          <a:xfrm xmlns:a="http://schemas.openxmlformats.org/drawingml/2006/main">
+            <a:off x="5429250" y="2800350"/>
+            <a:ext cx="5334000" cy="800100"/>
+          </a:xfrm>
+          <a:prstGeom xmlns:a="http://schemas.openxmlformats.org/drawingml/2006/main" prst="rect">
+            <a:avLst/>
+          </a:prstGeom>
+          <a:solidFill xmlns:a="http://schemas.openxmlformats.org/drawingml/2006/main">
+            <a:srgbClr val="FFFFFF"/>
+          </a:solidFill>
+          <a:ln xmlns:a="http://schemas.openxmlformats.org/drawingml/2006/main" w="9525">
+            <a:solidFill>
+              <a:srgbClr val="DDE3F0"/>
+            </a:solidFill>
+            <a:prstDash val="solid"/>
+          </a:ln>
+        </p:spPr>
+      </p:sp>
+      <p:sp>
+        <p:nvSpPr>
+          <p:cNvPr id="20" name="">
+            <a:extLst xmlns:a="http://schemas.openxmlformats.org/drawingml/2006/main">
+              <a:ext uri="{FF2B5EF4-FFF2-40B4-BE49-F238E27FC236}">
+                <a16:creationId xmlns:a16="http://schemas.microsoft.com/office/drawing/2014/main" id="{7BE4CFAA-FEB3-49C6-8563-8D0817CE2C33}"/>
+              </a:ext>
+            </a:extLst>
+          </p:cNvPr>
+          <p:cNvSpPr>
+            <a:spLocks xmlns:a="http://schemas.openxmlformats.org/drawingml/2006/main" noGrp="1"/>
+          </p:cNvSpPr>
+          <p:nvPr/>
+        </p:nvSpPr>
+        <p:spPr>
+          <a:xfrm xmlns:a="http://schemas.openxmlformats.org/drawingml/2006/main">
+            <a:off x="5429250" y="2800350"/>
+            <a:ext cx="47625" cy="800100"/>
+          </a:xfrm>
+          <a:prstGeom xmlns:a="http://schemas.openxmlformats.org/drawingml/2006/main" prst="rect">
+            <a:avLst/>
+          </a:prstGeom>
+          <a:solidFill xmlns:a="http://schemas.openxmlformats.org/drawingml/2006/main">
+            <a:srgbClr val="19D9F2"/>
+          </a:solidFill>
+          <a:ln xmlns:a="http://schemas.openxmlformats.org/drawingml/2006/main" w="0">
+            <a:solidFill>
+              <a:srgbClr val="000000">
+                <a:alpha val="0"/>
+              </a:srgbClr>
+            </a:solidFill>
+            <a:prstDash val="solid"/>
+          </a:ln>
+        </p:spPr>
+      </p:sp>
+      <p:sp>
+        <p:nvSpPr>
+          <p:cNvPr id="21" name="">
+            <a:extLst xmlns:a="http://schemas.openxmlformats.org/drawingml/2006/main">
+              <a:ext uri="{FF2B5EF4-FFF2-40B4-BE49-F238E27FC236}">
+                <a16:creationId xmlns:a16="http://schemas.microsoft.com/office/drawing/2014/main" id="{E5C35104-16F7-451A-A8A7-FB1C27446CF3}"/>
+              </a:ext>
+            </a:extLst>
+          </p:cNvPr>
+          <p:cNvSpPr>
+            <a:spLocks xmlns:a="http://schemas.openxmlformats.org/drawingml/2006/main" noGrp="1"/>
+          </p:cNvSpPr>
+          <p:nvPr/>
+        </p:nvSpPr>
+        <p:spPr>
+          <a:xfrm xmlns:a="http://schemas.openxmlformats.org/drawingml/2006/main">
+            <a:off x="5657850" y="2895600"/>
+            <a:ext cx="2000250" cy="171450"/>
+          </a:xfrm>
+          <a:prstGeom xmlns:a="http://schemas.openxmlformats.org/drawingml/2006/main" prst="rect">
+            <a:avLst/>
+          </a:prstGeom>
+          <a:solidFill xmlns:a="http://schemas.openxmlformats.org/drawingml/2006/main">
+            <a:srgbClr val="000000">
+              <a:alpha val="0"/>
+            </a:srgbClr>
+          </a:solidFill>
+          <a:ln xmlns:a="http://schemas.openxmlformats.org/drawingml/2006/main" w="0">
+            <a:solidFill>
+              <a:srgbClr val="000000">
+                <a:alpha val="0"/>
+              </a:srgbClr>
+            </a:solidFill>
+            <a:prstDash val="solid"/>
+          </a:ln>
+        </p:spPr>
+        <p:txBody>
+          <a:bodyPr xmlns:a="http://schemas.openxmlformats.org/drawingml/2006/main" lIns="0" tIns="0" rIns="0" bIns="0" anchor="ctr"/>
+          <a:lstStyle xmlns:a="http://schemas.openxmlformats.org/drawingml/2006/main"/>
+          <a:p xmlns:a="http://schemas.openxmlformats.org/drawingml/2006/main">
+            <a:pPr algn="l">
+              <a:defRPr sz="825" b="1">
+                <a:solidFill>
+                  <a:srgbClr val="19D9F2"/>
+                </a:solidFill>
+                <a:latin typeface="Aptos"/>
+                <a:ea typeface="Aptos"/>
+                <a:cs typeface="Aptos"/>
+              </a:defRPr>
+            </a:pPr>
+            <a:r>
+              <a:rPr sz="825" b="1">
+                <a:solidFill>
+                  <a:srgbClr val="19D9F2"/>
+                </a:solidFill>
+                <a:latin typeface="Aptos"/>
+                <a:ea typeface="Aptos"/>
+                <a:cs typeface="Aptos"/>
+              </a:rPr>
+              <a:t>PRODUCT OWNERSHIP</a:t>
+            </a:r>
+          </a:p>
+        </p:txBody>
+      </p:sp>
+      <p:sp>
+        <p:nvSpPr>
+          <p:cNvPr id="22" name="">
+            <a:extLst xmlns:a="http://schemas.openxmlformats.org/drawingml/2006/main">
+              <a:ext uri="{FF2B5EF4-FFF2-40B4-BE49-F238E27FC236}">
+                <a16:creationId xmlns:a16="http://schemas.microsoft.com/office/drawing/2014/main" id="{926463AD-CE62-4134-8D38-B3D14C102CCD}"/>
+              </a:ext>
+            </a:extLst>
+          </p:cNvPr>
+          <p:cNvSpPr>
+            <a:spLocks xmlns:a="http://schemas.openxmlformats.org/drawingml/2006/main" noGrp="1"/>
+          </p:cNvSpPr>
+          <p:nvPr/>
+        </p:nvSpPr>
+        <p:spPr>
+          <a:xfrm xmlns:a="http://schemas.openxmlformats.org/drawingml/2006/main">
+            <a:off x="5657850" y="3143250"/>
+            <a:ext cx="4572000" cy="285750"/>
+          </a:xfrm>
+          <a:prstGeom xmlns:a="http://schemas.openxmlformats.org/drawingml/2006/main" prst="rect">
+            <a:avLst/>
+          </a:prstGeom>
+          <a:solidFill xmlns:a="http://schemas.openxmlformats.org/drawingml/2006/main">
+            <a:srgbClr val="000000">
+              <a:alpha val="0"/>
+            </a:srgbClr>
+          </a:solidFill>
+          <a:ln xmlns:a="http://schemas.openxmlformats.org/drawingml/2006/main" w="0">
+            <a:solidFill>
+              <a:srgbClr val="000000">
+                <a:alpha val="0"/>
+              </a:srgbClr>
+            </a:solidFill>
+            <a:prstDash val="solid"/>
+          </a:ln>
+        </p:spPr>
+        <p:txBody>
+          <a:bodyPr xmlns:a="http://schemas.openxmlformats.org/drawingml/2006/main" lIns="19050" tIns="19050" rIns="19050" bIns="19050" anchor="t"/>
+          <a:lstStyle xmlns:a="http://schemas.openxmlformats.org/drawingml/2006/main"/>
+          <a:p xmlns:a="http://schemas.openxmlformats.org/drawingml/2006/main">
+            <a:pPr algn="l">
+              <a:defRPr sz="975" b="0">
+                <a:solidFill>
+                  <a:srgbClr val="0A1020"/>
+                </a:solidFill>
+                <a:latin typeface="Aptos"/>
+                <a:ea typeface="Aptos"/>
+                <a:cs typeface="Aptos"/>
+              </a:defRPr>
+            </a:pPr>
+            <a:r>
+              <a:rPr sz="975" b="0">
+                <a:solidFill>
+                  <a:srgbClr val="0A1020"/>
+                </a:solidFill>
+                <a:latin typeface="Aptos"/>
+                <a:ea typeface="Aptos"/>
+                <a:cs typeface="Aptos"/>
+              </a:rPr>
+              <a:t>Agent Passport, offline verifier, Python SDK, and Colab pilot workflow.</a:t>
+            </a:r>
+          </a:p>
+        </p:txBody>
+      </p:sp>
+      <p:sp>
+        <p:nvSpPr>
+          <p:cNvPr id="23" name="">
+            <a:extLst xmlns:a="http://schemas.openxmlformats.org/drawingml/2006/main">
+              <a:ext uri="{FF2B5EF4-FFF2-40B4-BE49-F238E27FC236}">
+                <a16:creationId xmlns:a16="http://schemas.microsoft.com/office/drawing/2014/main" id="{6DBA673E-53C2-4828-B9B3-0CF4A65524C1}"/>
+              </a:ext>
+            </a:extLst>
+          </p:cNvPr>
+          <p:cNvSpPr>
+            <a:spLocks xmlns:a="http://schemas.openxmlformats.org/drawingml/2006/main" noGrp="1"/>
+          </p:cNvSpPr>
+          <p:nvPr/>
+        </p:nvSpPr>
+        <p:spPr>
+          <a:xfrm xmlns:a="http://schemas.openxmlformats.org/drawingml/2006/main">
+            <a:off x="5429250" y="3657600"/>
+            <a:ext cx="5334000" cy="800100"/>
+          </a:xfrm>
+          <a:prstGeom xmlns:a="http://schemas.openxmlformats.org/drawingml/2006/main" prst="rect">
+            <a:avLst/>
+          </a:prstGeom>
+          <a:solidFill xmlns:a="http://schemas.openxmlformats.org/drawingml/2006/main">
+            <a:srgbClr val="FFFFFF"/>
+          </a:solidFill>
+          <a:ln xmlns:a="http://schemas.openxmlformats.org/drawingml/2006/main" w="9525">
+            <a:solidFill>
+              <a:srgbClr val="DDE3F0"/>
+            </a:solidFill>
+            <a:prstDash val="solid"/>
+          </a:ln>
+        </p:spPr>
+      </p:sp>
+      <p:sp>
+        <p:nvSpPr>
+          <p:cNvPr id="24" name="">
+            <a:extLst xmlns:a="http://schemas.openxmlformats.org/drawingml/2006/main">
+              <a:ext uri="{FF2B5EF4-FFF2-40B4-BE49-F238E27FC236}">
+                <a16:creationId xmlns:a16="http://schemas.microsoft.com/office/drawing/2014/main" id="{A7FDCAD8-6DB2-4EF5-9B81-31D6C48526E6}"/>
+              </a:ext>
+            </a:extLst>
+          </p:cNvPr>
+          <p:cNvSpPr>
+            <a:spLocks xmlns:a="http://schemas.openxmlformats.org/drawingml/2006/main" noGrp="1"/>
+          </p:cNvSpPr>
+          <p:nvPr/>
+        </p:nvSpPr>
+        <p:spPr>
+          <a:xfrm xmlns:a="http://schemas.openxmlformats.org/drawingml/2006/main">
+            <a:off x="5429250" y="3657600"/>
+            <a:ext cx="47625" cy="800100"/>
+          </a:xfrm>
+          <a:prstGeom xmlns:a="http://schemas.openxmlformats.org/drawingml/2006/main" prst="rect">
+            <a:avLst/>
+          </a:prstGeom>
+          <a:solidFill xmlns:a="http://schemas.openxmlformats.org/drawingml/2006/main">
+            <a:srgbClr val="7A49F2"/>
+          </a:solidFill>
+          <a:ln xmlns:a="http://schemas.openxmlformats.org/drawingml/2006/main" w="0">
+            <a:solidFill>
+              <a:srgbClr val="000000">
+                <a:alpha val="0"/>
+              </a:srgbClr>
+            </a:solidFill>
+            <a:prstDash val="solid"/>
+          </a:ln>
+        </p:spPr>
+      </p:sp>
+      <p:sp>
+        <p:nvSpPr>
+          <p:cNvPr id="25" name="">
+            <a:extLst xmlns:a="http://schemas.openxmlformats.org/drawingml/2006/main">
+              <a:ext uri="{FF2B5EF4-FFF2-40B4-BE49-F238E27FC236}">
+                <a16:creationId xmlns:a16="http://schemas.microsoft.com/office/drawing/2014/main" id="{1C3CD82E-43EA-4E7D-A512-9BCCB9A640B6}"/>
+              </a:ext>
+            </a:extLst>
+          </p:cNvPr>
+          <p:cNvSpPr>
+            <a:spLocks xmlns:a="http://schemas.openxmlformats.org/drawingml/2006/main" noGrp="1"/>
+          </p:cNvSpPr>
+          <p:nvPr/>
+        </p:nvSpPr>
+        <p:spPr>
+          <a:xfrm xmlns:a="http://schemas.openxmlformats.org/drawingml/2006/main">
+            <a:off x="5657850" y="3752850"/>
+            <a:ext cx="2000250" cy="171450"/>
+          </a:xfrm>
+          <a:prstGeom xmlns:a="http://schemas.openxmlformats.org/drawingml/2006/main" prst="rect">
+            <a:avLst/>
+          </a:prstGeom>
+          <a:solidFill xmlns:a="http://schemas.openxmlformats.org/drawingml/2006/main">
+            <a:srgbClr val="000000">
+              <a:alpha val="0"/>
+            </a:srgbClr>
+          </a:solidFill>
+          <a:ln xmlns:a="http://schemas.openxmlformats.org/drawingml/2006/main" w="0">
+            <a:solidFill>
+              <a:srgbClr val="000000">
+                <a:alpha val="0"/>
+              </a:srgbClr>
+            </a:solidFill>
+            <a:prstDash val="solid"/>
+          </a:ln>
+        </p:spPr>
+        <p:txBody>
+          <a:bodyPr xmlns:a="http://schemas.openxmlformats.org/drawingml/2006/main" lIns="0" tIns="0" rIns="0" bIns="0" anchor="ctr"/>
+          <a:lstStyle xmlns:a="http://schemas.openxmlformats.org/drawingml/2006/main"/>
+          <a:p xmlns:a="http://schemas.openxmlformats.org/drawingml/2006/main">
+            <a:pPr algn="l">
+              <a:defRPr sz="825" b="1">
+                <a:solidFill>
+                  <a:srgbClr val="7A49F2"/>
+                </a:solidFill>
+                <a:latin typeface="Aptos"/>
+                <a:ea typeface="Aptos"/>
+                <a:cs typeface="Aptos"/>
+              </a:defRPr>
+            </a:pPr>
+            <a:r>
+              <a:rPr sz="825" b="1">
+                <a:solidFill>
+                  <a:srgbClr val="7A49F2"/>
+                </a:solidFill>
+                <a:latin typeface="Aptos"/>
+                <a:ea typeface="Aptos"/>
+                <a:cs typeface="Aptos"/>
+              </a:rPr>
+              <a:t>TECHNICAL DIRECTION</a:t>
+            </a:r>
+          </a:p>
+        </p:txBody>
+      </p:sp>
+      <p:sp>
+        <p:nvSpPr>
+          <p:cNvPr id="26" name="">
+            <a:extLst xmlns:a="http://schemas.openxmlformats.org/drawingml/2006/main">
+              <a:ext uri="{FF2B5EF4-FFF2-40B4-BE49-F238E27FC236}">
+                <a16:creationId xmlns:a16="http://schemas.microsoft.com/office/drawing/2014/main" id="{7B1E2F6C-2DB6-4E55-BC14-35B9C2C3EE67}"/>
+              </a:ext>
+            </a:extLst>
+          </p:cNvPr>
+          <p:cNvSpPr>
+            <a:spLocks xmlns:a="http://schemas.openxmlformats.org/drawingml/2006/main" noGrp="1"/>
+          </p:cNvSpPr>
+          <p:nvPr/>
+        </p:nvSpPr>
+        <p:spPr>
+          <a:xfrm xmlns:a="http://schemas.openxmlformats.org/drawingml/2006/main">
+            <a:off x="5657850" y="4000500"/>
+            <a:ext cx="4572000" cy="285750"/>
+          </a:xfrm>
+          <a:prstGeom xmlns:a="http://schemas.openxmlformats.org/drawingml/2006/main" prst="rect">
+            <a:avLst/>
+          </a:prstGeom>
+          <a:solidFill xmlns:a="http://schemas.openxmlformats.org/drawingml/2006/main">
+            <a:srgbClr val="000000">
+              <a:alpha val="0"/>
+            </a:srgbClr>
+          </a:solidFill>
+          <a:ln xmlns:a="http://schemas.openxmlformats.org/drawingml/2006/main" w="0">
+            <a:solidFill>
+              <a:srgbClr val="000000">
+                <a:alpha val="0"/>
+              </a:srgbClr>
+            </a:solidFill>
+            <a:prstDash val="solid"/>
+          </a:ln>
+        </p:spPr>
+        <p:txBody>
+          <a:bodyPr xmlns:a="http://schemas.openxmlformats.org/drawingml/2006/main" lIns="19050" tIns="19050" rIns="19050" bIns="19050" anchor="t"/>
+          <a:lstStyle xmlns:a="http://schemas.openxmlformats.org/drawingml/2006/main"/>
+          <a:p xmlns:a="http://schemas.openxmlformats.org/drawingml/2006/main">
+            <a:pPr algn="l">
+              <a:defRPr sz="975" b="0">
+                <a:solidFill>
+                  <a:srgbClr val="0A1020"/>
+                </a:solidFill>
+                <a:latin typeface="Aptos"/>
+                <a:ea typeface="Aptos"/>
+                <a:cs typeface="Aptos"/>
+              </a:defRPr>
+            </a:pPr>
+            <a:r>
+              <a:rPr sz="975" b="0">
+                <a:solidFill>
+                  <a:srgbClr val="0A1020"/>
+                </a:solidFill>
+                <a:latin typeface="Aptos"/>
+                <a:ea typeface="Aptos"/>
+                <a:cs typeface="Aptos"/>
+              </a:rPr>
+              <a:t>Lineage, PASS / TOXIC verification, PQC roadmap, and AEGIS path.</a:t>
+            </a:r>
+          </a:p>
+        </p:txBody>
+      </p:sp>
+      <p:sp>
+        <p:nvSpPr>
+          <p:cNvPr id="27" name="">
+            <a:extLst xmlns:a="http://schemas.openxmlformats.org/drawingml/2006/main">
+              <a:ext uri="{FF2B5EF4-FFF2-40B4-BE49-F238E27FC236}">
+                <a16:creationId xmlns:a16="http://schemas.microsoft.com/office/drawing/2014/main" id="{0A670741-7709-4905-A7B8-FFB8EFE58D36}"/>
+              </a:ext>
+            </a:extLst>
+          </p:cNvPr>
+          <p:cNvSpPr>
+            <a:spLocks xmlns:a="http://schemas.openxmlformats.org/drawingml/2006/main" noGrp="1"/>
+          </p:cNvSpPr>
+          <p:nvPr/>
+        </p:nvSpPr>
+        <p:spPr>
+          <a:xfrm xmlns:a="http://schemas.openxmlformats.org/drawingml/2006/main">
+            <a:off x="5429250" y="4514850"/>
+            <a:ext cx="5334000" cy="800100"/>
+          </a:xfrm>
+          <a:prstGeom xmlns:a="http://schemas.openxmlformats.org/drawingml/2006/main" prst="rect">
+            <a:avLst/>
+          </a:prstGeom>
+          <a:solidFill xmlns:a="http://schemas.openxmlformats.org/drawingml/2006/main">
+            <a:srgbClr val="FFFFFF"/>
+          </a:solidFill>
+          <a:ln xmlns:a="http://schemas.openxmlformats.org/drawingml/2006/main" w="9525">
+            <a:solidFill>
+              <a:srgbClr val="DDE3F0"/>
+            </a:solidFill>
+            <a:prstDash val="solid"/>
+          </a:ln>
+        </p:spPr>
+      </p:sp>
+      <p:sp>
+        <p:nvSpPr>
+          <p:cNvPr id="28" name="">
+            <a:extLst xmlns:a="http://schemas.openxmlformats.org/drawingml/2006/main">
+              <a:ext uri="{FF2B5EF4-FFF2-40B4-BE49-F238E27FC236}">
+                <a16:creationId xmlns:a16="http://schemas.microsoft.com/office/drawing/2014/main" id="{712897B8-ED8C-4B5A-8C56-3ACC96A17772}"/>
+              </a:ext>
+            </a:extLst>
+          </p:cNvPr>
+          <p:cNvSpPr>
+            <a:spLocks xmlns:a="http://schemas.openxmlformats.org/drawingml/2006/main" noGrp="1"/>
+          </p:cNvSpPr>
+          <p:nvPr/>
+        </p:nvSpPr>
+        <p:spPr>
+          <a:xfrm xmlns:a="http://schemas.openxmlformats.org/drawingml/2006/main">
+            <a:off x="5429250" y="4514850"/>
+            <a:ext cx="47625" cy="800100"/>
+          </a:xfrm>
+          <a:prstGeom xmlns:a="http://schemas.openxmlformats.org/drawingml/2006/main" prst="rect">
+            <a:avLst/>
+          </a:prstGeom>
+          <a:solidFill xmlns:a="http://schemas.openxmlformats.org/drawingml/2006/main">
+            <a:srgbClr val="C52EE8"/>
+          </a:solidFill>
+          <a:ln xmlns:a="http://schemas.openxmlformats.org/drawingml/2006/main" w="0">
+            <a:solidFill>
+              <a:srgbClr val="000000">
+                <a:alpha val="0"/>
+              </a:srgbClr>
+            </a:solidFill>
+            <a:prstDash val="solid"/>
+          </a:ln>
+        </p:spPr>
+      </p:sp>
+      <p:sp>
+        <p:nvSpPr>
+          <p:cNvPr id="29" name="">
+            <a:extLst xmlns:a="http://schemas.openxmlformats.org/drawingml/2006/main">
+              <a:ext uri="{FF2B5EF4-FFF2-40B4-BE49-F238E27FC236}">
+                <a16:creationId xmlns:a16="http://schemas.microsoft.com/office/drawing/2014/main" id="{C69B6331-073C-4D0C-8973-C539DC3F5262}"/>
+              </a:ext>
+            </a:extLst>
+          </p:cNvPr>
+          <p:cNvSpPr>
+            <a:spLocks xmlns:a="http://schemas.openxmlformats.org/drawingml/2006/main" noGrp="1"/>
+          </p:cNvSpPr>
+          <p:nvPr/>
+        </p:nvSpPr>
+        <p:spPr>
+          <a:xfrm xmlns:a="http://schemas.openxmlformats.org/drawingml/2006/main">
+            <a:off x="5657850" y="4610100"/>
+            <a:ext cx="2000250" cy="171450"/>
+          </a:xfrm>
+          <a:prstGeom xmlns:a="http://schemas.openxmlformats.org/drawingml/2006/main" prst="rect">
+            <a:avLst/>
+          </a:prstGeom>
+          <a:solidFill xmlns:a="http://schemas.openxmlformats.org/drawingml/2006/main">
+            <a:srgbClr val="000000">
+              <a:alpha val="0"/>
+            </a:srgbClr>
+          </a:solidFill>
+          <a:ln xmlns:a="http://schemas.openxmlformats.org/drawingml/2006/main" w="0">
+            <a:solidFill>
+              <a:srgbClr val="000000">
+                <a:alpha val="0"/>
+              </a:srgbClr>
+            </a:solidFill>
+            <a:prstDash val="solid"/>
+          </a:ln>
+        </p:spPr>
+        <p:txBody>
+          <a:bodyPr xmlns:a="http://schemas.openxmlformats.org/drawingml/2006/main" lIns="0" tIns="0" rIns="0" bIns="0" anchor="ctr"/>
+          <a:lstStyle xmlns:a="http://schemas.openxmlformats.org/drawingml/2006/main"/>
+          <a:p xmlns:a="http://schemas.openxmlformats.org/drawingml/2006/main">
+            <a:pPr algn="l">
+              <a:defRPr sz="825" b="1">
+                <a:solidFill>
+                  <a:srgbClr val="C52EE8"/>
+                </a:solidFill>
+                <a:latin typeface="Aptos"/>
+                <a:ea typeface="Aptos"/>
+                <a:cs typeface="Aptos"/>
+              </a:defRPr>
+            </a:pPr>
+            <a:r>
+              <a:rPr sz="825" b="1">
+                <a:solidFill>
+                  <a:srgbClr val="C52EE8"/>
+                </a:solidFill>
+                <a:latin typeface="Aptos"/>
+                <a:ea typeface="Aptos"/>
+                <a:cs typeface="Aptos"/>
+              </a:rPr>
+              <a:t>COMMERCIAL FOCUS</a:t>
+            </a:r>
+          </a:p>
+        </p:txBody>
+      </p:sp>
+      <p:sp>
+        <p:nvSpPr>
+          <p:cNvPr id="30" name="">
+            <a:extLst xmlns:a="http://schemas.openxmlformats.org/drawingml/2006/main">
+              <a:ext uri="{FF2B5EF4-FFF2-40B4-BE49-F238E27FC236}">
+                <a16:creationId xmlns:a16="http://schemas.microsoft.com/office/drawing/2014/main" id="{E97E7E1B-E9CC-4A26-9F0A-E1C0A8EF3999}"/>
+              </a:ext>
+            </a:extLst>
+          </p:cNvPr>
+          <p:cNvSpPr>
+            <a:spLocks xmlns:a="http://schemas.openxmlformats.org/drawingml/2006/main" noGrp="1"/>
+          </p:cNvSpPr>
+          <p:nvPr/>
+        </p:nvSpPr>
+        <p:spPr>
+          <a:xfrm xmlns:a="http://schemas.openxmlformats.org/drawingml/2006/main">
+            <a:off x="5657850" y="4857750"/>
+            <a:ext cx="4572000" cy="285750"/>
+          </a:xfrm>
+          <a:prstGeom xmlns:a="http://schemas.openxmlformats.org/drawingml/2006/main" prst="rect">
+            <a:avLst/>
+          </a:prstGeom>
+          <a:solidFill xmlns:a="http://schemas.openxmlformats.org/drawingml/2006/main">
+            <a:srgbClr val="000000">
+              <a:alpha val="0"/>
+            </a:srgbClr>
+          </a:solidFill>
+          <a:ln xmlns:a="http://schemas.openxmlformats.org/drawingml/2006/main" w="0">
+            <a:solidFill>
+              <a:srgbClr val="000000">
+                <a:alpha val="0"/>
+              </a:srgbClr>
+            </a:solidFill>
+            <a:prstDash val="solid"/>
+          </a:ln>
+        </p:spPr>
+        <p:txBody>
+          <a:bodyPr xmlns:a="http://schemas.openxmlformats.org/drawingml/2006/main" lIns="19050" tIns="19050" rIns="19050" bIns="19050" anchor="t"/>
+          <a:lstStyle xmlns:a="http://schemas.openxmlformats.org/drawingml/2006/main"/>
+          <a:p xmlns:a="http://schemas.openxmlformats.org/drawingml/2006/main">
+            <a:pPr algn="l">
+              <a:defRPr sz="975" b="0">
+                <a:solidFill>
+                  <a:srgbClr val="0A1020"/>
+                </a:solidFill>
+                <a:latin typeface="Aptos"/>
+                <a:ea typeface="Aptos"/>
+                <a:cs typeface="Aptos"/>
+              </a:defRPr>
+            </a:pPr>
+            <a:r>
+              <a:rPr sz="975" b="0">
+                <a:solidFill>
+                  <a:srgbClr val="0A1020"/>
+                </a:solidFill>
+                <a:latin typeface="Aptos"/>
+                <a:ea typeface="Aptos"/>
+                <a:cs typeface="Aptos"/>
+              </a:rPr>
+              <a:t>Design partners, usage pricing, audit services, defense customers.</a:t>
+            </a:r>
+          </a:p>
+        </p:txBody>
+      </p:sp>
+      <p:sp>
+        <p:nvSpPr>
+          <p:cNvPr id="31" name="">
+            <a:extLst xmlns:a="http://schemas.openxmlformats.org/drawingml/2006/main">
+              <a:ext uri="{FF2B5EF4-FFF2-40B4-BE49-F238E27FC236}">
+                <a16:creationId xmlns:a16="http://schemas.microsoft.com/office/drawing/2014/main" id="{51BA09F4-68E9-4805-8147-E1DC9AA07CD8}"/>
+              </a:ext>
+            </a:extLst>
+          </p:cNvPr>
+          <p:cNvSpPr>
+            <a:spLocks xmlns:a="http://schemas.openxmlformats.org/drawingml/2006/main" noGrp="1"/>
+          </p:cNvSpPr>
+          <p:nvPr/>
+        </p:nvSpPr>
+        <p:spPr>
+          <a:xfrm xmlns:a="http://schemas.openxmlformats.org/drawingml/2006/main">
+            <a:off x="1104900" y="5562600"/>
+            <a:ext cx="9353550" cy="514350"/>
+          </a:xfrm>
+          <a:prstGeom xmlns:a="http://schemas.openxmlformats.org/drawingml/2006/main" prst="rect">
+            <a:avLst/>
+          </a:prstGeom>
+          <a:solidFill xmlns:a="http://schemas.openxmlformats.org/drawingml/2006/main">
+            <a:srgbClr val="E6FAFD"/>
+          </a:solidFill>
+          <a:ln xmlns:a="http://schemas.openxmlformats.org/drawingml/2006/main" w="9525">
+            <a:solidFill>
+              <a:srgbClr val="CDEFF4"/>
+            </a:solidFill>
+            <a:prstDash val="solid"/>
+          </a:ln>
+        </p:spPr>
+      </p:sp>
+      <p:sp>
+        <p:nvSpPr>
+          <p:cNvPr id="32" name="">
+            <a:extLst xmlns:a="http://schemas.openxmlformats.org/drawingml/2006/main">
+              <a:ext uri="{FF2B5EF4-FFF2-40B4-BE49-F238E27FC236}">
+                <a16:creationId xmlns:a16="http://schemas.microsoft.com/office/drawing/2014/main" id="{5148B5DB-3A84-406F-B29F-DE99E18D81CD}"/>
+              </a:ext>
+            </a:extLst>
+          </p:cNvPr>
+          <p:cNvSpPr>
+            <a:spLocks xmlns:a="http://schemas.openxmlformats.org/drawingml/2006/main" noGrp="1"/>
+          </p:cNvSpPr>
+          <p:nvPr/>
+        </p:nvSpPr>
+        <p:spPr>
+          <a:xfrm xmlns:a="http://schemas.openxmlformats.org/drawingml/2006/main">
+            <a:off x="1390650" y="5676900"/>
+            <a:ext cx="8763000" cy="304800"/>
+          </a:xfrm>
+          <a:prstGeom xmlns:a="http://schemas.openxmlformats.org/drawingml/2006/main" prst="rect">
+            <a:avLst/>
+          </a:prstGeom>
+          <a:solidFill xmlns:a="http://schemas.openxmlformats.org/drawingml/2006/main">
+            <a:srgbClr val="000000">
+              <a:alpha val="0"/>
+            </a:srgbClr>
+          </a:solidFill>
+          <a:ln xmlns:a="http://schemas.openxmlformats.org/drawingml/2006/main" w="0">
+            <a:solidFill>
+              <a:srgbClr val="000000">
+                <a:alpha val="0"/>
+              </a:srgbClr>
+            </a:solidFill>
+            <a:prstDash val="solid"/>
+          </a:ln>
+        </p:spPr>
+        <p:txBody>
+          <a:bodyPr xmlns:a="http://schemas.openxmlformats.org/drawingml/2006/main" lIns="19050" tIns="19050" rIns="19050" bIns="19050" anchor="t"/>
+          <a:lstStyle xmlns:a="http://schemas.openxmlformats.org/drawingml/2006/main"/>
+          <a:p xmlns:a="http://schemas.openxmlformats.org/drawingml/2006/main">
+            <a:pPr algn="l">
+              <a:defRPr sz="990" b="0">
+                <a:solidFill>
+                  <a:srgbClr val="0A1020"/>
+                </a:solidFill>
+                <a:latin typeface="Aptos"/>
+                <a:ea typeface="Aptos"/>
+                <a:cs typeface="Aptos"/>
+              </a:defRPr>
+            </a:pPr>
+            <a:r>
+              <a:rPr sz="990" b="0">
+                <a:solidFill>
+                  <a:srgbClr val="0A1020"/>
+                </a:solidFill>
+                <a:latin typeface="Aptos"/>
+                <a:ea typeface="Aptos"/>
+                <a:cs typeface="Aptos"/>
+              </a:rPr>
+              <a:t>Founder role: own the Agent Passport category, recruit design partners, convert pilots into revenue, and build global IP around agent trust infrastructure.</a:t>
+            </a:r>
+          </a:p>
+        </p:txBody>
+      </p:sp>
+      <p:sp>
+        <p:nvSpPr>
+          <p:cNvPr id="33" name="">
+            <a:extLst xmlns:a="http://schemas.openxmlformats.org/drawingml/2006/main">
+              <a:ext uri="{FF2B5EF4-FFF2-40B4-BE49-F238E27FC236}">
+                <a16:creationId xmlns:a16="http://schemas.microsoft.com/office/drawing/2014/main" id="{D24DE744-B48C-4DEE-8BAA-7F8DFF921793}"/>
+              </a:ext>
+            </a:extLst>
+          </p:cNvPr>
+          <p:cNvSpPr>
+            <a:spLocks xmlns:a="http://schemas.openxmlformats.org/drawingml/2006/main" noGrp="1"/>
+          </p:cNvSpPr>
+          <p:nvPr/>
+        </p:nvSpPr>
+        <p:spPr>
+          <a:xfrm xmlns:a="http://schemas.openxmlformats.org/drawingml/2006/main">
+            <a:off x="514350" y="6210300"/>
+            <a:ext cx="366713" cy="28575"/>
+          </a:xfrm>
+          <a:prstGeom xmlns:a="http://schemas.openxmlformats.org/drawingml/2006/main" prst="rect">
+            <a:avLst/>
+          </a:prstGeom>
+          <a:solidFill xmlns:a="http://schemas.openxmlformats.org/drawingml/2006/main">
+            <a:srgbClr val="19D9F2"/>
+          </a:solidFill>
+          <a:ln xmlns:a="http://schemas.openxmlformats.org/drawingml/2006/main" w="0">
+            <a:solidFill>
+              <a:srgbClr val="000000">
+                <a:alpha val="0"/>
+              </a:srgbClr>
+            </a:solidFill>
+            <a:prstDash val="solid"/>
+          </a:ln>
+        </p:spPr>
+      </p:sp>
+      <p:sp>
+        <p:nvSpPr>
+          <p:cNvPr id="34" name="">
+            <a:extLst xmlns:a="http://schemas.openxmlformats.org/drawingml/2006/main">
+              <a:ext uri="{FF2B5EF4-FFF2-40B4-BE49-F238E27FC236}">
+                <a16:creationId xmlns:a16="http://schemas.microsoft.com/office/drawing/2014/main" id="{7E252587-94A7-4C90-B3F9-C03C971CB2C2}"/>
+              </a:ext>
+            </a:extLst>
+          </p:cNvPr>
+          <p:cNvSpPr>
+            <a:spLocks xmlns:a="http://schemas.openxmlformats.org/drawingml/2006/main" noGrp="1"/>
+          </p:cNvSpPr>
+          <p:nvPr/>
+        </p:nvSpPr>
+        <p:spPr>
+          <a:xfrm xmlns:a="http://schemas.openxmlformats.org/drawingml/2006/main">
+            <a:off x="871538" y="6210300"/>
+            <a:ext cx="366713" cy="28575"/>
+          </a:xfrm>
+          <a:prstGeom xmlns:a="http://schemas.openxmlformats.org/drawingml/2006/main" prst="rect">
+            <a:avLst/>
+          </a:prstGeom>
+          <a:solidFill xmlns:a="http://schemas.openxmlformats.org/drawingml/2006/main">
+            <a:srgbClr val="4169F4"/>
+          </a:solidFill>
+          <a:ln xmlns:a="http://schemas.openxmlformats.org/drawingml/2006/main" w="0">
+            <a:solidFill>
+              <a:srgbClr val="000000">
+                <a:alpha val="0"/>
+              </a:srgbClr>
+            </a:solidFill>
+            <a:prstDash val="solid"/>
+          </a:ln>
+        </p:spPr>
+      </p:sp>
+      <p:sp>
+        <p:nvSpPr>
+          <p:cNvPr id="35" name="">
+            <a:extLst xmlns:a="http://schemas.openxmlformats.org/drawingml/2006/main">
+              <a:ext uri="{FF2B5EF4-FFF2-40B4-BE49-F238E27FC236}">
+                <a16:creationId xmlns:a16="http://schemas.microsoft.com/office/drawing/2014/main" id="{B544CD3F-9797-414C-B12F-ED40C1321701}"/>
+              </a:ext>
+            </a:extLst>
+          </p:cNvPr>
+          <p:cNvSpPr>
+            <a:spLocks xmlns:a="http://schemas.openxmlformats.org/drawingml/2006/main" noGrp="1"/>
+          </p:cNvSpPr>
+          <p:nvPr/>
+        </p:nvSpPr>
+        <p:spPr>
+          <a:xfrm xmlns:a="http://schemas.openxmlformats.org/drawingml/2006/main">
+            <a:off x="1228725" y="6210300"/>
+            <a:ext cx="366713" cy="28575"/>
+          </a:xfrm>
+          <a:prstGeom xmlns:a="http://schemas.openxmlformats.org/drawingml/2006/main" prst="rect">
+            <a:avLst/>
+          </a:prstGeom>
+          <a:solidFill xmlns:a="http://schemas.openxmlformats.org/drawingml/2006/main">
+            <a:srgbClr val="7A49F2"/>
+          </a:solidFill>
+          <a:ln xmlns:a="http://schemas.openxmlformats.org/drawingml/2006/main" w="0">
+            <a:solidFill>
+              <a:srgbClr val="000000">
+                <a:alpha val="0"/>
+              </a:srgbClr>
+            </a:solidFill>
+            <a:prstDash val="solid"/>
+          </a:ln>
+        </p:spPr>
+      </p:sp>
+      <p:sp>
+        <p:nvSpPr>
+          <p:cNvPr id="36" name="">
+            <a:extLst xmlns:a="http://schemas.openxmlformats.org/drawingml/2006/main">
+              <a:ext uri="{FF2B5EF4-FFF2-40B4-BE49-F238E27FC236}">
+                <a16:creationId xmlns:a16="http://schemas.microsoft.com/office/drawing/2014/main" id="{8D5FC3D0-B59A-4123-97E4-729B96744729}"/>
+              </a:ext>
+            </a:extLst>
+          </p:cNvPr>
+          <p:cNvSpPr>
+            <a:spLocks xmlns:a="http://schemas.openxmlformats.org/drawingml/2006/main" noGrp="1"/>
+          </p:cNvSpPr>
+          <p:nvPr/>
+        </p:nvSpPr>
+        <p:spPr>
+          <a:xfrm xmlns:a="http://schemas.openxmlformats.org/drawingml/2006/main">
+            <a:off x="1585913" y="6210300"/>
+            <a:ext cx="366713" cy="28575"/>
+          </a:xfrm>
+          <a:prstGeom xmlns:a="http://schemas.openxmlformats.org/drawingml/2006/main" prst="rect">
+            <a:avLst/>
+          </a:prstGeom>
+          <a:solidFill xmlns:a="http://schemas.openxmlformats.org/drawingml/2006/main">
+            <a:srgbClr val="C52EE8"/>
+          </a:solidFill>
+          <a:ln xmlns:a="http://schemas.openxmlformats.org/drawingml/2006/main" w="0">
+            <a:solidFill>
+              <a:srgbClr val="000000">
+                <a:alpha val="0"/>
+              </a:srgbClr>
+            </a:solidFill>
+            <a:prstDash val="solid"/>
+          </a:ln>
+        </p:spPr>
+      </p:sp>
+      <p:sp>
+        <p:nvSpPr>
+          <p:cNvPr id="37" name="">
+            <a:extLst xmlns:a="http://schemas.openxmlformats.org/drawingml/2006/main">
+              <a:ext uri="{FF2B5EF4-FFF2-40B4-BE49-F238E27FC236}">
+                <a16:creationId xmlns:a16="http://schemas.microsoft.com/office/drawing/2014/main" id="{F34E342B-D6AB-44E2-9924-EAAD18E922D2}"/>
+              </a:ext>
+            </a:extLst>
+          </p:cNvPr>
+          <p:cNvSpPr>
+            <a:spLocks xmlns:a="http://schemas.openxmlformats.org/drawingml/2006/main" noGrp="1"/>
+          </p:cNvSpPr>
+          <p:nvPr/>
+        </p:nvSpPr>
+        <p:spPr>
+          <a:xfrm xmlns:a="http://schemas.openxmlformats.org/drawingml/2006/main">
+            <a:off x="2057400" y="6419850"/>
+            <a:ext cx="6858000" cy="171450"/>
+          </a:xfrm>
+          <a:prstGeom xmlns:a="http://schemas.openxmlformats.org/drawingml/2006/main" prst="rect">
+            <a:avLst/>
+          </a:prstGeom>
+          <a:solidFill xmlns:a="http://schemas.openxmlformats.org/drawingml/2006/main">
+            <a:srgbClr val="000000">
+              <a:alpha val="0"/>
+            </a:srgbClr>
+          </a:solidFill>
+          <a:ln xmlns:a="http://schemas.openxmlformats.org/drawingml/2006/main" w="0">
+            <a:solidFill>
+              <a:srgbClr val="000000">
+                <a:alpha val="0"/>
+              </a:srgbClr>
+            </a:solidFill>
+            <a:prstDash val="solid"/>
+          </a:ln>
+        </p:spPr>
+        <p:txBody>
+          <a:bodyPr xmlns:a="http://schemas.openxmlformats.org/drawingml/2006/main" lIns="0" tIns="0" rIns="0" bIns="0" anchor="t"/>
+          <a:lstStyle xmlns:a="http://schemas.openxmlformats.org/drawingml/2006/main"/>
+          <a:p xmlns:a="http://schemas.openxmlformats.org/drawingml/2006/main">
+            <a:pPr algn="l">
+              <a:defRPr sz="750" b="0">
+                <a:solidFill>
+                  <a:srgbClr val="8A91A3"/>
+                </a:solidFill>
+                <a:latin typeface="Aptos"/>
+                <a:ea typeface="Aptos"/>
+                <a:cs typeface="Aptos"/>
+              </a:defRPr>
+            </a:pPr>
+            <a:r>
+              <a:rPr sz="750" b="0">
+                <a:solidFill>
+                  <a:srgbClr val="8A91A3"/>
+                </a:solidFill>
+                <a:latin typeface="Aptos"/>
+                <a:ea typeface="Aptos"/>
+                <a:cs typeface="Aptos"/>
+              </a:rPr>
+              <a:t>SYNTRIASS | AIRON Trust Infrastructure | Confidential pilot deck</a:t>
+            </a:r>
+          </a:p>
+        </p:txBody>
+      </p:sp>
+      <p:sp>
+        <p:nvSpPr>
+          <p:cNvPr id="38" name="">
+            <a:extLst xmlns:a="http://schemas.openxmlformats.org/drawingml/2006/main">
+              <a:ext uri="{FF2B5EF4-FFF2-40B4-BE49-F238E27FC236}">
+                <a16:creationId xmlns:a16="http://schemas.microsoft.com/office/drawing/2014/main" id="{13C6E63D-F2F0-4A3B-89A2-596D8AC39348}"/>
+              </a:ext>
+            </a:extLst>
+          </p:cNvPr>
+          <p:cNvSpPr>
+            <a:spLocks xmlns:a="http://schemas.openxmlformats.org/drawingml/2006/main" noGrp="1"/>
+          </p:cNvSpPr>
+          <p:nvPr/>
+        </p:nvSpPr>
+        <p:spPr>
+          <a:xfrm xmlns:a="http://schemas.openxmlformats.org/drawingml/2006/main">
+            <a:off x="11277600" y="6362700"/>
+            <a:ext cx="400050" cy="247650"/>
+          </a:xfrm>
+          <a:prstGeom xmlns:a="http://schemas.openxmlformats.org/drawingml/2006/main" prst="rect">
+            <a:avLst/>
+          </a:prstGeom>
+          <a:solidFill xmlns:a="http://schemas.openxmlformats.org/drawingml/2006/main">
+            <a:srgbClr val="000000">
+              <a:alpha val="0"/>
+            </a:srgbClr>
+          </a:solidFill>
+          <a:ln xmlns:a="http://schemas.openxmlformats.org/drawingml/2006/main" w="0">
+            <a:solidFill>
+              <a:srgbClr val="000000">
+                <a:alpha val="0"/>
+              </a:srgbClr>
+            </a:solidFill>
+            <a:prstDash val="solid"/>
+          </a:ln>
+        </p:spPr>
+        <p:txBody>
+          <a:bodyPr xmlns:a="http://schemas.openxmlformats.org/drawingml/2006/main" lIns="0" tIns="0" rIns="0" bIns="0" anchor="t"/>
+          <a:lstStyle xmlns:a="http://schemas.openxmlformats.org/drawingml/2006/main"/>
+          <a:p xmlns:a="http://schemas.openxmlformats.org/drawingml/2006/main">
+            <a:pPr algn="r">
+              <a:defRPr sz="825" b="0">
+                <a:solidFill>
+                  <a:srgbClr val="8A91A3"/>
+                </a:solidFill>
+                <a:latin typeface="Aptos Mono"/>
+                <a:ea typeface="Aptos Mono"/>
+                <a:cs typeface="Aptos Mono"/>
+              </a:defRPr>
+            </a:pPr>
+            <a:r>
+              <a:rPr sz="825" b="0">
+                <a:solidFill>
+                  <a:srgbClr val="8A91A3"/>
+                </a:solidFill>
+                <a:latin typeface="Aptos Mono"/>
+                <a:ea typeface="Aptos Mono"/>
+                <a:cs typeface="Aptos Mono"/>
+              </a:rPr>
+              <a:t>12</a:t>
+            </a:r>
+          </a:p>
+        </p:txBody>
+      </p:sp>
+    </p:spTree>
+    <p:extLst>
+      <p:ext uri="{BB962C8B-B14F-4D97-AF65-F5344CB8AC3E}">
+        <p14:creationId xmlns:p14="http://schemas.microsoft.com/office/powerpoint/2010/main" val="696994772"/>
+      </p:ext>
+    </p:extLst>
+  </p:cSld>
+</p:sld>
+</file>
+
+<file path=ppt/slides/slide13.xml><?xml version="1.0" encoding="utf-8"?>
+<p:sld xmlns:p="http://schemas.openxmlformats.org/presentationml/2006/main">
+  <p:cSld>
+    <p:spTree>
+      <p:nvGrpSpPr>
+        <p:cNvPr id="1" name=""/>
+        <p:cNvGrpSpPr/>
+        <p:nvPr/>
+      </p:nvGrpSpPr>
+      <p:grpSpPr>
+        <a:xfrm xmlns:a="http://schemas.openxmlformats.org/drawingml/2006/main"/>
+      </p:grpSpPr>
+      <p:sp>
+        <p:nvSpPr>
+          <p:cNvPr id="1" name="">
+            <a:extLst xmlns:a="http://schemas.openxmlformats.org/drawingml/2006/main">
+              <a:ext uri="{FF2B5EF4-FFF2-40B4-BE49-F238E27FC236}">
+                <a16:creationId xmlns:a16="http://schemas.microsoft.com/office/drawing/2014/main" id="{FF9356AE-E9BA-4558-B050-E58E1CCB9461}"/>
+              </a:ext>
+            </a:extLst>
+          </p:cNvPr>
+          <p:cNvSpPr>
+            <a:spLocks xmlns:a="http://schemas.openxmlformats.org/drawingml/2006/main" noGrp="1"/>
+          </p:cNvSpPr>
+          <p:nvPr/>
+        </p:nvSpPr>
+        <p:spPr>
+          <a:xfrm xmlns:a="http://schemas.openxmlformats.org/drawingml/2006/main">
+            <a:off x="0" y="0"/>
+            <a:ext cx="12192000" cy="6858000"/>
+          </a:xfrm>
+          <a:prstGeom xmlns:a="http://schemas.openxmlformats.org/drawingml/2006/main" prst="rect">
+            <a:avLst/>
+          </a:prstGeom>
+          <a:solidFill xmlns:a="http://schemas.openxmlformats.org/drawingml/2006/main">
+            <a:srgbClr val="07002B"/>
+          </a:solidFill>
           <a:ln xmlns:a="http://schemas.openxmlformats.org/drawingml/2006/main" w="0">
             <a:solidFill>
               <a:srgbClr val="000000">
@@ -7753,7 +9671,7 @@
           <p:cNvPr id="2" name="">
             <a:extLst xmlns:a="http://schemas.openxmlformats.org/drawingml/2006/main">
               <a:ext uri="{FF2B5EF4-FFF2-40B4-BE49-F238E27FC236}">
-                <a16:creationId xmlns:a16="http://schemas.microsoft.com/office/drawing/2014/main" id="{0FC8B072-C2FB-4579-ADC1-6E60AF0C26DF}"/>
+                <a16:creationId xmlns:a16="http://schemas.microsoft.com/office/drawing/2014/main" id="{A39FA257-D352-4D64-8860-70AFF9CC285C}"/>
               </a:ext>
             </a:extLst>
           </p:cNvPr>
@@ -7788,7 +9706,7 @@
           <p:cNvPr id="3" name="">
             <a:extLst xmlns:a="http://schemas.openxmlformats.org/drawingml/2006/main">
               <a:ext uri="{FF2B5EF4-FFF2-40B4-BE49-F238E27FC236}">
-                <a16:creationId xmlns:a16="http://schemas.microsoft.com/office/drawing/2014/main" id="{77836A35-C5CA-4D1F-9FD8-50C19F418DE0}"/>
+                <a16:creationId xmlns:a16="http://schemas.microsoft.com/office/drawing/2014/main" id="{6F0DBEBF-832F-469F-A9D4-BEF9E8CDE69E}"/>
               </a:ext>
             </a:extLst>
           </p:cNvPr>
@@ -7823,7 +9741,7 @@
           <p:cNvPr id="4" name="">
             <a:extLst xmlns:a="http://schemas.openxmlformats.org/drawingml/2006/main">
               <a:ext uri="{FF2B5EF4-FFF2-40B4-BE49-F238E27FC236}">
-                <a16:creationId xmlns:a16="http://schemas.microsoft.com/office/drawing/2014/main" id="{00969E03-2F80-4447-9F51-12D26537AB38}"/>
+                <a16:creationId xmlns:a16="http://schemas.microsoft.com/office/drawing/2014/main" id="{CFC51051-3C27-44DB-8DD0-5814831C592A}"/>
               </a:ext>
             </a:extLst>
           </p:cNvPr>
@@ -7858,7 +9776,7 @@
           <p:cNvPr id="5" name="">
             <a:extLst xmlns:a="http://schemas.openxmlformats.org/drawingml/2006/main">
               <a:ext uri="{FF2B5EF4-FFF2-40B4-BE49-F238E27FC236}">
-                <a16:creationId xmlns:a16="http://schemas.microsoft.com/office/drawing/2014/main" id="{193FA2EF-948D-41A0-91E8-292BA29E8159}"/>
+                <a16:creationId xmlns:a16="http://schemas.microsoft.com/office/drawing/2014/main" id="{0912BE8B-6281-4D03-BEC8-A2CAA69E9670}"/>
               </a:ext>
             </a:extLst>
           </p:cNvPr>
@@ -7897,7 +9815,7 @@
           <p:nvPr/>
         </p:nvPicPr>
         <p:blipFill>
-          <a:blip xmlns:r="http://schemas.openxmlformats.org/officeDocument/2006/relationships" xmlns:a="http://schemas.openxmlformats.org/drawingml/2006/main" r:embed="R9650bd4189104051"/>
+          <a:blip xmlns:r="http://schemas.openxmlformats.org/officeDocument/2006/relationships" xmlns:a="http://schemas.openxmlformats.org/drawingml/2006/main" r:embed="Rd2136d73a9424700"/>
           <a:stretch xmlns:a="http://schemas.openxmlformats.org/drawingml/2006/main"/>
         </p:blipFill>
         <p:spPr>
@@ -7915,7 +9833,7 @@
           <p:cNvPr id="7" name="">
             <a:extLst xmlns:a="http://schemas.openxmlformats.org/drawingml/2006/main">
               <a:ext uri="{FF2B5EF4-FFF2-40B4-BE49-F238E27FC236}">
-                <a16:creationId xmlns:a16="http://schemas.microsoft.com/office/drawing/2014/main" id="{93C067D9-8D7B-43A4-8CB3-629EC1691F32}"/>
+                <a16:creationId xmlns:a16="http://schemas.microsoft.com/office/drawing/2014/main" id="{A1C5DA43-64B7-48DF-B934-4347C1206230}"/>
               </a:ext>
             </a:extLst>
           </p:cNvPr>
@@ -7950,7 +9868,7 @@
           <p:cNvPr id="8" name="">
             <a:extLst xmlns:a="http://schemas.openxmlformats.org/drawingml/2006/main">
               <a:ext uri="{FF2B5EF4-FFF2-40B4-BE49-F238E27FC236}">
-                <a16:creationId xmlns:a16="http://schemas.microsoft.com/office/drawing/2014/main" id="{5EEF04C8-1B55-4557-8245-2FA30EAC52D4}"/>
+                <a16:creationId xmlns:a16="http://schemas.microsoft.com/office/drawing/2014/main" id="{F73C5068-5EBC-4A7E-B353-988F617FE038}"/>
               </a:ext>
             </a:extLst>
           </p:cNvPr>
@@ -7985,7 +9903,7 @@
           <p:cNvPr id="9" name="">
             <a:extLst xmlns:a="http://schemas.openxmlformats.org/drawingml/2006/main">
               <a:ext uri="{FF2B5EF4-FFF2-40B4-BE49-F238E27FC236}">
-                <a16:creationId xmlns:a16="http://schemas.microsoft.com/office/drawing/2014/main" id="{37B08A9F-0367-40B6-A0D8-545698C4C26F}"/>
+                <a16:creationId xmlns:a16="http://schemas.microsoft.com/office/drawing/2014/main" id="{22D0DC44-73CD-4AB9-A412-600DE016FD1A}"/>
               </a:ext>
             </a:extLst>
           </p:cNvPr>
@@ -8020,7 +9938,7 @@
           <p:cNvPr id="10" name="">
             <a:extLst xmlns:a="http://schemas.openxmlformats.org/drawingml/2006/main">
               <a:ext uri="{FF2B5EF4-FFF2-40B4-BE49-F238E27FC236}">
-                <a16:creationId xmlns:a16="http://schemas.microsoft.com/office/drawing/2014/main" id="{01173918-46D2-4D5E-ACED-7811D56A4BD2}"/>
+                <a16:creationId xmlns:a16="http://schemas.microsoft.com/office/drawing/2014/main" id="{54C9DD81-DC05-48D6-AAF9-420D3C457821}"/>
               </a:ext>
             </a:extLst>
           </p:cNvPr>
@@ -8055,7 +9973,7 @@
           <p:cNvPr id="11" name="">
             <a:extLst xmlns:a="http://schemas.openxmlformats.org/drawingml/2006/main">
               <a:ext uri="{FF2B5EF4-FFF2-40B4-BE49-F238E27FC236}">
-                <a16:creationId xmlns:a16="http://schemas.microsoft.com/office/drawing/2014/main" id="{E7F1F095-6E07-4D3F-A3D7-8A729413A634}"/>
+                <a16:creationId xmlns:a16="http://schemas.microsoft.com/office/drawing/2014/main" id="{9AFAFCFA-E6DC-42E3-8A56-D93F6D697942}"/>
               </a:ext>
             </a:extLst>
           </p:cNvPr>
@@ -8119,7 +10037,7 @@
           <p:cNvPr id="12" name="">
             <a:extLst xmlns:a="http://schemas.openxmlformats.org/drawingml/2006/main">
               <a:ext uri="{FF2B5EF4-FFF2-40B4-BE49-F238E27FC236}">
-                <a16:creationId xmlns:a16="http://schemas.microsoft.com/office/drawing/2014/main" id="{2CBFF153-F873-4685-BC76-ADE617B37F9F}"/>
+                <a16:creationId xmlns:a16="http://schemas.microsoft.com/office/drawing/2014/main" id="{4290CC42-4C76-4ACC-ABA9-5CB81BCA93D3}"/>
               </a:ext>
             </a:extLst>
           </p:cNvPr>
@@ -8183,7 +10101,7 @@
           <p:cNvPr id="13" name="">
             <a:extLst xmlns:a="http://schemas.openxmlformats.org/drawingml/2006/main">
               <a:ext uri="{FF2B5EF4-FFF2-40B4-BE49-F238E27FC236}">
-                <a16:creationId xmlns:a16="http://schemas.microsoft.com/office/drawing/2014/main" id="{9B7B73F4-EC0B-43BE-88A3-AADC57A9D67A}"/>
+                <a16:creationId xmlns:a16="http://schemas.microsoft.com/office/drawing/2014/main" id="{F58C202F-13F5-40C2-8CD1-9E888C0FF345}"/>
               </a:ext>
             </a:extLst>
           </p:cNvPr>
@@ -8247,7 +10165,7 @@
           <p:cNvPr id="14" name="">
             <a:extLst xmlns:a="http://schemas.openxmlformats.org/drawingml/2006/main">
               <a:ext uri="{FF2B5EF4-FFF2-40B4-BE49-F238E27FC236}">
-                <a16:creationId xmlns:a16="http://schemas.microsoft.com/office/drawing/2014/main" id="{8BAE0FB3-BC45-417E-8C32-A908F848AEFF}"/>
+                <a16:creationId xmlns:a16="http://schemas.microsoft.com/office/drawing/2014/main" id="{02C49E53-45F2-4CDD-90E6-2AE480EE74BC}"/>
               </a:ext>
             </a:extLst>
           </p:cNvPr>
@@ -8280,7 +10198,7 @@
           <p:cNvPr id="15" name="">
             <a:extLst xmlns:a="http://schemas.openxmlformats.org/drawingml/2006/main">
               <a:ext uri="{FF2B5EF4-FFF2-40B4-BE49-F238E27FC236}">
-                <a16:creationId xmlns:a16="http://schemas.microsoft.com/office/drawing/2014/main" id="{AA93D55C-9C1E-495A-8A9F-B6C0D95C8C59}"/>
+                <a16:creationId xmlns:a16="http://schemas.microsoft.com/office/drawing/2014/main" id="{556BA479-2219-4427-B7EA-3F9025827534}"/>
               </a:ext>
             </a:extLst>
           </p:cNvPr>
@@ -8344,7 +10262,7 @@
           <p:cNvPr id="16" name="">
             <a:extLst xmlns:a="http://schemas.openxmlformats.org/drawingml/2006/main">
               <a:ext uri="{FF2B5EF4-FFF2-40B4-BE49-F238E27FC236}">
-                <a16:creationId xmlns:a16="http://schemas.microsoft.com/office/drawing/2014/main" id="{7F6BF5E0-A7E2-4E70-BAFD-45B9ACA0A71A}"/>
+                <a16:creationId xmlns:a16="http://schemas.microsoft.com/office/drawing/2014/main" id="{B82C24CA-A331-4F27-9FD6-9B88F79016E4}"/>
               </a:ext>
             </a:extLst>
           </p:cNvPr>
@@ -8408,7 +10326,7 @@
           <p:cNvPr id="17" name="">
             <a:extLst xmlns:a="http://schemas.openxmlformats.org/drawingml/2006/main">
               <a:ext uri="{FF2B5EF4-FFF2-40B4-BE49-F238E27FC236}">
-                <a16:creationId xmlns:a16="http://schemas.microsoft.com/office/drawing/2014/main" id="{B5DBF9C5-84CE-4229-B7B9-0209C5899839}"/>
+                <a16:creationId xmlns:a16="http://schemas.microsoft.com/office/drawing/2014/main" id="{E1F75954-BC84-4209-AA65-6EEDFEB32B99}"/>
               </a:ext>
             </a:extLst>
           </p:cNvPr>
@@ -8441,7 +10359,7 @@
           <p:cNvPr id="18" name="">
             <a:extLst xmlns:a="http://schemas.openxmlformats.org/drawingml/2006/main">
               <a:ext uri="{FF2B5EF4-FFF2-40B4-BE49-F238E27FC236}">
-                <a16:creationId xmlns:a16="http://schemas.microsoft.com/office/drawing/2014/main" id="{4426A0D6-2712-4592-A654-6EA19B9434AF}"/>
+                <a16:creationId xmlns:a16="http://schemas.microsoft.com/office/drawing/2014/main" id="{70671887-3C27-48D1-834A-F1AB1C41A723}"/>
               </a:ext>
             </a:extLst>
           </p:cNvPr>
@@ -8505,7 +10423,7 @@
           <p:cNvPr id="19" name="">
             <a:extLst xmlns:a="http://schemas.openxmlformats.org/drawingml/2006/main">
               <a:ext uri="{FF2B5EF4-FFF2-40B4-BE49-F238E27FC236}">
-                <a16:creationId xmlns:a16="http://schemas.microsoft.com/office/drawing/2014/main" id="{DECE8BDE-CF55-4880-AFF9-147A7F54A6D4}"/>
+                <a16:creationId xmlns:a16="http://schemas.microsoft.com/office/drawing/2014/main" id="{2DBDCD65-41D4-437C-ABB6-A96E007A7D30}"/>
               </a:ext>
             </a:extLst>
           </p:cNvPr>
@@ -8569,7 +10487,7 @@
           <p:cNvPr id="20" name="">
             <a:extLst xmlns:a="http://schemas.openxmlformats.org/drawingml/2006/main">
               <a:ext uri="{FF2B5EF4-FFF2-40B4-BE49-F238E27FC236}">
-                <a16:creationId xmlns:a16="http://schemas.microsoft.com/office/drawing/2014/main" id="{29CC3C0D-190C-4712-9BB3-90F7AD0BE4E5}"/>
+                <a16:creationId xmlns:a16="http://schemas.microsoft.com/office/drawing/2014/main" id="{0DEFA60B-9FCD-4DF6-AFE7-04D24CB4AD59}"/>
               </a:ext>
             </a:extLst>
           </p:cNvPr>
@@ -8602,7 +10520,7 @@
           <p:cNvPr id="21" name="">
             <a:extLst xmlns:a="http://schemas.openxmlformats.org/drawingml/2006/main">
               <a:ext uri="{FF2B5EF4-FFF2-40B4-BE49-F238E27FC236}">
-                <a16:creationId xmlns:a16="http://schemas.microsoft.com/office/drawing/2014/main" id="{8F2D8ED4-DD60-4A0C-B9C3-02BF72144A8D}"/>
+                <a16:creationId xmlns:a16="http://schemas.microsoft.com/office/drawing/2014/main" id="{915E8FAD-ED81-404E-9B43-FFC98445D939}"/>
               </a:ext>
             </a:extLst>
           </p:cNvPr>
@@ -8666,7 +10584,7 @@
           <p:cNvPr id="22" name="">
             <a:extLst xmlns:a="http://schemas.openxmlformats.org/drawingml/2006/main">
               <a:ext uri="{FF2B5EF4-FFF2-40B4-BE49-F238E27FC236}">
-                <a16:creationId xmlns:a16="http://schemas.microsoft.com/office/drawing/2014/main" id="{6D5B9CCE-2CF0-4C6B-9134-AFEACE94F54A}"/>
+                <a16:creationId xmlns:a16="http://schemas.microsoft.com/office/drawing/2014/main" id="{E7ED45FB-3726-41D4-8589-DA5DA42E405B}"/>
               </a:ext>
             </a:extLst>
           </p:cNvPr>
@@ -8730,7 +10648,7 @@
           <p:cNvPr id="23" name="">
             <a:extLst xmlns:a="http://schemas.openxmlformats.org/drawingml/2006/main">
               <a:ext uri="{FF2B5EF4-FFF2-40B4-BE49-F238E27FC236}">
-                <a16:creationId xmlns:a16="http://schemas.microsoft.com/office/drawing/2014/main" id="{4988CFB1-CE03-494E-980E-B3C6A6B4A641}"/>
+                <a16:creationId xmlns:a16="http://schemas.microsoft.com/office/drawing/2014/main" id="{7A90C014-D8BE-4DEA-9330-5927A59B5F8E}"/>
               </a:ext>
             </a:extLst>
           </p:cNvPr>
@@ -8763,7 +10681,7 @@
           <p:cNvPr id="24" name="">
             <a:extLst xmlns:a="http://schemas.openxmlformats.org/drawingml/2006/main">
               <a:ext uri="{FF2B5EF4-FFF2-40B4-BE49-F238E27FC236}">
-                <a16:creationId xmlns:a16="http://schemas.microsoft.com/office/drawing/2014/main" id="{1825D52B-4276-445B-AE0E-B0C5356A41B3}"/>
+                <a16:creationId xmlns:a16="http://schemas.microsoft.com/office/drawing/2014/main" id="{7E141A46-105F-4CD5-B60E-B80C5A378AE1}"/>
               </a:ext>
             </a:extLst>
           </p:cNvPr>
@@ -8827,7 +10745,7 @@
           <p:cNvPr id="25" name="">
             <a:extLst xmlns:a="http://schemas.openxmlformats.org/drawingml/2006/main">
               <a:ext uri="{FF2B5EF4-FFF2-40B4-BE49-F238E27FC236}">
-                <a16:creationId xmlns:a16="http://schemas.microsoft.com/office/drawing/2014/main" id="{249715C3-0922-4171-8893-02CBEC851F05}"/>
+                <a16:creationId xmlns:a16="http://schemas.microsoft.com/office/drawing/2014/main" id="{5AF8A7EB-BCD4-417E-93E3-A2C798B8A813}"/>
               </a:ext>
             </a:extLst>
           </p:cNvPr>
@@ -8891,7 +10809,7 @@
           <p:cNvPr id="26" name="">
             <a:extLst xmlns:a="http://schemas.openxmlformats.org/drawingml/2006/main">
               <a:ext uri="{FF2B5EF4-FFF2-40B4-BE49-F238E27FC236}">
-                <a16:creationId xmlns:a16="http://schemas.microsoft.com/office/drawing/2014/main" id="{C7644EBC-39B2-40B9-9DF3-58528E267EAD}"/>
+                <a16:creationId xmlns:a16="http://schemas.microsoft.com/office/drawing/2014/main" id="{90EF47EA-2FF1-424B-8B69-AA2AC820DF32}"/>
               </a:ext>
             </a:extLst>
           </p:cNvPr>
@@ -8924,18 +10842,18 @@
           <p:cNvPr id="27" name="">
             <a:extLst xmlns:a="http://schemas.openxmlformats.org/drawingml/2006/main">
               <a:ext uri="{FF2B5EF4-FFF2-40B4-BE49-F238E27FC236}">
-                <a16:creationId xmlns:a16="http://schemas.microsoft.com/office/drawing/2014/main" id="{7D049E81-D4AE-4BF6-9286-E136DB873E83}"/>
-              </a:ext>
-            </a:extLst>
-          </p:cNvPr>
-          <p:cNvSpPr>
-            <a:spLocks xmlns:a="http://schemas.openxmlformats.org/drawingml/2006/main" noGrp="1"/>
-          </p:cNvSpPr>
-          <p:nvPr/>
-        </p:nvSpPr>
-        <p:spPr>
-          <a:xfrm xmlns:a="http://schemas.openxmlformats.org/drawingml/2006/main">
-            <a:off x="8686800" y="3581400"/>
+                <a16:creationId xmlns:a16="http://schemas.microsoft.com/office/drawing/2014/main" id="{4602A503-0A91-4DBE-8D4E-F2A939C11F81}"/>
+              </a:ext>
+            </a:extLst>
+          </p:cNvPr>
+          <p:cNvSpPr>
+            <a:spLocks xmlns:a="http://schemas.openxmlformats.org/drawingml/2006/main" noGrp="1"/>
+          </p:cNvSpPr>
+          <p:nvPr/>
+        </p:nvSpPr>
+        <p:spPr>
+          <a:xfrm xmlns:a="http://schemas.openxmlformats.org/drawingml/2006/main">
+            <a:off x="8686800" y="3562350"/>
             <a:ext cx="1428750" cy="266700"/>
           </a:xfrm>
           <a:prstGeom xmlns:a="http://schemas.openxmlformats.org/drawingml/2006/main" prst="rect">
@@ -8978,7 +10896,7 @@
                 <a:ea typeface="Aptos Display"/>
                 <a:cs typeface="Aptos Display"/>
               </a:rPr>
-              <a:t>Next step</a:t>
+              <a:t>Founder</a:t>
             </a:r>
           </a:p>
         </p:txBody>
@@ -8988,7 +10906,7 @@
           <p:cNvPr id="28" name="">
             <a:extLst xmlns:a="http://schemas.openxmlformats.org/drawingml/2006/main">
               <a:ext uri="{FF2B5EF4-FFF2-40B4-BE49-F238E27FC236}">
-                <a16:creationId xmlns:a16="http://schemas.microsoft.com/office/drawing/2014/main" id="{5C198F73-8EA9-4DAE-91DB-CE1D8E712F25}"/>
+                <a16:creationId xmlns:a16="http://schemas.microsoft.com/office/drawing/2014/main" id="{54016839-206D-4E18-BD4F-2E464A8FDDBB}"/>
               </a:ext>
             </a:extLst>
           </p:cNvPr>
@@ -9000,7 +10918,7 @@
         <p:spPr>
           <a:xfrm xmlns:a="http://schemas.openxmlformats.org/drawingml/2006/main">
             <a:off x="8686800" y="4019550"/>
-            <a:ext cx="2171700" cy="1066800"/>
+            <a:ext cx="2171700" cy="914400"/>
           </a:xfrm>
           <a:prstGeom xmlns:a="http://schemas.openxmlformats.org/drawingml/2006/main" prst="rect">
             <a:avLst/>
@@ -9024,7 +10942,7 @@
           <a:lstStyle xmlns:a="http://schemas.openxmlformats.org/drawingml/2006/main"/>
           <a:p xmlns:a="http://schemas.openxmlformats.org/drawingml/2006/main">
             <a:pPr algn="l">
-              <a:defRPr sz="1163" b="0">
+              <a:defRPr sz="1013" b="0">
                 <a:solidFill>
                   <a:srgbClr val="0A1020"/>
                 </a:solidFill>
@@ -9034,7 +10952,7 @@
               </a:defRPr>
             </a:pPr>
             <a:r>
-              <a:rPr sz="1163" b="0">
+              <a:rPr sz="1013" b="0">
                 <a:solidFill>
                   <a:srgbClr val="0A1020"/>
                 </a:solidFill>
@@ -9042,9 +10960,78 @@
                 <a:ea typeface="Aptos"/>
                 <a:cs typeface="Aptos"/>
               </a:rPr>
-              <a:t>Send the deck to VCs with the pilot ask: capital, regulated intros, and technical diligence on the Agent Passport evidence stack.</a:t>
+              <a:t>Katta Naga Sri Ganesh</a:t>
             </a:r>
           </a:p>
+          <a:p xmlns:a="http://schemas.openxmlformats.org/drawingml/2006/main">
+            <a:pPr algn="l">
+              <a:defRPr sz="1013" b="0">
+                <a:solidFill>
+                  <a:srgbClr val="0A1020"/>
+                </a:solidFill>
+                <a:latin typeface="Aptos"/>
+                <a:ea typeface="Aptos"/>
+                <a:cs typeface="Aptos"/>
+              </a:defRPr>
+            </a:pPr>
+            <a:r>
+              <a:rPr sz="1013" b="0">
+                <a:solidFill>
+                  <a:srgbClr val="0A1020"/>
+                </a:solidFill>
+                <a:latin typeface="Aptos"/>
+                <a:ea typeface="Aptos"/>
+                <a:cs typeface="Aptos"/>
+              </a:rPr>
+              <a:t>Founder, Syntriass / AIRON</a:t>
+            </a:r>
+          </a:p>
+          <a:p xmlns:a="http://schemas.openxmlformats.org/drawingml/2006/main">
+            <a:pPr algn="l">
+              <a:defRPr sz="1013" b="0">
+                <a:solidFill>
+                  <a:srgbClr val="0A1020"/>
+                </a:solidFill>
+                <a:latin typeface="Aptos"/>
+                <a:ea typeface="Aptos"/>
+                <a:cs typeface="Aptos"/>
+              </a:defRPr>
+            </a:pPr>
+            <a:r>
+              <a:rPr sz="1013" b="0">
+                <a:solidFill>
+                  <a:srgbClr val="0A1020"/>
+                </a:solidFill>
+                <a:latin typeface="Aptos"/>
+                <a:ea typeface="Aptos"/>
+                <a:cs typeface="Aptos"/>
+              </a:rPr>
+              <a:t>syntriass@gmail.com</a:t>
+            </a:r>
+          </a:p>
+          <a:p xmlns:a="http://schemas.openxmlformats.org/drawingml/2006/main">
+            <a:pPr algn="l">
+              <a:defRPr sz="1013" b="0">
+                <a:solidFill>
+                  <a:srgbClr val="0A1020"/>
+                </a:solidFill>
+                <a:latin typeface="Aptos"/>
+                <a:ea typeface="Aptos"/>
+                <a:cs typeface="Aptos"/>
+              </a:defRPr>
+            </a:pPr>
+            <a:r>
+              <a:rPr sz="1013" b="0">
+                <a:solidFill>
+                  <a:srgbClr val="0A1020"/>
+                </a:solidFill>
+                <a:latin typeface="Aptos"/>
+                <a:ea typeface="Aptos"/>
+                <a:cs typeface="Aptos"/>
+              </a:rPr>
+              <a:t>GitHub: richardrich999888-rgb</a:t>
+            </a:r>
+          </a:p>
         </p:txBody>
       </p:sp>
       <p:sp>
@@ -9052,7 +11039,7 @@
           <p:cNvPr id="29" name="">
             <a:extLst xmlns:a="http://schemas.openxmlformats.org/drawingml/2006/main">
               <a:ext uri="{FF2B5EF4-FFF2-40B4-BE49-F238E27FC236}">
-                <a16:creationId xmlns:a16="http://schemas.microsoft.com/office/drawing/2014/main" id="{110544B2-EBF6-4FE7-841D-F56336C9315C}"/>
+                <a16:creationId xmlns:a16="http://schemas.microsoft.com/office/drawing/2014/main" id="{FB12E236-6810-4CCC-816A-27D9738C148E}"/>
               </a:ext>
             </a:extLst>
           </p:cNvPr>
@@ -9087,7 +11074,7 @@
           <p:cNvPr id="30" name="">
             <a:extLst xmlns:a="http://schemas.openxmlformats.org/drawingml/2006/main">
               <a:ext uri="{FF2B5EF4-FFF2-40B4-BE49-F238E27FC236}">
-                <a16:creationId xmlns:a16="http://schemas.microsoft.com/office/drawing/2014/main" id="{A0A459AB-2758-4B2B-A853-0B65A8B3BC94}"/>
+                <a16:creationId xmlns:a16="http://schemas.microsoft.com/office/drawing/2014/main" id="{6607B2A8-0799-49A7-86CE-83623D182F39}"/>
               </a:ext>
             </a:extLst>
           </p:cNvPr>
@@ -9122,7 +11109,7 @@
           <p:cNvPr id="31" name="">
             <a:extLst xmlns:a="http://schemas.openxmlformats.org/drawingml/2006/main">
               <a:ext uri="{FF2B5EF4-FFF2-40B4-BE49-F238E27FC236}">
-                <a16:creationId xmlns:a16="http://schemas.microsoft.com/office/drawing/2014/main" id="{20057EAB-5157-428D-8FE9-89DE7BAEDA95}"/>
+                <a16:creationId xmlns:a16="http://schemas.microsoft.com/office/drawing/2014/main" id="{9E1D90B8-596A-43BA-A93E-FA0CF0B2C283}"/>
               </a:ext>
             </a:extLst>
           </p:cNvPr>
@@ -9157,7 +11144,7 @@
           <p:cNvPr id="32" name="">
             <a:extLst xmlns:a="http://schemas.openxmlformats.org/drawingml/2006/main">
               <a:ext uri="{FF2B5EF4-FFF2-40B4-BE49-F238E27FC236}">
-                <a16:creationId xmlns:a16="http://schemas.microsoft.com/office/drawing/2014/main" id="{AEF79284-9CB2-4407-B18D-467BEF97881A}"/>
+                <a16:creationId xmlns:a16="http://schemas.microsoft.com/office/drawing/2014/main" id="{E896056D-F286-42D6-B6A2-E172F3A83BCE}"/>
               </a:ext>
             </a:extLst>
           </p:cNvPr>
@@ -9192,7 +11179,7 @@
           <p:cNvPr id="33" name="">
             <a:extLst xmlns:a="http://schemas.openxmlformats.org/drawingml/2006/main">
               <a:ext uri="{FF2B5EF4-FFF2-40B4-BE49-F238E27FC236}">
-                <a16:creationId xmlns:a16="http://schemas.microsoft.com/office/drawing/2014/main" id="{8CC9F5DE-EFAF-4CA9-82A1-B30BBD509F29}"/>
+                <a16:creationId xmlns:a16="http://schemas.microsoft.com/office/drawing/2014/main" id="{B96EFC17-78AD-45C4-8E5A-53A055384FC9}"/>
               </a:ext>
             </a:extLst>
           </p:cNvPr>
@@ -9227,7 +11214,7 @@
           <p:cNvPr id="34" name="">
             <a:extLst xmlns:a="http://schemas.openxmlformats.org/drawingml/2006/main">
               <a:ext uri="{FF2B5EF4-FFF2-40B4-BE49-F238E27FC236}">
-                <a16:creationId xmlns:a16="http://schemas.microsoft.com/office/drawing/2014/main" id="{BD22E29C-2DB2-4616-A474-150E33DAD210}"/>
+                <a16:creationId xmlns:a16="http://schemas.microsoft.com/office/drawing/2014/main" id="{3D115761-4204-4E61-91D4-E14C9D4A3A7B}"/>
               </a:ext>
             </a:extLst>
           </p:cNvPr>
@@ -9262,7 +11249,7 @@
           <p:cNvPr id="35" name="">
             <a:extLst xmlns:a="http://schemas.openxmlformats.org/drawingml/2006/main">
               <a:ext uri="{FF2B5EF4-FFF2-40B4-BE49-F238E27FC236}">
-                <a16:creationId xmlns:a16="http://schemas.microsoft.com/office/drawing/2014/main" id="{4DD2E070-D60D-4C69-9FFD-341BE5A4AA50}"/>
+                <a16:creationId xmlns:a16="http://schemas.microsoft.com/office/drawing/2014/main" id="{E56F984A-EE01-40D7-B9D7-423C81EC7AB0}"/>
               </a:ext>
             </a:extLst>
           </p:cNvPr>
@@ -9297,7 +11284,7 @@
           <p:cNvPr id="36" name="">
             <a:extLst xmlns:a="http://schemas.openxmlformats.org/drawingml/2006/main">
               <a:ext uri="{FF2B5EF4-FFF2-40B4-BE49-F238E27FC236}">
-                <a16:creationId xmlns:a16="http://schemas.microsoft.com/office/drawing/2014/main" id="{36071D87-72E5-44D0-BA29-8F1F7CE5E216}"/>
+                <a16:creationId xmlns:a16="http://schemas.microsoft.com/office/drawing/2014/main" id="{22F2C9E9-84AE-4DC6-972A-0E6A3362896E}"/>
               </a:ext>
             </a:extLst>
           </p:cNvPr>
@@ -9332,7 +11319,7 @@
           <p:cNvPr id="37" name="">
             <a:extLst xmlns:a="http://schemas.openxmlformats.org/drawingml/2006/main">
               <a:ext uri="{FF2B5EF4-FFF2-40B4-BE49-F238E27FC236}">
-                <a16:creationId xmlns:a16="http://schemas.microsoft.com/office/drawing/2014/main" id="{C5491896-16D3-4F1B-8ADD-D284B115C77D}"/>
+                <a16:creationId xmlns:a16="http://schemas.microsoft.com/office/drawing/2014/main" id="{B45CA2A9-7A4B-477E-A249-A18D9F18B7F8}"/>
               </a:ext>
             </a:extLst>
           </p:cNvPr>
@@ -9396,7 +11383,7 @@
           <p:cNvPr id="38" name="">
             <a:extLst xmlns:a="http://schemas.openxmlformats.org/drawingml/2006/main">
               <a:ext uri="{FF2B5EF4-FFF2-40B4-BE49-F238E27FC236}">
-                <a16:creationId xmlns:a16="http://schemas.microsoft.com/office/drawing/2014/main" id="{9B3B10E3-74C1-4BE2-9DF2-A73EE4E06AB4}"/>
+                <a16:creationId xmlns:a16="http://schemas.microsoft.com/office/drawing/2014/main" id="{C7BE7CBF-5949-4336-BC58-64A5721CD302}"/>
               </a:ext>
             </a:extLst>
           </p:cNvPr>
@@ -9450,7 +11437,7 @@
                 <a:ea typeface="Aptos Mono"/>
                 <a:cs typeface="Aptos Mono"/>
               </a:rPr>
-              <a:t>12</a:t>
+              <a:t>13</a:t>
             </a:r>
           </a:p>
         </p:txBody>
@@ -9458,7 +11445,7 @@
     </p:spTree>
     <p:extLst>
       <p:ext uri="{BB962C8B-B14F-4D97-AF65-F5344CB8AC3E}">
-        <p14:creationId xmlns:p14="http://schemas.microsoft.com/office/powerpoint/2010/main" val="1783023096"/>
+        <p14:creationId xmlns:p14="http://schemas.microsoft.com/office/powerpoint/2010/main" val="610417633"/>
       </p:ext>
     </p:extLst>
   </p:cSld>
@@ -9482,7 +11469,7 @@
           <p:cNvPr id="1" name="">
             <a:extLst xmlns:a="http://schemas.openxmlformats.org/drawingml/2006/main">
               <a:ext uri="{FF2B5EF4-FFF2-40B4-BE49-F238E27FC236}">
-                <a16:creationId xmlns:a16="http://schemas.microsoft.com/office/drawing/2014/main" id="{389B7515-D016-4BCF-A5AD-31953A711E36}"/>
+                <a16:creationId xmlns:a16="http://schemas.microsoft.com/office/drawing/2014/main" id="{8511DA81-5A17-40F8-80B4-8FFBED6697F2}"/>
               </a:ext>
             </a:extLst>
           </p:cNvPr>
@@ -9517,7 +11504,7 @@
           <p:cNvPr id="2" name="">
             <a:extLst xmlns:a="http://schemas.openxmlformats.org/drawingml/2006/main">
               <a:ext uri="{FF2B5EF4-FFF2-40B4-BE49-F238E27FC236}">
-                <a16:creationId xmlns:a16="http://schemas.microsoft.com/office/drawing/2014/main" id="{C92DAD1F-46CE-4CDA-9198-85CBD276AEBA}"/>
+                <a16:creationId xmlns:a16="http://schemas.microsoft.com/office/drawing/2014/main" id="{C5ACB94D-5048-42C5-BF1B-ACFC34E67A2D}"/>
               </a:ext>
             </a:extLst>
           </p:cNvPr>
@@ -9552,7 +11539,7 @@
           <p:cNvPr id="3" name="">
             <a:extLst xmlns:a="http://schemas.openxmlformats.org/drawingml/2006/main">
               <a:ext uri="{FF2B5EF4-FFF2-40B4-BE49-F238E27FC236}">
-                <a16:creationId xmlns:a16="http://schemas.microsoft.com/office/drawing/2014/main" id="{B41464DB-F641-40BA-B7A6-388D19D044A5}"/>
+                <a16:creationId xmlns:a16="http://schemas.microsoft.com/office/drawing/2014/main" id="{6D000E91-A780-451F-91F4-5E3120FBEF8C}"/>
               </a:ext>
             </a:extLst>
           </p:cNvPr>
@@ -9587,7 +11574,7 @@
           <p:cNvPr id="4" name="">
             <a:extLst xmlns:a="http://schemas.openxmlformats.org/drawingml/2006/main">
               <a:ext uri="{FF2B5EF4-FFF2-40B4-BE49-F238E27FC236}">
-                <a16:creationId xmlns:a16="http://schemas.microsoft.com/office/drawing/2014/main" id="{F209B321-A60B-49CF-9C01-3BB6D74A07E2}"/>
+                <a16:creationId xmlns:a16="http://schemas.microsoft.com/office/drawing/2014/main" id="{ABD510D1-9AB4-471B-A864-2258D2F34CDA}"/>
               </a:ext>
             </a:extLst>
           </p:cNvPr>
@@ -9622,7 +11609,7 @@
           <p:cNvPr id="5" name="">
             <a:extLst xmlns:a="http://schemas.openxmlformats.org/drawingml/2006/main">
               <a:ext uri="{FF2B5EF4-FFF2-40B4-BE49-F238E27FC236}">
-                <a16:creationId xmlns:a16="http://schemas.microsoft.com/office/drawing/2014/main" id="{0200ADDD-D23A-4CAE-9E48-3C8D960D723F}"/>
+                <a16:creationId xmlns:a16="http://schemas.microsoft.com/office/drawing/2014/main" id="{DA2A5CC2-2D6C-43FA-95B8-B4BB1E559185}"/>
               </a:ext>
             </a:extLst>
           </p:cNvPr>
@@ -9657,7 +11644,7 @@
           <p:cNvPr id="6" name="">
             <a:extLst xmlns:a="http://schemas.openxmlformats.org/drawingml/2006/main">
               <a:ext uri="{FF2B5EF4-FFF2-40B4-BE49-F238E27FC236}">
-                <a16:creationId xmlns:a16="http://schemas.microsoft.com/office/drawing/2014/main" id="{43484A65-4412-439F-BD99-A78FE50EC67F}"/>
+                <a16:creationId xmlns:a16="http://schemas.microsoft.com/office/drawing/2014/main" id="{33626F76-BC83-42AC-822A-A45ABD996539}"/>
               </a:ext>
             </a:extLst>
           </p:cNvPr>
@@ -9721,7 +11708,7 @@
           <p:cNvPr id="7" name="">
             <a:extLst xmlns:a="http://schemas.openxmlformats.org/drawingml/2006/main">
               <a:ext uri="{FF2B5EF4-FFF2-40B4-BE49-F238E27FC236}">
-                <a16:creationId xmlns:a16="http://schemas.microsoft.com/office/drawing/2014/main" id="{FFAEDEAB-3237-42C3-B850-651AD3E11FF1}"/>
+                <a16:creationId xmlns:a16="http://schemas.microsoft.com/office/drawing/2014/main" id="{D5B831A0-9978-4443-984E-FE802E791F4C}"/>
               </a:ext>
             </a:extLst>
           </p:cNvPr>
@@ -9785,7 +11772,7 @@
           <p:cNvPr id="8" name="">
             <a:extLst xmlns:a="http://schemas.openxmlformats.org/drawingml/2006/main">
               <a:ext uri="{FF2B5EF4-FFF2-40B4-BE49-F238E27FC236}">
-                <a16:creationId xmlns:a16="http://schemas.microsoft.com/office/drawing/2014/main" id="{4395DE94-D4E0-4F5A-9582-DA485291BF05}"/>
+                <a16:creationId xmlns:a16="http://schemas.microsoft.com/office/drawing/2014/main" id="{5CFE8464-7954-4BEF-A281-FBCF5DB1E426}"/>
               </a:ext>
             </a:extLst>
           </p:cNvPr>
@@ -9849,7 +11836,7 @@
           <p:cNvPr id="9" name="">
             <a:extLst xmlns:a="http://schemas.openxmlformats.org/drawingml/2006/main">
               <a:ext uri="{FF2B5EF4-FFF2-40B4-BE49-F238E27FC236}">
-                <a16:creationId xmlns:a16="http://schemas.microsoft.com/office/drawing/2014/main" id="{D281F2AD-DDBC-4047-B2F4-26B50786B252}"/>
+                <a16:creationId xmlns:a16="http://schemas.microsoft.com/office/drawing/2014/main" id="{66A8D506-B64E-4266-AFFB-99AFB2F4EDBC}"/>
               </a:ext>
             </a:extLst>
           </p:cNvPr>
@@ -9882,7 +11869,7 @@
           <p:cNvPr id="10" name="">
             <a:extLst xmlns:a="http://schemas.openxmlformats.org/drawingml/2006/main">
               <a:ext uri="{FF2B5EF4-FFF2-40B4-BE49-F238E27FC236}">
-                <a16:creationId xmlns:a16="http://schemas.microsoft.com/office/drawing/2014/main" id="{27A01019-F9E6-4765-8AE1-C0FFBBF13197}"/>
+                <a16:creationId xmlns:a16="http://schemas.microsoft.com/office/drawing/2014/main" id="{B0B874F8-4341-481C-8239-173B20341477}"/>
               </a:ext>
             </a:extLst>
           </p:cNvPr>
@@ -9917,7 +11904,7 @@
           <p:cNvPr id="11" name="">
             <a:extLst xmlns:a="http://schemas.openxmlformats.org/drawingml/2006/main">
               <a:ext uri="{FF2B5EF4-FFF2-40B4-BE49-F238E27FC236}">
-                <a16:creationId xmlns:a16="http://schemas.microsoft.com/office/drawing/2014/main" id="{74F9CF84-E8B9-4333-80A0-B72808FF33DE}"/>
+                <a16:creationId xmlns:a16="http://schemas.microsoft.com/office/drawing/2014/main" id="{F9797B7B-BCE3-43B9-82D3-1972065D856A}"/>
               </a:ext>
             </a:extLst>
           </p:cNvPr>
@@ -9981,7 +11968,7 @@
           <p:cNvPr id="12" name="">
             <a:extLst xmlns:a="http://schemas.openxmlformats.org/drawingml/2006/main">
               <a:ext uri="{FF2B5EF4-FFF2-40B4-BE49-F238E27FC236}">
-                <a16:creationId xmlns:a16="http://schemas.microsoft.com/office/drawing/2014/main" id="{3D5F7999-766D-4708-9FF0-AFBDCE82A2BD}"/>
+                <a16:creationId xmlns:a16="http://schemas.microsoft.com/office/drawing/2014/main" id="{1FDE7FF5-F337-4718-B34C-024A1483C85B}"/>
               </a:ext>
             </a:extLst>
           </p:cNvPr>
@@ -10045,7 +12032,7 @@
           <p:cNvPr id="13" name="">
             <a:extLst xmlns:a="http://schemas.openxmlformats.org/drawingml/2006/main">
               <a:ext uri="{FF2B5EF4-FFF2-40B4-BE49-F238E27FC236}">
-                <a16:creationId xmlns:a16="http://schemas.microsoft.com/office/drawing/2014/main" id="{B8554BAE-9C7C-4841-AAD7-DF6C39BB904D}"/>
+                <a16:creationId xmlns:a16="http://schemas.microsoft.com/office/drawing/2014/main" id="{0066C3CB-E671-4F50-BA19-54D778BEA0A6}"/>
               </a:ext>
             </a:extLst>
           </p:cNvPr>
@@ -10109,7 +12096,7 @@
           <p:cNvPr id="14" name="">
             <a:extLst xmlns:a="http://schemas.openxmlformats.org/drawingml/2006/main">
               <a:ext uri="{FF2B5EF4-FFF2-40B4-BE49-F238E27FC236}">
-                <a16:creationId xmlns:a16="http://schemas.microsoft.com/office/drawing/2014/main" id="{0F7AD6BE-8575-4953-8298-ECB6ED5F8B69}"/>
+                <a16:creationId xmlns:a16="http://schemas.microsoft.com/office/drawing/2014/main" id="{6C5B761D-EDA9-468F-8E0E-5F762B42EAD8}"/>
               </a:ext>
             </a:extLst>
           </p:cNvPr>
@@ -10142,7 +12129,7 @@
           <p:cNvPr id="15" name="">
             <a:extLst xmlns:a="http://schemas.openxmlformats.org/drawingml/2006/main">
               <a:ext uri="{FF2B5EF4-FFF2-40B4-BE49-F238E27FC236}">
-                <a16:creationId xmlns:a16="http://schemas.microsoft.com/office/drawing/2014/main" id="{E2002461-C6AF-4A1A-BEFC-B3638E3583B0}"/>
+                <a16:creationId xmlns:a16="http://schemas.microsoft.com/office/drawing/2014/main" id="{DF2AE0D1-7D29-4F43-8A97-2FC79FAB14C5}"/>
               </a:ext>
             </a:extLst>
           </p:cNvPr>
@@ -10177,7 +12164,7 @@
           <p:cNvPr id="16" name="">
             <a:extLst xmlns:a="http://schemas.openxmlformats.org/drawingml/2006/main">
               <a:ext uri="{FF2B5EF4-FFF2-40B4-BE49-F238E27FC236}">
-                <a16:creationId xmlns:a16="http://schemas.microsoft.com/office/drawing/2014/main" id="{09F07072-31CD-4EE3-B006-54FAB067FF0C}"/>
+                <a16:creationId xmlns:a16="http://schemas.microsoft.com/office/drawing/2014/main" id="{B5C5CA5F-7D29-40D5-939A-C8E79DA86FE6}"/>
               </a:ext>
             </a:extLst>
           </p:cNvPr>
@@ -10241,7 +12228,7 @@
           <p:cNvPr id="17" name="">
             <a:extLst xmlns:a="http://schemas.openxmlformats.org/drawingml/2006/main">
               <a:ext uri="{FF2B5EF4-FFF2-40B4-BE49-F238E27FC236}">
-                <a16:creationId xmlns:a16="http://schemas.microsoft.com/office/drawing/2014/main" id="{A738A6C1-077C-4FF3-A34A-6ADC97AC27D6}"/>
+                <a16:creationId xmlns:a16="http://schemas.microsoft.com/office/drawing/2014/main" id="{6F21DF6D-57A9-4627-BC79-3BA3D57220AC}"/>
               </a:ext>
             </a:extLst>
           </p:cNvPr>
@@ -10305,7 +12292,7 @@
           <p:cNvPr id="18" name="">
             <a:extLst xmlns:a="http://schemas.openxmlformats.org/drawingml/2006/main">
               <a:ext uri="{FF2B5EF4-FFF2-40B4-BE49-F238E27FC236}">
-                <a16:creationId xmlns:a16="http://schemas.microsoft.com/office/drawing/2014/main" id="{94E96D0E-74AE-4295-9A09-CCDD7AEF5AAC}"/>
+                <a16:creationId xmlns:a16="http://schemas.microsoft.com/office/drawing/2014/main" id="{91DE696B-78EF-468B-831E-8EB7184A6B4B}"/>
               </a:ext>
             </a:extLst>
           </p:cNvPr>
@@ -10369,7 +12356,7 @@
           <p:cNvPr id="19" name="">
             <a:extLst xmlns:a="http://schemas.openxmlformats.org/drawingml/2006/main">
               <a:ext uri="{FF2B5EF4-FFF2-40B4-BE49-F238E27FC236}">
-                <a16:creationId xmlns:a16="http://schemas.microsoft.com/office/drawing/2014/main" id="{0B049618-85BB-464A-A4D6-D77FC2A86DCB}"/>
+                <a16:creationId xmlns:a16="http://schemas.microsoft.com/office/drawing/2014/main" id="{0D66068B-077E-4E27-AD09-8FFA1DF12D77}"/>
               </a:ext>
             </a:extLst>
           </p:cNvPr>
@@ -10402,7 +12389,7 @@
           <p:cNvPr id="20" name="">
             <a:extLst xmlns:a="http://schemas.openxmlformats.org/drawingml/2006/main">
               <a:ext uri="{FF2B5EF4-FFF2-40B4-BE49-F238E27FC236}">
-                <a16:creationId xmlns:a16="http://schemas.microsoft.com/office/drawing/2014/main" id="{B62CE5A2-21F9-48C7-B971-14040A2E119C}"/>
+                <a16:creationId xmlns:a16="http://schemas.microsoft.com/office/drawing/2014/main" id="{36507BB1-0009-4F81-80EA-F78D80EEE8DA}"/>
               </a:ext>
             </a:extLst>
           </p:cNvPr>
@@ -10437,7 +12424,7 @@
           <p:cNvPr id="21" name="">
             <a:extLst xmlns:a="http://schemas.openxmlformats.org/drawingml/2006/main">
               <a:ext uri="{FF2B5EF4-FFF2-40B4-BE49-F238E27FC236}">
-                <a16:creationId xmlns:a16="http://schemas.microsoft.com/office/drawing/2014/main" id="{524B6340-44C9-45DA-BA9E-DB8C8841A3ED}"/>
+                <a16:creationId xmlns:a16="http://schemas.microsoft.com/office/drawing/2014/main" id="{2A9B6EBA-D163-4158-85AF-D152285898DD}"/>
               </a:ext>
             </a:extLst>
           </p:cNvPr>
@@ -10501,7 +12488,7 @@
           <p:cNvPr id="22" name="">
             <a:extLst xmlns:a="http://schemas.openxmlformats.org/drawingml/2006/main">
               <a:ext uri="{FF2B5EF4-FFF2-40B4-BE49-F238E27FC236}">
-                <a16:creationId xmlns:a16="http://schemas.microsoft.com/office/drawing/2014/main" id="{2CEE3563-BD1D-406A-BCA4-62C8006E8DD5}"/>
+                <a16:creationId xmlns:a16="http://schemas.microsoft.com/office/drawing/2014/main" id="{984101DA-D2F8-401E-8DF8-1C24BB279848}"/>
               </a:ext>
             </a:extLst>
           </p:cNvPr>
@@ -10565,7 +12552,7 @@
           <p:cNvPr id="23" name="">
             <a:extLst xmlns:a="http://schemas.openxmlformats.org/drawingml/2006/main">
               <a:ext uri="{FF2B5EF4-FFF2-40B4-BE49-F238E27FC236}">
-                <a16:creationId xmlns:a16="http://schemas.microsoft.com/office/drawing/2014/main" id="{E81381E4-9FA0-46FB-AE9B-9CAABDAE9A80}"/>
+                <a16:creationId xmlns:a16="http://schemas.microsoft.com/office/drawing/2014/main" id="{2F416226-6BE0-4263-A46E-069BB7890437}"/>
               </a:ext>
             </a:extLst>
           </p:cNvPr>
@@ -10629,7 +12616,7 @@
           <p:cNvPr id="24" name="">
             <a:extLst xmlns:a="http://schemas.openxmlformats.org/drawingml/2006/main">
               <a:ext uri="{FF2B5EF4-FFF2-40B4-BE49-F238E27FC236}">
-                <a16:creationId xmlns:a16="http://schemas.microsoft.com/office/drawing/2014/main" id="{2B931B86-A78E-4E27-A793-37962888A954}"/>
+                <a16:creationId xmlns:a16="http://schemas.microsoft.com/office/drawing/2014/main" id="{3D51AA09-8700-45FF-A279-494A495658E3}"/>
               </a:ext>
             </a:extLst>
           </p:cNvPr>
@@ -10662,7 +12649,7 @@
           <p:cNvPr id="25" name="">
             <a:extLst xmlns:a="http://schemas.openxmlformats.org/drawingml/2006/main">
               <a:ext uri="{FF2B5EF4-FFF2-40B4-BE49-F238E27FC236}">
-                <a16:creationId xmlns:a16="http://schemas.microsoft.com/office/drawing/2014/main" id="{BA71C93E-B27C-40B8-B2BD-3EB9ABF5AB8A}"/>
+                <a16:creationId xmlns:a16="http://schemas.microsoft.com/office/drawing/2014/main" id="{172E4D2C-F9F0-4669-A148-F6F0C73E42C9}"/>
               </a:ext>
             </a:extLst>
           </p:cNvPr>
@@ -10726,7 +12713,7 @@
           <p:cNvPr id="26" name="">
             <a:extLst xmlns:a="http://schemas.openxmlformats.org/drawingml/2006/main">
               <a:ext uri="{FF2B5EF4-FFF2-40B4-BE49-F238E27FC236}">
-                <a16:creationId xmlns:a16="http://schemas.microsoft.com/office/drawing/2014/main" id="{020F3A6B-8D42-4531-B8E3-A7391F78CC73}"/>
+                <a16:creationId xmlns:a16="http://schemas.microsoft.com/office/drawing/2014/main" id="{2491C956-B048-4B58-92C3-EA825723C374}"/>
               </a:ext>
             </a:extLst>
           </p:cNvPr>
@@ -10790,7 +12777,7 @@
           <p:cNvPr id="27" name="">
             <a:extLst xmlns:a="http://schemas.openxmlformats.org/drawingml/2006/main">
               <a:ext uri="{FF2B5EF4-FFF2-40B4-BE49-F238E27FC236}">
-                <a16:creationId xmlns:a16="http://schemas.microsoft.com/office/drawing/2014/main" id="{19FE7C12-BAA3-4CE6-BB41-5665621DE6F0}"/>
+                <a16:creationId xmlns:a16="http://schemas.microsoft.com/office/drawing/2014/main" id="{5E9ACEC5-6479-40FC-9D3B-86842A4498F6}"/>
               </a:ext>
             </a:extLst>
           </p:cNvPr>
@@ -10825,7 +12812,7 @@
           <p:cNvPr id="28" name="">
             <a:extLst xmlns:a="http://schemas.openxmlformats.org/drawingml/2006/main">
               <a:ext uri="{FF2B5EF4-FFF2-40B4-BE49-F238E27FC236}">
-                <a16:creationId xmlns:a16="http://schemas.microsoft.com/office/drawing/2014/main" id="{29E97435-3D86-4A95-9B5C-B2F349A55701}"/>
+                <a16:creationId xmlns:a16="http://schemas.microsoft.com/office/drawing/2014/main" id="{3D5F9D4F-C908-4F98-BFC1-2FDE93841134}"/>
               </a:ext>
             </a:extLst>
           </p:cNvPr>
@@ -10860,7 +12847,7 @@
           <p:cNvPr id="29" name="">
             <a:extLst xmlns:a="http://schemas.openxmlformats.org/drawingml/2006/main">
               <a:ext uri="{FF2B5EF4-FFF2-40B4-BE49-F238E27FC236}">
-                <a16:creationId xmlns:a16="http://schemas.microsoft.com/office/drawing/2014/main" id="{29A8E815-605F-4418-AAFC-AF5925771C03}"/>
+                <a16:creationId xmlns:a16="http://schemas.microsoft.com/office/drawing/2014/main" id="{120F35C8-1090-45C0-A159-64EDAEDA47B7}"/>
               </a:ext>
             </a:extLst>
           </p:cNvPr>
@@ -10895,7 +12882,7 @@
           <p:cNvPr id="30" name="">
             <a:extLst xmlns:a="http://schemas.openxmlformats.org/drawingml/2006/main">
               <a:ext uri="{FF2B5EF4-FFF2-40B4-BE49-F238E27FC236}">
-                <a16:creationId xmlns:a16="http://schemas.microsoft.com/office/drawing/2014/main" id="{EECF7667-9E9F-4F78-912B-7D3DDC440A8C}"/>
+                <a16:creationId xmlns:a16="http://schemas.microsoft.com/office/drawing/2014/main" id="{1A4418CF-B97A-4205-B62E-B2EC993CA947}"/>
               </a:ext>
             </a:extLst>
           </p:cNvPr>
@@ -10930,7 +12917,7 @@
           <p:cNvPr id="31" name="">
             <a:extLst xmlns:a="http://schemas.openxmlformats.org/drawingml/2006/main">
               <a:ext uri="{FF2B5EF4-FFF2-40B4-BE49-F238E27FC236}">
-                <a16:creationId xmlns:a16="http://schemas.microsoft.com/office/drawing/2014/main" id="{836AAD5B-21CF-43A7-8601-38FBFDD8DABF}"/>
+                <a16:creationId xmlns:a16="http://schemas.microsoft.com/office/drawing/2014/main" id="{42A57596-753E-4973-A7E8-BB3A5A4DF229}"/>
               </a:ext>
             </a:extLst>
           </p:cNvPr>
@@ -10994,7 +12981,7 @@
           <p:cNvPr id="32" name="">
             <a:extLst xmlns:a="http://schemas.openxmlformats.org/drawingml/2006/main">
               <a:ext uri="{FF2B5EF4-FFF2-40B4-BE49-F238E27FC236}">
-                <a16:creationId xmlns:a16="http://schemas.microsoft.com/office/drawing/2014/main" id="{E841A993-2F2F-41B6-A113-765A1D6E61FD}"/>
+                <a16:creationId xmlns:a16="http://schemas.microsoft.com/office/drawing/2014/main" id="{C36139FF-8857-40FB-A3E1-A21AD9DE989A}"/>
               </a:ext>
             </a:extLst>
           </p:cNvPr>
@@ -11056,7 +13043,7 @@
     </p:spTree>
     <p:extLst>
       <p:ext uri="{BB962C8B-B14F-4D97-AF65-F5344CB8AC3E}">
-        <p14:creationId xmlns:p14="http://schemas.microsoft.com/office/powerpoint/2010/main" val="961753089"/>
+        <p14:creationId xmlns:p14="http://schemas.microsoft.com/office/powerpoint/2010/main" val="290393152"/>
       </p:ext>
     </p:extLst>
   </p:cSld>
@@ -11080,7 +13067,7 @@
           <p:cNvPr id="1" name="">
             <a:extLst xmlns:a="http://schemas.openxmlformats.org/drawingml/2006/main">
               <a:ext uri="{FF2B5EF4-FFF2-40B4-BE49-F238E27FC236}">
-                <a16:creationId xmlns:a16="http://schemas.microsoft.com/office/drawing/2014/main" id="{F4DFB7F2-DEA5-4433-92F2-98E0A0958AE8}"/>
+                <a16:creationId xmlns:a16="http://schemas.microsoft.com/office/drawing/2014/main" id="{D5445C2A-7A1B-402D-9CA0-23882833C46F}"/>
               </a:ext>
             </a:extLst>
           </p:cNvPr>
@@ -11115,7 +13102,7 @@
           <p:cNvPr id="2" name="">
             <a:extLst xmlns:a="http://schemas.openxmlformats.org/drawingml/2006/main">
               <a:ext uri="{FF2B5EF4-FFF2-40B4-BE49-F238E27FC236}">
-                <a16:creationId xmlns:a16="http://schemas.microsoft.com/office/drawing/2014/main" id="{FA6B77E6-4B76-4591-9D2B-CEAED93573A3}"/>
+                <a16:creationId xmlns:a16="http://schemas.microsoft.com/office/drawing/2014/main" id="{437903E2-F32A-4D96-A2D0-3263798FCFF4}"/>
               </a:ext>
             </a:extLst>
           </p:cNvPr>
@@ -11150,7 +13137,7 @@
           <p:cNvPr id="3" name="">
             <a:extLst xmlns:a="http://schemas.openxmlformats.org/drawingml/2006/main">
               <a:ext uri="{FF2B5EF4-FFF2-40B4-BE49-F238E27FC236}">
-                <a16:creationId xmlns:a16="http://schemas.microsoft.com/office/drawing/2014/main" id="{E3D890FE-276A-4D8C-8C60-AB3611AF281D}"/>
+                <a16:creationId xmlns:a16="http://schemas.microsoft.com/office/drawing/2014/main" id="{59316EB8-9139-4105-9E31-43DDC4389AC6}"/>
               </a:ext>
             </a:extLst>
           </p:cNvPr>
@@ -11185,7 +13172,7 @@
           <p:cNvPr id="4" name="">
             <a:extLst xmlns:a="http://schemas.openxmlformats.org/drawingml/2006/main">
               <a:ext uri="{FF2B5EF4-FFF2-40B4-BE49-F238E27FC236}">
-                <a16:creationId xmlns:a16="http://schemas.microsoft.com/office/drawing/2014/main" id="{EC13BCB5-4234-43A8-9DB3-E46F48BE2AD5}"/>
+                <a16:creationId xmlns:a16="http://schemas.microsoft.com/office/drawing/2014/main" id="{3E05D156-5432-441C-98AB-F71F74D46785}"/>
               </a:ext>
             </a:extLst>
           </p:cNvPr>
@@ -11220,7 +13207,7 @@
           <p:cNvPr id="5" name="">
             <a:extLst xmlns:a="http://schemas.openxmlformats.org/drawingml/2006/main">
               <a:ext uri="{FF2B5EF4-FFF2-40B4-BE49-F238E27FC236}">
-                <a16:creationId xmlns:a16="http://schemas.microsoft.com/office/drawing/2014/main" id="{F794FDBD-74FD-4734-B7ED-4B169BCBEE2E}"/>
+                <a16:creationId xmlns:a16="http://schemas.microsoft.com/office/drawing/2014/main" id="{C89A008A-264B-429C-8F3A-AEAE143E8957}"/>
               </a:ext>
             </a:extLst>
           </p:cNvPr>
@@ -11255,7 +13242,7 @@
           <p:cNvPr id="6" name="">
             <a:extLst xmlns:a="http://schemas.openxmlformats.org/drawingml/2006/main">
               <a:ext uri="{FF2B5EF4-FFF2-40B4-BE49-F238E27FC236}">
-                <a16:creationId xmlns:a16="http://schemas.microsoft.com/office/drawing/2014/main" id="{57BCBE71-FD42-4DCC-B20F-8A178CAF84BD}"/>
+                <a16:creationId xmlns:a16="http://schemas.microsoft.com/office/drawing/2014/main" id="{3855C0D2-04C5-4158-819D-CE3F11A119F4}"/>
               </a:ext>
             </a:extLst>
           </p:cNvPr>
@@ -11319,7 +13306,7 @@
           <p:cNvPr id="7" name="">
             <a:extLst xmlns:a="http://schemas.openxmlformats.org/drawingml/2006/main">
               <a:ext uri="{FF2B5EF4-FFF2-40B4-BE49-F238E27FC236}">
-                <a16:creationId xmlns:a16="http://schemas.microsoft.com/office/drawing/2014/main" id="{3CA8574E-222D-4FED-8C9F-E901EB1F6B4B}"/>
+                <a16:creationId xmlns:a16="http://schemas.microsoft.com/office/drawing/2014/main" id="{A4F1BA65-D2F0-4ABE-A1E4-0E2CA8B7ADCD}"/>
               </a:ext>
             </a:extLst>
           </p:cNvPr>
@@ -11383,7 +13370,7 @@
           <p:cNvPr id="8" name="">
             <a:extLst xmlns:a="http://schemas.openxmlformats.org/drawingml/2006/main">
               <a:ext uri="{FF2B5EF4-FFF2-40B4-BE49-F238E27FC236}">
-                <a16:creationId xmlns:a16="http://schemas.microsoft.com/office/drawing/2014/main" id="{D0DE335A-EB28-4F6E-A654-C4A84920372C}"/>
+                <a16:creationId xmlns:a16="http://schemas.microsoft.com/office/drawing/2014/main" id="{6774F66D-B277-4828-ACBF-0D0606B3F3C6}"/>
               </a:ext>
             </a:extLst>
           </p:cNvPr>
@@ -11447,7 +13434,7 @@
           <p:cNvPr id="9" name="">
             <a:extLst xmlns:a="http://schemas.openxmlformats.org/drawingml/2006/main">
               <a:ext uri="{FF2B5EF4-FFF2-40B4-BE49-F238E27FC236}">
-                <a16:creationId xmlns:a16="http://schemas.microsoft.com/office/drawing/2014/main" id="{D973FDB0-C834-42AF-B97A-6E824CB08637}"/>
+                <a16:creationId xmlns:a16="http://schemas.microsoft.com/office/drawing/2014/main" id="{6672A2AC-2509-4CF7-BBD0-0E28B91DDF7B}"/>
               </a:ext>
             </a:extLst>
           </p:cNvPr>
@@ -11480,7 +13467,7 @@
           <p:cNvPr id="10" name="">
             <a:extLst xmlns:a="http://schemas.openxmlformats.org/drawingml/2006/main">
               <a:ext uri="{FF2B5EF4-FFF2-40B4-BE49-F238E27FC236}">
-                <a16:creationId xmlns:a16="http://schemas.microsoft.com/office/drawing/2014/main" id="{F75E50C7-A881-4BB0-B70B-0967A35B8AF0}"/>
+                <a16:creationId xmlns:a16="http://schemas.microsoft.com/office/drawing/2014/main" id="{34396185-C957-4171-A9CF-60132570BACE}"/>
               </a:ext>
             </a:extLst>
           </p:cNvPr>
@@ -11728,7 +13715,7 @@
           <p:cNvPr id="11" name="">
             <a:extLst xmlns:a="http://schemas.openxmlformats.org/drawingml/2006/main">
               <a:ext uri="{FF2B5EF4-FFF2-40B4-BE49-F238E27FC236}">
-                <a16:creationId xmlns:a16="http://schemas.microsoft.com/office/drawing/2014/main" id="{63B70FC3-D680-442A-AC0B-C114E590E3E6}"/>
+                <a16:creationId xmlns:a16="http://schemas.microsoft.com/office/drawing/2014/main" id="{6F7AF02C-F87B-4FDD-8A88-0F12DB523A86}"/>
               </a:ext>
             </a:extLst>
           </p:cNvPr>
@@ -11792,7 +13779,7 @@
           <p:cNvPr id="12" name="">
             <a:extLst xmlns:a="http://schemas.openxmlformats.org/drawingml/2006/main">
               <a:ext uri="{FF2B5EF4-FFF2-40B4-BE49-F238E27FC236}">
-                <a16:creationId xmlns:a16="http://schemas.microsoft.com/office/drawing/2014/main" id="{CAA8B8DC-44E8-47B4-9306-881180788E19}"/>
+                <a16:creationId xmlns:a16="http://schemas.microsoft.com/office/drawing/2014/main" id="{234D180D-527A-4060-8930-7E9105A1CDC6}"/>
               </a:ext>
             </a:extLst>
           </p:cNvPr>
@@ -11856,7 +13843,7 @@
           <p:cNvPr id="13" name="">
             <a:extLst xmlns:a="http://schemas.openxmlformats.org/drawingml/2006/main">
               <a:ext uri="{FF2B5EF4-FFF2-40B4-BE49-F238E27FC236}">
-                <a16:creationId xmlns:a16="http://schemas.microsoft.com/office/drawing/2014/main" id="{BCDBDF11-2159-4428-B238-8A51E8169B39}"/>
+                <a16:creationId xmlns:a16="http://schemas.microsoft.com/office/drawing/2014/main" id="{AC2BA89A-38CC-40B9-8C2F-317EBC7CEDDF}"/>
               </a:ext>
             </a:extLst>
           </p:cNvPr>
@@ -11920,7 +13907,7 @@
           <p:cNvPr id="14" name="">
             <a:extLst xmlns:a="http://schemas.openxmlformats.org/drawingml/2006/main">
               <a:ext uri="{FF2B5EF4-FFF2-40B4-BE49-F238E27FC236}">
-                <a16:creationId xmlns:a16="http://schemas.microsoft.com/office/drawing/2014/main" id="{7CCEF64F-32DC-4745-B843-DCF95B9FD1E5}"/>
+                <a16:creationId xmlns:a16="http://schemas.microsoft.com/office/drawing/2014/main" id="{165DE162-1E60-4F0A-AC25-BDF1470C10B1}"/>
               </a:ext>
             </a:extLst>
           </p:cNvPr>
@@ -11984,7 +13971,7 @@
           <p:cNvPr id="15" name="">
             <a:extLst xmlns:a="http://schemas.openxmlformats.org/drawingml/2006/main">
               <a:ext uri="{FF2B5EF4-FFF2-40B4-BE49-F238E27FC236}">
-                <a16:creationId xmlns:a16="http://schemas.microsoft.com/office/drawing/2014/main" id="{DC1CD4C8-9A0D-4B88-B514-62C656159037}"/>
+                <a16:creationId xmlns:a16="http://schemas.microsoft.com/office/drawing/2014/main" id="{BA91BEDB-B57F-4CC9-A63D-16F883CDF019}"/>
               </a:ext>
             </a:extLst>
           </p:cNvPr>
@@ -12048,7 +14035,7 @@
           <p:cNvPr id="16" name="">
             <a:extLst xmlns:a="http://schemas.openxmlformats.org/drawingml/2006/main">
               <a:ext uri="{FF2B5EF4-FFF2-40B4-BE49-F238E27FC236}">
-                <a16:creationId xmlns:a16="http://schemas.microsoft.com/office/drawing/2014/main" id="{1613E29D-3FCC-4E40-88BF-7B13199198DA}"/>
+                <a16:creationId xmlns:a16="http://schemas.microsoft.com/office/drawing/2014/main" id="{C2481C64-1151-4628-B8FE-B397705AC992}"/>
               </a:ext>
             </a:extLst>
           </p:cNvPr>
@@ -12112,7 +14099,7 @@
           <p:cNvPr id="17" name="">
             <a:extLst xmlns:a="http://schemas.openxmlformats.org/drawingml/2006/main">
               <a:ext uri="{FF2B5EF4-FFF2-40B4-BE49-F238E27FC236}">
-                <a16:creationId xmlns:a16="http://schemas.microsoft.com/office/drawing/2014/main" id="{AD53BACA-5A50-4CD9-AA06-2743B2D887E6}"/>
+                <a16:creationId xmlns:a16="http://schemas.microsoft.com/office/drawing/2014/main" id="{64A3D973-79C4-44C2-B595-912B2B926C5F}"/>
               </a:ext>
             </a:extLst>
           </p:cNvPr>
@@ -12176,7 +14163,7 @@
           <p:cNvPr id="18" name="">
             <a:extLst xmlns:a="http://schemas.openxmlformats.org/drawingml/2006/main">
               <a:ext uri="{FF2B5EF4-FFF2-40B4-BE49-F238E27FC236}">
-                <a16:creationId xmlns:a16="http://schemas.microsoft.com/office/drawing/2014/main" id="{7F2A1D55-0F3E-4F3F-B647-8FD0EC8D4DDB}"/>
+                <a16:creationId xmlns:a16="http://schemas.microsoft.com/office/drawing/2014/main" id="{02307737-ABF7-4250-AEBE-13C073F7E46A}"/>
               </a:ext>
             </a:extLst>
           </p:cNvPr>
@@ -12240,7 +14227,7 @@
           <p:cNvPr id="19" name="">
             <a:extLst xmlns:a="http://schemas.openxmlformats.org/drawingml/2006/main">
               <a:ext uri="{FF2B5EF4-FFF2-40B4-BE49-F238E27FC236}">
-                <a16:creationId xmlns:a16="http://schemas.microsoft.com/office/drawing/2014/main" id="{87042D5D-601A-44CC-82DF-E8C5CF5EDE90}"/>
+                <a16:creationId xmlns:a16="http://schemas.microsoft.com/office/drawing/2014/main" id="{2BD094D0-FA00-4A52-8EFC-2AEA7A49D6EF}"/>
               </a:ext>
             </a:extLst>
           </p:cNvPr>
@@ -12273,7 +14260,7 @@
           <p:cNvPr id="20" name="">
             <a:extLst xmlns:a="http://schemas.openxmlformats.org/drawingml/2006/main">
               <a:ext uri="{FF2B5EF4-FFF2-40B4-BE49-F238E27FC236}">
-                <a16:creationId xmlns:a16="http://schemas.microsoft.com/office/drawing/2014/main" id="{59D3C402-8A58-469C-A882-426776AF49DE}"/>
+                <a16:creationId xmlns:a16="http://schemas.microsoft.com/office/drawing/2014/main" id="{B805D052-7D7F-4E67-9F86-915CB80BD8B6}"/>
               </a:ext>
             </a:extLst>
           </p:cNvPr>
@@ -12337,7 +14324,7 @@
           <p:cNvPr id="21" name="">
             <a:extLst xmlns:a="http://schemas.openxmlformats.org/drawingml/2006/main">
               <a:ext uri="{FF2B5EF4-FFF2-40B4-BE49-F238E27FC236}">
-                <a16:creationId xmlns:a16="http://schemas.microsoft.com/office/drawing/2014/main" id="{0AF63544-3392-4EF8-996E-C05E791CE51E}"/>
+                <a16:creationId xmlns:a16="http://schemas.microsoft.com/office/drawing/2014/main" id="{C4BC318B-BA2D-40F4-9ACE-CEED46309AC5}"/>
               </a:ext>
             </a:extLst>
           </p:cNvPr>
@@ -12370,7 +14357,7 @@
           <p:cNvPr id="22" name="">
             <a:extLst xmlns:a="http://schemas.openxmlformats.org/drawingml/2006/main">
               <a:ext uri="{FF2B5EF4-FFF2-40B4-BE49-F238E27FC236}">
-                <a16:creationId xmlns:a16="http://schemas.microsoft.com/office/drawing/2014/main" id="{DF652F6C-D95D-4EF4-A20C-A6122EF93AC2}"/>
+                <a16:creationId xmlns:a16="http://schemas.microsoft.com/office/drawing/2014/main" id="{EDF54A60-E5CF-4081-951F-F1CCB7208ECE}"/>
               </a:ext>
             </a:extLst>
           </p:cNvPr>
@@ -12434,7 +14421,7 @@
           <p:cNvPr id="23" name="">
             <a:extLst xmlns:a="http://schemas.openxmlformats.org/drawingml/2006/main">
               <a:ext uri="{FF2B5EF4-FFF2-40B4-BE49-F238E27FC236}">
-                <a16:creationId xmlns:a16="http://schemas.microsoft.com/office/drawing/2014/main" id="{E205B412-0A8D-45D4-BF46-D096DA39DDA5}"/>
+                <a16:creationId xmlns:a16="http://schemas.microsoft.com/office/drawing/2014/main" id="{6BBBC47D-A58D-40C1-B748-53505422B799}"/>
               </a:ext>
             </a:extLst>
           </p:cNvPr>
@@ -12467,7 +14454,7 @@
           <p:cNvPr id="24" name="">
             <a:extLst xmlns:a="http://schemas.openxmlformats.org/drawingml/2006/main">
               <a:ext uri="{FF2B5EF4-FFF2-40B4-BE49-F238E27FC236}">
-                <a16:creationId xmlns:a16="http://schemas.microsoft.com/office/drawing/2014/main" id="{748D2922-F9AB-48C2-8883-EE459F9E4CDC}"/>
+                <a16:creationId xmlns:a16="http://schemas.microsoft.com/office/drawing/2014/main" id="{41E9ED6C-4320-4BF2-B9CD-76E0CDC59C65}"/>
               </a:ext>
             </a:extLst>
           </p:cNvPr>
@@ -12531,7 +14518,7 @@
           <p:cNvPr id="25" name="">
             <a:extLst xmlns:a="http://schemas.openxmlformats.org/drawingml/2006/main">
               <a:ext uri="{FF2B5EF4-FFF2-40B4-BE49-F238E27FC236}">
-                <a16:creationId xmlns:a16="http://schemas.microsoft.com/office/drawing/2014/main" id="{1C395840-A82D-4079-A5E7-0388348D418B}"/>
+                <a16:creationId xmlns:a16="http://schemas.microsoft.com/office/drawing/2014/main" id="{6ECAC508-9059-4292-82E7-049721897F0D}"/>
               </a:ext>
             </a:extLst>
           </p:cNvPr>
@@ -12566,7 +14553,7 @@
           <p:cNvPr id="26" name="">
             <a:extLst xmlns:a="http://schemas.openxmlformats.org/drawingml/2006/main">
               <a:ext uri="{FF2B5EF4-FFF2-40B4-BE49-F238E27FC236}">
-                <a16:creationId xmlns:a16="http://schemas.microsoft.com/office/drawing/2014/main" id="{3EB014E3-DAB2-4801-9283-FF8C82F983F9}"/>
+                <a16:creationId xmlns:a16="http://schemas.microsoft.com/office/drawing/2014/main" id="{CE40C96F-7BFF-4CEB-9197-6CA1A8A96FFE}"/>
               </a:ext>
             </a:extLst>
           </p:cNvPr>
@@ -12601,7 +14588,7 @@
           <p:cNvPr id="27" name="">
             <a:extLst xmlns:a="http://schemas.openxmlformats.org/drawingml/2006/main">
               <a:ext uri="{FF2B5EF4-FFF2-40B4-BE49-F238E27FC236}">
-                <a16:creationId xmlns:a16="http://schemas.microsoft.com/office/drawing/2014/main" id="{06A3270A-A73F-4EE8-B9F3-7EA8406FA01E}"/>
+                <a16:creationId xmlns:a16="http://schemas.microsoft.com/office/drawing/2014/main" id="{A1FF9B75-2DAC-44D3-AB3E-0A7A671CE280}"/>
               </a:ext>
             </a:extLst>
           </p:cNvPr>
@@ -12636,7 +14623,7 @@
           <p:cNvPr id="28" name="">
             <a:extLst xmlns:a="http://schemas.openxmlformats.org/drawingml/2006/main">
               <a:ext uri="{FF2B5EF4-FFF2-40B4-BE49-F238E27FC236}">
-                <a16:creationId xmlns:a16="http://schemas.microsoft.com/office/drawing/2014/main" id="{DEE98AEA-7043-4B7B-A576-D83B48340D98}"/>
+                <a16:creationId xmlns:a16="http://schemas.microsoft.com/office/drawing/2014/main" id="{56E09711-41AB-4FDF-94CA-8788435AAE1F}"/>
               </a:ext>
             </a:extLst>
           </p:cNvPr>
@@ -12671,7 +14658,7 @@
           <p:cNvPr id="29" name="">
             <a:extLst xmlns:a="http://schemas.openxmlformats.org/drawingml/2006/main">
               <a:ext uri="{FF2B5EF4-FFF2-40B4-BE49-F238E27FC236}">
-                <a16:creationId xmlns:a16="http://schemas.microsoft.com/office/drawing/2014/main" id="{D13E1D33-D921-4ECE-B409-BDE509C24F79}"/>
+                <a16:creationId xmlns:a16="http://schemas.microsoft.com/office/drawing/2014/main" id="{CF61F03D-02C4-440B-B72D-C0B48F29AFB0}"/>
               </a:ext>
             </a:extLst>
           </p:cNvPr>
@@ -12735,7 +14722,7 @@
           <p:cNvPr id="30" name="">
             <a:extLst xmlns:a="http://schemas.openxmlformats.org/drawingml/2006/main">
               <a:ext uri="{FF2B5EF4-FFF2-40B4-BE49-F238E27FC236}">
-                <a16:creationId xmlns:a16="http://schemas.microsoft.com/office/drawing/2014/main" id="{9F2F672A-DF07-4ACB-83B8-F077ABD6B0D6}"/>
+                <a16:creationId xmlns:a16="http://schemas.microsoft.com/office/drawing/2014/main" id="{0D92C7D9-6842-44BC-8BBB-F9F1E51357B9}"/>
               </a:ext>
             </a:extLst>
           </p:cNvPr>
@@ -12797,7 +14784,7 @@
     </p:spTree>
     <p:extLst>
       <p:ext uri="{BB962C8B-B14F-4D97-AF65-F5344CB8AC3E}">
-        <p14:creationId xmlns:p14="http://schemas.microsoft.com/office/powerpoint/2010/main" val="1464123540"/>
+        <p14:creationId xmlns:p14="http://schemas.microsoft.com/office/powerpoint/2010/main" val="2050804931"/>
       </p:ext>
     </p:extLst>
   </p:cSld>
@@ -12821,7 +14808,7 @@
           <p:cNvPr id="1" name="">
             <a:extLst xmlns:a="http://schemas.openxmlformats.org/drawingml/2006/main">
               <a:ext uri="{FF2B5EF4-FFF2-40B4-BE49-F238E27FC236}">
-                <a16:creationId xmlns:a16="http://schemas.microsoft.com/office/drawing/2014/main" id="{A69540D8-9FA9-4111-A1A3-9DBAB63FDA52}"/>
+                <a16:creationId xmlns:a16="http://schemas.microsoft.com/office/drawing/2014/main" id="{338293B8-CFF5-4A8E-B216-CEFD74E3DEB4}"/>
               </a:ext>
             </a:extLst>
           </p:cNvPr>
@@ -12856,7 +14843,7 @@
           <p:cNvPr id="2" name="">
             <a:extLst xmlns:a="http://schemas.openxmlformats.org/drawingml/2006/main">
               <a:ext uri="{FF2B5EF4-FFF2-40B4-BE49-F238E27FC236}">
-                <a16:creationId xmlns:a16="http://schemas.microsoft.com/office/drawing/2014/main" id="{C209BA1F-F731-4A0B-A676-C9EDAA236171}"/>
+                <a16:creationId xmlns:a16="http://schemas.microsoft.com/office/drawing/2014/main" id="{25CCC43E-6CB1-4CED-91FA-412B0D4B9666}"/>
               </a:ext>
             </a:extLst>
           </p:cNvPr>
@@ -12891,7 +14878,7 @@
           <p:cNvPr id="3" name="">
             <a:extLst xmlns:a="http://schemas.openxmlformats.org/drawingml/2006/main">
               <a:ext uri="{FF2B5EF4-FFF2-40B4-BE49-F238E27FC236}">
-                <a16:creationId xmlns:a16="http://schemas.microsoft.com/office/drawing/2014/main" id="{44CD1617-EFE3-4916-B9B7-CE709C81A5CF}"/>
+                <a16:creationId xmlns:a16="http://schemas.microsoft.com/office/drawing/2014/main" id="{EEFA8855-3A87-4D98-AB62-39CEB717F4A0}"/>
               </a:ext>
             </a:extLst>
           </p:cNvPr>
@@ -12926,7 +14913,7 @@
           <p:cNvPr id="4" name="">
             <a:extLst xmlns:a="http://schemas.openxmlformats.org/drawingml/2006/main">
               <a:ext uri="{FF2B5EF4-FFF2-40B4-BE49-F238E27FC236}">
-                <a16:creationId xmlns:a16="http://schemas.microsoft.com/office/drawing/2014/main" id="{4B066AB6-19AA-44E8-8BFE-7BD4057E1235}"/>
+                <a16:creationId xmlns:a16="http://schemas.microsoft.com/office/drawing/2014/main" id="{23803E9D-3A38-414D-BC8B-9B19DD0846FC}"/>
               </a:ext>
             </a:extLst>
           </p:cNvPr>
@@ -12961,7 +14948,7 @@
           <p:cNvPr id="5" name="">
             <a:extLst xmlns:a="http://schemas.openxmlformats.org/drawingml/2006/main">
               <a:ext uri="{FF2B5EF4-FFF2-40B4-BE49-F238E27FC236}">
-                <a16:creationId xmlns:a16="http://schemas.microsoft.com/office/drawing/2014/main" id="{EF105E37-99ED-4496-BB37-0BA038A9CDDF}"/>
+                <a16:creationId xmlns:a16="http://schemas.microsoft.com/office/drawing/2014/main" id="{A1B7AD06-D684-4938-A6D2-1F5FB2422596}"/>
               </a:ext>
             </a:extLst>
           </p:cNvPr>
@@ -12996,7 +14983,7 @@
           <p:cNvPr id="6" name="">
             <a:extLst xmlns:a="http://schemas.openxmlformats.org/drawingml/2006/main">
               <a:ext uri="{FF2B5EF4-FFF2-40B4-BE49-F238E27FC236}">
-                <a16:creationId xmlns:a16="http://schemas.microsoft.com/office/drawing/2014/main" id="{D6FED58B-A907-4340-920A-6B3C5B16330C}"/>
+                <a16:creationId xmlns:a16="http://schemas.microsoft.com/office/drawing/2014/main" id="{4B68D74A-A7F2-444E-98C3-003986B29755}"/>
               </a:ext>
             </a:extLst>
           </p:cNvPr>
@@ -13060,7 +15047,7 @@
           <p:cNvPr id="7" name="">
             <a:extLst xmlns:a="http://schemas.openxmlformats.org/drawingml/2006/main">
               <a:ext uri="{FF2B5EF4-FFF2-40B4-BE49-F238E27FC236}">
-                <a16:creationId xmlns:a16="http://schemas.microsoft.com/office/drawing/2014/main" id="{587DAA9B-2EE0-415D-985B-F54B126F13E2}"/>
+                <a16:creationId xmlns:a16="http://schemas.microsoft.com/office/drawing/2014/main" id="{73F060FB-57C5-4E6E-B516-A2F4CF823387}"/>
               </a:ext>
             </a:extLst>
           </p:cNvPr>
@@ -13124,7 +15111,7 @@
           <p:cNvPr id="8" name="">
             <a:extLst xmlns:a="http://schemas.openxmlformats.org/drawingml/2006/main">
               <a:ext uri="{FF2B5EF4-FFF2-40B4-BE49-F238E27FC236}">
-                <a16:creationId xmlns:a16="http://schemas.microsoft.com/office/drawing/2014/main" id="{059FBA20-69A0-4823-97F4-864F57B8A4CF}"/>
+                <a16:creationId xmlns:a16="http://schemas.microsoft.com/office/drawing/2014/main" id="{15F82FB5-AC32-4BD4-A59A-4EBDF03C271F}"/>
               </a:ext>
             </a:extLst>
           </p:cNvPr>
@@ -13188,7 +15175,7 @@
           <p:cNvPr id="9" name="">
             <a:extLst xmlns:a="http://schemas.openxmlformats.org/drawingml/2006/main">
               <a:ext uri="{FF2B5EF4-FFF2-40B4-BE49-F238E27FC236}">
-                <a16:creationId xmlns:a16="http://schemas.microsoft.com/office/drawing/2014/main" id="{81CF1543-6BD2-41E4-BD5D-ECE4A85EA340}"/>
+                <a16:creationId xmlns:a16="http://schemas.microsoft.com/office/drawing/2014/main" id="{38AA6118-5C33-470C-9590-24EBA17CEF64}"/>
               </a:ext>
             </a:extLst>
           </p:cNvPr>
@@ -13221,7 +15208,7 @@
           <p:cNvPr id="10" name="">
             <a:extLst xmlns:a="http://schemas.openxmlformats.org/drawingml/2006/main">
               <a:ext uri="{FF2B5EF4-FFF2-40B4-BE49-F238E27FC236}">
-                <a16:creationId xmlns:a16="http://schemas.microsoft.com/office/drawing/2014/main" id="{865595C4-F86B-4CBD-A6D7-A8F245685A9F}"/>
+                <a16:creationId xmlns:a16="http://schemas.microsoft.com/office/drawing/2014/main" id="{F9D8F7F7-0D86-4507-BC86-780F41734D33}"/>
               </a:ext>
             </a:extLst>
           </p:cNvPr>
@@ -13256,7 +15243,7 @@
           <p:cNvPr id="11" name="">
             <a:extLst xmlns:a="http://schemas.openxmlformats.org/drawingml/2006/main">
               <a:ext uri="{FF2B5EF4-FFF2-40B4-BE49-F238E27FC236}">
-                <a16:creationId xmlns:a16="http://schemas.microsoft.com/office/drawing/2014/main" id="{A5C47E90-E338-469F-8866-16C4A6572E5B}"/>
+                <a16:creationId xmlns:a16="http://schemas.microsoft.com/office/drawing/2014/main" id="{5E8966AE-1431-4253-BCD4-6860B07CBE6E}"/>
               </a:ext>
             </a:extLst>
           </p:cNvPr>
@@ -13320,7 +15307,7 @@
           <p:cNvPr id="12" name="">
             <a:extLst xmlns:a="http://schemas.openxmlformats.org/drawingml/2006/main">
               <a:ext uri="{FF2B5EF4-FFF2-40B4-BE49-F238E27FC236}">
-                <a16:creationId xmlns:a16="http://schemas.microsoft.com/office/drawing/2014/main" id="{45048E36-59FC-412A-8415-0098E13E8AD7}"/>
+                <a16:creationId xmlns:a16="http://schemas.microsoft.com/office/drawing/2014/main" id="{968AD0A4-CECA-435E-A4FD-8E7FD1195B12}"/>
               </a:ext>
             </a:extLst>
           </p:cNvPr>
@@ -13384,7 +15371,7 @@
           <p:cNvPr id="13" name="">
             <a:extLst xmlns:a="http://schemas.openxmlformats.org/drawingml/2006/main">
               <a:ext uri="{FF2B5EF4-FFF2-40B4-BE49-F238E27FC236}">
-                <a16:creationId xmlns:a16="http://schemas.microsoft.com/office/drawing/2014/main" id="{B5D18A7F-26F2-4B9D-B77C-09A2869D7601}"/>
+                <a16:creationId xmlns:a16="http://schemas.microsoft.com/office/drawing/2014/main" id="{AF98265A-7BBB-489B-95C1-DA8DD0FA7ECE}"/>
               </a:ext>
             </a:extLst>
           </p:cNvPr>
@@ -13448,7 +15435,7 @@
           <p:cNvPr id="14" name="">
             <a:extLst xmlns:a="http://schemas.openxmlformats.org/drawingml/2006/main">
               <a:ext uri="{FF2B5EF4-FFF2-40B4-BE49-F238E27FC236}">
-                <a16:creationId xmlns:a16="http://schemas.microsoft.com/office/drawing/2014/main" id="{7FABF787-5C3F-40E1-9E33-A8958BE9E80C}"/>
+                <a16:creationId xmlns:a16="http://schemas.microsoft.com/office/drawing/2014/main" id="{AD242908-1D62-46C3-810F-BB1D842C47FA}"/>
               </a:ext>
             </a:extLst>
           </p:cNvPr>
@@ -13481,7 +15468,7 @@
           <p:cNvPr id="15" name="">
             <a:extLst xmlns:a="http://schemas.openxmlformats.org/drawingml/2006/main">
               <a:ext uri="{FF2B5EF4-FFF2-40B4-BE49-F238E27FC236}">
-                <a16:creationId xmlns:a16="http://schemas.microsoft.com/office/drawing/2014/main" id="{A8D214EF-59B7-456A-865A-55A9E3B7453C}"/>
+                <a16:creationId xmlns:a16="http://schemas.microsoft.com/office/drawing/2014/main" id="{2B40AB35-6C78-47C2-BBB9-EC67553F4AFB}"/>
               </a:ext>
             </a:extLst>
           </p:cNvPr>
@@ -13516,7 +15503,7 @@
           <p:cNvPr id="16" name="">
             <a:extLst xmlns:a="http://schemas.openxmlformats.org/drawingml/2006/main">
               <a:ext uri="{FF2B5EF4-FFF2-40B4-BE49-F238E27FC236}">
-                <a16:creationId xmlns:a16="http://schemas.microsoft.com/office/drawing/2014/main" id="{11619A89-8E85-4F2D-A691-21F6AF90747A}"/>
+                <a16:creationId xmlns:a16="http://schemas.microsoft.com/office/drawing/2014/main" id="{3FBFA028-7EF0-4725-82B1-1B2FAE7B028E}"/>
               </a:ext>
             </a:extLst>
           </p:cNvPr>
@@ -13580,7 +15567,7 @@
           <p:cNvPr id="17" name="">
             <a:extLst xmlns:a="http://schemas.openxmlformats.org/drawingml/2006/main">
               <a:ext uri="{FF2B5EF4-FFF2-40B4-BE49-F238E27FC236}">
-                <a16:creationId xmlns:a16="http://schemas.microsoft.com/office/drawing/2014/main" id="{1E2CD72C-9FB3-4AF2-8696-B3612370CB2B}"/>
+                <a16:creationId xmlns:a16="http://schemas.microsoft.com/office/drawing/2014/main" id="{CC95FC6F-89D4-4CDC-8A0B-C502122BD9A9}"/>
               </a:ext>
             </a:extLst>
           </p:cNvPr>
@@ -13644,7 +15631,7 @@
           <p:cNvPr id="18" name="">
             <a:extLst xmlns:a="http://schemas.openxmlformats.org/drawingml/2006/main">
               <a:ext uri="{FF2B5EF4-FFF2-40B4-BE49-F238E27FC236}">
-                <a16:creationId xmlns:a16="http://schemas.microsoft.com/office/drawing/2014/main" id="{5AC966D6-DD13-4FF7-88EF-A1CA9D727E49}"/>
+                <a16:creationId xmlns:a16="http://schemas.microsoft.com/office/drawing/2014/main" id="{D888CB73-15B3-4338-B486-BAC1E3834AEF}"/>
               </a:ext>
             </a:extLst>
           </p:cNvPr>
@@ -13708,7 +15695,7 @@
           <p:cNvPr id="19" name="">
             <a:extLst xmlns:a="http://schemas.openxmlformats.org/drawingml/2006/main">
               <a:ext uri="{FF2B5EF4-FFF2-40B4-BE49-F238E27FC236}">
-                <a16:creationId xmlns:a16="http://schemas.microsoft.com/office/drawing/2014/main" id="{7C194CAF-F0AE-42AA-9063-3EC183A6F50D}"/>
+                <a16:creationId xmlns:a16="http://schemas.microsoft.com/office/drawing/2014/main" id="{33B74E45-9DB9-4F97-8533-44B80D6A41C1}"/>
               </a:ext>
             </a:extLst>
           </p:cNvPr>
@@ -13741,7 +15728,7 @@
           <p:cNvPr id="20" name="">
             <a:extLst xmlns:a="http://schemas.openxmlformats.org/drawingml/2006/main">
               <a:ext uri="{FF2B5EF4-FFF2-40B4-BE49-F238E27FC236}">
-                <a16:creationId xmlns:a16="http://schemas.microsoft.com/office/drawing/2014/main" id="{72085F2A-1893-42E5-875E-BDF34DEF5CE0}"/>
+                <a16:creationId xmlns:a16="http://schemas.microsoft.com/office/drawing/2014/main" id="{A0269C4E-CCC7-4A25-A05F-192F59856B3D}"/>
               </a:ext>
             </a:extLst>
           </p:cNvPr>
@@ -13776,7 +15763,7 @@
           <p:cNvPr id="21" name="">
             <a:extLst xmlns:a="http://schemas.openxmlformats.org/drawingml/2006/main">
               <a:ext uri="{FF2B5EF4-FFF2-40B4-BE49-F238E27FC236}">
-                <a16:creationId xmlns:a16="http://schemas.microsoft.com/office/drawing/2014/main" id="{71C5524B-B4C7-49AD-BE20-4E96B23D657D}"/>
+                <a16:creationId xmlns:a16="http://schemas.microsoft.com/office/drawing/2014/main" id="{777A24C3-2CA1-437A-8676-B58EC9EFAC60}"/>
               </a:ext>
             </a:extLst>
           </p:cNvPr>
@@ -13840,7 +15827,7 @@
           <p:cNvPr id="22" name="">
             <a:extLst xmlns:a="http://schemas.openxmlformats.org/drawingml/2006/main">
               <a:ext uri="{FF2B5EF4-FFF2-40B4-BE49-F238E27FC236}">
-                <a16:creationId xmlns:a16="http://schemas.microsoft.com/office/drawing/2014/main" id="{13F0A50B-C33B-4DA5-9D57-8C3289633C2D}"/>
+                <a16:creationId xmlns:a16="http://schemas.microsoft.com/office/drawing/2014/main" id="{A1D41AF4-D357-4010-A619-ADFCD949A3AC}"/>
               </a:ext>
             </a:extLst>
           </p:cNvPr>
@@ -13904,7 +15891,7 @@
           <p:cNvPr id="23" name="">
             <a:extLst xmlns:a="http://schemas.openxmlformats.org/drawingml/2006/main">
               <a:ext uri="{FF2B5EF4-FFF2-40B4-BE49-F238E27FC236}">
-                <a16:creationId xmlns:a16="http://schemas.microsoft.com/office/drawing/2014/main" id="{8351C40A-6E5A-42DA-9F8B-63456EC0C6BB}"/>
+                <a16:creationId xmlns:a16="http://schemas.microsoft.com/office/drawing/2014/main" id="{0F5CF691-AD05-437D-BDC7-C1B889FB8B19}"/>
               </a:ext>
             </a:extLst>
           </p:cNvPr>
@@ -13968,7 +15955,7 @@
           <p:cNvPr id="24" name="">
             <a:extLst xmlns:a="http://schemas.openxmlformats.org/drawingml/2006/main">
               <a:ext uri="{FF2B5EF4-FFF2-40B4-BE49-F238E27FC236}">
-                <a16:creationId xmlns:a16="http://schemas.microsoft.com/office/drawing/2014/main" id="{6CD6DB5D-7F1D-4716-B946-0292DC7F9583}"/>
+                <a16:creationId xmlns:a16="http://schemas.microsoft.com/office/drawing/2014/main" id="{624EC7BF-436E-4C13-9867-803642616537}"/>
               </a:ext>
             </a:extLst>
           </p:cNvPr>
@@ -14001,7 +15988,7 @@
           <p:cNvPr id="25" name="">
             <a:extLst xmlns:a="http://schemas.openxmlformats.org/drawingml/2006/main">
               <a:ext uri="{FF2B5EF4-FFF2-40B4-BE49-F238E27FC236}">
-                <a16:creationId xmlns:a16="http://schemas.microsoft.com/office/drawing/2014/main" id="{5804A48C-ED51-455A-A5DE-1DDFD60DE512}"/>
+                <a16:creationId xmlns:a16="http://schemas.microsoft.com/office/drawing/2014/main" id="{67B14BE7-90A4-43F7-A3DE-447EAE4F1E81}"/>
               </a:ext>
             </a:extLst>
           </p:cNvPr>
@@ -14036,7 +16023,7 @@
           <p:cNvPr id="26" name="">
             <a:extLst xmlns:a="http://schemas.openxmlformats.org/drawingml/2006/main">
               <a:ext uri="{FF2B5EF4-FFF2-40B4-BE49-F238E27FC236}">
-                <a16:creationId xmlns:a16="http://schemas.microsoft.com/office/drawing/2014/main" id="{AEAFDB11-0132-4F7A-A1A3-6B68253574AD}"/>
+                <a16:creationId xmlns:a16="http://schemas.microsoft.com/office/drawing/2014/main" id="{8D139430-7620-41C2-952F-36809D45F948}"/>
               </a:ext>
             </a:extLst>
           </p:cNvPr>
@@ -14100,7 +16087,7 @@
           <p:cNvPr id="27" name="">
             <a:extLst xmlns:a="http://schemas.openxmlformats.org/drawingml/2006/main">
               <a:ext uri="{FF2B5EF4-FFF2-40B4-BE49-F238E27FC236}">
-                <a16:creationId xmlns:a16="http://schemas.microsoft.com/office/drawing/2014/main" id="{4A33B6E2-3CE6-438A-A355-627DCE862F95}"/>
+                <a16:creationId xmlns:a16="http://schemas.microsoft.com/office/drawing/2014/main" id="{3470260B-DBB0-4A14-A774-4FC4750DE0D2}"/>
               </a:ext>
             </a:extLst>
           </p:cNvPr>
@@ -14164,7 +16151,7 @@
           <p:cNvPr id="28" name="">
             <a:extLst xmlns:a="http://schemas.openxmlformats.org/drawingml/2006/main">
               <a:ext uri="{FF2B5EF4-FFF2-40B4-BE49-F238E27FC236}">
-                <a16:creationId xmlns:a16="http://schemas.microsoft.com/office/drawing/2014/main" id="{CB4EC7B1-DDA7-4FF0-BEE0-117FB811BDBA}"/>
+                <a16:creationId xmlns:a16="http://schemas.microsoft.com/office/drawing/2014/main" id="{A5A1B574-6F6F-4A23-B567-9FD9222F4207}"/>
               </a:ext>
             </a:extLst>
           </p:cNvPr>
@@ -14197,7 +16184,7 @@
           <p:cNvPr id="29" name="">
             <a:extLst xmlns:a="http://schemas.openxmlformats.org/drawingml/2006/main">
               <a:ext uri="{FF2B5EF4-FFF2-40B4-BE49-F238E27FC236}">
-                <a16:creationId xmlns:a16="http://schemas.microsoft.com/office/drawing/2014/main" id="{7A25914E-BD3E-40F1-8223-E5A0D0803060}"/>
+                <a16:creationId xmlns:a16="http://schemas.microsoft.com/office/drawing/2014/main" id="{A87D6542-C4D5-4DE0-A155-50486669A7E3}"/>
               </a:ext>
             </a:extLst>
           </p:cNvPr>
@@ -14261,7 +16248,7 @@
           <p:cNvPr id="30" name="">
             <a:extLst xmlns:a="http://schemas.openxmlformats.org/drawingml/2006/main">
               <a:ext uri="{FF2B5EF4-FFF2-40B4-BE49-F238E27FC236}">
-                <a16:creationId xmlns:a16="http://schemas.microsoft.com/office/drawing/2014/main" id="{40DE9FC4-DD85-4B81-98FE-28BEF160305D}"/>
+                <a16:creationId xmlns:a16="http://schemas.microsoft.com/office/drawing/2014/main" id="{5348878A-114E-4F6A-82D9-7FFCAC831E1B}"/>
               </a:ext>
             </a:extLst>
           </p:cNvPr>
@@ -14294,7 +16281,7 @@
           <p:cNvPr id="31" name="">
             <a:extLst xmlns:a="http://schemas.openxmlformats.org/drawingml/2006/main">
               <a:ext uri="{FF2B5EF4-FFF2-40B4-BE49-F238E27FC236}">
-                <a16:creationId xmlns:a16="http://schemas.microsoft.com/office/drawing/2014/main" id="{C7102925-B297-45FE-877F-B3AB809BD035}"/>
+                <a16:creationId xmlns:a16="http://schemas.microsoft.com/office/drawing/2014/main" id="{DBD20849-E0AD-4A2D-9C0D-D996C2414B8D}"/>
               </a:ext>
             </a:extLst>
           </p:cNvPr>
@@ -14358,7 +16345,7 @@
           <p:cNvPr id="32" name="">
             <a:extLst xmlns:a="http://schemas.openxmlformats.org/drawingml/2006/main">
               <a:ext uri="{FF2B5EF4-FFF2-40B4-BE49-F238E27FC236}">
-                <a16:creationId xmlns:a16="http://schemas.microsoft.com/office/drawing/2014/main" id="{5DBC3CED-4ACD-4443-BEF2-5FFC75F5C944}"/>
+                <a16:creationId xmlns:a16="http://schemas.microsoft.com/office/drawing/2014/main" id="{72DC2CCA-7475-4F6B-A6D1-4429A8977466}"/>
               </a:ext>
             </a:extLst>
           </p:cNvPr>
@@ -14422,7 +16409,7 @@
           <p:cNvPr id="33" name="">
             <a:extLst xmlns:a="http://schemas.openxmlformats.org/drawingml/2006/main">
               <a:ext uri="{FF2B5EF4-FFF2-40B4-BE49-F238E27FC236}">
-                <a16:creationId xmlns:a16="http://schemas.microsoft.com/office/drawing/2014/main" id="{91D92726-FD95-4A26-85E5-C5A7E8E4216C}"/>
+                <a16:creationId xmlns:a16="http://schemas.microsoft.com/office/drawing/2014/main" id="{52FD9613-4671-4A3E-9AA4-F1E813F69C23}"/>
               </a:ext>
             </a:extLst>
           </p:cNvPr>
@@ -14457,7 +16444,7 @@
           <p:cNvPr id="34" name="">
             <a:extLst xmlns:a="http://schemas.openxmlformats.org/drawingml/2006/main">
               <a:ext uri="{FF2B5EF4-FFF2-40B4-BE49-F238E27FC236}">
-                <a16:creationId xmlns:a16="http://schemas.microsoft.com/office/drawing/2014/main" id="{E80F9F08-844B-473F-809A-7971578BAB45}"/>
+                <a16:creationId xmlns:a16="http://schemas.microsoft.com/office/drawing/2014/main" id="{5DDECB49-6A21-4C1B-A8ED-2285B06BC518}"/>
               </a:ext>
             </a:extLst>
           </p:cNvPr>
@@ -14492,7 +16479,7 @@
           <p:cNvPr id="35" name="">
             <a:extLst xmlns:a="http://schemas.openxmlformats.org/drawingml/2006/main">
               <a:ext uri="{FF2B5EF4-FFF2-40B4-BE49-F238E27FC236}">
-                <a16:creationId xmlns:a16="http://schemas.microsoft.com/office/drawing/2014/main" id="{817E10D8-6D72-4612-B9BF-DC6AE52122E5}"/>
+                <a16:creationId xmlns:a16="http://schemas.microsoft.com/office/drawing/2014/main" id="{4C3ED55C-4438-47FB-8A3A-0C1A8E631B18}"/>
               </a:ext>
             </a:extLst>
           </p:cNvPr>
@@ -14527,7 +16514,7 @@
           <p:cNvPr id="36" name="">
             <a:extLst xmlns:a="http://schemas.openxmlformats.org/drawingml/2006/main">
               <a:ext uri="{FF2B5EF4-FFF2-40B4-BE49-F238E27FC236}">
-                <a16:creationId xmlns:a16="http://schemas.microsoft.com/office/drawing/2014/main" id="{F8B7A3A5-DC85-4628-8E7B-39E7EE0A9622}"/>
+                <a16:creationId xmlns:a16="http://schemas.microsoft.com/office/drawing/2014/main" id="{7E2B5896-D51F-43F7-B781-F9327DC5E0C1}"/>
               </a:ext>
             </a:extLst>
           </p:cNvPr>
@@ -14562,7 +16549,7 @@
           <p:cNvPr id="37" name="">
             <a:extLst xmlns:a="http://schemas.openxmlformats.org/drawingml/2006/main">
               <a:ext uri="{FF2B5EF4-FFF2-40B4-BE49-F238E27FC236}">
-                <a16:creationId xmlns:a16="http://schemas.microsoft.com/office/drawing/2014/main" id="{385F8A9E-84B1-45EC-AEC2-8C709BE1F93A}"/>
+                <a16:creationId xmlns:a16="http://schemas.microsoft.com/office/drawing/2014/main" id="{2A5D190E-9974-4F57-B87D-9FC786214D04}"/>
               </a:ext>
             </a:extLst>
           </p:cNvPr>
@@ -14626,7 +16613,7 @@
           <p:cNvPr id="38" name="">
             <a:extLst xmlns:a="http://schemas.openxmlformats.org/drawingml/2006/main">
               <a:ext uri="{FF2B5EF4-FFF2-40B4-BE49-F238E27FC236}">
-                <a16:creationId xmlns:a16="http://schemas.microsoft.com/office/drawing/2014/main" id="{D4936D59-80B8-4E9F-9A56-B28C1EF45E58}"/>
+                <a16:creationId xmlns:a16="http://schemas.microsoft.com/office/drawing/2014/main" id="{225ED5ED-972F-47C4-9639-62F1AC270CF8}"/>
               </a:ext>
             </a:extLst>
           </p:cNvPr>
@@ -14688,7 +16675,7 @@
     </p:spTree>
     <p:extLst>
       <p:ext uri="{BB962C8B-B14F-4D97-AF65-F5344CB8AC3E}">
-        <p14:creationId xmlns:p14="http://schemas.microsoft.com/office/powerpoint/2010/main" val="755944837"/>
+        <p14:creationId xmlns:p14="http://schemas.microsoft.com/office/powerpoint/2010/main" val="1868974599"/>
       </p:ext>
     </p:extLst>
   </p:cSld>
@@ -14712,7 +16699,7 @@
           <p:cNvPr id="1" name="">
             <a:extLst xmlns:a="http://schemas.openxmlformats.org/drawingml/2006/main">
               <a:ext uri="{FF2B5EF4-FFF2-40B4-BE49-F238E27FC236}">
-                <a16:creationId xmlns:a16="http://schemas.microsoft.com/office/drawing/2014/main" id="{1B60058E-BA0F-4714-9BE4-42F3FAB5C11B}"/>
+                <a16:creationId xmlns:a16="http://schemas.microsoft.com/office/drawing/2014/main" id="{63FD59D9-A816-41E4-AE59-AA24506761D6}"/>
               </a:ext>
             </a:extLst>
           </p:cNvPr>
@@ -14747,7 +16734,7 @@
           <p:cNvPr id="2" name="">
             <a:extLst xmlns:a="http://schemas.openxmlformats.org/drawingml/2006/main">
               <a:ext uri="{FF2B5EF4-FFF2-40B4-BE49-F238E27FC236}">
-                <a16:creationId xmlns:a16="http://schemas.microsoft.com/office/drawing/2014/main" id="{E9C0547F-217B-4DFC-975A-FFB75990096C}"/>
+                <a16:creationId xmlns:a16="http://schemas.microsoft.com/office/drawing/2014/main" id="{AC67A45A-AE37-401F-A0D8-B5A98C29AF86}"/>
               </a:ext>
             </a:extLst>
           </p:cNvPr>
@@ -14782,7 +16769,7 @@
           <p:cNvPr id="3" name="">
             <a:extLst xmlns:a="http://schemas.openxmlformats.org/drawingml/2006/main">
               <a:ext uri="{FF2B5EF4-FFF2-40B4-BE49-F238E27FC236}">
-                <a16:creationId xmlns:a16="http://schemas.microsoft.com/office/drawing/2014/main" id="{8F678796-CEEE-4CA9-A013-3EEB25A61772}"/>
+                <a16:creationId xmlns:a16="http://schemas.microsoft.com/office/drawing/2014/main" id="{0A3A1887-1220-458E-BC02-CACED0715C1B}"/>
               </a:ext>
             </a:extLst>
           </p:cNvPr>
@@ -14817,7 +16804,7 @@
           <p:cNvPr id="4" name="">
             <a:extLst xmlns:a="http://schemas.openxmlformats.org/drawingml/2006/main">
               <a:ext uri="{FF2B5EF4-FFF2-40B4-BE49-F238E27FC236}">
-                <a16:creationId xmlns:a16="http://schemas.microsoft.com/office/drawing/2014/main" id="{4582D30A-6E80-4AB8-B4B1-55830033BFFA}"/>
+                <a16:creationId xmlns:a16="http://schemas.microsoft.com/office/drawing/2014/main" id="{0A41BCAF-8867-4952-A163-72CEC688689C}"/>
               </a:ext>
             </a:extLst>
           </p:cNvPr>
@@ -14852,7 +16839,7 @@
           <p:cNvPr id="5" name="">
             <a:extLst xmlns:a="http://schemas.openxmlformats.org/drawingml/2006/main">
               <a:ext uri="{FF2B5EF4-FFF2-40B4-BE49-F238E27FC236}">
-                <a16:creationId xmlns:a16="http://schemas.microsoft.com/office/drawing/2014/main" id="{36769466-13E1-4613-B92F-8F56AEDC63E4}"/>
+                <a16:creationId xmlns:a16="http://schemas.microsoft.com/office/drawing/2014/main" id="{9AF41A7B-22EA-479B-8145-407D9B942296}"/>
               </a:ext>
             </a:extLst>
           </p:cNvPr>
@@ -14887,7 +16874,7 @@
           <p:cNvPr id="6" name="">
             <a:extLst xmlns:a="http://schemas.openxmlformats.org/drawingml/2006/main">
               <a:ext uri="{FF2B5EF4-FFF2-40B4-BE49-F238E27FC236}">
-                <a16:creationId xmlns:a16="http://schemas.microsoft.com/office/drawing/2014/main" id="{AF382948-7EF7-4306-8986-46F640DCFB9A}"/>
+                <a16:creationId xmlns:a16="http://schemas.microsoft.com/office/drawing/2014/main" id="{5CE67E6C-D276-4A11-8BB9-197CCCA352C2}"/>
               </a:ext>
             </a:extLst>
           </p:cNvPr>
@@ -14951,7 +16938,7 @@
           <p:cNvPr id="7" name="">
             <a:extLst xmlns:a="http://schemas.openxmlformats.org/drawingml/2006/main">
               <a:ext uri="{FF2B5EF4-FFF2-40B4-BE49-F238E27FC236}">
-                <a16:creationId xmlns:a16="http://schemas.microsoft.com/office/drawing/2014/main" id="{52BC1543-465A-4143-B0BE-E09ADFBD62C3}"/>
+                <a16:creationId xmlns:a16="http://schemas.microsoft.com/office/drawing/2014/main" id="{25E764ED-4C1E-452D-9069-3DCBFF620921}"/>
               </a:ext>
             </a:extLst>
           </p:cNvPr>
@@ -15015,7 +17002,7 @@
           <p:cNvPr id="8" name="">
             <a:extLst xmlns:a="http://schemas.openxmlformats.org/drawingml/2006/main">
               <a:ext uri="{FF2B5EF4-FFF2-40B4-BE49-F238E27FC236}">
-                <a16:creationId xmlns:a16="http://schemas.microsoft.com/office/drawing/2014/main" id="{8D13E7DF-A7EF-4B22-A214-2DB5EE02C5BE}"/>
+                <a16:creationId xmlns:a16="http://schemas.microsoft.com/office/drawing/2014/main" id="{A8E3789D-0200-4184-A48A-ECCC0B814E42}"/>
               </a:ext>
             </a:extLst>
           </p:cNvPr>
@@ -15079,7 +17066,7 @@
           <p:cNvPr id="9" name="">
             <a:extLst xmlns:a="http://schemas.openxmlformats.org/drawingml/2006/main">
               <a:ext uri="{FF2B5EF4-FFF2-40B4-BE49-F238E27FC236}">
-                <a16:creationId xmlns:a16="http://schemas.microsoft.com/office/drawing/2014/main" id="{2999D759-136D-4A2F-8C9D-D1CE19EF45CA}"/>
+                <a16:creationId xmlns:a16="http://schemas.microsoft.com/office/drawing/2014/main" id="{1C5F934A-7647-41B5-86EB-874CA401C83A}"/>
               </a:ext>
             </a:extLst>
           </p:cNvPr>
@@ -15112,7 +17099,7 @@
           <p:cNvPr id="10" name="">
             <a:extLst xmlns:a="http://schemas.openxmlformats.org/drawingml/2006/main">
               <a:ext uri="{FF2B5EF4-FFF2-40B4-BE49-F238E27FC236}">
-                <a16:creationId xmlns:a16="http://schemas.microsoft.com/office/drawing/2014/main" id="{6D8AEF20-F3EC-4276-889C-9C2E5BD28632}"/>
+                <a16:creationId xmlns:a16="http://schemas.microsoft.com/office/drawing/2014/main" id="{8A544316-D4A9-46EE-BD08-2258F9F975C5}"/>
               </a:ext>
             </a:extLst>
           </p:cNvPr>
@@ -15176,7 +17163,7 @@
           <p:cNvPr id="11" name="">
             <a:extLst xmlns:a="http://schemas.openxmlformats.org/drawingml/2006/main">
               <a:ext uri="{FF2B5EF4-FFF2-40B4-BE49-F238E27FC236}">
-                <a16:creationId xmlns:a16="http://schemas.microsoft.com/office/drawing/2014/main" id="{EC6BB3CE-F5C1-44B0-A19F-7E968E35F91E}"/>
+                <a16:creationId xmlns:a16="http://schemas.microsoft.com/office/drawing/2014/main" id="{AA1D6270-FA5F-449B-AC2A-F40096692AFB}"/>
               </a:ext>
             </a:extLst>
           </p:cNvPr>
@@ -15209,7 +17196,7 @@
           <p:cNvPr id="12" name="">
             <a:extLst xmlns:a="http://schemas.openxmlformats.org/drawingml/2006/main">
               <a:ext uri="{FF2B5EF4-FFF2-40B4-BE49-F238E27FC236}">
-                <a16:creationId xmlns:a16="http://schemas.microsoft.com/office/drawing/2014/main" id="{C33B4FD4-3F4C-40FF-905E-7FE5EE59A8D2}"/>
+                <a16:creationId xmlns:a16="http://schemas.microsoft.com/office/drawing/2014/main" id="{E061AE11-D277-47A4-8FCC-1189371F4FEF}"/>
               </a:ext>
             </a:extLst>
           </p:cNvPr>
@@ -15244,7 +17231,7 @@
           <p:cNvPr id="13" name="">
             <a:extLst xmlns:a="http://schemas.openxmlformats.org/drawingml/2006/main">
               <a:ext uri="{FF2B5EF4-FFF2-40B4-BE49-F238E27FC236}">
-                <a16:creationId xmlns:a16="http://schemas.microsoft.com/office/drawing/2014/main" id="{BFFE51A5-7E65-4D71-9FA3-AB26CB2CE995}"/>
+                <a16:creationId xmlns:a16="http://schemas.microsoft.com/office/drawing/2014/main" id="{E56DB8BB-E12B-4B84-8F5F-671CE57EA3BB}"/>
               </a:ext>
             </a:extLst>
           </p:cNvPr>
@@ -15308,7 +17295,7 @@
           <p:cNvPr id="14" name="">
             <a:extLst xmlns:a="http://schemas.openxmlformats.org/drawingml/2006/main">
               <a:ext uri="{FF2B5EF4-FFF2-40B4-BE49-F238E27FC236}">
-                <a16:creationId xmlns:a16="http://schemas.microsoft.com/office/drawing/2014/main" id="{0544EAE9-97E0-4333-81D6-8CBE7E78D3A3}"/>
+                <a16:creationId xmlns:a16="http://schemas.microsoft.com/office/drawing/2014/main" id="{CE7A3171-80D3-49C9-80FD-FDF8051B21AD}"/>
               </a:ext>
             </a:extLst>
           </p:cNvPr>
@@ -15372,7 +17359,7 @@
           <p:cNvPr id="15" name="">
             <a:extLst xmlns:a="http://schemas.openxmlformats.org/drawingml/2006/main">
               <a:ext uri="{FF2B5EF4-FFF2-40B4-BE49-F238E27FC236}">
-                <a16:creationId xmlns:a16="http://schemas.microsoft.com/office/drawing/2014/main" id="{E06A8ABC-62B7-4459-AA71-500F5B6E885E}"/>
+                <a16:creationId xmlns:a16="http://schemas.microsoft.com/office/drawing/2014/main" id="{F84FAF21-147A-4FBA-B1F8-4618932A24B5}"/>
               </a:ext>
             </a:extLst>
           </p:cNvPr>
@@ -15405,7 +17392,7 @@
           <p:cNvPr id="16" name="">
             <a:extLst xmlns:a="http://schemas.openxmlformats.org/drawingml/2006/main">
               <a:ext uri="{FF2B5EF4-FFF2-40B4-BE49-F238E27FC236}">
-                <a16:creationId xmlns:a16="http://schemas.microsoft.com/office/drawing/2014/main" id="{356BC261-F6DC-4708-8B05-DD6CA1116ADF}"/>
+                <a16:creationId xmlns:a16="http://schemas.microsoft.com/office/drawing/2014/main" id="{EF41E9FE-F2D3-461A-9BEB-74EE906A5597}"/>
               </a:ext>
             </a:extLst>
           </p:cNvPr>
@@ -15440,7 +17427,7 @@
           <p:cNvPr id="17" name="">
             <a:extLst xmlns:a="http://schemas.openxmlformats.org/drawingml/2006/main">
               <a:ext uri="{FF2B5EF4-FFF2-40B4-BE49-F238E27FC236}">
-                <a16:creationId xmlns:a16="http://schemas.microsoft.com/office/drawing/2014/main" id="{2FACC2A3-5036-4961-B5E8-C6640A637364}"/>
+                <a16:creationId xmlns:a16="http://schemas.microsoft.com/office/drawing/2014/main" id="{A2D1FCD3-7284-4A8C-8FBA-AD1C57CFABA3}"/>
               </a:ext>
             </a:extLst>
           </p:cNvPr>
@@ -15504,7 +17491,7 @@
           <p:cNvPr id="18" name="">
             <a:extLst xmlns:a="http://schemas.openxmlformats.org/drawingml/2006/main">
               <a:ext uri="{FF2B5EF4-FFF2-40B4-BE49-F238E27FC236}">
-                <a16:creationId xmlns:a16="http://schemas.microsoft.com/office/drawing/2014/main" id="{E46DF8A5-CDA4-4A01-9CFF-82B656CC99A8}"/>
+                <a16:creationId xmlns:a16="http://schemas.microsoft.com/office/drawing/2014/main" id="{637C2A26-D16E-4AC6-8887-751C210A6D7F}"/>
               </a:ext>
             </a:extLst>
           </p:cNvPr>
@@ -15568,7 +17555,7 @@
           <p:cNvPr id="19" name="">
             <a:extLst xmlns:a="http://schemas.openxmlformats.org/drawingml/2006/main">
               <a:ext uri="{FF2B5EF4-FFF2-40B4-BE49-F238E27FC236}">
-                <a16:creationId xmlns:a16="http://schemas.microsoft.com/office/drawing/2014/main" id="{D8781224-F12A-4486-A7A4-1B8C77A683C5}"/>
+                <a16:creationId xmlns:a16="http://schemas.microsoft.com/office/drawing/2014/main" id="{E67D221B-5501-4A7D-9FFE-99B2E77CE10B}"/>
               </a:ext>
             </a:extLst>
           </p:cNvPr>
@@ -15601,7 +17588,7 @@
           <p:cNvPr id="20" name="">
             <a:extLst xmlns:a="http://schemas.openxmlformats.org/drawingml/2006/main">
               <a:ext uri="{FF2B5EF4-FFF2-40B4-BE49-F238E27FC236}">
-                <a16:creationId xmlns:a16="http://schemas.microsoft.com/office/drawing/2014/main" id="{88A3D36B-EB36-40FA-9CFA-22432340BAAD}"/>
+                <a16:creationId xmlns:a16="http://schemas.microsoft.com/office/drawing/2014/main" id="{A8D6F7CA-B1ED-49F0-9AD3-740AE2BBD8C2}"/>
               </a:ext>
             </a:extLst>
           </p:cNvPr>
@@ -15636,7 +17623,7 @@
           <p:cNvPr id="21" name="">
             <a:extLst xmlns:a="http://schemas.openxmlformats.org/drawingml/2006/main">
               <a:ext uri="{FF2B5EF4-FFF2-40B4-BE49-F238E27FC236}">
-                <a16:creationId xmlns:a16="http://schemas.microsoft.com/office/drawing/2014/main" id="{3F3D8CEA-8BF5-45AB-A77C-3BCCFBCA1EAE}"/>
+                <a16:creationId xmlns:a16="http://schemas.microsoft.com/office/drawing/2014/main" id="{0A3B0829-CE3D-4518-A353-5B20D21FB457}"/>
               </a:ext>
             </a:extLst>
           </p:cNvPr>
@@ -15700,7 +17687,7 @@
           <p:cNvPr id="22" name="">
             <a:extLst xmlns:a="http://schemas.openxmlformats.org/drawingml/2006/main">
               <a:ext uri="{FF2B5EF4-FFF2-40B4-BE49-F238E27FC236}">
-                <a16:creationId xmlns:a16="http://schemas.microsoft.com/office/drawing/2014/main" id="{8ACFD230-E627-4868-AA23-6DA667B19038}"/>
+                <a16:creationId xmlns:a16="http://schemas.microsoft.com/office/drawing/2014/main" id="{28F0E74B-E2A8-4813-BBA2-F5FEB20FE9C9}"/>
               </a:ext>
             </a:extLst>
           </p:cNvPr>
@@ -15764,7 +17751,7 @@
           <p:cNvPr id="23" name="">
             <a:extLst xmlns:a="http://schemas.openxmlformats.org/drawingml/2006/main">
               <a:ext uri="{FF2B5EF4-FFF2-40B4-BE49-F238E27FC236}">
-                <a16:creationId xmlns:a16="http://schemas.microsoft.com/office/drawing/2014/main" id="{3C03C161-CC59-4708-B1CC-99DAE7F68796}"/>
+                <a16:creationId xmlns:a16="http://schemas.microsoft.com/office/drawing/2014/main" id="{04B45266-47F8-4FAF-87D9-CC7344494BBB}"/>
               </a:ext>
             </a:extLst>
           </p:cNvPr>
@@ -15797,7 +17784,7 @@
           <p:cNvPr id="24" name="">
             <a:extLst xmlns:a="http://schemas.openxmlformats.org/drawingml/2006/main">
               <a:ext uri="{FF2B5EF4-FFF2-40B4-BE49-F238E27FC236}">
-                <a16:creationId xmlns:a16="http://schemas.microsoft.com/office/drawing/2014/main" id="{6136B46A-9702-4E20-BEDA-A44E579098AC}"/>
+                <a16:creationId xmlns:a16="http://schemas.microsoft.com/office/drawing/2014/main" id="{2C98D776-1FB4-4704-A035-BB4BD729910D}"/>
               </a:ext>
             </a:extLst>
           </p:cNvPr>
@@ -15832,7 +17819,7 @@
           <p:cNvPr id="25" name="">
             <a:extLst xmlns:a="http://schemas.openxmlformats.org/drawingml/2006/main">
               <a:ext uri="{FF2B5EF4-FFF2-40B4-BE49-F238E27FC236}">
-                <a16:creationId xmlns:a16="http://schemas.microsoft.com/office/drawing/2014/main" id="{9DAC7663-2C6E-4ECC-8603-3A25C25EE752}"/>
+                <a16:creationId xmlns:a16="http://schemas.microsoft.com/office/drawing/2014/main" id="{59CE7895-2CCE-4625-BB16-8539BDFD0253}"/>
               </a:ext>
             </a:extLst>
           </p:cNvPr>
@@ -15896,7 +17883,7 @@
           <p:cNvPr id="26" name="">
             <a:extLst xmlns:a="http://schemas.openxmlformats.org/drawingml/2006/main">
               <a:ext uri="{FF2B5EF4-FFF2-40B4-BE49-F238E27FC236}">
-                <a16:creationId xmlns:a16="http://schemas.microsoft.com/office/drawing/2014/main" id="{C5CF151A-6CD4-49E6-878A-1FDCFD1CC4B7}"/>
+                <a16:creationId xmlns:a16="http://schemas.microsoft.com/office/drawing/2014/main" id="{56942548-BFCF-47B3-AAF0-D522DAD53345}"/>
               </a:ext>
             </a:extLst>
           </p:cNvPr>
@@ -15960,7 +17947,7 @@
           <p:cNvPr id="27" name="">
             <a:extLst xmlns:a="http://schemas.openxmlformats.org/drawingml/2006/main">
               <a:ext uri="{FF2B5EF4-FFF2-40B4-BE49-F238E27FC236}">
-                <a16:creationId xmlns:a16="http://schemas.microsoft.com/office/drawing/2014/main" id="{BBA47FAD-6D96-4958-8195-A9A18FBC43AB}"/>
+                <a16:creationId xmlns:a16="http://schemas.microsoft.com/office/drawing/2014/main" id="{8DB8FA81-BB34-44C8-A379-817675E7B923}"/>
               </a:ext>
             </a:extLst>
           </p:cNvPr>
@@ -15993,7 +17980,7 @@
           <p:cNvPr id="28" name="">
             <a:extLst xmlns:a="http://schemas.openxmlformats.org/drawingml/2006/main">
               <a:ext uri="{FF2B5EF4-FFF2-40B4-BE49-F238E27FC236}">
-                <a16:creationId xmlns:a16="http://schemas.microsoft.com/office/drawing/2014/main" id="{D10613BD-4124-4610-BADC-76F289A5E3F5}"/>
+                <a16:creationId xmlns:a16="http://schemas.microsoft.com/office/drawing/2014/main" id="{0168930C-8443-42A6-8F10-4BC02821B2DF}"/>
               </a:ext>
             </a:extLst>
           </p:cNvPr>
@@ -16057,7 +18044,7 @@
           <p:cNvPr id="29" name="">
             <a:extLst xmlns:a="http://schemas.openxmlformats.org/drawingml/2006/main">
               <a:ext uri="{FF2B5EF4-FFF2-40B4-BE49-F238E27FC236}">
-                <a16:creationId xmlns:a16="http://schemas.microsoft.com/office/drawing/2014/main" id="{853CECB8-292E-45CE-9CE9-D7BB6260D19D}"/>
+                <a16:creationId xmlns:a16="http://schemas.microsoft.com/office/drawing/2014/main" id="{92B1590E-85DB-40FC-BB2B-5DD36EE96D70}"/>
               </a:ext>
             </a:extLst>
           </p:cNvPr>
@@ -16090,7 +18077,7 @@
           <p:cNvPr id="30" name="">
             <a:extLst xmlns:a="http://schemas.openxmlformats.org/drawingml/2006/main">
               <a:ext uri="{FF2B5EF4-FFF2-40B4-BE49-F238E27FC236}">
-                <a16:creationId xmlns:a16="http://schemas.microsoft.com/office/drawing/2014/main" id="{16F685D7-2FB8-46BB-A98D-CB50D4BD57AD}"/>
+                <a16:creationId xmlns:a16="http://schemas.microsoft.com/office/drawing/2014/main" id="{9CDECC79-507D-4247-94F9-2548101501CA}"/>
               </a:ext>
             </a:extLst>
           </p:cNvPr>
@@ -16125,7 +18112,7 @@
           <p:cNvPr id="31" name="">
             <a:extLst xmlns:a="http://schemas.openxmlformats.org/drawingml/2006/main">
               <a:ext uri="{FF2B5EF4-FFF2-40B4-BE49-F238E27FC236}">
-                <a16:creationId xmlns:a16="http://schemas.microsoft.com/office/drawing/2014/main" id="{0232AF21-7F98-4D62-976B-5E63CC86F729}"/>
+                <a16:creationId xmlns:a16="http://schemas.microsoft.com/office/drawing/2014/main" id="{0A5CB75B-A884-4F31-9074-BE3B45231736}"/>
               </a:ext>
             </a:extLst>
           </p:cNvPr>
@@ -16189,7 +18176,7 @@
           <p:cNvPr id="32" name="">
             <a:extLst xmlns:a="http://schemas.openxmlformats.org/drawingml/2006/main">
               <a:ext uri="{FF2B5EF4-FFF2-40B4-BE49-F238E27FC236}">
-                <a16:creationId xmlns:a16="http://schemas.microsoft.com/office/drawing/2014/main" id="{897AC6B3-3BCB-43B7-A97D-1EF83A7061A7}"/>
+                <a16:creationId xmlns:a16="http://schemas.microsoft.com/office/drawing/2014/main" id="{AFC7A19B-7F80-41A8-AF65-1B0EE064157A}"/>
               </a:ext>
             </a:extLst>
           </p:cNvPr>
@@ -16253,7 +18240,7 @@
           <p:cNvPr id="33" name="">
             <a:extLst xmlns:a="http://schemas.openxmlformats.org/drawingml/2006/main">
               <a:ext uri="{FF2B5EF4-FFF2-40B4-BE49-F238E27FC236}">
-                <a16:creationId xmlns:a16="http://schemas.microsoft.com/office/drawing/2014/main" id="{305AFD60-FBBA-4256-8814-D56516D38CCC}"/>
+                <a16:creationId xmlns:a16="http://schemas.microsoft.com/office/drawing/2014/main" id="{E81280C1-9F9E-47A9-B516-E83ACA0D3F8D}"/>
               </a:ext>
             </a:extLst>
           </p:cNvPr>
@@ -16286,7 +18273,7 @@
           <p:cNvPr id="34" name="">
             <a:extLst xmlns:a="http://schemas.openxmlformats.org/drawingml/2006/main">
               <a:ext uri="{FF2B5EF4-FFF2-40B4-BE49-F238E27FC236}">
-                <a16:creationId xmlns:a16="http://schemas.microsoft.com/office/drawing/2014/main" id="{B22E1590-8DAA-4A6A-9BE6-2226DFD9F813}"/>
+                <a16:creationId xmlns:a16="http://schemas.microsoft.com/office/drawing/2014/main" id="{320BF8C1-6AFA-43A8-B997-4AF3359C0624}"/>
               </a:ext>
             </a:extLst>
           </p:cNvPr>
@@ -16321,7 +18308,7 @@
           <p:cNvPr id="35" name="">
             <a:extLst xmlns:a="http://schemas.openxmlformats.org/drawingml/2006/main">
               <a:ext uri="{FF2B5EF4-FFF2-40B4-BE49-F238E27FC236}">
-                <a16:creationId xmlns:a16="http://schemas.microsoft.com/office/drawing/2014/main" id="{C0CA58C0-C6F8-46DB-9B37-5A71596EDCE6}"/>
+                <a16:creationId xmlns:a16="http://schemas.microsoft.com/office/drawing/2014/main" id="{A5C78A0E-7ECB-40D0-A32F-104F33A8E8BB}"/>
               </a:ext>
             </a:extLst>
           </p:cNvPr>
@@ -16385,7 +18372,7 @@
           <p:cNvPr id="36" name="">
             <a:extLst xmlns:a="http://schemas.openxmlformats.org/drawingml/2006/main">
               <a:ext uri="{FF2B5EF4-FFF2-40B4-BE49-F238E27FC236}">
-                <a16:creationId xmlns:a16="http://schemas.microsoft.com/office/drawing/2014/main" id="{933A2F78-A469-4A59-BED2-8EB8C5E43AC9}"/>
+                <a16:creationId xmlns:a16="http://schemas.microsoft.com/office/drawing/2014/main" id="{2E5137F0-733E-4D4D-A00B-CC35E4F74299}"/>
               </a:ext>
             </a:extLst>
           </p:cNvPr>
@@ -16449,7 +18436,7 @@
           <p:cNvPr id="37" name="">
             <a:extLst xmlns:a="http://schemas.openxmlformats.org/drawingml/2006/main">
               <a:ext uri="{FF2B5EF4-FFF2-40B4-BE49-F238E27FC236}">
-                <a16:creationId xmlns:a16="http://schemas.microsoft.com/office/drawing/2014/main" id="{FEA13120-5999-4E66-ABAD-55DB4A2C9B6B}"/>
+                <a16:creationId xmlns:a16="http://schemas.microsoft.com/office/drawing/2014/main" id="{DD7DD22C-64B2-4085-B57F-EEBEE3F9808F}"/>
               </a:ext>
             </a:extLst>
           </p:cNvPr>
@@ -16482,7 +18469,7 @@
           <p:cNvPr id="38" name="">
             <a:extLst xmlns:a="http://schemas.openxmlformats.org/drawingml/2006/main">
               <a:ext uri="{FF2B5EF4-FFF2-40B4-BE49-F238E27FC236}">
-                <a16:creationId xmlns:a16="http://schemas.microsoft.com/office/drawing/2014/main" id="{E1415981-86D1-4E07-AE48-1C7399604194}"/>
+                <a16:creationId xmlns:a16="http://schemas.microsoft.com/office/drawing/2014/main" id="{97373013-1B4B-4F97-8CE0-375A37ACBD23}"/>
               </a:ext>
             </a:extLst>
           </p:cNvPr>
@@ -16517,7 +18504,7 @@
           <p:cNvPr id="39" name="">
             <a:extLst xmlns:a="http://schemas.openxmlformats.org/drawingml/2006/main">
               <a:ext uri="{FF2B5EF4-FFF2-40B4-BE49-F238E27FC236}">
-                <a16:creationId xmlns:a16="http://schemas.microsoft.com/office/drawing/2014/main" id="{17A8C7D0-0EEB-4E0A-AD4D-4DC145DE877D}"/>
+                <a16:creationId xmlns:a16="http://schemas.microsoft.com/office/drawing/2014/main" id="{234EC76A-0570-4FB9-9346-A977E44AB4F0}"/>
               </a:ext>
             </a:extLst>
           </p:cNvPr>
@@ -16581,7 +18568,7 @@
           <p:cNvPr id="40" name="">
             <a:extLst xmlns:a="http://schemas.openxmlformats.org/drawingml/2006/main">
               <a:ext uri="{FF2B5EF4-FFF2-40B4-BE49-F238E27FC236}">
-                <a16:creationId xmlns:a16="http://schemas.microsoft.com/office/drawing/2014/main" id="{B673B226-345D-4B53-82AA-D28279CEE56C}"/>
+                <a16:creationId xmlns:a16="http://schemas.microsoft.com/office/drawing/2014/main" id="{9967E1C2-6C6C-4913-8D20-87A06C6CC652}"/>
               </a:ext>
             </a:extLst>
           </p:cNvPr>
@@ -16645,7 +18632,7 @@
           <p:cNvPr id="41" name="">
             <a:extLst xmlns:a="http://schemas.openxmlformats.org/drawingml/2006/main">
               <a:ext uri="{FF2B5EF4-FFF2-40B4-BE49-F238E27FC236}">
-                <a16:creationId xmlns:a16="http://schemas.microsoft.com/office/drawing/2014/main" id="{8114E8C3-1B24-4B48-8F10-58597728728F}"/>
+                <a16:creationId xmlns:a16="http://schemas.microsoft.com/office/drawing/2014/main" id="{83BB77E0-2E51-4F56-88E5-F7C83DDD48AF}"/>
               </a:ext>
             </a:extLst>
           </p:cNvPr>
@@ -16678,7 +18665,7 @@
           <p:cNvPr id="42" name="">
             <a:extLst xmlns:a="http://schemas.openxmlformats.org/drawingml/2006/main">
               <a:ext uri="{FF2B5EF4-FFF2-40B4-BE49-F238E27FC236}">
-                <a16:creationId xmlns:a16="http://schemas.microsoft.com/office/drawing/2014/main" id="{927C58C4-C6F2-4943-A18E-306A2B8D845D}"/>
+                <a16:creationId xmlns:a16="http://schemas.microsoft.com/office/drawing/2014/main" id="{52597E27-1015-4F34-9289-C71A45161394}"/>
               </a:ext>
             </a:extLst>
           </p:cNvPr>
@@ -16713,7 +18700,7 @@
           <p:cNvPr id="43" name="">
             <a:extLst xmlns:a="http://schemas.openxmlformats.org/drawingml/2006/main">
               <a:ext uri="{FF2B5EF4-FFF2-40B4-BE49-F238E27FC236}">
-                <a16:creationId xmlns:a16="http://schemas.microsoft.com/office/drawing/2014/main" id="{A604200D-FA08-4191-8FAF-71D3BD00BABB}"/>
+                <a16:creationId xmlns:a16="http://schemas.microsoft.com/office/drawing/2014/main" id="{D0A206EC-B9A9-498A-A344-CC9DC2FB1936}"/>
               </a:ext>
             </a:extLst>
           </p:cNvPr>
@@ -16777,7 +18764,7 @@
           <p:cNvPr id="44" name="">
             <a:extLst xmlns:a="http://schemas.openxmlformats.org/drawingml/2006/main">
               <a:ext uri="{FF2B5EF4-FFF2-40B4-BE49-F238E27FC236}">
-                <a16:creationId xmlns:a16="http://schemas.microsoft.com/office/drawing/2014/main" id="{BA9AABE1-F3EF-4A01-BC4C-D4621A66876A}"/>
+                <a16:creationId xmlns:a16="http://schemas.microsoft.com/office/drawing/2014/main" id="{28A69CEF-7AE5-4974-B3A8-CF9C6C4DBDD3}"/>
               </a:ext>
             </a:extLst>
           </p:cNvPr>
@@ -16841,7 +18828,7 @@
           <p:cNvPr id="45" name="">
             <a:extLst xmlns:a="http://schemas.openxmlformats.org/drawingml/2006/main">
               <a:ext uri="{FF2B5EF4-FFF2-40B4-BE49-F238E27FC236}">
-                <a16:creationId xmlns:a16="http://schemas.microsoft.com/office/drawing/2014/main" id="{111F11FB-F05B-4FB6-9F3F-3649251F0B51}"/>
+                <a16:creationId xmlns:a16="http://schemas.microsoft.com/office/drawing/2014/main" id="{ABFAE942-7462-4A09-A242-C41BFD49B594}"/>
               </a:ext>
             </a:extLst>
           </p:cNvPr>
@@ -16905,7 +18892,7 @@
           <p:cNvPr id="46" name="">
             <a:extLst xmlns:a="http://schemas.openxmlformats.org/drawingml/2006/main">
               <a:ext uri="{FF2B5EF4-FFF2-40B4-BE49-F238E27FC236}">
-                <a16:creationId xmlns:a16="http://schemas.microsoft.com/office/drawing/2014/main" id="{0A8F0E4C-989C-45AD-8E20-AC3B7C63142F}"/>
+                <a16:creationId xmlns:a16="http://schemas.microsoft.com/office/drawing/2014/main" id="{EA885DF7-78E8-428B-AF7A-43C6CA2CF67B}"/>
               </a:ext>
             </a:extLst>
           </p:cNvPr>
@@ -16940,7 +18927,7 @@
           <p:cNvPr id="47" name="">
             <a:extLst xmlns:a="http://schemas.openxmlformats.org/drawingml/2006/main">
               <a:ext uri="{FF2B5EF4-FFF2-40B4-BE49-F238E27FC236}">
-                <a16:creationId xmlns:a16="http://schemas.microsoft.com/office/drawing/2014/main" id="{EED5C57E-B572-4F77-BD2C-CB47894FABDC}"/>
+                <a16:creationId xmlns:a16="http://schemas.microsoft.com/office/drawing/2014/main" id="{F2BE9352-61D0-4E43-AFA0-82633D852A22}"/>
               </a:ext>
             </a:extLst>
           </p:cNvPr>
@@ -16975,7 +18962,7 @@
           <p:cNvPr id="48" name="">
             <a:extLst xmlns:a="http://schemas.openxmlformats.org/drawingml/2006/main">
               <a:ext uri="{FF2B5EF4-FFF2-40B4-BE49-F238E27FC236}">
-                <a16:creationId xmlns:a16="http://schemas.microsoft.com/office/drawing/2014/main" id="{953ADA6D-6759-4B38-A15B-1618C0DAAE82}"/>
+                <a16:creationId xmlns:a16="http://schemas.microsoft.com/office/drawing/2014/main" id="{246F33BF-563C-4B70-BD1C-FE31E4B44B63}"/>
               </a:ext>
             </a:extLst>
           </p:cNvPr>
@@ -17010,7 +18997,7 @@
           <p:cNvPr id="49" name="">
             <a:extLst xmlns:a="http://schemas.openxmlformats.org/drawingml/2006/main">
               <a:ext uri="{FF2B5EF4-FFF2-40B4-BE49-F238E27FC236}">
-                <a16:creationId xmlns:a16="http://schemas.microsoft.com/office/drawing/2014/main" id="{2F021B38-3E82-49E4-B77F-48CC043A5313}"/>
+                <a16:creationId xmlns:a16="http://schemas.microsoft.com/office/drawing/2014/main" id="{30026F56-311F-4583-977F-A3887A514EB2}"/>
               </a:ext>
             </a:extLst>
           </p:cNvPr>
@@ -17045,7 +19032,7 @@
           <p:cNvPr id="50" name="">
             <a:extLst xmlns:a="http://schemas.openxmlformats.org/drawingml/2006/main">
               <a:ext uri="{FF2B5EF4-FFF2-40B4-BE49-F238E27FC236}">
-                <a16:creationId xmlns:a16="http://schemas.microsoft.com/office/drawing/2014/main" id="{BE995900-517D-406B-8001-79A00D18F92B}"/>
+                <a16:creationId xmlns:a16="http://schemas.microsoft.com/office/drawing/2014/main" id="{A0FD5D79-C1F7-4BAF-B844-56E04D817A27}"/>
               </a:ext>
             </a:extLst>
           </p:cNvPr>
@@ -17109,7 +19096,7 @@
           <p:cNvPr id="51" name="">
             <a:extLst xmlns:a="http://schemas.openxmlformats.org/drawingml/2006/main">
               <a:ext uri="{FF2B5EF4-FFF2-40B4-BE49-F238E27FC236}">
-                <a16:creationId xmlns:a16="http://schemas.microsoft.com/office/drawing/2014/main" id="{3E840CB4-A58E-4515-A9C9-BA773B381624}"/>
+                <a16:creationId xmlns:a16="http://schemas.microsoft.com/office/drawing/2014/main" id="{8CE609C8-3B79-484E-A2E5-C32DB52E1026}"/>
               </a:ext>
             </a:extLst>
           </p:cNvPr>
@@ -17171,7 +19158,7 @@
     </p:spTree>
     <p:extLst>
       <p:ext uri="{BB962C8B-B14F-4D97-AF65-F5344CB8AC3E}">
-        <p14:creationId xmlns:p14="http://schemas.microsoft.com/office/powerpoint/2010/main" val="1332981353"/>
+        <p14:creationId xmlns:p14="http://schemas.microsoft.com/office/powerpoint/2010/main" val="1096469415"/>
       </p:ext>
     </p:extLst>
   </p:cSld>
@@ -17195,7 +19182,7 @@
           <p:cNvPr id="1" name="">
             <a:extLst xmlns:a="http://schemas.openxmlformats.org/drawingml/2006/main">
               <a:ext uri="{FF2B5EF4-FFF2-40B4-BE49-F238E27FC236}">
-                <a16:creationId xmlns:a16="http://schemas.microsoft.com/office/drawing/2014/main" id="{1288D6F6-7520-48D3-A6AF-0BFF24FB14A7}"/>
+                <a16:creationId xmlns:a16="http://schemas.microsoft.com/office/drawing/2014/main" id="{123E5946-1513-47AB-9F3F-F3EF6EC0DE16}"/>
               </a:ext>
             </a:extLst>
           </p:cNvPr>
@@ -17230,7 +19217,7 @@
           <p:cNvPr id="2" name="">
             <a:extLst xmlns:a="http://schemas.openxmlformats.org/drawingml/2006/main">
               <a:ext uri="{FF2B5EF4-FFF2-40B4-BE49-F238E27FC236}">
-                <a16:creationId xmlns:a16="http://schemas.microsoft.com/office/drawing/2014/main" id="{60A9A4FA-47E1-4F02-91C9-C35C95AC130E}"/>
+                <a16:creationId xmlns:a16="http://schemas.microsoft.com/office/drawing/2014/main" id="{06559A9A-69C8-4338-88FC-0CEA73F7A7F6}"/>
               </a:ext>
             </a:extLst>
           </p:cNvPr>
@@ -17265,7 +19252,7 @@
           <p:cNvPr id="3" name="">
             <a:extLst xmlns:a="http://schemas.openxmlformats.org/drawingml/2006/main">
               <a:ext uri="{FF2B5EF4-FFF2-40B4-BE49-F238E27FC236}">
-                <a16:creationId xmlns:a16="http://schemas.microsoft.com/office/drawing/2014/main" id="{C3B4D6B6-ADDC-46A0-989F-9F44A124DF4E}"/>
+                <a16:creationId xmlns:a16="http://schemas.microsoft.com/office/drawing/2014/main" id="{70DB02D6-50C1-42E1-8BBD-DB3412C19DB8}"/>
               </a:ext>
             </a:extLst>
           </p:cNvPr>
@@ -17300,7 +19287,7 @@
           <p:cNvPr id="4" name="">
             <a:extLst xmlns:a="http://schemas.openxmlformats.org/drawingml/2006/main">
               <a:ext uri="{FF2B5EF4-FFF2-40B4-BE49-F238E27FC236}">
-                <a16:creationId xmlns:a16="http://schemas.microsoft.com/office/drawing/2014/main" id="{C9DC77AD-51F4-4655-9045-55750C2D2B39}"/>
+                <a16:creationId xmlns:a16="http://schemas.microsoft.com/office/drawing/2014/main" id="{BA433C5A-DBF3-4C2A-AB28-6691898BC74F}"/>
               </a:ext>
             </a:extLst>
           </p:cNvPr>
@@ -17335,7 +19322,7 @@
           <p:cNvPr id="5" name="">
             <a:extLst xmlns:a="http://schemas.openxmlformats.org/drawingml/2006/main">
               <a:ext uri="{FF2B5EF4-FFF2-40B4-BE49-F238E27FC236}">
-                <a16:creationId xmlns:a16="http://schemas.microsoft.com/office/drawing/2014/main" id="{E65225B2-685A-4BBD-80B3-8DE5F42DA30A}"/>
+                <a16:creationId xmlns:a16="http://schemas.microsoft.com/office/drawing/2014/main" id="{7848DD9B-F587-4AD6-A1A2-12A42D25CDED}"/>
               </a:ext>
             </a:extLst>
           </p:cNvPr>
@@ -17370,7 +19357,7 @@
           <p:cNvPr id="6" name="">
             <a:extLst xmlns:a="http://schemas.openxmlformats.org/drawingml/2006/main">
               <a:ext uri="{FF2B5EF4-FFF2-40B4-BE49-F238E27FC236}">
-                <a16:creationId xmlns:a16="http://schemas.microsoft.com/office/drawing/2014/main" id="{620EEB2C-3098-48CF-AC00-5BD7D16E44AE}"/>
+                <a16:creationId xmlns:a16="http://schemas.microsoft.com/office/drawing/2014/main" id="{76F15F53-F050-4EF1-A771-B019F27F9E13}"/>
               </a:ext>
             </a:extLst>
           </p:cNvPr>
@@ -17434,7 +19421,7 @@
           <p:cNvPr id="7" name="">
             <a:extLst xmlns:a="http://schemas.openxmlformats.org/drawingml/2006/main">
               <a:ext uri="{FF2B5EF4-FFF2-40B4-BE49-F238E27FC236}">
-                <a16:creationId xmlns:a16="http://schemas.microsoft.com/office/drawing/2014/main" id="{3D9081F1-C25E-4174-9B8A-8318C5B40CBD}"/>
+                <a16:creationId xmlns:a16="http://schemas.microsoft.com/office/drawing/2014/main" id="{5D1F89C9-35CD-4CBB-AEA0-0F4B351DC292}"/>
               </a:ext>
             </a:extLst>
           </p:cNvPr>
@@ -17498,7 +19485,7 @@
           <p:cNvPr id="8" name="">
             <a:extLst xmlns:a="http://schemas.openxmlformats.org/drawingml/2006/main">
               <a:ext uri="{FF2B5EF4-FFF2-40B4-BE49-F238E27FC236}">
-                <a16:creationId xmlns:a16="http://schemas.microsoft.com/office/drawing/2014/main" id="{B7ED9FA0-EBA8-444B-A6F6-357658EEDE8C}"/>
+                <a16:creationId xmlns:a16="http://schemas.microsoft.com/office/drawing/2014/main" id="{5CA425E5-217B-465D-871C-48A2F38BFE64}"/>
               </a:ext>
             </a:extLst>
           </p:cNvPr>
@@ -17562,7 +19549,7 @@
           <p:cNvPr id="9" name="">
             <a:extLst xmlns:a="http://schemas.openxmlformats.org/drawingml/2006/main">
               <a:ext uri="{FF2B5EF4-FFF2-40B4-BE49-F238E27FC236}">
-                <a16:creationId xmlns:a16="http://schemas.microsoft.com/office/drawing/2014/main" id="{6188B06D-8A7D-4C25-8765-8B40218BDF15}"/>
+                <a16:creationId xmlns:a16="http://schemas.microsoft.com/office/drawing/2014/main" id="{43E58B61-2328-43B1-8289-B5F1605A25F3}"/>
               </a:ext>
             </a:extLst>
           </p:cNvPr>
@@ -17595,7 +19582,7 @@
           <p:cNvPr id="10" name="">
             <a:extLst xmlns:a="http://schemas.openxmlformats.org/drawingml/2006/main">
               <a:ext uri="{FF2B5EF4-FFF2-40B4-BE49-F238E27FC236}">
-                <a16:creationId xmlns:a16="http://schemas.microsoft.com/office/drawing/2014/main" id="{4289CF6C-E34E-4AD4-A93E-6B278C1E6309}"/>
+                <a16:creationId xmlns:a16="http://schemas.microsoft.com/office/drawing/2014/main" id="{0C82E55D-238D-48CD-865F-934B2D6BDE6A}"/>
               </a:ext>
             </a:extLst>
           </p:cNvPr>
@@ -17659,7 +19646,7 @@
           <p:cNvPr id="11" name="">
             <a:extLst xmlns:a="http://schemas.openxmlformats.org/drawingml/2006/main">
               <a:ext uri="{FF2B5EF4-FFF2-40B4-BE49-F238E27FC236}">
-                <a16:creationId xmlns:a16="http://schemas.microsoft.com/office/drawing/2014/main" id="{FC38494C-469E-4931-8424-E85C0E200EC7}"/>
+                <a16:creationId xmlns:a16="http://schemas.microsoft.com/office/drawing/2014/main" id="{AD392CA8-AB29-444E-80B5-8BFF17DE452B}"/>
               </a:ext>
             </a:extLst>
           </p:cNvPr>
@@ -17723,7 +19710,7 @@
           <p:cNvPr id="12" name="">
             <a:extLst xmlns:a="http://schemas.openxmlformats.org/drawingml/2006/main">
               <a:ext uri="{FF2B5EF4-FFF2-40B4-BE49-F238E27FC236}">
-                <a16:creationId xmlns:a16="http://schemas.microsoft.com/office/drawing/2014/main" id="{E27422D9-9B94-42F1-B3D7-491C1403721B}"/>
+                <a16:creationId xmlns:a16="http://schemas.microsoft.com/office/drawing/2014/main" id="{D72C1788-64A3-401B-B389-C6E4CB169180}"/>
               </a:ext>
             </a:extLst>
           </p:cNvPr>
@@ -17756,7 +19743,7 @@
           <p:cNvPr id="13" name="">
             <a:extLst xmlns:a="http://schemas.openxmlformats.org/drawingml/2006/main">
               <a:ext uri="{FF2B5EF4-FFF2-40B4-BE49-F238E27FC236}">
-                <a16:creationId xmlns:a16="http://schemas.microsoft.com/office/drawing/2014/main" id="{3995591C-E3C6-4C3C-94BB-8FCC776EC8CD}"/>
+                <a16:creationId xmlns:a16="http://schemas.microsoft.com/office/drawing/2014/main" id="{CCD1C5A2-EBC9-44E6-BCF3-E5C3F0C98342}"/>
               </a:ext>
             </a:extLst>
           </p:cNvPr>
@@ -17820,7 +19807,7 @@
           <p:cNvPr id="14" name="">
             <a:extLst xmlns:a="http://schemas.openxmlformats.org/drawingml/2006/main">
               <a:ext uri="{FF2B5EF4-FFF2-40B4-BE49-F238E27FC236}">
-                <a16:creationId xmlns:a16="http://schemas.microsoft.com/office/drawing/2014/main" id="{6377555E-7ED4-4B7D-8F92-F71BB2A7BA3E}"/>
+                <a16:creationId xmlns:a16="http://schemas.microsoft.com/office/drawing/2014/main" id="{672BE193-9C77-406E-8AB8-95067CCBEE33}"/>
               </a:ext>
             </a:extLst>
           </p:cNvPr>
@@ -17884,7 +19871,7 @@
           <p:cNvPr id="15" name="">
             <a:extLst xmlns:a="http://schemas.openxmlformats.org/drawingml/2006/main">
               <a:ext uri="{FF2B5EF4-FFF2-40B4-BE49-F238E27FC236}">
-                <a16:creationId xmlns:a16="http://schemas.microsoft.com/office/drawing/2014/main" id="{F1C7A15C-3BD8-4A74-B257-8D1752997B32}"/>
+                <a16:creationId xmlns:a16="http://schemas.microsoft.com/office/drawing/2014/main" id="{31C37511-A077-4353-867B-C68BE01B5D86}"/>
               </a:ext>
             </a:extLst>
           </p:cNvPr>
@@ -17917,7 +19904,7 @@
           <p:cNvPr id="16" name="">
             <a:extLst xmlns:a="http://schemas.openxmlformats.org/drawingml/2006/main">
               <a:ext uri="{FF2B5EF4-FFF2-40B4-BE49-F238E27FC236}">
-                <a16:creationId xmlns:a16="http://schemas.microsoft.com/office/drawing/2014/main" id="{EC7305C5-8CCA-4D06-A8B0-A762DB49B24A}"/>
+                <a16:creationId xmlns:a16="http://schemas.microsoft.com/office/drawing/2014/main" id="{2911C25F-8D4F-44ED-8F1C-4AFD5174B296}"/>
               </a:ext>
             </a:extLst>
           </p:cNvPr>
@@ -17981,7 +19968,7 @@
           <p:cNvPr id="17" name="">
             <a:extLst xmlns:a="http://schemas.openxmlformats.org/drawingml/2006/main">
               <a:ext uri="{FF2B5EF4-FFF2-40B4-BE49-F238E27FC236}">
-                <a16:creationId xmlns:a16="http://schemas.microsoft.com/office/drawing/2014/main" id="{127527E2-F15F-409D-8229-0549A15DEBAB}"/>
+                <a16:creationId xmlns:a16="http://schemas.microsoft.com/office/drawing/2014/main" id="{18DDF4D8-B9F2-48CC-B7CA-E79F22238D2A}"/>
               </a:ext>
             </a:extLst>
           </p:cNvPr>
@@ -18045,7 +20032,7 @@
           <p:cNvPr id="18" name="">
             <a:extLst xmlns:a="http://schemas.openxmlformats.org/drawingml/2006/main">
               <a:ext uri="{FF2B5EF4-FFF2-40B4-BE49-F238E27FC236}">
-                <a16:creationId xmlns:a16="http://schemas.microsoft.com/office/drawing/2014/main" id="{076AC0FC-ABB3-4100-BAFE-AF53AE0FC867}"/>
+                <a16:creationId xmlns:a16="http://schemas.microsoft.com/office/drawing/2014/main" id="{9A88981C-1354-49ED-9E7A-A7FDFCE897CA}"/>
               </a:ext>
             </a:extLst>
           </p:cNvPr>
@@ -18078,7 +20065,7 @@
           <p:cNvPr id="19" name="">
             <a:extLst xmlns:a="http://schemas.openxmlformats.org/drawingml/2006/main">
               <a:ext uri="{FF2B5EF4-FFF2-40B4-BE49-F238E27FC236}">
-                <a16:creationId xmlns:a16="http://schemas.microsoft.com/office/drawing/2014/main" id="{DBC30FEA-4234-4047-91B2-F4AE8DE9288A}"/>
+                <a16:creationId xmlns:a16="http://schemas.microsoft.com/office/drawing/2014/main" id="{5D09AA93-0EF3-4081-96A2-AD07D2FA90A9}"/>
               </a:ext>
             </a:extLst>
           </p:cNvPr>
@@ -18142,7 +20129,7 @@
           <p:cNvPr id="20" name="">
             <a:extLst xmlns:a="http://schemas.openxmlformats.org/drawingml/2006/main">
               <a:ext uri="{FF2B5EF4-FFF2-40B4-BE49-F238E27FC236}">
-                <a16:creationId xmlns:a16="http://schemas.microsoft.com/office/drawing/2014/main" id="{43929F59-3916-4D59-B804-0FF0EE72C456}"/>
+                <a16:creationId xmlns:a16="http://schemas.microsoft.com/office/drawing/2014/main" id="{72F30A87-48C1-40E1-AC83-20A2D8901407}"/>
               </a:ext>
             </a:extLst>
           </p:cNvPr>
@@ -18206,7 +20193,7 @@
           <p:cNvPr id="21" name="">
             <a:extLst xmlns:a="http://schemas.openxmlformats.org/drawingml/2006/main">
               <a:ext uri="{FF2B5EF4-FFF2-40B4-BE49-F238E27FC236}">
-                <a16:creationId xmlns:a16="http://schemas.microsoft.com/office/drawing/2014/main" id="{FF91E808-93C7-49B2-ABAA-16D1A4318673}"/>
+                <a16:creationId xmlns:a16="http://schemas.microsoft.com/office/drawing/2014/main" id="{FAC9E102-21E0-4E90-9C4C-73A9014CCCC1}"/>
               </a:ext>
             </a:extLst>
           </p:cNvPr>
@@ -18239,7 +20226,7 @@
           <p:cNvPr id="22" name="">
             <a:extLst xmlns:a="http://schemas.openxmlformats.org/drawingml/2006/main">
               <a:ext uri="{FF2B5EF4-FFF2-40B4-BE49-F238E27FC236}">
-                <a16:creationId xmlns:a16="http://schemas.microsoft.com/office/drawing/2014/main" id="{11CF296E-4F7C-4E54-908F-73B2702ECEAB}"/>
+                <a16:creationId xmlns:a16="http://schemas.microsoft.com/office/drawing/2014/main" id="{2DA98B89-EEDA-4154-BCC2-850839430498}"/>
               </a:ext>
             </a:extLst>
           </p:cNvPr>
@@ -18303,7 +20290,7 @@
           <p:cNvPr id="23" name="">
             <a:extLst xmlns:a="http://schemas.openxmlformats.org/drawingml/2006/main">
               <a:ext uri="{FF2B5EF4-FFF2-40B4-BE49-F238E27FC236}">
-                <a16:creationId xmlns:a16="http://schemas.microsoft.com/office/drawing/2014/main" id="{626C67A7-FC54-41EC-82A3-6A86F9459765}"/>
+                <a16:creationId xmlns:a16="http://schemas.microsoft.com/office/drawing/2014/main" id="{53F83781-8A8B-409D-BA69-F808D0967D75}"/>
               </a:ext>
             </a:extLst>
           </p:cNvPr>
@@ -18367,7 +20354,7 @@
           <p:cNvPr id="24" name="">
             <a:extLst xmlns:a="http://schemas.openxmlformats.org/drawingml/2006/main">
               <a:ext uri="{FF2B5EF4-FFF2-40B4-BE49-F238E27FC236}">
-                <a16:creationId xmlns:a16="http://schemas.microsoft.com/office/drawing/2014/main" id="{CBE7CE30-68E7-4D01-9692-AD34113A0FF5}"/>
+                <a16:creationId xmlns:a16="http://schemas.microsoft.com/office/drawing/2014/main" id="{88F1358E-C772-4903-8F4E-1E268747C947}"/>
               </a:ext>
             </a:extLst>
           </p:cNvPr>
@@ -18431,7 +20418,7 @@
           <p:cNvPr id="25" name="">
             <a:extLst xmlns:a="http://schemas.openxmlformats.org/drawingml/2006/main">
               <a:ext uri="{FF2B5EF4-FFF2-40B4-BE49-F238E27FC236}">
-                <a16:creationId xmlns:a16="http://schemas.microsoft.com/office/drawing/2014/main" id="{29C04806-81E4-4851-A8DA-63E8B1ACB7A5}"/>
+                <a16:creationId xmlns:a16="http://schemas.microsoft.com/office/drawing/2014/main" id="{3EA6F1AB-4F83-4EEA-B889-85A6DFF590CF}"/>
               </a:ext>
             </a:extLst>
           </p:cNvPr>
@@ -18495,7 +20482,7 @@
           <p:cNvPr id="26" name="">
             <a:extLst xmlns:a="http://schemas.openxmlformats.org/drawingml/2006/main">
               <a:ext uri="{FF2B5EF4-FFF2-40B4-BE49-F238E27FC236}">
-                <a16:creationId xmlns:a16="http://schemas.microsoft.com/office/drawing/2014/main" id="{A0FB2232-1B89-49A2-8271-D4C783F9EF81}"/>
+                <a16:creationId xmlns:a16="http://schemas.microsoft.com/office/drawing/2014/main" id="{4450C48D-C2D3-448A-8125-3947113FCD44}"/>
               </a:ext>
             </a:extLst>
           </p:cNvPr>
@@ -18530,7 +20517,7 @@
           <p:cNvPr id="27" name="">
             <a:extLst xmlns:a="http://schemas.openxmlformats.org/drawingml/2006/main">
               <a:ext uri="{FF2B5EF4-FFF2-40B4-BE49-F238E27FC236}">
-                <a16:creationId xmlns:a16="http://schemas.microsoft.com/office/drawing/2014/main" id="{24586FA2-16F8-47EC-B769-1704D3BEC44C}"/>
+                <a16:creationId xmlns:a16="http://schemas.microsoft.com/office/drawing/2014/main" id="{910094CE-D5E6-4E3D-AFA5-1FF69879EDF1}"/>
               </a:ext>
             </a:extLst>
           </p:cNvPr>
@@ -18594,7 +20581,7 @@
           <p:cNvPr id="28" name="">
             <a:extLst xmlns:a="http://schemas.openxmlformats.org/drawingml/2006/main">
               <a:ext uri="{FF2B5EF4-FFF2-40B4-BE49-F238E27FC236}">
-                <a16:creationId xmlns:a16="http://schemas.microsoft.com/office/drawing/2014/main" id="{792BC074-6C78-4CEB-A2C7-A782CF8B8C66}"/>
+                <a16:creationId xmlns:a16="http://schemas.microsoft.com/office/drawing/2014/main" id="{07D6A80E-243F-4950-B1D3-6D2AC0391F2B}"/>
               </a:ext>
             </a:extLst>
           </p:cNvPr>
@@ -18629,7 +20616,7 @@
           <p:cNvPr id="29" name="">
             <a:extLst xmlns:a="http://schemas.openxmlformats.org/drawingml/2006/main">
               <a:ext uri="{FF2B5EF4-FFF2-40B4-BE49-F238E27FC236}">
-                <a16:creationId xmlns:a16="http://schemas.microsoft.com/office/drawing/2014/main" id="{B8CEAE4E-D8AC-4078-8399-576672DFFD12}"/>
+                <a16:creationId xmlns:a16="http://schemas.microsoft.com/office/drawing/2014/main" id="{FACD2878-D35C-48A6-9FA6-BF964602E748}"/>
               </a:ext>
             </a:extLst>
           </p:cNvPr>
@@ -18693,7 +20680,7 @@
           <p:cNvPr id="30" name="">
             <a:extLst xmlns:a="http://schemas.openxmlformats.org/drawingml/2006/main">
               <a:ext uri="{FF2B5EF4-FFF2-40B4-BE49-F238E27FC236}">
-                <a16:creationId xmlns:a16="http://schemas.microsoft.com/office/drawing/2014/main" id="{A2139D0A-4B2B-4153-877D-CF588AE5CA2E}"/>
+                <a16:creationId xmlns:a16="http://schemas.microsoft.com/office/drawing/2014/main" id="{63F336C3-CFC6-4413-BB8A-4EA824FEC364}"/>
               </a:ext>
             </a:extLst>
           </p:cNvPr>
@@ -18728,7 +20715,7 @@
           <p:cNvPr id="31" name="">
             <a:extLst xmlns:a="http://schemas.openxmlformats.org/drawingml/2006/main">
               <a:ext uri="{FF2B5EF4-FFF2-40B4-BE49-F238E27FC236}">
-                <a16:creationId xmlns:a16="http://schemas.microsoft.com/office/drawing/2014/main" id="{569E8755-1674-45C7-8A4B-840EEEF13AEC}"/>
+                <a16:creationId xmlns:a16="http://schemas.microsoft.com/office/drawing/2014/main" id="{7D4F1C64-AC93-4818-8578-816094889E33}"/>
               </a:ext>
             </a:extLst>
           </p:cNvPr>
@@ -18792,7 +20779,7 @@
           <p:cNvPr id="32" name="">
             <a:extLst xmlns:a="http://schemas.openxmlformats.org/drawingml/2006/main">
               <a:ext uri="{FF2B5EF4-FFF2-40B4-BE49-F238E27FC236}">
-                <a16:creationId xmlns:a16="http://schemas.microsoft.com/office/drawing/2014/main" id="{ACD7F0F5-8717-485B-86E6-5D954126A384}"/>
+                <a16:creationId xmlns:a16="http://schemas.microsoft.com/office/drawing/2014/main" id="{B84AC0E1-9F60-4726-96E1-72CE20C44B0B}"/>
               </a:ext>
             </a:extLst>
           </p:cNvPr>
@@ -18827,7 +20814,7 @@
           <p:cNvPr id="33" name="">
             <a:extLst xmlns:a="http://schemas.openxmlformats.org/drawingml/2006/main">
               <a:ext uri="{FF2B5EF4-FFF2-40B4-BE49-F238E27FC236}">
-                <a16:creationId xmlns:a16="http://schemas.microsoft.com/office/drawing/2014/main" id="{9190F0CA-13EE-4726-9044-672AB3EC9998}"/>
+                <a16:creationId xmlns:a16="http://schemas.microsoft.com/office/drawing/2014/main" id="{4B084D48-D266-462D-882D-460A5005A1CF}"/>
               </a:ext>
             </a:extLst>
           </p:cNvPr>
@@ -18891,7 +20878,7 @@
           <p:cNvPr id="34" name="">
             <a:extLst xmlns:a="http://schemas.openxmlformats.org/drawingml/2006/main">
               <a:ext uri="{FF2B5EF4-FFF2-40B4-BE49-F238E27FC236}">
-                <a16:creationId xmlns:a16="http://schemas.microsoft.com/office/drawing/2014/main" id="{25CE84EE-0368-4990-9F6D-7210EC1AE58B}"/>
+                <a16:creationId xmlns:a16="http://schemas.microsoft.com/office/drawing/2014/main" id="{47EF315B-988B-4EA6-84FA-E9693B768EC3}"/>
               </a:ext>
             </a:extLst>
           </p:cNvPr>
@@ -18926,7 +20913,7 @@
           <p:cNvPr id="35" name="">
             <a:extLst xmlns:a="http://schemas.openxmlformats.org/drawingml/2006/main">
               <a:ext uri="{FF2B5EF4-FFF2-40B4-BE49-F238E27FC236}">
-                <a16:creationId xmlns:a16="http://schemas.microsoft.com/office/drawing/2014/main" id="{1CEB48FD-E031-4EA5-9A76-E5C1C5B339FF}"/>
+                <a16:creationId xmlns:a16="http://schemas.microsoft.com/office/drawing/2014/main" id="{52F62FE3-1E58-4C96-9D5B-45267BE353CB}"/>
               </a:ext>
             </a:extLst>
           </p:cNvPr>
@@ -18961,7 +20948,7 @@
           <p:cNvPr id="36" name="">
             <a:extLst xmlns:a="http://schemas.openxmlformats.org/drawingml/2006/main">
               <a:ext uri="{FF2B5EF4-FFF2-40B4-BE49-F238E27FC236}">
-                <a16:creationId xmlns:a16="http://schemas.microsoft.com/office/drawing/2014/main" id="{99D237DD-B3B1-4341-8F26-5106245EF617}"/>
+                <a16:creationId xmlns:a16="http://schemas.microsoft.com/office/drawing/2014/main" id="{EF99551C-9355-493B-91DA-923FFAD04BE0}"/>
               </a:ext>
             </a:extLst>
           </p:cNvPr>
@@ -18996,7 +20983,7 @@
           <p:cNvPr id="37" name="">
             <a:extLst xmlns:a="http://schemas.openxmlformats.org/drawingml/2006/main">
               <a:ext uri="{FF2B5EF4-FFF2-40B4-BE49-F238E27FC236}">
-                <a16:creationId xmlns:a16="http://schemas.microsoft.com/office/drawing/2014/main" id="{3D2D2894-657D-49A1-B189-929F01948918}"/>
+                <a16:creationId xmlns:a16="http://schemas.microsoft.com/office/drawing/2014/main" id="{556A90A8-2AAA-495C-AFD4-5188E483C112}"/>
               </a:ext>
             </a:extLst>
           </p:cNvPr>
@@ -19031,7 +21018,7 @@
           <p:cNvPr id="38" name="">
             <a:extLst xmlns:a="http://schemas.openxmlformats.org/drawingml/2006/main">
               <a:ext uri="{FF2B5EF4-FFF2-40B4-BE49-F238E27FC236}">
-                <a16:creationId xmlns:a16="http://schemas.microsoft.com/office/drawing/2014/main" id="{90C9E630-05D7-49A9-BABC-8D881C917753}"/>
+                <a16:creationId xmlns:a16="http://schemas.microsoft.com/office/drawing/2014/main" id="{1FDA0DFB-4454-4665-A070-C4F16BCCD831}"/>
               </a:ext>
             </a:extLst>
           </p:cNvPr>
@@ -19095,7 +21082,7 @@
           <p:cNvPr id="39" name="">
             <a:extLst xmlns:a="http://schemas.openxmlformats.org/drawingml/2006/main">
               <a:ext uri="{FF2B5EF4-FFF2-40B4-BE49-F238E27FC236}">
-                <a16:creationId xmlns:a16="http://schemas.microsoft.com/office/drawing/2014/main" id="{14A1F570-5E60-40EF-833B-0BC3ADE8A6C4}"/>
+                <a16:creationId xmlns:a16="http://schemas.microsoft.com/office/drawing/2014/main" id="{B2674F1D-7598-434E-A48A-8A4293908496}"/>
               </a:ext>
             </a:extLst>
           </p:cNvPr>
@@ -19157,7 +21144,7 @@
     </p:spTree>
     <p:extLst>
       <p:ext uri="{BB962C8B-B14F-4D97-AF65-F5344CB8AC3E}">
-        <p14:creationId xmlns:p14="http://schemas.microsoft.com/office/powerpoint/2010/main" val="1866113817"/>
+        <p14:creationId xmlns:p14="http://schemas.microsoft.com/office/powerpoint/2010/main" val="2045402286"/>
       </p:ext>
     </p:extLst>
   </p:cSld>
@@ -19181,7 +21168,7 @@
           <p:cNvPr id="1" name="">
             <a:extLst xmlns:a="http://schemas.openxmlformats.org/drawingml/2006/main">
               <a:ext uri="{FF2B5EF4-FFF2-40B4-BE49-F238E27FC236}">
-                <a16:creationId xmlns:a16="http://schemas.microsoft.com/office/drawing/2014/main" id="{0A3EEA31-46FB-4BCE-906D-2A01566A7050}"/>
+                <a16:creationId xmlns:a16="http://schemas.microsoft.com/office/drawing/2014/main" id="{C11867C4-B079-4DC5-95E2-48A955349214}"/>
               </a:ext>
             </a:extLst>
           </p:cNvPr>
@@ -19216,7 +21203,7 @@
           <p:cNvPr id="2" name="">
             <a:extLst xmlns:a="http://schemas.openxmlformats.org/drawingml/2006/main">
               <a:ext uri="{FF2B5EF4-FFF2-40B4-BE49-F238E27FC236}">
-                <a16:creationId xmlns:a16="http://schemas.microsoft.com/office/drawing/2014/main" id="{0358C23F-EED7-4902-A2A4-A11568F069AF}"/>
+                <a16:creationId xmlns:a16="http://schemas.microsoft.com/office/drawing/2014/main" id="{A22A84D2-4E0F-4A10-9CD2-44DCC32C9AE2}"/>
               </a:ext>
             </a:extLst>
           </p:cNvPr>
@@ -19251,7 +21238,7 @@
           <p:cNvPr id="3" name="">
             <a:extLst xmlns:a="http://schemas.openxmlformats.org/drawingml/2006/main">
               <a:ext uri="{FF2B5EF4-FFF2-40B4-BE49-F238E27FC236}">
-                <a16:creationId xmlns:a16="http://schemas.microsoft.com/office/drawing/2014/main" id="{24B813F5-E6C3-4182-ABE7-11FCDEB18A38}"/>
+                <a16:creationId xmlns:a16="http://schemas.microsoft.com/office/drawing/2014/main" id="{1E590F69-F556-41A8-A8EE-D7F3FE7A8445}"/>
               </a:ext>
             </a:extLst>
           </p:cNvPr>
@@ -19286,7 +21273,7 @@
           <p:cNvPr id="4" name="">
             <a:extLst xmlns:a="http://schemas.openxmlformats.org/drawingml/2006/main">
               <a:ext uri="{FF2B5EF4-FFF2-40B4-BE49-F238E27FC236}">
-                <a16:creationId xmlns:a16="http://schemas.microsoft.com/office/drawing/2014/main" id="{9747C4BC-8139-4E52-88E7-8D1C07D14418}"/>
+                <a16:creationId xmlns:a16="http://schemas.microsoft.com/office/drawing/2014/main" id="{96ED8FAA-FA1D-4108-8536-A58A6B5BA7BC}"/>
               </a:ext>
             </a:extLst>
           </p:cNvPr>
@@ -19321,7 +21308,7 @@
           <p:cNvPr id="5" name="">
             <a:extLst xmlns:a="http://schemas.openxmlformats.org/drawingml/2006/main">
               <a:ext uri="{FF2B5EF4-FFF2-40B4-BE49-F238E27FC236}">
-                <a16:creationId xmlns:a16="http://schemas.microsoft.com/office/drawing/2014/main" id="{E0FCE908-2961-408B-9465-89C093BB6B40}"/>
+                <a16:creationId xmlns:a16="http://schemas.microsoft.com/office/drawing/2014/main" id="{64CE6796-BE4D-4918-A166-698E575D8942}"/>
               </a:ext>
             </a:extLst>
           </p:cNvPr>
@@ -19356,7 +21343,7 @@
           <p:cNvPr id="6" name="">
             <a:extLst xmlns:a="http://schemas.openxmlformats.org/drawingml/2006/main">
               <a:ext uri="{FF2B5EF4-FFF2-40B4-BE49-F238E27FC236}">
-                <a16:creationId xmlns:a16="http://schemas.microsoft.com/office/drawing/2014/main" id="{06CEA346-5D67-438F-884A-ADCF0050AD76}"/>
+                <a16:creationId xmlns:a16="http://schemas.microsoft.com/office/drawing/2014/main" id="{A2091D16-97D1-49D5-8525-90B503D7FD6E}"/>
               </a:ext>
             </a:extLst>
           </p:cNvPr>
@@ -19420,7 +21407,7 @@
           <p:cNvPr id="7" name="">
             <a:extLst xmlns:a="http://schemas.openxmlformats.org/drawingml/2006/main">
               <a:ext uri="{FF2B5EF4-FFF2-40B4-BE49-F238E27FC236}">
-                <a16:creationId xmlns:a16="http://schemas.microsoft.com/office/drawing/2014/main" id="{4EC7414F-B2C7-4725-9AFB-85F79243D385}"/>
+                <a16:creationId xmlns:a16="http://schemas.microsoft.com/office/drawing/2014/main" id="{943010C9-2FF6-4711-AF1C-FC5112D63BD4}"/>
               </a:ext>
             </a:extLst>
           </p:cNvPr>
@@ -19484,7 +21471,7 @@
           <p:cNvPr id="8" name="">
             <a:extLst xmlns:a="http://schemas.openxmlformats.org/drawingml/2006/main">
               <a:ext uri="{FF2B5EF4-FFF2-40B4-BE49-F238E27FC236}">
-                <a16:creationId xmlns:a16="http://schemas.microsoft.com/office/drawing/2014/main" id="{77EC3118-B420-4BB9-89CF-B571F6698E6B}"/>
+                <a16:creationId xmlns:a16="http://schemas.microsoft.com/office/drawing/2014/main" id="{660FC254-1F8F-4A05-8D13-F8D6F080F0B8}"/>
               </a:ext>
             </a:extLst>
           </p:cNvPr>
@@ -19548,7 +21535,7 @@
           <p:cNvPr id="9" name="">
             <a:extLst xmlns:a="http://schemas.openxmlformats.org/drawingml/2006/main">
               <a:ext uri="{FF2B5EF4-FFF2-40B4-BE49-F238E27FC236}">
-                <a16:creationId xmlns:a16="http://schemas.microsoft.com/office/drawing/2014/main" id="{78BE837F-14AE-4100-BD73-E33BB9FE0216}"/>
+                <a16:creationId xmlns:a16="http://schemas.microsoft.com/office/drawing/2014/main" id="{24AD56C0-09D9-4A59-88B8-55FBF8721498}"/>
               </a:ext>
             </a:extLst>
           </p:cNvPr>
@@ -19581,7 +21568,7 @@
           <p:cNvPr id="10" name="">
             <a:extLst xmlns:a="http://schemas.openxmlformats.org/drawingml/2006/main">
               <a:ext uri="{FF2B5EF4-FFF2-40B4-BE49-F238E27FC236}">
-                <a16:creationId xmlns:a16="http://schemas.microsoft.com/office/drawing/2014/main" id="{C130ECA2-576F-466A-A1AD-AA5AEB6609C8}"/>
+                <a16:creationId xmlns:a16="http://schemas.microsoft.com/office/drawing/2014/main" id="{D448EB1A-B30A-4E44-B58F-CC6169B9A451}"/>
               </a:ext>
             </a:extLst>
           </p:cNvPr>
@@ -19616,7 +21603,7 @@
           <p:cNvPr id="11" name="">
             <a:extLst xmlns:a="http://schemas.openxmlformats.org/drawingml/2006/main">
               <a:ext uri="{FF2B5EF4-FFF2-40B4-BE49-F238E27FC236}">
-                <a16:creationId xmlns:a16="http://schemas.microsoft.com/office/drawing/2014/main" id="{29F1F187-E13A-4F6B-BE88-03C554DD47E4}"/>
+                <a16:creationId xmlns:a16="http://schemas.microsoft.com/office/drawing/2014/main" id="{B185B4E3-BC5C-4873-9CFC-CDC22034A692}"/>
               </a:ext>
             </a:extLst>
           </p:cNvPr>
@@ -19680,7 +21667,7 @@
           <p:cNvPr id="12" name="">
             <a:extLst xmlns:a="http://schemas.openxmlformats.org/drawingml/2006/main">
               <a:ext uri="{FF2B5EF4-FFF2-40B4-BE49-F238E27FC236}">
-                <a16:creationId xmlns:a16="http://schemas.microsoft.com/office/drawing/2014/main" id="{50D8B0E5-40A2-4987-90C1-F0E95CE198C3}"/>
+                <a16:creationId xmlns:a16="http://schemas.microsoft.com/office/drawing/2014/main" id="{6C89A052-D858-4C00-A8B8-4B779E44A901}"/>
               </a:ext>
             </a:extLst>
           </p:cNvPr>
@@ -19744,7 +21731,7 @@
           <p:cNvPr id="13" name="">
             <a:extLst xmlns:a="http://schemas.openxmlformats.org/drawingml/2006/main">
               <a:ext uri="{FF2B5EF4-FFF2-40B4-BE49-F238E27FC236}">
-                <a16:creationId xmlns:a16="http://schemas.microsoft.com/office/drawing/2014/main" id="{18F45943-6F3C-4845-8A61-3B5DE86B4562}"/>
+                <a16:creationId xmlns:a16="http://schemas.microsoft.com/office/drawing/2014/main" id="{473DE156-05B6-4AE4-BC41-18A5CCFC93D0}"/>
               </a:ext>
             </a:extLst>
           </p:cNvPr>
@@ -19808,7 +21795,7 @@
           <p:cNvPr id="14" name="">
             <a:extLst xmlns:a="http://schemas.openxmlformats.org/drawingml/2006/main">
               <a:ext uri="{FF2B5EF4-FFF2-40B4-BE49-F238E27FC236}">
-                <a16:creationId xmlns:a16="http://schemas.microsoft.com/office/drawing/2014/main" id="{D78005CF-DC56-4FBF-AF26-5AE7EE20743E}"/>
+                <a16:creationId xmlns:a16="http://schemas.microsoft.com/office/drawing/2014/main" id="{39D43F24-B896-41F4-AC8B-AA93D5854A23}"/>
               </a:ext>
             </a:extLst>
           </p:cNvPr>
@@ -19872,7 +21859,7 @@
           <p:cNvPr id="15" name="">
             <a:extLst xmlns:a="http://schemas.openxmlformats.org/drawingml/2006/main">
               <a:ext uri="{FF2B5EF4-FFF2-40B4-BE49-F238E27FC236}">
-                <a16:creationId xmlns:a16="http://schemas.microsoft.com/office/drawing/2014/main" id="{72C7F62C-7720-45C2-A504-F20E912AE0B5}"/>
+                <a16:creationId xmlns:a16="http://schemas.microsoft.com/office/drawing/2014/main" id="{ACEE2A76-6C67-41F1-8B13-833C7033BDE9}"/>
               </a:ext>
             </a:extLst>
           </p:cNvPr>
@@ -19905,7 +21892,7 @@
           <p:cNvPr id="16" name="">
             <a:extLst xmlns:a="http://schemas.openxmlformats.org/drawingml/2006/main">
               <a:ext uri="{FF2B5EF4-FFF2-40B4-BE49-F238E27FC236}">
-                <a16:creationId xmlns:a16="http://schemas.microsoft.com/office/drawing/2014/main" id="{6F938686-9AEA-4F51-86DA-F4986D04B8C1}"/>
+                <a16:creationId xmlns:a16="http://schemas.microsoft.com/office/drawing/2014/main" id="{BDD5DA81-22E4-44F9-BE48-F847835AF4A9}"/>
               </a:ext>
             </a:extLst>
           </p:cNvPr>
@@ -19940,7 +21927,7 @@
           <p:cNvPr id="17" name="">
             <a:extLst xmlns:a="http://schemas.openxmlformats.org/drawingml/2006/main">
               <a:ext uri="{FF2B5EF4-FFF2-40B4-BE49-F238E27FC236}">
-                <a16:creationId xmlns:a16="http://schemas.microsoft.com/office/drawing/2014/main" id="{5390E7E1-8B16-4EAC-BFC8-95F104B07D3A}"/>
+                <a16:creationId xmlns:a16="http://schemas.microsoft.com/office/drawing/2014/main" id="{A1BA901F-05FD-4593-9A28-C990D00BA040}"/>
               </a:ext>
             </a:extLst>
           </p:cNvPr>
@@ -20004,7 +21991,7 @@
           <p:cNvPr id="18" name="">
             <a:extLst xmlns:a="http://schemas.openxmlformats.org/drawingml/2006/main">
               <a:ext uri="{FF2B5EF4-FFF2-40B4-BE49-F238E27FC236}">
-                <a16:creationId xmlns:a16="http://schemas.microsoft.com/office/drawing/2014/main" id="{8BC8E639-E71F-46C2-B520-98655DD08998}"/>
+                <a16:creationId xmlns:a16="http://schemas.microsoft.com/office/drawing/2014/main" id="{4DA5E0FD-491C-4969-ACF4-6A15BDAB92A4}"/>
               </a:ext>
             </a:extLst>
           </p:cNvPr>
@@ -20068,7 +22055,7 @@
           <p:cNvPr id="19" name="">
             <a:extLst xmlns:a="http://schemas.openxmlformats.org/drawingml/2006/main">
               <a:ext uri="{FF2B5EF4-FFF2-40B4-BE49-F238E27FC236}">
-                <a16:creationId xmlns:a16="http://schemas.microsoft.com/office/drawing/2014/main" id="{031EE267-5E69-4208-BAD1-6889FA22F51A}"/>
+                <a16:creationId xmlns:a16="http://schemas.microsoft.com/office/drawing/2014/main" id="{5170F960-D744-4F15-B5D9-08E9A9FD43AA}"/>
               </a:ext>
             </a:extLst>
           </p:cNvPr>
@@ -20132,7 +22119,7 @@
           <p:cNvPr id="20" name="">
             <a:extLst xmlns:a="http://schemas.openxmlformats.org/drawingml/2006/main">
               <a:ext uri="{FF2B5EF4-FFF2-40B4-BE49-F238E27FC236}">
-                <a16:creationId xmlns:a16="http://schemas.microsoft.com/office/drawing/2014/main" id="{A6CE5155-F955-446F-A489-F748074245D3}"/>
+                <a16:creationId xmlns:a16="http://schemas.microsoft.com/office/drawing/2014/main" id="{AABE9AD3-F5C8-4C9A-93F0-F7D4408739B2}"/>
               </a:ext>
             </a:extLst>
           </p:cNvPr>
@@ -20196,7 +22183,7 @@
           <p:cNvPr id="21" name="">
             <a:extLst xmlns:a="http://schemas.openxmlformats.org/drawingml/2006/main">
               <a:ext uri="{FF2B5EF4-FFF2-40B4-BE49-F238E27FC236}">
-                <a16:creationId xmlns:a16="http://schemas.microsoft.com/office/drawing/2014/main" id="{9DE8F903-80DF-4F35-9D6D-201F0C853345}"/>
+                <a16:creationId xmlns:a16="http://schemas.microsoft.com/office/drawing/2014/main" id="{3BD9DFCF-EAB4-4F0F-B896-6F74639DC213}"/>
               </a:ext>
             </a:extLst>
           </p:cNvPr>
@@ -20229,7 +22216,7 @@
           <p:cNvPr id="22" name="">
             <a:extLst xmlns:a="http://schemas.openxmlformats.org/drawingml/2006/main">
               <a:ext uri="{FF2B5EF4-FFF2-40B4-BE49-F238E27FC236}">
-                <a16:creationId xmlns:a16="http://schemas.microsoft.com/office/drawing/2014/main" id="{EA1DF75E-A534-4712-8BA1-8DE3AF2F5E20}"/>
+                <a16:creationId xmlns:a16="http://schemas.microsoft.com/office/drawing/2014/main" id="{58BA4969-8199-4FC9-BAAA-C489BAB81C11}"/>
               </a:ext>
             </a:extLst>
           </p:cNvPr>
@@ -20264,7 +22251,7 @@
           <p:cNvPr id="23" name="">
             <a:extLst xmlns:a="http://schemas.openxmlformats.org/drawingml/2006/main">
               <a:ext uri="{FF2B5EF4-FFF2-40B4-BE49-F238E27FC236}">
-                <a16:creationId xmlns:a16="http://schemas.microsoft.com/office/drawing/2014/main" id="{292118A6-A759-4A3F-B063-6698FFD0E8D2}"/>
+                <a16:creationId xmlns:a16="http://schemas.microsoft.com/office/drawing/2014/main" id="{8C28B482-FD08-4EE0-898F-F90BC5E897CC}"/>
               </a:ext>
             </a:extLst>
           </p:cNvPr>
@@ -20328,7 +22315,7 @@
           <p:cNvPr id="24" name="">
             <a:extLst xmlns:a="http://schemas.openxmlformats.org/drawingml/2006/main">
               <a:ext uri="{FF2B5EF4-FFF2-40B4-BE49-F238E27FC236}">
-                <a16:creationId xmlns:a16="http://schemas.microsoft.com/office/drawing/2014/main" id="{01CB5A2B-0C14-4B7C-8C7E-639F1BDB593B}"/>
+                <a16:creationId xmlns:a16="http://schemas.microsoft.com/office/drawing/2014/main" id="{AA597148-2E97-4B68-BB9B-C208AED6D527}"/>
               </a:ext>
             </a:extLst>
           </p:cNvPr>
@@ -20392,7 +22379,7 @@
           <p:cNvPr id="25" name="">
             <a:extLst xmlns:a="http://schemas.openxmlformats.org/drawingml/2006/main">
               <a:ext uri="{FF2B5EF4-FFF2-40B4-BE49-F238E27FC236}">
-                <a16:creationId xmlns:a16="http://schemas.microsoft.com/office/drawing/2014/main" id="{2CE5249C-8CD8-45EC-9BEE-7A9DC4225368}"/>
+                <a16:creationId xmlns:a16="http://schemas.microsoft.com/office/drawing/2014/main" id="{D42FD6BE-5304-462B-AFC0-A9A42939ED05}"/>
               </a:ext>
             </a:extLst>
           </p:cNvPr>
@@ -20456,7 +22443,7 @@
           <p:cNvPr id="26" name="">
             <a:extLst xmlns:a="http://schemas.openxmlformats.org/drawingml/2006/main">
               <a:ext uri="{FF2B5EF4-FFF2-40B4-BE49-F238E27FC236}">
-                <a16:creationId xmlns:a16="http://schemas.microsoft.com/office/drawing/2014/main" id="{AE4EDFE7-CC28-426A-8BF4-ABCBA83484C4}"/>
+                <a16:creationId xmlns:a16="http://schemas.microsoft.com/office/drawing/2014/main" id="{09E0E2F5-DEB2-4703-8AFC-78E5ABAABE8D}"/>
               </a:ext>
             </a:extLst>
           </p:cNvPr>
@@ -20520,7 +22507,7 @@
           <p:cNvPr id="27" name="">
             <a:extLst xmlns:a="http://schemas.openxmlformats.org/drawingml/2006/main">
               <a:ext uri="{FF2B5EF4-FFF2-40B4-BE49-F238E27FC236}">
-                <a16:creationId xmlns:a16="http://schemas.microsoft.com/office/drawing/2014/main" id="{35A72D5E-E7AD-43A4-A3F7-595D7CC8B54A}"/>
+                <a16:creationId xmlns:a16="http://schemas.microsoft.com/office/drawing/2014/main" id="{ACB345FE-74B1-4A44-8C40-677332988263}"/>
               </a:ext>
             </a:extLst>
           </p:cNvPr>
@@ -20553,7 +22540,7 @@
           <p:cNvPr id="28" name="">
             <a:extLst xmlns:a="http://schemas.openxmlformats.org/drawingml/2006/main">
               <a:ext uri="{FF2B5EF4-FFF2-40B4-BE49-F238E27FC236}">
-                <a16:creationId xmlns:a16="http://schemas.microsoft.com/office/drawing/2014/main" id="{845EC61B-76B6-46B2-951D-A03293688366}"/>
+                <a16:creationId xmlns:a16="http://schemas.microsoft.com/office/drawing/2014/main" id="{21D2706C-576B-4179-AC0F-CC9674A41CD8}"/>
               </a:ext>
             </a:extLst>
           </p:cNvPr>
@@ -20588,7 +22575,7 @@
           <p:cNvPr id="29" name="">
             <a:extLst xmlns:a="http://schemas.openxmlformats.org/drawingml/2006/main">
               <a:ext uri="{FF2B5EF4-FFF2-40B4-BE49-F238E27FC236}">
-                <a16:creationId xmlns:a16="http://schemas.microsoft.com/office/drawing/2014/main" id="{7A4F483F-94F5-43B5-806C-17AF95F95504}"/>
+                <a16:creationId xmlns:a16="http://schemas.microsoft.com/office/drawing/2014/main" id="{ECA8AE85-ADD9-4069-B1DC-DB04C0306AF7}"/>
               </a:ext>
             </a:extLst>
           </p:cNvPr>
@@ -20652,7 +22639,7 @@
           <p:cNvPr id="30" name="">
             <a:extLst xmlns:a="http://schemas.openxmlformats.org/drawingml/2006/main">
               <a:ext uri="{FF2B5EF4-FFF2-40B4-BE49-F238E27FC236}">
-                <a16:creationId xmlns:a16="http://schemas.microsoft.com/office/drawing/2014/main" id="{C58CE661-E51E-44E9-B268-0AD43D9662DE}"/>
+                <a16:creationId xmlns:a16="http://schemas.microsoft.com/office/drawing/2014/main" id="{390556B5-4170-43E9-AD0B-2BFCE9CB00E9}"/>
               </a:ext>
             </a:extLst>
           </p:cNvPr>
@@ -20716,7 +22703,7 @@
           <p:cNvPr id="31" name="">
             <a:extLst xmlns:a="http://schemas.openxmlformats.org/drawingml/2006/main">
               <a:ext uri="{FF2B5EF4-FFF2-40B4-BE49-F238E27FC236}">
-                <a16:creationId xmlns:a16="http://schemas.microsoft.com/office/drawing/2014/main" id="{DA665626-F98B-41F1-98AE-CAD57C56BD81}"/>
+                <a16:creationId xmlns:a16="http://schemas.microsoft.com/office/drawing/2014/main" id="{F6BB3A62-C319-4F33-B589-D1D96EA943A7}"/>
               </a:ext>
             </a:extLst>
           </p:cNvPr>
@@ -20751,7 +22738,7 @@
           <p:cNvPr id="32" name="">
             <a:extLst xmlns:a="http://schemas.openxmlformats.org/drawingml/2006/main">
               <a:ext uri="{FF2B5EF4-FFF2-40B4-BE49-F238E27FC236}">
-                <a16:creationId xmlns:a16="http://schemas.microsoft.com/office/drawing/2014/main" id="{98F4A46E-7D36-4585-93B1-A9E729858925}"/>
+                <a16:creationId xmlns:a16="http://schemas.microsoft.com/office/drawing/2014/main" id="{1F2666E3-D9EE-4AC2-81FB-F0D05BE2354A}"/>
               </a:ext>
             </a:extLst>
           </p:cNvPr>
@@ -20786,7 +22773,7 @@
           <p:cNvPr id="33" name="">
             <a:extLst xmlns:a="http://schemas.openxmlformats.org/drawingml/2006/main">
               <a:ext uri="{FF2B5EF4-FFF2-40B4-BE49-F238E27FC236}">
-                <a16:creationId xmlns:a16="http://schemas.microsoft.com/office/drawing/2014/main" id="{C9A5DB48-655F-45E5-912B-848F7B5E3515}"/>
+                <a16:creationId xmlns:a16="http://schemas.microsoft.com/office/drawing/2014/main" id="{73382A9A-86A9-4B36-A302-29F2C5C3FCA2}"/>
               </a:ext>
             </a:extLst>
           </p:cNvPr>
@@ -20821,7 +22808,7 @@
           <p:cNvPr id="34" name="">
             <a:extLst xmlns:a="http://schemas.openxmlformats.org/drawingml/2006/main">
               <a:ext uri="{FF2B5EF4-FFF2-40B4-BE49-F238E27FC236}">
-                <a16:creationId xmlns:a16="http://schemas.microsoft.com/office/drawing/2014/main" id="{BD8E1ACE-D660-4278-8B80-A245DAA11028}"/>
+                <a16:creationId xmlns:a16="http://schemas.microsoft.com/office/drawing/2014/main" id="{5FE3D4A4-521D-4BDE-AEFB-BDC8EC86F19C}"/>
               </a:ext>
             </a:extLst>
           </p:cNvPr>
@@ -20856,7 +22843,7 @@
           <p:cNvPr id="35" name="">
             <a:extLst xmlns:a="http://schemas.openxmlformats.org/drawingml/2006/main">
               <a:ext uri="{FF2B5EF4-FFF2-40B4-BE49-F238E27FC236}">
-                <a16:creationId xmlns:a16="http://schemas.microsoft.com/office/drawing/2014/main" id="{F14B27BD-AF16-499E-BBF2-0959BCF6ABD7}"/>
+                <a16:creationId xmlns:a16="http://schemas.microsoft.com/office/drawing/2014/main" id="{54E78A9E-18BD-4AD3-8B32-4C3E5C7F9C43}"/>
               </a:ext>
             </a:extLst>
           </p:cNvPr>
@@ -20920,7 +22907,7 @@
           <p:cNvPr id="36" name="">
             <a:extLst xmlns:a="http://schemas.openxmlformats.org/drawingml/2006/main">
               <a:ext uri="{FF2B5EF4-FFF2-40B4-BE49-F238E27FC236}">
-                <a16:creationId xmlns:a16="http://schemas.microsoft.com/office/drawing/2014/main" id="{6E32E103-3D71-4134-8BC6-8F584E53A540}"/>
+                <a16:creationId xmlns:a16="http://schemas.microsoft.com/office/drawing/2014/main" id="{B84CC858-07AE-4721-B912-1B80C0C867FF}"/>
               </a:ext>
             </a:extLst>
           </p:cNvPr>
@@ -20982,7 +22969,7 @@
     </p:spTree>
     <p:extLst>
       <p:ext uri="{BB962C8B-B14F-4D97-AF65-F5344CB8AC3E}">
-        <p14:creationId xmlns:p14="http://schemas.microsoft.com/office/powerpoint/2010/main" val="129029455"/>
+        <p14:creationId xmlns:p14="http://schemas.microsoft.com/office/powerpoint/2010/main" val="155549027"/>
       </p:ext>
     </p:extLst>
   </p:cSld>
@@ -21006,7 +22993,7 @@
           <p:cNvPr id="1" name="">
             <a:extLst xmlns:a="http://schemas.openxmlformats.org/drawingml/2006/main">
               <a:ext uri="{FF2B5EF4-FFF2-40B4-BE49-F238E27FC236}">
-                <a16:creationId xmlns:a16="http://schemas.microsoft.com/office/drawing/2014/main" id="{F96BB37F-17A5-4994-8E9E-A4FA2F5046A1}"/>
+                <a16:creationId xmlns:a16="http://schemas.microsoft.com/office/drawing/2014/main" id="{8B20598F-01B3-468B-94CB-AE603F56356F}"/>
               </a:ext>
             </a:extLst>
           </p:cNvPr>
@@ -21041,7 +23028,7 @@
           <p:cNvPr id="2" name="">
             <a:extLst xmlns:a="http://schemas.openxmlformats.org/drawingml/2006/main">
               <a:ext uri="{FF2B5EF4-FFF2-40B4-BE49-F238E27FC236}">
-                <a16:creationId xmlns:a16="http://schemas.microsoft.com/office/drawing/2014/main" id="{9B58A8EF-CD7D-4DC9-8335-A9E7FB05C54E}"/>
+                <a16:creationId xmlns:a16="http://schemas.microsoft.com/office/drawing/2014/main" id="{625BBF43-0DE9-442B-8107-C2083CE2711F}"/>
               </a:ext>
             </a:extLst>
           </p:cNvPr>
@@ -21076,7 +23063,7 @@
           <p:cNvPr id="3" name="">
             <a:extLst xmlns:a="http://schemas.openxmlformats.org/drawingml/2006/main">
               <a:ext uri="{FF2B5EF4-FFF2-40B4-BE49-F238E27FC236}">
-                <a16:creationId xmlns:a16="http://schemas.microsoft.com/office/drawing/2014/main" id="{0F1DCAA4-0EE7-4102-8645-9D6089DD68BB}"/>
+                <a16:creationId xmlns:a16="http://schemas.microsoft.com/office/drawing/2014/main" id="{5D4D6BEE-E1DF-40AF-804A-5F92CD58353B}"/>
               </a:ext>
             </a:extLst>
           </p:cNvPr>
@@ -21111,7 +23098,7 @@
           <p:cNvPr id="4" name="">
             <a:extLst xmlns:a="http://schemas.openxmlformats.org/drawingml/2006/main">
               <a:ext uri="{FF2B5EF4-FFF2-40B4-BE49-F238E27FC236}">
-                <a16:creationId xmlns:a16="http://schemas.microsoft.com/office/drawing/2014/main" id="{266F30E2-9BED-4D5E-B9B7-57598BA019FB}"/>
+                <a16:creationId xmlns:a16="http://schemas.microsoft.com/office/drawing/2014/main" id="{4E03A121-FB83-4BB8-9855-AB7B8F41EBDD}"/>
               </a:ext>
             </a:extLst>
           </p:cNvPr>
@@ -21146,7 +23133,7 @@
           <p:cNvPr id="5" name="">
             <a:extLst xmlns:a="http://schemas.openxmlformats.org/drawingml/2006/main">
               <a:ext uri="{FF2B5EF4-FFF2-40B4-BE49-F238E27FC236}">
-                <a16:creationId xmlns:a16="http://schemas.microsoft.com/office/drawing/2014/main" id="{6488595E-05E0-4BB1-9292-F24B869BB1AE}"/>
+                <a16:creationId xmlns:a16="http://schemas.microsoft.com/office/drawing/2014/main" id="{B178FA4C-E3A6-47B4-B60D-EBBA30BAC183}"/>
               </a:ext>
             </a:extLst>
           </p:cNvPr>
@@ -21181,7 +23168,7 @@
           <p:cNvPr id="6" name="">
             <a:extLst xmlns:a="http://schemas.openxmlformats.org/drawingml/2006/main">
               <a:ext uri="{FF2B5EF4-FFF2-40B4-BE49-F238E27FC236}">
-                <a16:creationId xmlns:a16="http://schemas.microsoft.com/office/drawing/2014/main" id="{BA2B547F-85E3-4542-96C9-E0D9CCEFCD29}"/>
+                <a16:creationId xmlns:a16="http://schemas.microsoft.com/office/drawing/2014/main" id="{B4B996D8-35FD-4EA0-A7A2-6157A1CD8466}"/>
               </a:ext>
             </a:extLst>
           </p:cNvPr>
@@ -21245,7 +23232,7 @@
           <p:cNvPr id="7" name="">
             <a:extLst xmlns:a="http://schemas.openxmlformats.org/drawingml/2006/main">
               <a:ext uri="{FF2B5EF4-FFF2-40B4-BE49-F238E27FC236}">
-                <a16:creationId xmlns:a16="http://schemas.microsoft.com/office/drawing/2014/main" id="{1EBD1A55-701E-4661-9662-F3EB03AE8F74}"/>
+                <a16:creationId xmlns:a16="http://schemas.microsoft.com/office/drawing/2014/main" id="{0A30703C-02CD-4310-8D68-417156DB75A0}"/>
               </a:ext>
             </a:extLst>
           </p:cNvPr>
@@ -21309,7 +23296,7 @@
           <p:cNvPr id="8" name="">
             <a:extLst xmlns:a="http://schemas.openxmlformats.org/drawingml/2006/main">
               <a:ext uri="{FF2B5EF4-FFF2-40B4-BE49-F238E27FC236}">
-                <a16:creationId xmlns:a16="http://schemas.microsoft.com/office/drawing/2014/main" id="{CEE84C85-D9A6-42D1-ADC3-406AA2B7530A}"/>
+                <a16:creationId xmlns:a16="http://schemas.microsoft.com/office/drawing/2014/main" id="{1376918F-9658-4F9A-AD29-2D989863D064}"/>
               </a:ext>
             </a:extLst>
           </p:cNvPr>
@@ -21373,7 +23360,7 @@
           <p:cNvPr id="9" name="">
             <a:extLst xmlns:a="http://schemas.openxmlformats.org/drawingml/2006/main">
               <a:ext uri="{FF2B5EF4-FFF2-40B4-BE49-F238E27FC236}">
-                <a16:creationId xmlns:a16="http://schemas.microsoft.com/office/drawing/2014/main" id="{FB98457F-BBB5-481F-8163-6CA9282C431F}"/>
+                <a16:creationId xmlns:a16="http://schemas.microsoft.com/office/drawing/2014/main" id="{23392B70-A5E6-4EBC-94E1-0ED4BD86733F}"/>
               </a:ext>
             </a:extLst>
           </p:cNvPr>
@@ -21406,7 +23393,7 @@
           <p:cNvPr id="10" name="">
             <a:extLst xmlns:a="http://schemas.openxmlformats.org/drawingml/2006/main">
               <a:ext uri="{FF2B5EF4-FFF2-40B4-BE49-F238E27FC236}">
-                <a16:creationId xmlns:a16="http://schemas.microsoft.com/office/drawing/2014/main" id="{D2C2B1A1-63DB-4B38-9701-7FE8862D9082}"/>
+                <a16:creationId xmlns:a16="http://schemas.microsoft.com/office/drawing/2014/main" id="{99EEF556-4C6F-440C-8F0F-99C416D087DD}"/>
               </a:ext>
             </a:extLst>
           </p:cNvPr>
@@ -21441,7 +23428,7 @@
           <p:cNvPr id="11" name="">
             <a:extLst xmlns:a="http://schemas.openxmlformats.org/drawingml/2006/main">
               <a:ext uri="{FF2B5EF4-FFF2-40B4-BE49-F238E27FC236}">
-                <a16:creationId xmlns:a16="http://schemas.microsoft.com/office/drawing/2014/main" id="{D0B1C6CD-683D-4A80-87F9-99A354328A1B}"/>
+                <a16:creationId xmlns:a16="http://schemas.microsoft.com/office/drawing/2014/main" id="{FD6A31AC-47BF-4C43-AEA5-CBD96E14669E}"/>
               </a:ext>
             </a:extLst>
           </p:cNvPr>
@@ -21476,7 +23463,7 @@
           <p:cNvPr id="12" name="">
             <a:extLst xmlns:a="http://schemas.openxmlformats.org/drawingml/2006/main">
               <a:ext uri="{FF2B5EF4-FFF2-40B4-BE49-F238E27FC236}">
-                <a16:creationId xmlns:a16="http://schemas.microsoft.com/office/drawing/2014/main" id="{C8E0038D-49EC-4B56-9CD3-31AB00E00D92}"/>
+                <a16:creationId xmlns:a16="http://schemas.microsoft.com/office/drawing/2014/main" id="{0AEDCBDF-ACD6-4C33-81E8-4884B5E0EE7D}"/>
               </a:ext>
             </a:extLst>
           </p:cNvPr>
@@ -21511,7 +23498,7 @@
           <p:cNvPr id="13" name="">
             <a:extLst xmlns:a="http://schemas.openxmlformats.org/drawingml/2006/main">
               <a:ext uri="{FF2B5EF4-FFF2-40B4-BE49-F238E27FC236}">
-                <a16:creationId xmlns:a16="http://schemas.microsoft.com/office/drawing/2014/main" id="{9228F42D-5A1F-4A92-83D7-696B9C2DC307}"/>
+                <a16:creationId xmlns:a16="http://schemas.microsoft.com/office/drawing/2014/main" id="{22357DDC-6DFE-410E-999A-306537543CAD}"/>
               </a:ext>
             </a:extLst>
           </p:cNvPr>
@@ -21546,7 +23533,7 @@
           <p:cNvPr id="14" name="">
             <a:extLst xmlns:a="http://schemas.openxmlformats.org/drawingml/2006/main">
               <a:ext uri="{FF2B5EF4-FFF2-40B4-BE49-F238E27FC236}">
-                <a16:creationId xmlns:a16="http://schemas.microsoft.com/office/drawing/2014/main" id="{C27FD61D-E78F-449F-9270-397809938765}"/>
+                <a16:creationId xmlns:a16="http://schemas.microsoft.com/office/drawing/2014/main" id="{7D71D02F-0DD4-4381-8245-7A5C046085C9}"/>
               </a:ext>
             </a:extLst>
           </p:cNvPr>
@@ -21610,7 +23597,7 @@
           <p:cNvPr id="15" name="">
             <a:extLst xmlns:a="http://schemas.openxmlformats.org/drawingml/2006/main">
               <a:ext uri="{FF2B5EF4-FFF2-40B4-BE49-F238E27FC236}">
-                <a16:creationId xmlns:a16="http://schemas.microsoft.com/office/drawing/2014/main" id="{42E4320B-02A2-4265-9A1F-52A4C46E0635}"/>
+                <a16:creationId xmlns:a16="http://schemas.microsoft.com/office/drawing/2014/main" id="{37400792-1B32-4046-B920-C9D7BC39CB9F}"/>
               </a:ext>
             </a:extLst>
           </p:cNvPr>
@@ -21674,7 +23661,7 @@
           <p:cNvPr id="16" name="">
             <a:extLst xmlns:a="http://schemas.openxmlformats.org/drawingml/2006/main">
               <a:ext uri="{FF2B5EF4-FFF2-40B4-BE49-F238E27FC236}">
-                <a16:creationId xmlns:a16="http://schemas.microsoft.com/office/drawing/2014/main" id="{77C65524-6076-41E3-A97C-5D7AC0AA0F3F}"/>
+                <a16:creationId xmlns:a16="http://schemas.microsoft.com/office/drawing/2014/main" id="{46358048-826C-48C7-ADA3-9D41F8A33874}"/>
               </a:ext>
             </a:extLst>
           </p:cNvPr>
@@ -21738,7 +23725,7 @@
           <p:cNvPr id="17" name="">
             <a:extLst xmlns:a="http://schemas.openxmlformats.org/drawingml/2006/main">
               <a:ext uri="{FF2B5EF4-FFF2-40B4-BE49-F238E27FC236}">
-                <a16:creationId xmlns:a16="http://schemas.microsoft.com/office/drawing/2014/main" id="{CF6B380B-67E8-4AF0-98F1-9A81FCED2067}"/>
+                <a16:creationId xmlns:a16="http://schemas.microsoft.com/office/drawing/2014/main" id="{C7908483-B7DF-4C61-A730-3A496350C63A}"/>
               </a:ext>
             </a:extLst>
           </p:cNvPr>
@@ -21771,7 +23758,7 @@
           <p:cNvPr id="18" name="">
             <a:extLst xmlns:a="http://schemas.openxmlformats.org/drawingml/2006/main">
               <a:ext uri="{FF2B5EF4-FFF2-40B4-BE49-F238E27FC236}">
-                <a16:creationId xmlns:a16="http://schemas.microsoft.com/office/drawing/2014/main" id="{1769EED6-AD33-43BF-AD1A-7074D3678321}"/>
+                <a16:creationId xmlns:a16="http://schemas.microsoft.com/office/drawing/2014/main" id="{B4D7C877-D8A7-413F-A713-8F27D068FD22}"/>
               </a:ext>
             </a:extLst>
           </p:cNvPr>
@@ -21806,7 +23793,7 @@
           <p:cNvPr id="19" name="">
             <a:extLst xmlns:a="http://schemas.openxmlformats.org/drawingml/2006/main">
               <a:ext uri="{FF2B5EF4-FFF2-40B4-BE49-F238E27FC236}">
-                <a16:creationId xmlns:a16="http://schemas.microsoft.com/office/drawing/2014/main" id="{CC162367-0D21-4330-9BE8-B4459666D9C5}"/>
+                <a16:creationId xmlns:a16="http://schemas.microsoft.com/office/drawing/2014/main" id="{A11EBB37-260C-4471-AECA-7664EE4CF4B1}"/>
               </a:ext>
             </a:extLst>
           </p:cNvPr>
@@ -21841,7 +23828,7 @@
           <p:cNvPr id="20" name="">
             <a:extLst xmlns:a="http://schemas.openxmlformats.org/drawingml/2006/main">
               <a:ext uri="{FF2B5EF4-FFF2-40B4-BE49-F238E27FC236}">
-                <a16:creationId xmlns:a16="http://schemas.microsoft.com/office/drawing/2014/main" id="{BF930D94-BA1C-4540-BD2C-CF964F31F22E}"/>
+                <a16:creationId xmlns:a16="http://schemas.microsoft.com/office/drawing/2014/main" id="{AB525833-84D8-4AEF-9185-EE4CC8BC7660}"/>
               </a:ext>
             </a:extLst>
           </p:cNvPr>
@@ -21876,7 +23863,7 @@
           <p:cNvPr id="21" name="">
             <a:extLst xmlns:a="http://schemas.openxmlformats.org/drawingml/2006/main">
               <a:ext uri="{FF2B5EF4-FFF2-40B4-BE49-F238E27FC236}">
-                <a16:creationId xmlns:a16="http://schemas.microsoft.com/office/drawing/2014/main" id="{973192A2-D172-481E-A1DF-123B4DD57D00}"/>
+                <a16:creationId xmlns:a16="http://schemas.microsoft.com/office/drawing/2014/main" id="{4871BE22-46FE-4772-B8AC-52AA0E92E2D4}"/>
               </a:ext>
             </a:extLst>
           </p:cNvPr>
@@ -21911,7 +23898,7 @@
           <p:cNvPr id="22" name="">
             <a:extLst xmlns:a="http://schemas.openxmlformats.org/drawingml/2006/main">
               <a:ext uri="{FF2B5EF4-FFF2-40B4-BE49-F238E27FC236}">
-                <a16:creationId xmlns:a16="http://schemas.microsoft.com/office/drawing/2014/main" id="{210D02C5-F958-40F8-8207-6306F461FAE9}"/>
+                <a16:creationId xmlns:a16="http://schemas.microsoft.com/office/drawing/2014/main" id="{615A23DB-918D-494C-BC11-F0C1CF36BDD5}"/>
               </a:ext>
             </a:extLst>
           </p:cNvPr>
@@ -21975,7 +23962,7 @@
           <p:cNvPr id="23" name="">
             <a:extLst xmlns:a="http://schemas.openxmlformats.org/drawingml/2006/main">
               <a:ext uri="{FF2B5EF4-FFF2-40B4-BE49-F238E27FC236}">
-                <a16:creationId xmlns:a16="http://schemas.microsoft.com/office/drawing/2014/main" id="{05B615CE-65C2-46E3-A882-38E35F946885}"/>
+                <a16:creationId xmlns:a16="http://schemas.microsoft.com/office/drawing/2014/main" id="{38793EB9-DBB4-4342-B04C-657CC734242D}"/>
               </a:ext>
             </a:extLst>
           </p:cNvPr>
@@ -22039,7 +24026,7 @@
           <p:cNvPr id="24" name="">
             <a:extLst xmlns:a="http://schemas.openxmlformats.org/drawingml/2006/main">
               <a:ext uri="{FF2B5EF4-FFF2-40B4-BE49-F238E27FC236}">
-                <a16:creationId xmlns:a16="http://schemas.microsoft.com/office/drawing/2014/main" id="{63AE5670-2F6E-4279-8F4B-CC11F0A3F2D0}"/>
+                <a16:creationId xmlns:a16="http://schemas.microsoft.com/office/drawing/2014/main" id="{8264135E-210B-42D3-AC84-A71EEBECD24B}"/>
               </a:ext>
             </a:extLst>
           </p:cNvPr>
@@ -22103,7 +24090,7 @@
           <p:cNvPr id="25" name="">
             <a:extLst xmlns:a="http://schemas.openxmlformats.org/drawingml/2006/main">
               <a:ext uri="{FF2B5EF4-FFF2-40B4-BE49-F238E27FC236}">
-                <a16:creationId xmlns:a16="http://schemas.microsoft.com/office/drawing/2014/main" id="{62A58C09-716B-4336-9A2A-C032F10DA363}"/>
+                <a16:creationId xmlns:a16="http://schemas.microsoft.com/office/drawing/2014/main" id="{0E141025-7216-4973-9D80-5C61AC208156}"/>
               </a:ext>
             </a:extLst>
           </p:cNvPr>
@@ -22136,7 +24123,7 @@
           <p:cNvPr id="26" name="">
             <a:extLst xmlns:a="http://schemas.openxmlformats.org/drawingml/2006/main">
               <a:ext uri="{FF2B5EF4-FFF2-40B4-BE49-F238E27FC236}">
-                <a16:creationId xmlns:a16="http://schemas.microsoft.com/office/drawing/2014/main" id="{0163FD06-931C-4A5A-84C3-C4F53573C899}"/>
+                <a16:creationId xmlns:a16="http://schemas.microsoft.com/office/drawing/2014/main" id="{E7DB9B6A-06B0-45A3-97AA-38000E072C0D}"/>
               </a:ext>
             </a:extLst>
           </p:cNvPr>
@@ -22171,7 +24158,7 @@
           <p:cNvPr id="27" name="">
             <a:extLst xmlns:a="http://schemas.openxmlformats.org/drawingml/2006/main">
               <a:ext uri="{FF2B5EF4-FFF2-40B4-BE49-F238E27FC236}">
-                <a16:creationId xmlns:a16="http://schemas.microsoft.com/office/drawing/2014/main" id="{960D03F8-FE9A-45FF-9F0B-16AC05B59B68}"/>
+                <a16:creationId xmlns:a16="http://schemas.microsoft.com/office/drawing/2014/main" id="{C427DE81-569F-4D29-9501-6C1DC21FF4CC}"/>
               </a:ext>
             </a:extLst>
           </p:cNvPr>
@@ -22206,7 +24193,7 @@
           <p:cNvPr id="28" name="">
             <a:extLst xmlns:a="http://schemas.openxmlformats.org/drawingml/2006/main">
               <a:ext uri="{FF2B5EF4-FFF2-40B4-BE49-F238E27FC236}">
-                <a16:creationId xmlns:a16="http://schemas.microsoft.com/office/drawing/2014/main" id="{E0A04FB7-FFF3-4FAA-82D8-085C1E0BA1D2}"/>
+                <a16:creationId xmlns:a16="http://schemas.microsoft.com/office/drawing/2014/main" id="{18DD66B1-113E-4D48-A97B-D136F22E7224}"/>
               </a:ext>
             </a:extLst>
           </p:cNvPr>
@@ -22241,7 +24228,7 @@
           <p:cNvPr id="29" name="">
             <a:extLst xmlns:a="http://schemas.openxmlformats.org/drawingml/2006/main">
               <a:ext uri="{FF2B5EF4-FFF2-40B4-BE49-F238E27FC236}">
-                <a16:creationId xmlns:a16="http://schemas.microsoft.com/office/drawing/2014/main" id="{8BA43E72-816B-4AE2-93CD-AEF69404C6FC}"/>
+                <a16:creationId xmlns:a16="http://schemas.microsoft.com/office/drawing/2014/main" id="{A4D4DD13-BC69-4863-B92D-4D7732D84A12}"/>
               </a:ext>
             </a:extLst>
           </p:cNvPr>
@@ -22276,7 +24263,7 @@
           <p:cNvPr id="30" name="">
             <a:extLst xmlns:a="http://schemas.openxmlformats.org/drawingml/2006/main">
               <a:ext uri="{FF2B5EF4-FFF2-40B4-BE49-F238E27FC236}">
-                <a16:creationId xmlns:a16="http://schemas.microsoft.com/office/drawing/2014/main" id="{6123C061-B12F-4432-B6F5-AFA7A863D609}"/>
+                <a16:creationId xmlns:a16="http://schemas.microsoft.com/office/drawing/2014/main" id="{5CA248D9-C9F2-43FB-912B-6090324099AF}"/>
               </a:ext>
             </a:extLst>
           </p:cNvPr>
@@ -22340,7 +24327,7 @@
           <p:cNvPr id="31" name="">
             <a:extLst xmlns:a="http://schemas.openxmlformats.org/drawingml/2006/main">
               <a:ext uri="{FF2B5EF4-FFF2-40B4-BE49-F238E27FC236}">
-                <a16:creationId xmlns:a16="http://schemas.microsoft.com/office/drawing/2014/main" id="{1B096E77-1A0D-4ABC-AC95-03CE50113DB7}"/>
+                <a16:creationId xmlns:a16="http://schemas.microsoft.com/office/drawing/2014/main" id="{EB6FD702-CD13-44F1-B06F-C39192EC5D85}"/>
               </a:ext>
             </a:extLst>
           </p:cNvPr>
@@ -22404,7 +24391,7 @@
           <p:cNvPr id="32" name="">
             <a:extLst xmlns:a="http://schemas.openxmlformats.org/drawingml/2006/main">
               <a:ext uri="{FF2B5EF4-FFF2-40B4-BE49-F238E27FC236}">
-                <a16:creationId xmlns:a16="http://schemas.microsoft.com/office/drawing/2014/main" id="{8ADB9CCF-8186-4740-9D02-D8B56100D2F0}"/>
+                <a16:creationId xmlns:a16="http://schemas.microsoft.com/office/drawing/2014/main" id="{DF0E2357-3828-4D69-8937-CA805C8486D1}"/>
               </a:ext>
             </a:extLst>
           </p:cNvPr>
@@ -22468,7 +24455,7 @@
           <p:cNvPr id="33" name="">
             <a:extLst xmlns:a="http://schemas.openxmlformats.org/drawingml/2006/main">
               <a:ext uri="{FF2B5EF4-FFF2-40B4-BE49-F238E27FC236}">
-                <a16:creationId xmlns:a16="http://schemas.microsoft.com/office/drawing/2014/main" id="{F2E32783-29C1-4925-8EBE-2D0E4E7ED1DC}"/>
+                <a16:creationId xmlns:a16="http://schemas.microsoft.com/office/drawing/2014/main" id="{FB864A1C-D3F1-4802-8315-9A6B93D9A9B4}"/>
               </a:ext>
             </a:extLst>
           </p:cNvPr>
@@ -22501,7 +24488,7 @@
           <p:cNvPr id="34" name="">
             <a:extLst xmlns:a="http://schemas.openxmlformats.org/drawingml/2006/main">
               <a:ext uri="{FF2B5EF4-FFF2-40B4-BE49-F238E27FC236}">
-                <a16:creationId xmlns:a16="http://schemas.microsoft.com/office/drawing/2014/main" id="{B9C45402-B14B-438B-BE7F-A36967423779}"/>
+                <a16:creationId xmlns:a16="http://schemas.microsoft.com/office/drawing/2014/main" id="{4273FCB1-B263-4D06-9BD4-EA30B88DEB5A}"/>
               </a:ext>
             </a:extLst>
           </p:cNvPr>
@@ -22565,7 +24552,7 @@
           <p:cNvPr id="35" name="">
             <a:extLst xmlns:a="http://schemas.openxmlformats.org/drawingml/2006/main">
               <a:ext uri="{FF2B5EF4-FFF2-40B4-BE49-F238E27FC236}">
-                <a16:creationId xmlns:a16="http://schemas.microsoft.com/office/drawing/2014/main" id="{7AAF5B61-DAFB-43E4-9FFB-42C12F976703}"/>
+                <a16:creationId xmlns:a16="http://schemas.microsoft.com/office/drawing/2014/main" id="{EBE1D394-568A-455F-BA22-461743BE9CA4}"/>
               </a:ext>
             </a:extLst>
           </p:cNvPr>
@@ -22600,7 +24587,7 @@
           <p:cNvPr id="36" name="">
             <a:extLst xmlns:a="http://schemas.openxmlformats.org/drawingml/2006/main">
               <a:ext uri="{FF2B5EF4-FFF2-40B4-BE49-F238E27FC236}">
-                <a16:creationId xmlns:a16="http://schemas.microsoft.com/office/drawing/2014/main" id="{C630C481-C144-473E-B5DA-BA51E60DAE39}"/>
+                <a16:creationId xmlns:a16="http://schemas.microsoft.com/office/drawing/2014/main" id="{C215EB94-6E29-414C-B702-C99B796B27E4}"/>
               </a:ext>
             </a:extLst>
           </p:cNvPr>
@@ -22635,7 +24622,7 @@
           <p:cNvPr id="37" name="">
             <a:extLst xmlns:a="http://schemas.openxmlformats.org/drawingml/2006/main">
               <a:ext uri="{FF2B5EF4-FFF2-40B4-BE49-F238E27FC236}">
-                <a16:creationId xmlns:a16="http://schemas.microsoft.com/office/drawing/2014/main" id="{1C28FDC5-791E-4622-A7A3-C596A99A4CEB}"/>
+                <a16:creationId xmlns:a16="http://schemas.microsoft.com/office/drawing/2014/main" id="{B440A1A6-2B29-4ED0-90A9-234F1023590C}"/>
               </a:ext>
             </a:extLst>
           </p:cNvPr>
@@ -22670,7 +24657,7 @@
           <p:cNvPr id="38" name="">
             <a:extLst xmlns:a="http://schemas.openxmlformats.org/drawingml/2006/main">
               <a:ext uri="{FF2B5EF4-FFF2-40B4-BE49-F238E27FC236}">
-                <a16:creationId xmlns:a16="http://schemas.microsoft.com/office/drawing/2014/main" id="{48EFF66C-C305-4A27-854E-AA60BF2E78A2}"/>
+                <a16:creationId xmlns:a16="http://schemas.microsoft.com/office/drawing/2014/main" id="{7250E1AC-59CD-4235-A852-5046ADFAE7B7}"/>
               </a:ext>
             </a:extLst>
           </p:cNvPr>
@@ -22705,7 +24692,7 @@
           <p:cNvPr id="39" name="">
             <a:extLst xmlns:a="http://schemas.openxmlformats.org/drawingml/2006/main">
               <a:ext uri="{FF2B5EF4-FFF2-40B4-BE49-F238E27FC236}">
-                <a16:creationId xmlns:a16="http://schemas.microsoft.com/office/drawing/2014/main" id="{44017F6C-C370-49E8-A25D-8C83CA09907D}"/>
+                <a16:creationId xmlns:a16="http://schemas.microsoft.com/office/drawing/2014/main" id="{B0C53D51-9A94-44B7-9D06-E74A44304FB4}"/>
               </a:ext>
             </a:extLst>
           </p:cNvPr>
@@ -22769,7 +24756,7 @@
           <p:cNvPr id="40" name="">
             <a:extLst xmlns:a="http://schemas.openxmlformats.org/drawingml/2006/main">
               <a:ext uri="{FF2B5EF4-FFF2-40B4-BE49-F238E27FC236}">
-                <a16:creationId xmlns:a16="http://schemas.microsoft.com/office/drawing/2014/main" id="{D7383E84-17C9-4043-8BF5-1FF78910F6DE}"/>
+                <a16:creationId xmlns:a16="http://schemas.microsoft.com/office/drawing/2014/main" id="{195F7528-B2DE-484B-A2D9-1546EA83D3C8}"/>
               </a:ext>
             </a:extLst>
           </p:cNvPr>
@@ -22831,7 +24818,7 @@
     </p:spTree>
     <p:extLst>
       <p:ext uri="{BB962C8B-B14F-4D97-AF65-F5344CB8AC3E}">
-        <p14:creationId xmlns:p14="http://schemas.microsoft.com/office/powerpoint/2010/main" val="1870529807"/>
+        <p14:creationId xmlns:p14="http://schemas.microsoft.com/office/powerpoint/2010/main" val="1221594224"/>
       </p:ext>
     </p:extLst>
   </p:cSld>
@@ -22855,7 +24842,7 @@
           <p:cNvPr id="1" name="">
             <a:extLst xmlns:a="http://schemas.openxmlformats.org/drawingml/2006/main">
               <a:ext uri="{FF2B5EF4-FFF2-40B4-BE49-F238E27FC236}">
-                <a16:creationId xmlns:a16="http://schemas.microsoft.com/office/drawing/2014/main" id="{B9733B59-F19F-48DE-8765-E5F9BA5349D4}"/>
+                <a16:creationId xmlns:a16="http://schemas.microsoft.com/office/drawing/2014/main" id="{7C738FEF-10B8-4C61-88CC-9B8FF8115E1E}"/>
               </a:ext>
             </a:extLst>
           </p:cNvPr>
@@ -22890,7 +24877,7 @@
           <p:cNvPr id="2" name="">
             <a:extLst xmlns:a="http://schemas.openxmlformats.org/drawingml/2006/main">
               <a:ext uri="{FF2B5EF4-FFF2-40B4-BE49-F238E27FC236}">
-                <a16:creationId xmlns:a16="http://schemas.microsoft.com/office/drawing/2014/main" id="{60672B9B-0E7D-4DA1-B458-9A366D104F9D}"/>
+                <a16:creationId xmlns:a16="http://schemas.microsoft.com/office/drawing/2014/main" id="{80DE7554-0D55-4DD9-B7E5-518D4950A11D}"/>
               </a:ext>
             </a:extLst>
           </p:cNvPr>
@@ -22925,7 +24912,7 @@
           <p:cNvPr id="3" name="">
             <a:extLst xmlns:a="http://schemas.openxmlformats.org/drawingml/2006/main">
               <a:ext uri="{FF2B5EF4-FFF2-40B4-BE49-F238E27FC236}">
-                <a16:creationId xmlns:a16="http://schemas.microsoft.com/office/drawing/2014/main" id="{EB55FE11-EF24-4D0C-B199-74EEA59BD6F3}"/>
+                <a16:creationId xmlns:a16="http://schemas.microsoft.com/office/drawing/2014/main" id="{279B000A-7ACB-4B58-9D42-3276DCD03E47}"/>
               </a:ext>
             </a:extLst>
           </p:cNvPr>
@@ -22960,7 +24947,7 @@
           <p:cNvPr id="4" name="">
             <a:extLst xmlns:a="http://schemas.openxmlformats.org/drawingml/2006/main">
               <a:ext uri="{FF2B5EF4-FFF2-40B4-BE49-F238E27FC236}">
-                <a16:creationId xmlns:a16="http://schemas.microsoft.com/office/drawing/2014/main" id="{B0DCE63F-50AD-4C4E-82F7-9DE838DFA170}"/>
+                <a16:creationId xmlns:a16="http://schemas.microsoft.com/office/drawing/2014/main" id="{E08EC830-2717-468C-8ACB-D5FB7A595495}"/>
               </a:ext>
             </a:extLst>
           </p:cNvPr>
@@ -22995,7 +24982,7 @@
           <p:cNvPr id="5" name="">
             <a:extLst xmlns:a="http://schemas.openxmlformats.org/drawingml/2006/main">
               <a:ext uri="{FF2B5EF4-FFF2-40B4-BE49-F238E27FC236}">
-                <a16:creationId xmlns:a16="http://schemas.microsoft.com/office/drawing/2014/main" id="{A588781E-D9FE-41E5-BBE5-4F1CB5D2CE40}"/>
+                <a16:creationId xmlns:a16="http://schemas.microsoft.com/office/drawing/2014/main" id="{223F7132-0C94-493D-B690-B1C3A20F3E89}"/>
               </a:ext>
             </a:extLst>
           </p:cNvPr>
@@ -23030,7 +25017,7 @@
           <p:cNvPr id="6" name="">
             <a:extLst xmlns:a="http://schemas.openxmlformats.org/drawingml/2006/main">
               <a:ext uri="{FF2B5EF4-FFF2-40B4-BE49-F238E27FC236}">
-                <a16:creationId xmlns:a16="http://schemas.microsoft.com/office/drawing/2014/main" id="{692E16D9-4E9C-4598-8EE5-995B9AE2BA59}"/>
+                <a16:creationId xmlns:a16="http://schemas.microsoft.com/office/drawing/2014/main" id="{FAC2F908-C0F7-43C3-9A31-E5627986807E}"/>
               </a:ext>
             </a:extLst>
           </p:cNvPr>
@@ -23094,7 +25081,7 @@
           <p:cNvPr id="7" name="">
             <a:extLst xmlns:a="http://schemas.openxmlformats.org/drawingml/2006/main">
               <a:ext uri="{FF2B5EF4-FFF2-40B4-BE49-F238E27FC236}">
-                <a16:creationId xmlns:a16="http://schemas.microsoft.com/office/drawing/2014/main" id="{1CB76B74-AFD7-435A-9325-57F7AD24740A}"/>
+                <a16:creationId xmlns:a16="http://schemas.microsoft.com/office/drawing/2014/main" id="{69B20541-B370-46C1-92F2-2AC12CF3024D}"/>
               </a:ext>
             </a:extLst>
           </p:cNvPr>
@@ -23158,7 +25145,7 @@
           <p:cNvPr id="8" name="">
             <a:extLst xmlns:a="http://schemas.openxmlformats.org/drawingml/2006/main">
               <a:ext uri="{FF2B5EF4-FFF2-40B4-BE49-F238E27FC236}">
-                <a16:creationId xmlns:a16="http://schemas.microsoft.com/office/drawing/2014/main" id="{67369501-DAA5-432B-8080-72225C9D114E}"/>
+                <a16:creationId xmlns:a16="http://schemas.microsoft.com/office/drawing/2014/main" id="{5E6A31AB-83D2-4EF4-B5ED-040260A3BFE2}"/>
               </a:ext>
             </a:extLst>
           </p:cNvPr>
@@ -23222,7 +25209,7 @@
           <p:cNvPr id="9" name="">
             <a:extLst xmlns:a="http://schemas.openxmlformats.org/drawingml/2006/main">
               <a:ext uri="{FF2B5EF4-FFF2-40B4-BE49-F238E27FC236}">
-                <a16:creationId xmlns:a16="http://schemas.microsoft.com/office/drawing/2014/main" id="{110C5DB6-F757-4512-9691-C2785FC3E428}"/>
+                <a16:creationId xmlns:a16="http://schemas.microsoft.com/office/drawing/2014/main" id="{9E6D750E-E28D-429F-BAED-2DC11B15EBC4}"/>
               </a:ext>
             </a:extLst>
           </p:cNvPr>
@@ -23255,7 +25242,7 @@
           <p:cNvPr id="10" name="">
             <a:extLst xmlns:a="http://schemas.openxmlformats.org/drawingml/2006/main">
               <a:ext uri="{FF2B5EF4-FFF2-40B4-BE49-F238E27FC236}">
-                <a16:creationId xmlns:a16="http://schemas.microsoft.com/office/drawing/2014/main" id="{8FA34BBE-7F9F-4425-AA00-3C0ED5F9ECC1}"/>
+                <a16:creationId xmlns:a16="http://schemas.microsoft.com/office/drawing/2014/main" id="{93C73771-C6AA-4127-B32B-C3E6F939E449}"/>
               </a:ext>
             </a:extLst>
           </p:cNvPr>
@@ -23290,7 +25277,7 @@
           <p:cNvPr id="11" name="">
             <a:extLst xmlns:a="http://schemas.openxmlformats.org/drawingml/2006/main">
               <a:ext uri="{FF2B5EF4-FFF2-40B4-BE49-F238E27FC236}">
-                <a16:creationId xmlns:a16="http://schemas.microsoft.com/office/drawing/2014/main" id="{FD2F59DF-A233-45D9-8876-34772072995C}"/>
+                <a16:creationId xmlns:a16="http://schemas.microsoft.com/office/drawing/2014/main" id="{364A82EE-F7E2-4F03-8B92-BECA0A79078F}"/>
               </a:ext>
             </a:extLst>
           </p:cNvPr>
@@ -23354,7 +25341,7 @@
           <p:cNvPr id="12" name="">
             <a:extLst xmlns:a="http://schemas.openxmlformats.org/drawingml/2006/main">
               <a:ext uri="{FF2B5EF4-FFF2-40B4-BE49-F238E27FC236}">
-                <a16:creationId xmlns:a16="http://schemas.microsoft.com/office/drawing/2014/main" id="{19CC91FC-1D3A-4F9E-A072-2565085BD064}"/>
+                <a16:creationId xmlns:a16="http://schemas.microsoft.com/office/drawing/2014/main" id="{870C51BF-ADFF-43B2-ABE2-B1D52F01A790}"/>
               </a:ext>
             </a:extLst>
           </p:cNvPr>
@@ -23418,7 +25405,7 @@
           <p:cNvPr id="13" name="">
             <a:extLst xmlns:a="http://schemas.openxmlformats.org/drawingml/2006/main">
               <a:ext uri="{FF2B5EF4-FFF2-40B4-BE49-F238E27FC236}">
-                <a16:creationId xmlns:a16="http://schemas.microsoft.com/office/drawing/2014/main" id="{EE2D5696-2E69-428B-9A2C-155A68B87126}"/>
+                <a16:creationId xmlns:a16="http://schemas.microsoft.com/office/drawing/2014/main" id="{0F9F5F2A-2546-478F-91B1-4E093F1A3A2F}"/>
               </a:ext>
             </a:extLst>
           </p:cNvPr>
@@ -23482,7 +25469,7 @@
           <p:cNvPr id="14" name="">
             <a:extLst xmlns:a="http://schemas.openxmlformats.org/drawingml/2006/main">
               <a:ext uri="{FF2B5EF4-FFF2-40B4-BE49-F238E27FC236}">
-                <a16:creationId xmlns:a16="http://schemas.microsoft.com/office/drawing/2014/main" id="{63EBE966-BBD1-4DB9-BD98-BA4F9FE61C19}"/>
+                <a16:creationId xmlns:a16="http://schemas.microsoft.com/office/drawing/2014/main" id="{9DD36169-9F6B-43AB-BBC7-1C1053041257}"/>
               </a:ext>
             </a:extLst>
           </p:cNvPr>
@@ -23546,7 +25533,7 @@
           <p:cNvPr id="15" name="">
             <a:extLst xmlns:a="http://schemas.openxmlformats.org/drawingml/2006/main">
               <a:ext uri="{FF2B5EF4-FFF2-40B4-BE49-F238E27FC236}">
-                <a16:creationId xmlns:a16="http://schemas.microsoft.com/office/drawing/2014/main" id="{B87A91DD-3B9E-43E1-ACF3-0261C45AAF33}"/>
+                <a16:creationId xmlns:a16="http://schemas.microsoft.com/office/drawing/2014/main" id="{F54AD167-CCFF-4EC2-BFF3-4E18E3A9DF6F}"/>
               </a:ext>
             </a:extLst>
           </p:cNvPr>
@@ -23579,7 +25566,7 @@
           <p:cNvPr id="16" name="">
             <a:extLst xmlns:a="http://schemas.openxmlformats.org/drawingml/2006/main">
               <a:ext uri="{FF2B5EF4-FFF2-40B4-BE49-F238E27FC236}">
-                <a16:creationId xmlns:a16="http://schemas.microsoft.com/office/drawing/2014/main" id="{1379BC24-CED9-4C5D-BBB8-EE22D19DC0FC}"/>
+                <a16:creationId xmlns:a16="http://schemas.microsoft.com/office/drawing/2014/main" id="{C406E17A-0966-4BA6-B01B-FB605F13629B}"/>
               </a:ext>
             </a:extLst>
           </p:cNvPr>
@@ -23614,7 +25601,7 @@
           <p:cNvPr id="17" name="">
             <a:extLst xmlns:a="http://schemas.openxmlformats.org/drawingml/2006/main">
               <a:ext uri="{FF2B5EF4-FFF2-40B4-BE49-F238E27FC236}">
-                <a16:creationId xmlns:a16="http://schemas.microsoft.com/office/drawing/2014/main" id="{E0D9D5DF-1160-48D3-B988-F1B3D5E598C4}"/>
+                <a16:creationId xmlns:a16="http://schemas.microsoft.com/office/drawing/2014/main" id="{6E52AA39-DF42-4166-9C58-607227D8E01B}"/>
               </a:ext>
             </a:extLst>
           </p:cNvPr>
@@ -23678,7 +25665,7 @@
           <p:cNvPr id="18" name="">
             <a:extLst xmlns:a="http://schemas.openxmlformats.org/drawingml/2006/main">
               <a:ext uri="{FF2B5EF4-FFF2-40B4-BE49-F238E27FC236}">
-                <a16:creationId xmlns:a16="http://schemas.microsoft.com/office/drawing/2014/main" id="{B3129AFB-A78C-4674-9033-BD788258B080}"/>
+                <a16:creationId xmlns:a16="http://schemas.microsoft.com/office/drawing/2014/main" id="{18550978-A57A-49AD-AA15-8E5CC42642EF}"/>
               </a:ext>
             </a:extLst>
           </p:cNvPr>
@@ -23742,7 +25729,7 @@
           <p:cNvPr id="19" name="">
             <a:extLst xmlns:a="http://schemas.openxmlformats.org/drawingml/2006/main">
               <a:ext uri="{FF2B5EF4-FFF2-40B4-BE49-F238E27FC236}">
-                <a16:creationId xmlns:a16="http://schemas.microsoft.com/office/drawing/2014/main" id="{B965BA08-3339-4EFC-ABA5-6D24B31F68A4}"/>
+                <a16:creationId xmlns:a16="http://schemas.microsoft.com/office/drawing/2014/main" id="{C12DF4AA-040F-4041-829F-4EE342106E85}"/>
               </a:ext>
             </a:extLst>
           </p:cNvPr>
@@ -23806,7 +25793,7 @@
           <p:cNvPr id="20" name="">
             <a:extLst xmlns:a="http://schemas.openxmlformats.org/drawingml/2006/main">
               <a:ext uri="{FF2B5EF4-FFF2-40B4-BE49-F238E27FC236}">
-                <a16:creationId xmlns:a16="http://schemas.microsoft.com/office/drawing/2014/main" id="{3D8F9E9C-65BB-4E28-8A97-4D70E793BFA6}"/>
+                <a16:creationId xmlns:a16="http://schemas.microsoft.com/office/drawing/2014/main" id="{A7EAA811-7A39-4E15-86CB-73EA51EC6245}"/>
               </a:ext>
             </a:extLst>
           </p:cNvPr>
@@ -23870,7 +25857,7 @@
           <p:cNvPr id="21" name="">
             <a:extLst xmlns:a="http://schemas.openxmlformats.org/drawingml/2006/main">
               <a:ext uri="{FF2B5EF4-FFF2-40B4-BE49-F238E27FC236}">
-                <a16:creationId xmlns:a16="http://schemas.microsoft.com/office/drawing/2014/main" id="{1FF97B3A-6675-45E0-9246-239F0C80AAAA}"/>
+                <a16:creationId xmlns:a16="http://schemas.microsoft.com/office/drawing/2014/main" id="{CC63B941-891F-4949-A70A-68D867BCEC08}"/>
               </a:ext>
             </a:extLst>
           </p:cNvPr>
@@ -23903,7 +25890,7 @@
           <p:cNvPr id="22" name="">
             <a:extLst xmlns:a="http://schemas.openxmlformats.org/drawingml/2006/main">
               <a:ext uri="{FF2B5EF4-FFF2-40B4-BE49-F238E27FC236}">
-                <a16:creationId xmlns:a16="http://schemas.microsoft.com/office/drawing/2014/main" id="{7B9D943D-1CC0-4303-A115-EE261082B951}"/>
+                <a16:creationId xmlns:a16="http://schemas.microsoft.com/office/drawing/2014/main" id="{084318DC-2593-428E-9384-CBE8D83104D5}"/>
               </a:ext>
             </a:extLst>
           </p:cNvPr>
@@ -23938,7 +25925,7 @@
           <p:cNvPr id="23" name="">
             <a:extLst xmlns:a="http://schemas.openxmlformats.org/drawingml/2006/main">
               <a:ext uri="{FF2B5EF4-FFF2-40B4-BE49-F238E27FC236}">
-                <a16:creationId xmlns:a16="http://schemas.microsoft.com/office/drawing/2014/main" id="{FBEBB28F-05EF-4BD9-AB08-A8C0C2F6C1DA}"/>
+                <a16:creationId xmlns:a16="http://schemas.microsoft.com/office/drawing/2014/main" id="{A6D5BE05-3BCF-442C-99A6-91868118EF5E}"/>
               </a:ext>
             </a:extLst>
           </p:cNvPr>
@@ -24002,7 +25989,7 @@
           <p:cNvPr id="24" name="">
             <a:extLst xmlns:a="http://schemas.openxmlformats.org/drawingml/2006/main">
               <a:ext uri="{FF2B5EF4-FFF2-40B4-BE49-F238E27FC236}">
-                <a16:creationId xmlns:a16="http://schemas.microsoft.com/office/drawing/2014/main" id="{AEB0AEEB-9D38-4FB6-9842-1D627A65F7F3}"/>
+                <a16:creationId xmlns:a16="http://schemas.microsoft.com/office/drawing/2014/main" id="{412088FB-3C7D-4D7D-B6F3-CDCD94795473}"/>
               </a:ext>
             </a:extLst>
           </p:cNvPr>
@@ -24066,7 +26053,7 @@
           <p:cNvPr id="25" name="">
             <a:extLst xmlns:a="http://schemas.openxmlformats.org/drawingml/2006/main">
               <a:ext uri="{FF2B5EF4-FFF2-40B4-BE49-F238E27FC236}">
-                <a16:creationId xmlns:a16="http://schemas.microsoft.com/office/drawing/2014/main" id="{9BFD9F15-13AF-4208-9663-6B1F0E819948}"/>
+                <a16:creationId xmlns:a16="http://schemas.microsoft.com/office/drawing/2014/main" id="{2B4F6E19-D2A9-440B-8DEF-20669D646059}"/>
               </a:ext>
             </a:extLst>
           </p:cNvPr>
@@ -24130,7 +26117,7 @@
           <p:cNvPr id="26" name="">
             <a:extLst xmlns:a="http://schemas.openxmlformats.org/drawingml/2006/main">
               <a:ext uri="{FF2B5EF4-FFF2-40B4-BE49-F238E27FC236}">
-                <a16:creationId xmlns:a16="http://schemas.microsoft.com/office/drawing/2014/main" id="{82B4A2F2-5418-4B8C-BC18-67A893C9DEC2}"/>
+                <a16:creationId xmlns:a16="http://schemas.microsoft.com/office/drawing/2014/main" id="{8FECBD39-E78C-40D9-AE57-863FAF01EACD}"/>
               </a:ext>
             </a:extLst>
           </p:cNvPr>
@@ -24194,7 +26181,7 @@
           <p:cNvPr id="27" name="">
             <a:extLst xmlns:a="http://schemas.openxmlformats.org/drawingml/2006/main">
               <a:ext uri="{FF2B5EF4-FFF2-40B4-BE49-F238E27FC236}">
-                <a16:creationId xmlns:a16="http://schemas.microsoft.com/office/drawing/2014/main" id="{163AC71B-5885-4228-B7A1-0033E9AD2866}"/>
+                <a16:creationId xmlns:a16="http://schemas.microsoft.com/office/drawing/2014/main" id="{307E4E80-160B-487C-B7DA-C25D05B3308A}"/>
               </a:ext>
             </a:extLst>
           </p:cNvPr>
@@ -24227,7 +26214,7 @@
           <p:cNvPr id="28" name="">
             <a:extLst xmlns:a="http://schemas.openxmlformats.org/drawingml/2006/main">
               <a:ext uri="{FF2B5EF4-FFF2-40B4-BE49-F238E27FC236}">
-                <a16:creationId xmlns:a16="http://schemas.microsoft.com/office/drawing/2014/main" id="{AA3D9C3A-2F19-4EB3-B761-5B98AB5A0CC1}"/>
+                <a16:creationId xmlns:a16="http://schemas.microsoft.com/office/drawing/2014/main" id="{E029331D-78BC-4888-993E-31FF9B15C3DD}"/>
               </a:ext>
             </a:extLst>
           </p:cNvPr>
@@ -24262,7 +26249,7 @@
           <p:cNvPr id="29" name="">
             <a:extLst xmlns:a="http://schemas.openxmlformats.org/drawingml/2006/main">
               <a:ext uri="{FF2B5EF4-FFF2-40B4-BE49-F238E27FC236}">
-                <a16:creationId xmlns:a16="http://schemas.microsoft.com/office/drawing/2014/main" id="{D38D2E2F-1297-4DAE-A805-11EBE35DA286}"/>
+                <a16:creationId xmlns:a16="http://schemas.microsoft.com/office/drawing/2014/main" id="{995D486B-C8D8-4771-8C72-DE2D8240F9A3}"/>
               </a:ext>
             </a:extLst>
           </p:cNvPr>
@@ -24326,7 +26313,7 @@
           <p:cNvPr id="30" name="">
             <a:extLst xmlns:a="http://schemas.openxmlformats.org/drawingml/2006/main">
               <a:ext uri="{FF2B5EF4-FFF2-40B4-BE49-F238E27FC236}">
-                <a16:creationId xmlns:a16="http://schemas.microsoft.com/office/drawing/2014/main" id="{7984AB69-04AC-4969-910E-32EC90DB695B}"/>
+                <a16:creationId xmlns:a16="http://schemas.microsoft.com/office/drawing/2014/main" id="{13050174-2987-461D-A472-DF833CC03E77}"/>
               </a:ext>
             </a:extLst>
           </p:cNvPr>
@@ -24390,7 +26377,7 @@
           <p:cNvPr id="31" name="">
             <a:extLst xmlns:a="http://schemas.openxmlformats.org/drawingml/2006/main">
               <a:ext uri="{FF2B5EF4-FFF2-40B4-BE49-F238E27FC236}">
-                <a16:creationId xmlns:a16="http://schemas.microsoft.com/office/drawing/2014/main" id="{18C59906-67A5-4893-B547-3C04CD2AF8AC}"/>
+                <a16:creationId xmlns:a16="http://schemas.microsoft.com/office/drawing/2014/main" id="{06C8BBEC-00DC-47B0-BBB5-5112E27F8438}"/>
               </a:ext>
             </a:extLst>
           </p:cNvPr>
@@ -24454,7 +26441,7 @@
           <p:cNvPr id="32" name="">
             <a:extLst xmlns:a="http://schemas.openxmlformats.org/drawingml/2006/main">
               <a:ext uri="{FF2B5EF4-FFF2-40B4-BE49-F238E27FC236}">
-                <a16:creationId xmlns:a16="http://schemas.microsoft.com/office/drawing/2014/main" id="{0E347D84-C1AA-4887-8F85-F4BC97ED0B09}"/>
+                <a16:creationId xmlns:a16="http://schemas.microsoft.com/office/drawing/2014/main" id="{CC608FF1-254B-4AAD-BD88-E82459AC7287}"/>
               </a:ext>
             </a:extLst>
           </p:cNvPr>
@@ -24518,7 +26505,7 @@
           <p:cNvPr id="33" name="">
             <a:extLst xmlns:a="http://schemas.openxmlformats.org/drawingml/2006/main">
               <a:ext uri="{FF2B5EF4-FFF2-40B4-BE49-F238E27FC236}">
-                <a16:creationId xmlns:a16="http://schemas.microsoft.com/office/drawing/2014/main" id="{858E00A1-0BAE-4EB7-BF54-0B4AB646F9D9}"/>
+                <a16:creationId xmlns:a16="http://schemas.microsoft.com/office/drawing/2014/main" id="{F3E190A6-7E9A-4B2F-9DA1-1B6ACEA910E7}"/>
               </a:ext>
             </a:extLst>
           </p:cNvPr>
@@ -24551,7 +26538,7 @@
           <p:cNvPr id="34" name="">
             <a:extLst xmlns:a="http://schemas.openxmlformats.org/drawingml/2006/main">
               <a:ext uri="{FF2B5EF4-FFF2-40B4-BE49-F238E27FC236}">
-                <a16:creationId xmlns:a16="http://schemas.microsoft.com/office/drawing/2014/main" id="{5549284D-BBDE-4FE6-BEDA-11351068AF32}"/>
+                <a16:creationId xmlns:a16="http://schemas.microsoft.com/office/drawing/2014/main" id="{3745DFC0-9DC0-4916-8731-8B0BE19E71F1}"/>
               </a:ext>
             </a:extLst>
           </p:cNvPr>
@@ -24615,7 +26602,7 @@
           <p:cNvPr id="35" name="">
             <a:extLst xmlns:a="http://schemas.openxmlformats.org/drawingml/2006/main">
               <a:ext uri="{FF2B5EF4-FFF2-40B4-BE49-F238E27FC236}">
-                <a16:creationId xmlns:a16="http://schemas.microsoft.com/office/drawing/2014/main" id="{31DD9E14-5F54-4D72-9220-C6E0086831BB}"/>
+                <a16:creationId xmlns:a16="http://schemas.microsoft.com/office/drawing/2014/main" id="{D2BC4194-32B9-4B01-B902-09346570CBAB}"/>
               </a:ext>
             </a:extLst>
           </p:cNvPr>
@@ -24650,7 +26637,7 @@
           <p:cNvPr id="36" name="">
             <a:extLst xmlns:a="http://schemas.openxmlformats.org/drawingml/2006/main">
               <a:ext uri="{FF2B5EF4-FFF2-40B4-BE49-F238E27FC236}">
-                <a16:creationId xmlns:a16="http://schemas.microsoft.com/office/drawing/2014/main" id="{A3DC79F2-A185-4E00-A392-00B7753F2089}"/>
+                <a16:creationId xmlns:a16="http://schemas.microsoft.com/office/drawing/2014/main" id="{406050EC-F82C-448C-95F8-FC50B91CD223}"/>
               </a:ext>
             </a:extLst>
           </p:cNvPr>
@@ -24685,7 +26672,7 @@
           <p:cNvPr id="37" name="">
             <a:extLst xmlns:a="http://schemas.openxmlformats.org/drawingml/2006/main">
               <a:ext uri="{FF2B5EF4-FFF2-40B4-BE49-F238E27FC236}">
-                <a16:creationId xmlns:a16="http://schemas.microsoft.com/office/drawing/2014/main" id="{DBEEEADB-6A53-4066-AC68-A4F46AA81E1C}"/>
+                <a16:creationId xmlns:a16="http://schemas.microsoft.com/office/drawing/2014/main" id="{6B887C4D-3E60-4833-B2F7-CA6F65B1B091}"/>
               </a:ext>
             </a:extLst>
           </p:cNvPr>
@@ -24720,7 +26707,7 @@
           <p:cNvPr id="38" name="">
             <a:extLst xmlns:a="http://schemas.openxmlformats.org/drawingml/2006/main">
               <a:ext uri="{FF2B5EF4-FFF2-40B4-BE49-F238E27FC236}">
-                <a16:creationId xmlns:a16="http://schemas.microsoft.com/office/drawing/2014/main" id="{09B13F07-40DD-4743-A662-1222C846FDAE}"/>
+                <a16:creationId xmlns:a16="http://schemas.microsoft.com/office/drawing/2014/main" id="{2F6B687F-7E7C-434A-97F1-FDF6F254CA68}"/>
               </a:ext>
             </a:extLst>
           </p:cNvPr>
@@ -24755,7 +26742,7 @@
           <p:cNvPr id="39" name="">
             <a:extLst xmlns:a="http://schemas.openxmlformats.org/drawingml/2006/main">
               <a:ext uri="{FF2B5EF4-FFF2-40B4-BE49-F238E27FC236}">
-                <a16:creationId xmlns:a16="http://schemas.microsoft.com/office/drawing/2014/main" id="{62CB581B-B11C-4B48-8A54-F640E949A0DD}"/>
+                <a16:creationId xmlns:a16="http://schemas.microsoft.com/office/drawing/2014/main" id="{74E1B1BB-4E59-4403-A114-320F4B903439}"/>
               </a:ext>
             </a:extLst>
           </p:cNvPr>
@@ -24819,7 +26806,7 @@
           <p:cNvPr id="40" name="">
             <a:extLst xmlns:a="http://schemas.openxmlformats.org/drawingml/2006/main">
               <a:ext uri="{FF2B5EF4-FFF2-40B4-BE49-F238E27FC236}">
-                <a16:creationId xmlns:a16="http://schemas.microsoft.com/office/drawing/2014/main" id="{B996C3D5-ED9B-4FA2-8BDB-4A2A986537A0}"/>
+                <a16:creationId xmlns:a16="http://schemas.microsoft.com/office/drawing/2014/main" id="{B35F5861-5FC7-403C-AAB9-BDA334A95A8C}"/>
               </a:ext>
             </a:extLst>
           </p:cNvPr>
@@ -24881,7 +26868,7 @@
     </p:spTree>
     <p:extLst>
       <p:ext uri="{BB962C8B-B14F-4D97-AF65-F5344CB8AC3E}">
-        <p14:creationId xmlns:p14="http://schemas.microsoft.com/office/powerpoint/2010/main" val="1068516526"/>
+        <p14:creationId xmlns:p14="http://schemas.microsoft.com/office/powerpoint/2010/main" val="2012479851"/>
       </p:ext>
     </p:extLst>
   </p:cSld>
